--- a/deliverables/07-presentation/العرض-التقديمي.pptx
+++ b/deliverables/07-presentation/العرض-التقديمي.pptx
@@ -28,7 +28,6 @@
     <p:sldId id="276" r:id="rId28"/>
     <p:sldId id="277" r:id="rId29"/>
     <p:sldId id="278" r:id="rId30"/>
-    <p:sldId id="279" r:id="rId31"/>
   </p:sldIdLst>
   <p:sldSz cx="12191695" cy="6858000" type="screen4x3"/>
   <p:notesSz cx="6858000" cy="9144000"/>
@@ -1174,7 +1173,7 @@
             <a:pPr rtl="1" algn="r"/>
             <a:r>
               <a:rPr lang="ar-SA"/>
-              <a:t>[2014: يُملأ من verdicts.csv بعد التشغيل التأكيدي.] الأحكام بالأسبقية وفق الجدولين 3-14 و3-15: مؤكَّدة، مدحوضة عكسياً، مدحوضة عملياً، غير حاسمة (وفي H3 أيضاً تكافؤ عملي وتأخر مؤكَّد). قيم MDE80 مجمَّدة قبل التشغيل من results/dev2013/mde80.md ولا قوة ملاحَظة من 2014. النتيجة السلبية نتيجة رئيسية مقبولة. H2-ب غير منطبقة بالبناء ولا تظهر.</a:t>
+              <a:t>[2014: يُملأ من verdicts.csv بعد التشغيل التأكيدي.] الأحكام بالأسبقية وفق الجدولين 3-14 و3-15: مؤكَّدة، مدحوضة عكسياً، مدحوضة عملياً، غير حاسمة (وفي H3 أيضاً تكافؤ عملي وتأخر مؤكَّد). قيم MDE80 مجمَّدة قبل التشغيل من results/dev2013/mde80.md ولا قوة ملاحَظة من 2014. النتيجة السلبية نتيجة رئيسية مقبولة. H2-ب غير منطبقة بالبناء ولا تظهر. H4-ب استكشافية: المعالَجة الهجين المجمَّد والمقارِن SKNN وحده على الربع الأدنى تاريخاً؛ بلا حكم تأكيدي. للمرجع فقط (تطوير — وصفي): +0.052 [+0.022، +0.133].</a:t>
             </a:r>
           </a:p>
         </p:txBody>
@@ -1246,7 +1245,7 @@
             <a:pPr rtl="1" algn="r"/>
             <a:r>
               <a:rPr lang="ar-SA"/>
-              <a:t>[2014: تُملأ بعد التشغيل التأكيدي.] الفرضية استكشافية: المعالَجة الهجين المجمَّد، والمقارِن SKNN وحده، على الربع الأدنى من عدد الموارد المختلفة التي زارها المتعلم. للمرجع فقط (تطوير — وصفي): الربع الأدنى +0.052 [+0.022، +0.133].</a:t>
+              <a:t>[2014: تُملأ من results/conf2014/ بصيغة PNG (تُحوَّل SVG عبر scripts/svg2png.py). في JSON: panel.image بمسار PNG فيحلّ محلّ المكان النائب.] التحليلات الثانوية مسجّلة مسبقاً ولا تغيّر حكم الفرضيات.</a:t>
             </a:r>
           </a:p>
         </p:txBody>
@@ -1318,7 +1317,7 @@
             <a:pPr rtl="1" algn="r"/>
             <a:r>
               <a:rPr lang="ar-SA"/>
-              <a:t>[2014: تُملأ من results/conf2014/ بصيغة PNG (تُحوَّل SVG عبر scripts/svg2png.py). في JSON: panel.image بمسار PNG فيحلّ محلّ المكان النائب.] التحليلات الثانوية مسجّلة مسبقاً ولا تغيّر حكم الفرضيات.</a:t>
+              <a:t>[تُكتب بعد النتائج.] المحاور الأربعة مسجّلة سلفاً. سياسة النتيجة السلبية مكتوبة في الفصل الثالث: تفوّق الشعبية الآنية على الهجين، أو الجيران على GRU-lite، نتيجة رئيسية مقبولة.</a:t>
             </a:r>
           </a:p>
         </p:txBody>
@@ -1390,7 +1389,7 @@
             <a:pPr rtl="1" algn="r"/>
             <a:r>
               <a:rPr lang="ar-SA"/>
-              <a:t>[تُكتب بعد النتائج.] المحاور الأربعة مسجّلة سلفاً. سياسة النتيجة السلبية مكتوبة في الفصل الثالث: تفوّق الشعبية الآنية على الهجين، أو الجيران على GRU-lite، نتيجة رئيسية مقبولة.</a:t>
+              <a:t>حدود الادعاء: الوصول المستقبلي وكيل للملاءمة لا للتعلم، والتعميم داخل المؤسسة نفسها، ولم تُدمج السمات الديموغرافية في أي نموذج. من العمل المستقبلي ما يعالج هذه القيود مباشرة. [يُراجع هذا القسم بعد النتائج التأكيدية إن ظهرت قيود إضافية.]</a:t>
             </a:r>
           </a:p>
         </p:txBody>
@@ -1462,7 +1461,7 @@
             <a:pPr rtl="1" algn="r"/>
             <a:r>
               <a:rPr lang="ar-SA"/>
-              <a:t>حدود الادعاء: الوصول المستقبلي وكيل للملاءمة لا للتعلم، والتعميم داخل المؤسسة نفسها، ولم تُدمج السمات الديموغرافية في أي نموذج. من العمل المستقبلي ما يعالج هذه القيود مباشرة. [يُراجع هذا القسم بعد النتائج التأكيدية إن ظهرت قيود إضافية.]</a:t>
+              <a:t>الخاتمة: أربع مساهمات تجريبية ومنهجية. لا أدّعي ابتكار خوارزمية، بل اختبار أفكار قائمة اختباراً منضبطاً على سجلات تعليمية عامة. [الجملة الختامية عن نتيجة التأكيد تُستكمل في الجولة التالية.] سواء كانت النتيجة إيجابية أم سلبية، فهي تجيب عن سؤال تحتاجه أي منصة تعليمية: ما الذي يضيفه التخصيص فوق مواد الأسبوع الحالي؟</a:t>
             </a:r>
           </a:p>
         </p:txBody>
@@ -1606,7 +1605,7 @@
             <a:pPr rtl="1" algn="r"/>
             <a:r>
               <a:rPr lang="ar-SA"/>
-              <a:t>الخاتمة: أربع مساهمات تجريبية ومنهجية. لا أدّعي ابتكار خوارزمية، بل اختبار أفكار قائمة اختباراً منضبطاً على سجلات تعليمية عامة. [الجملة الختامية عن نتيجة التأكيد تُستكمل في الجولة التالية.] سواء كانت النتيجة إيجابية أم سلبية، فهي تجيب عن سؤال تحتاجه أي منصة تعليمية: ما الذي يضيفه التخصيص فوق مواد الأسبوع الحالي؟</a:t>
+              <a:t>أشكر اللجنة والمشرف، وأرحّب بالأسئلة. الشرائح الاحتياطية التالية تغطي الأسئلة المتوقعة: لماذا numpy فقط؟ لماذا لا CNN؟ ما الدلالة الإحصائية؟ ما حدود التعميم؟</a:t>
             </a:r>
           </a:p>
         </p:txBody>
@@ -1678,7 +1677,7 @@
             <a:pPr rtl="1" algn="r"/>
             <a:r>
               <a:rPr lang="ar-SA"/>
-              <a:t>أشكر اللجنة والمشرف، وأرحّب بالأسئلة. الشرائح الاحتياطية التالية تغطي الأسئلة المتوقعة: لماذا numpy فقط؟ لماذا لا CNN؟ ما الدلالة الإحصائية؟ ما حدود التعميم؟</a:t>
+              <a:t>الجواب الموثّق: قرار منهجي مبرَّر بقيد بيئي وبديل معلن. استُبعدت الـCNN لسببين: مرجعها غير قابل للتكرار، وغياب بنية محلية في سلال الأيام. الشبكة العصبونية المتكررة ممثَّلة بـ GRU-lite، وقد اجتازت حزمة صحة قبل أي تقييم.</a:t>
             </a:r>
           </a:p>
         </p:txBody>
@@ -1750,7 +1749,7 @@
             <a:pPr rtl="1" algn="r"/>
             <a:r>
               <a:rPr lang="ar-SA"/>
-              <a:t>الجواب الموثّق: قرار منهجي مبرَّر بقيد بيئي وبديل معلن. استُبعدت الـCNN لسببين: مرجعها غير قابل للتكرار، وغياب بنية محلية في سلال الأيام. الشبكة العصبونية المتكررة ممثَّلة بـ GRU-lite، وقد اجتازت حزمة صحة قبل أي تقييم.</a:t>
+              <a:t>القاعدة مسجّلة قبل رؤية نتائج 2014 وتُطبَّق آلياً بالأسبقية. الفواصل على 9 عروض في التطوير وصفية فقط. الفاصل المعيَّر يغطي نحو 95% عند 13 وحدة مقابل نحو 92% للمئيني. أصغر p ممكنة نحو 0.00024. والنماذج العشوائية تُقرَّر بخمس بذور. قيم MDE80 من results/dev2013/mde80.md؛ تُلحق بـ«غير حاسمة» عبارة: لا يكشف التصميم بقوة 80% أثراً أصغر من MDE80.</a:t>
             </a:r>
           </a:p>
         </p:txBody>
@@ -1776,78 +1775,6 @@
 </file>
 
 <file path=ppt/notesSlides/notesSlide23.xml><?xml version="1.0" encoding="utf-8"?>
-<p:notes xmlns:a="http://schemas.openxmlformats.org/drawingml/2006/main" xmlns:p="http://schemas.openxmlformats.org/presentationml/2006/main" xmlns:r="http://schemas.openxmlformats.org/officeDocument/2006/relationships">
-  <p:cSld>
-    <p:spTree>
-      <p:nvGrpSpPr>
-        <p:cNvPr id="1" name=""/>
-        <p:cNvGrpSpPr/>
-        <p:nvPr/>
-      </p:nvGrpSpPr>
-      <p:grpSpPr>
-        <a:xfrm>
-          <a:off x="0" y="0"/>
-          <a:ext cx="0" cy="0"/>
-          <a:chOff x="0" y="0"/>
-          <a:chExt cx="0" cy="0"/>
-        </a:xfrm>
-      </p:grpSpPr>
-      <p:sp>
-        <p:nvSpPr>
-          <p:cNvPr id="2" name="Slide Image Placeholder 1"/>
-          <p:cNvSpPr>
-            <a:spLocks noGrp="1"/>
-          </p:cNvSpPr>
-          <p:nvPr>
-            <p:ph type="sldImg" idx="2"/>
-          </p:nvPr>
-        </p:nvSpPr>
-        <p:spPr/>
-      </p:sp>
-      <p:sp>
-        <p:nvSpPr>
-          <p:cNvPr id="3" name="Notes Placeholder 2"/>
-          <p:cNvSpPr>
-            <a:spLocks noGrp="1"/>
-          </p:cNvSpPr>
-          <p:nvPr>
-            <p:ph type="body" idx="3" sz="quarter"/>
-          </p:nvPr>
-        </p:nvSpPr>
-        <p:spPr/>
-        <p:txBody>
-          <a:bodyPr/>
-          <a:lstStyle/>
-          <a:p>
-            <a:pPr rtl="1" algn="r"/>
-            <a:r>
-              <a:rPr lang="ar-SA"/>
-              <a:t>القاعدة مسجّلة قبل رؤية نتائج 2014 وتُطبَّق آلياً بالأسبقية. الفواصل على 9 عروض في التطوير وصفية فقط. الفاصل المعيَّر يغطي نحو 95% عند 13 وحدة مقابل نحو 92% للمئيني. أصغر p ممكنة نحو 0.00024. والنماذج العشوائية تُقرَّر بخمس بذور. قيم MDE80 من results/dev2013/mde80.md؛ تُلحق بـ«غير حاسمة» عبارة: لا يكشف التصميم بقوة 80% أثراً أصغر من MDE80.</a:t>
-            </a:r>
-          </a:p>
-        </p:txBody>
-      </p:sp>
-      <p:sp>
-        <p:nvSpPr>
-          <p:cNvPr id="4" name="Slide Number Placeholder 3"/>
-          <p:cNvSpPr>
-            <a:spLocks noGrp="1"/>
-          </p:cNvSpPr>
-          <p:nvPr>
-            <p:ph type="sldNum" idx="5" sz="quarter"/>
-          </p:nvPr>
-        </p:nvSpPr>
-        <p:spPr/>
-      </p:sp>
-    </p:spTree>
-  </p:cSld>
-  <p:clrMapOvr>
-    <a:masterClrMapping/>
-  </p:clrMapOvr>
-</p:notes>
-</file>
-
-<file path=ppt/notesSlides/notesSlide24.xml><?xml version="1.0" encoding="utf-8"?>
 <p:notes xmlns:a="http://schemas.openxmlformats.org/drawingml/2006/main" xmlns:p="http://schemas.openxmlformats.org/presentationml/2006/main" xmlns:r="http://schemas.openxmlformats.org/officeDocument/2006/relationships">
   <p:cSld>
     <p:spTree>
@@ -11132,7 +11059,7 @@
                 <a:latin typeface="Arial"/>
                 <a:cs typeface="Arial"/>
               </a:rPr>
-              <a:t>نتائج التأكيد 2014: أحكام الفرضيات الأربع</a:t>
+              <a:t>نتائج التأكيد 2014: الفرضيات الأربع والاستكشافية</a:t>
             </a:r>
           </a:p>
         </p:txBody>
@@ -11206,7 +11133,7 @@
         </p:nvGraphicFramePr>
         <p:xfrm>
           <a:off x="548640" y="1874519"/>
-          <a:ext cx="11094412" cy="3657600"/>
+          <a:ext cx="11094412" cy="3794760"/>
         </p:xfrm>
         <a:graphic>
           <a:graphicData uri="http://schemas.openxmlformats.org/drawingml/2006/table">
@@ -11222,7 +11149,7 @@
                 <a:gridCol w="1364067"/>
                 <a:gridCol w="3273761"/>
               </a:tblGrid>
-              <a:tr h="731520">
+              <a:tr h="632460">
                 <a:tc>
                   <a:txBody>
                     <a:bodyPr wrap="square"/>
@@ -11368,7 +11295,7 @@
                   </a:tcPr>
                 </a:tc>
               </a:tr>
-              <a:tr h="731520">
+              <a:tr h="632460">
                 <a:tc>
                   <a:txBody>
                     <a:bodyPr wrap="square"/>
@@ -11514,7 +11441,7 @@
                   </a:tcPr>
                 </a:tc>
               </a:tr>
-              <a:tr h="731520">
+              <a:tr h="632460">
                 <a:tc>
                   <a:txBody>
                     <a:bodyPr wrap="square"/>
@@ -11660,7 +11587,7 @@
                   </a:tcPr>
                 </a:tc>
               </a:tr>
-              <a:tr h="731520">
+              <a:tr h="632460">
                 <a:tc>
                   <a:txBody>
                     <a:bodyPr wrap="square"/>
@@ -11806,7 +11733,7 @@
                   </a:tcPr>
                 </a:tc>
               </a:tr>
-              <a:tr h="731520">
+              <a:tr h="632460">
                 <a:tc>
                   <a:txBody>
                     <a:bodyPr wrap="square"/>
@@ -11952,6 +11879,152 @@
                   </a:tcPr>
                 </a:tc>
               </a:tr>
+              <a:tr h="632460">
+                <a:tc>
+                  <a:txBody>
+                    <a:bodyPr wrap="square"/>
+                    <a:lstStyle/>
+                    <a:p>
+                      <a:pPr rtl="1" algn="r"/>
+                      <a:r>
+                        <a:rPr sz="1500" b="1" i="0" lang="ar-SA">
+                          <a:solidFill>
+                            <a:srgbClr val="134E4A"/>
+                          </a:solidFill>
+                          <a:latin typeface="Arial"/>
+                          <a:cs typeface="Arial"/>
+                        </a:rPr>
+                        <a:t>استكشافي — لا حكم</a:t>
+                      </a:r>
+                    </a:p>
+                  </a:txBody>
+                  <a:tcPr anchor="ctr" marL="91440" marR="91440" marT="36576" marB="36576">
+                    <a:solidFill>
+                      <a:srgbClr val="CCFBF1"/>
+                    </a:solidFill>
+                  </a:tcPr>
+                </a:tc>
+                <a:tc>
+                  <a:txBody>
+                    <a:bodyPr wrap="square"/>
+                    <a:lstStyle/>
+                    <a:p>
+                      <a:pPr rtl="1" algn="r"/>
+                      <a:r>
+                        <a:rPr sz="1500" b="0" i="0" lang="ar-SA">
+                          <a:solidFill>
+                            <a:srgbClr val="134E4A"/>
+                          </a:solidFill>
+                          <a:latin typeface="Arial"/>
+                          <a:cs typeface="Arial"/>
+                        </a:rPr>
+                        <a:t>—</a:t>
+                      </a:r>
+                    </a:p>
+                  </a:txBody>
+                  <a:tcPr anchor="ctr" marL="91440" marR="91440" marT="36576" marB="36576">
+                    <a:solidFill>
+                      <a:srgbClr val="CCFBF1"/>
+                    </a:solidFill>
+                  </a:tcPr>
+                </a:tc>
+                <a:tc>
+                  <a:txBody>
+                    <a:bodyPr wrap="square"/>
+                    <a:lstStyle/>
+                    <a:p>
+                      <a:pPr rtl="1" algn="ctr"/>
+                      <a:r>
+                        <a:rPr sz="1500" b="0" i="1" lang="ar-SA">
+                          <a:solidFill>
+                            <a:srgbClr val="92400E"/>
+                          </a:solidFill>
+                          <a:latin typeface="Arial"/>
+                          <a:cs typeface="Arial"/>
+                        </a:rPr>
+                        <a:t>[2014] غير مصحَّحة</a:t>
+                      </a:r>
+                    </a:p>
+                  </a:txBody>
+                  <a:tcPr anchor="ctr" marL="91440" marR="91440" marT="36576" marB="36576">
+                    <a:solidFill>
+                      <a:srgbClr val="FEF3C7"/>
+                    </a:solidFill>
+                  </a:tcPr>
+                </a:tc>
+                <a:tc>
+                  <a:txBody>
+                    <a:bodyPr wrap="square"/>
+                    <a:lstStyle/>
+                    <a:p>
+                      <a:pPr rtl="1" algn="ctr"/>
+                      <a:r>
+                        <a:rPr sz="1500" b="0" i="1" lang="ar-SA">
+                          <a:solidFill>
+                            <a:srgbClr val="92400E"/>
+                          </a:solidFill>
+                          <a:latin typeface="Arial"/>
+                          <a:cs typeface="Arial"/>
+                        </a:rPr>
+                        <a:t>[2014]</a:t>
+                      </a:r>
+                    </a:p>
+                  </a:txBody>
+                  <a:tcPr anchor="ctr" marL="91440" marR="91440" marT="36576" marB="36576">
+                    <a:solidFill>
+                      <a:srgbClr val="FEF3C7"/>
+                    </a:solidFill>
+                  </a:tcPr>
+                </a:tc>
+                <a:tc>
+                  <a:txBody>
+                    <a:bodyPr wrap="square"/>
+                    <a:lstStyle/>
+                    <a:p>
+                      <a:pPr rtl="1" algn="ctr"/>
+                      <a:r>
+                        <a:rPr sz="1500" b="0" i="1" lang="ar-SA">
+                          <a:solidFill>
+                            <a:srgbClr val="92400E"/>
+                          </a:solidFill>
+                          <a:latin typeface="Arial"/>
+                          <a:cs typeface="Arial"/>
+                        </a:rPr>
+                        <a:t>[2014]</a:t>
+                      </a:r>
+                    </a:p>
+                  </a:txBody>
+                  <a:tcPr anchor="ctr" marL="91440" marR="91440" marT="36576" marB="36576">
+                    <a:solidFill>
+                      <a:srgbClr val="FEF3C7"/>
+                    </a:solidFill>
+                  </a:tcPr>
+                </a:tc>
+                <a:tc>
+                  <a:txBody>
+                    <a:bodyPr wrap="square"/>
+                    <a:lstStyle/>
+                    <a:p>
+                      <a:pPr rtl="1" algn="ctr"/>
+                      <a:r>
+                        <a:rPr sz="1500" b="1" i="0" lang="ar-SA">
+                          <a:solidFill>
+                            <a:srgbClr val="134E4A"/>
+                          </a:solidFill>
+                          <a:latin typeface="Arial"/>
+                          <a:cs typeface="Arial"/>
+                        </a:rPr>
+                        <a:t>H4-ب · الهجين مع شعبية العنقود مقابل SKNN وحده (الربع الأقل تاريخاً)</a:t>
+                      </a:r>
+                    </a:p>
+                  </a:txBody>
+                  <a:tcPr anchor="ctr" marL="91440" marR="91440" marT="36576" marB="36576">
+                    <a:solidFill>
+                      <a:srgbClr val="CCFBF1"/>
+                    </a:solidFill>
+                  </a:tcPr>
+                </a:tc>
+              </a:tr>
             </a:tbl>
           </a:graphicData>
         </a:graphic>
@@ -11964,7 +12037,7 @@
         </p:nvSpPr>
         <p:spPr>
           <a:xfrm>
-            <a:off x="548640" y="5623559"/>
+            <a:off x="548640" y="5760720"/>
             <a:ext cx="11094415" cy="502920"/>
           </a:xfrm>
           <a:prstGeom prst="rect">
@@ -11997,7 +12070,7 @@
                 <a:latin typeface="Arial"/>
                 <a:cs typeface="Arial"/>
               </a:rPr>
-              <a:t>13 عرضاً؛ δ = 0.02؛ هولم على الأربع. «غير حاسمة: لا يكشف التصميم بقوة 80% أثراً أصغر من MDE80 = x»؛ ويُكتب صراحةً حين يتجاوز MDE80 ضعف δ (H2-أ وH3).</a:t>
+              <a:t>13 عرضاً؛ δ = 0.02؛ هولم على الأربع. «غير حاسمة: لا يكشف التصميم بقوة 80% أثراً أصغر من MDE80 = x»؛ ويُكتب صراحةً حين يتجاوز MDE80 ضعف δ (H2-أ وH3). الصف الأخير استكشافي: فاصل وp غير مصحَّحة ولا يدخل عائلة هولم.</a:t>
             </a:r>
           </a:p>
         </p:txBody>
@@ -12206,7 +12279,7 @@
                 <a:latin typeface="Arial"/>
                 <a:cs typeface="Arial"/>
               </a:rPr>
-              <a:t>H4-ب (استكشافية): الربع الأقل تاريخاً</a:t>
+              <a:t>الأشكال: الاستئصال والحساسيات</a:t>
             </a:r>
           </a:p>
         </p:txBody>
@@ -12265,7 +12338,7 @@
                 <a:latin typeface="Arial"/>
                 <a:cs typeface="Arial"/>
               </a:rPr>
-              <a:t>[2014] قيد الاستكمال: فاصل ثقة وp غير مصحَّحة، بلا حكم تأكيدي</a:t>
+              <a:t>[2014] قيد الاستكمال: تُملأ بأشكال PNG من results/conf2014/</a:t>
             </a:r>
           </a:p>
         </p:txBody>
@@ -12279,7 +12352,7 @@
         <p:spPr>
           <a:xfrm>
             <a:off x="8127796" y="1874519"/>
-            <a:ext cx="3515258" cy="3246120"/>
+            <a:ext cx="3515258" cy="4297680"/>
           </a:xfrm>
           <a:prstGeom prst="roundRect">
             <a:avLst>
@@ -12359,7 +12432,7 @@
                 <a:latin typeface="Arial"/>
                 <a:cs typeface="Arial"/>
               </a:rPr>
-              <a:t>الربع الأقل تاريخاً</a:t>
+              <a:t>استئصال الإشارة</a:t>
             </a:r>
           </a:p>
         </p:txBody>
@@ -12405,7 +12478,7 @@
                 <a:latin typeface="Arial"/>
                 <a:cs typeface="Arial"/>
               </a:rPr>
-              <a:t>الهجين مع شعبية العنقود مقابل SKNN وحده</a:t>
+              <a:t>L0 ⊂ L1 ⊂ L2 ⊂ L3 في WRMF وItem-kNN</a:t>
             </a:r>
           </a:p>
         </p:txBody>
@@ -12419,7 +12492,7 @@
         <p:spPr>
           <a:xfrm>
             <a:off x="8310676" y="3611879"/>
-            <a:ext cx="3149498" cy="1325879"/>
+            <a:ext cx="3149498" cy="2377440"/>
           </a:xfrm>
           <a:prstGeom prst="roundRect">
             <a:avLst>
@@ -12464,7 +12537,7 @@
                 <a:latin typeface="Arial"/>
                 <a:cs typeface="Arial"/>
               </a:rPr>
-              <a:t>[2014] Δ وفاصل 95% وp</a:t>
+              <a:t>[2014] شكل</a:t>
             </a:r>
           </a:p>
         </p:txBody>
@@ -12478,7 +12551,7 @@
         <p:spPr>
           <a:xfrm>
             <a:off x="4338218" y="1874519"/>
-            <a:ext cx="3515258" cy="3246120"/>
+            <a:ext cx="3515258" cy="4297680"/>
           </a:xfrm>
           <a:prstGeom prst="roundRect">
             <a:avLst>
@@ -12558,7 +12631,7 @@
                 <a:latin typeface="Arial"/>
                 <a:cs typeface="Arial"/>
               </a:rPr>
-              <a:t>الربع الأعلى تاريخاً</a:t>
+              <a:t>استئصال مكوّنات الهجين</a:t>
             </a:r>
           </a:p>
         </p:txBody>
@@ -12604,7 +12677,7 @@
                 <a:latin typeface="Arial"/>
                 <a:cs typeface="Arial"/>
               </a:rPr>
-              <a:t>مقارنة: هل الأثر خاص بالأقل تاريخاً؟</a:t>
+              <a:t>حذف كل مكوّن مع إعادة ضبط الأوزان</a:t>
             </a:r>
           </a:p>
         </p:txBody>
@@ -12618,7 +12691,7 @@
         <p:spPr>
           <a:xfrm>
             <a:off x="4521098" y="3611879"/>
-            <a:ext cx="3149498" cy="1325879"/>
+            <a:ext cx="3149498" cy="2377440"/>
           </a:xfrm>
           <a:prstGeom prst="roundRect">
             <a:avLst>
@@ -12663,7 +12736,7 @@
                 <a:latin typeface="Arial"/>
                 <a:cs typeface="Arial"/>
               </a:rPr>
-              <a:t>[2014] Δ وفاصل 95% وp</a:t>
+              <a:t>[2014] شكل</a:t>
             </a:r>
           </a:p>
         </p:txBody>
@@ -12677,7 +12750,7 @@
         <p:spPr>
           <a:xfrm>
             <a:off x="548639" y="1874519"/>
-            <a:ext cx="3515258" cy="3246120"/>
+            <a:ext cx="3515258" cy="4297680"/>
           </a:xfrm>
           <a:prstGeom prst="roundRect">
             <a:avLst>
@@ -12757,7 +12830,7 @@
                 <a:latin typeface="Arial"/>
                 <a:cs typeface="Arial"/>
               </a:rPr>
-              <a:t>حجم الشريحة</a:t>
+              <a:t>حساسيات مسجّلة مسبقاً</a:t>
             </a:r>
           </a:p>
         </p:txBody>
@@ -12803,7 +12876,7 @@
                 <a:latin typeface="Arial"/>
                 <a:cs typeface="Arial"/>
               </a:rPr>
-              <a:t>حصة الربع الفعلية وعدد المقيَّمين</a:t>
+              <a:t>الأنواع المستبعدة، نقاط القطع، السوالب المعيَّنة، سعة GRU</a:t>
             </a:r>
           </a:p>
         </p:txBody>
@@ -12817,7 +12890,7 @@
         <p:spPr>
           <a:xfrm>
             <a:off x="731519" y="3611879"/>
-            <a:ext cx="3149498" cy="1325879"/>
+            <a:ext cx="3149498" cy="2377440"/>
           </a:xfrm>
           <a:prstGeom prst="roundRect">
             <a:avLst>
@@ -12862,25 +12935,25 @@
                 <a:latin typeface="Arial"/>
                 <a:cs typeface="Arial"/>
               </a:rPr>
-              <a:t>[2014] الحصة والعدد</a:t>
-            </a:r>
-          </a:p>
-        </p:txBody>
-      </p:sp>
-      <p:sp>
-        <p:nvSpPr>
-          <p:cNvPr id="16" name="خلاصة"/>
+              <a:t>[2014] شكل</a:t>
+            </a:r>
+          </a:p>
+        </p:txBody>
+      </p:sp>
+      <p:sp>
+        <p:nvSpPr>
+          <p:cNvPr id="16" name="شعار الجامعة"/>
           <p:cNvSpPr/>
           <p:nvPr/>
         </p:nvSpPr>
         <p:spPr>
           <a:xfrm>
-            <a:off x="548640" y="5257800"/>
-            <a:ext cx="11094415" cy="868680"/>
+            <a:off x="10957255" y="6382512"/>
+            <a:ext cx="685800" cy="292608"/>
           </a:xfrm>
           <a:prstGeom prst="roundRect">
             <a:avLst>
-              <a:gd name="adj" fmla="val 12000"/>
+              <a:gd name="adj" fmla="val 50000"/>
             </a:avLst>
           </a:prstGeom>
           <a:solidFill>
@@ -12906,74 +12979,18 @@
           </a:fontRef>
         </p:style>
         <p:txBody>
-          <a:bodyPr rtlCol="0" anchor="ctr" wrap="square" lIns="274320" rIns="274320" tIns="18288" bIns="18288"/>
-          <a:lstStyle/>
-          <a:p>
-            <a:pPr algn="r" rtl="1"/>
-            <a:r>
-              <a:rPr sz="2200" b="1" i="0" lang="ar-SA">
+          <a:bodyPr rtlCol="0" anchor="ctr" wrap="square" lIns="54864" rIns="54864" tIns="18288" bIns="18288"/>
+          <a:lstStyle/>
+          <a:p>
+            <a:pPr algn="ctr" rtl="1"/>
+            <a:r>
+              <a:rPr sz="1200" b="1" i="0" lang="ar-SA">
                 <a:solidFill>
                   <a:srgbClr val="FFFFFF"/>
                 </a:solidFill>
                 <a:latin typeface="Arial"/>
                 <a:cs typeface="Arial"/>
               </a:rPr>
-              <a:t>استكشافية: تُبلَّغ بفاصل ثقة وp غير مصحَّحة، ولا تدخل عائلة هولم</a:t>
-            </a:r>
-          </a:p>
-        </p:txBody>
-      </p:sp>
-      <p:sp>
-        <p:nvSpPr>
-          <p:cNvPr id="17" name="شعار الجامعة"/>
-          <p:cNvSpPr/>
-          <p:nvPr/>
-        </p:nvSpPr>
-        <p:spPr>
-          <a:xfrm>
-            <a:off x="10957255" y="6382512"/>
-            <a:ext cx="685800" cy="292608"/>
-          </a:xfrm>
-          <a:prstGeom prst="roundRect">
-            <a:avLst>
-              <a:gd name="adj" fmla="val 50000"/>
-            </a:avLst>
-          </a:prstGeom>
-          <a:solidFill>
-            <a:srgbClr val="0F766E"/>
-          </a:solidFill>
-          <a:ln>
-            <a:noFill/>
-          </a:ln>
-          <a:effectLst/>
-        </p:spPr>
-        <p:style>
-          <a:lnRef idx="1">
-            <a:schemeClr val="accent1"/>
-          </a:lnRef>
-          <a:fillRef idx="3">
-            <a:schemeClr val="accent1"/>
-          </a:fillRef>
-          <a:effectRef idx="2">
-            <a:schemeClr val="accent1"/>
-          </a:effectRef>
-          <a:fontRef idx="minor">
-            <a:schemeClr val="lt1"/>
-          </a:fontRef>
-        </p:style>
-        <p:txBody>
-          <a:bodyPr rtlCol="0" anchor="ctr" wrap="square" lIns="54864" rIns="54864" tIns="18288" bIns="18288"/>
-          <a:lstStyle/>
-          <a:p>
-            <a:pPr algn="ctr" rtl="1"/>
-            <a:r>
-              <a:rPr sz="1200" b="1" i="0" lang="ar-SA">
-                <a:solidFill>
-                  <a:srgbClr val="FFFFFF"/>
-                </a:solidFill>
-                <a:latin typeface="Arial"/>
-                <a:cs typeface="Arial"/>
-              </a:rPr>
               <a:t>SVU</a:t>
             </a:r>
           </a:p>
@@ -12981,7 +12998,7 @@
       </p:sp>
       <p:sp>
         <p:nvSpPr>
-          <p:cNvPr id="18" name="تذييل"/>
+          <p:cNvPr id="17" name="تذييل"/>
           <p:cNvSpPr txBox="1"/>
           <p:nvPr/>
         </p:nvSpPr>
@@ -13027,7 +13044,7 @@
       </p:sp>
       <p:sp>
         <p:nvSpPr>
-          <p:cNvPr id="19" name="رقم الشريحة"/>
+          <p:cNvPr id="18" name="رقم الشريحة"/>
           <p:cNvSpPr txBox="1"/>
           <p:nvPr/>
         </p:nvSpPr>
@@ -13127,7 +13144,7 @@
                 <a:latin typeface="Arial"/>
                 <a:cs typeface="Arial"/>
               </a:rPr>
-              <a:t>الأشكال: الاستئصال والحساسيات</a:t>
+              <a:t>المناقشة</a:t>
             </a:r>
           </a:p>
         </p:txBody>
@@ -13186,7 +13203,7 @@
                 <a:latin typeface="Arial"/>
                 <a:cs typeface="Arial"/>
               </a:rPr>
-              <a:t>[2014] قيد الاستكمال: تُملأ بأشكال PNG من results/conf2014/</a:t>
+              <a:t>قيد الاستكمال: تُكتب بعد النتائج التأكيدية</a:t>
             </a:r>
           </a:p>
         </p:txBody>
@@ -13199,8 +13216,8 @@
         </p:nvSpPr>
         <p:spPr>
           <a:xfrm>
-            <a:off x="8127796" y="1874519"/>
-            <a:ext cx="3515258" cy="4297680"/>
+            <a:off x="9075191" y="1874519"/>
+            <a:ext cx="2567863" cy="3246120"/>
           </a:xfrm>
           <a:prstGeom prst="roundRect">
             <a:avLst>
@@ -13247,8 +13264,8 @@
         </p:nvSpPr>
         <p:spPr>
           <a:xfrm>
-            <a:off x="8264956" y="1965960"/>
-            <a:ext cx="3240938" cy="685800"/>
+            <a:off x="9212351" y="1965960"/>
+            <a:ext cx="2293543" cy="685800"/>
           </a:xfrm>
           <a:prstGeom prst="rect">
             <a:avLst/>
@@ -13273,14 +13290,14 @@
               </a:spcAft>
             </a:pPr>
             <a:r>
-              <a:rPr sz="2000" b="1" i="0" lang="ar-SA">
+              <a:rPr sz="1800" b="1" i="0" lang="ar-SA">
                 <a:solidFill>
                   <a:srgbClr val="134E4A"/>
                 </a:solidFill>
                 <a:latin typeface="Arial"/>
                 <a:cs typeface="Arial"/>
               </a:rPr>
-              <a:t>استئصال الإشارة</a:t>
+              <a:t>الجدول الدراسي والشعبية الآنية</a:t>
             </a:r>
           </a:p>
         </p:txBody>
@@ -13293,8 +13310,8 @@
         </p:nvSpPr>
         <p:spPr>
           <a:xfrm>
-            <a:off x="8264956" y="2697479"/>
-            <a:ext cx="3240938" cy="822960"/>
+            <a:off x="9212351" y="2697479"/>
+            <a:ext cx="2293543" cy="822960"/>
           </a:xfrm>
           <a:prstGeom prst="rect">
             <a:avLst/>
@@ -13326,7 +13343,7 @@
                 <a:latin typeface="Arial"/>
                 <a:cs typeface="Arial"/>
               </a:rPr>
-              <a:t>L0 ⊂ L1 ⊂ L2 ⊂ L3 في WRMF وItem-kNN</a:t>
+              <a:t>كم يفرض الجدول على الوصول؟</a:t>
             </a:r>
           </a:p>
         </p:txBody>
@@ -13339,8 +13356,8 @@
         </p:nvSpPr>
         <p:spPr>
           <a:xfrm>
-            <a:off x="8310676" y="3611879"/>
-            <a:ext cx="3149498" cy="2377440"/>
+            <a:off x="9258071" y="3611879"/>
+            <a:ext cx="2202103" cy="1325879"/>
           </a:xfrm>
           <a:prstGeom prst="roundRect">
             <a:avLst>
@@ -13385,7 +13402,7 @@
                 <a:latin typeface="Arial"/>
                 <a:cs typeface="Arial"/>
               </a:rPr>
-              <a:t>[2014] شكل</a:t>
+              <a:t>[ تُكتب بعد النتائج ]</a:t>
             </a:r>
           </a:p>
         </p:txBody>
@@ -13398,8 +13415,8 @@
         </p:nvSpPr>
         <p:spPr>
           <a:xfrm>
-            <a:off x="4338218" y="1874519"/>
-            <a:ext cx="3515258" cy="4297680"/>
+            <a:off x="6233007" y="1874519"/>
+            <a:ext cx="2567863" cy="3246120"/>
           </a:xfrm>
           <a:prstGeom prst="roundRect">
             <a:avLst>
@@ -13446,8 +13463,8 @@
         </p:nvSpPr>
         <p:spPr>
           <a:xfrm>
-            <a:off x="4475378" y="1965960"/>
-            <a:ext cx="3240938" cy="685800"/>
+            <a:off x="6370167" y="1965960"/>
+            <a:ext cx="2293543" cy="685800"/>
           </a:xfrm>
           <a:prstGeom prst="rect">
             <a:avLst/>
@@ -13472,14 +13489,14 @@
               </a:spcAft>
             </a:pPr>
             <a:r>
-              <a:rPr sz="2000" b="1" i="0" lang="ar-SA">
+              <a:rPr sz="1800" b="1" i="0" lang="ar-SA">
                 <a:solidFill>
                   <a:srgbClr val="134E4A"/>
                 </a:solidFill>
                 <a:latin typeface="Arial"/>
                 <a:cs typeface="Arial"/>
               </a:rPr>
-              <a:t>استئصال مكوّنات الهجين</a:t>
+              <a:t>قيمة ترجيح الإشارات</a:t>
             </a:r>
           </a:p>
         </p:txBody>
@@ -13492,8 +13509,8 @@
         </p:nvSpPr>
         <p:spPr>
           <a:xfrm>
-            <a:off x="4475378" y="2697479"/>
-            <a:ext cx="3240938" cy="822960"/>
+            <a:off x="6370167" y="2697479"/>
+            <a:ext cx="2293543" cy="822960"/>
           </a:xfrm>
           <a:prstGeom prst="rect">
             <a:avLst/>
@@ -13525,7 +13542,7 @@
                 <a:latin typeface="Arial"/>
                 <a:cs typeface="Arial"/>
               </a:rPr>
-              <a:t>حذف كل مكوّن مع إعادة ضبط الأوزان</a:t>
+              <a:t>أي مستوى حمل الأثر إن وُجد؟</a:t>
             </a:r>
           </a:p>
         </p:txBody>
@@ -13538,8 +13555,8 @@
         </p:nvSpPr>
         <p:spPr>
           <a:xfrm>
-            <a:off x="4521098" y="3611879"/>
-            <a:ext cx="3149498" cy="2377440"/>
+            <a:off x="6415887" y="3611879"/>
+            <a:ext cx="2202103" cy="1325879"/>
           </a:xfrm>
           <a:prstGeom prst="roundRect">
             <a:avLst>
@@ -13584,7 +13601,7 @@
                 <a:latin typeface="Arial"/>
                 <a:cs typeface="Arial"/>
               </a:rPr>
-              <a:t>[2014] شكل</a:t>
+              <a:t>[ تُكتب بعد النتائج ]</a:t>
             </a:r>
           </a:p>
         </p:txBody>
@@ -13597,8 +13614,8 @@
         </p:nvSpPr>
         <p:spPr>
           <a:xfrm>
-            <a:off x="548639" y="1874519"/>
-            <a:ext cx="3515258" cy="4297680"/>
+            <a:off x="3390823" y="1874519"/>
+            <a:ext cx="2567863" cy="3246120"/>
           </a:xfrm>
           <a:prstGeom prst="roundRect">
             <a:avLst>
@@ -13645,8 +13662,8 @@
         </p:nvSpPr>
         <p:spPr>
           <a:xfrm>
-            <a:off x="685799" y="1965960"/>
-            <a:ext cx="3240938" cy="685800"/>
+            <a:off x="3527983" y="1965960"/>
+            <a:ext cx="2293543" cy="685800"/>
           </a:xfrm>
           <a:prstGeom prst="rect">
             <a:avLst/>
@@ -13671,14 +13688,14 @@
               </a:spcAft>
             </a:pPr>
             <a:r>
-              <a:rPr sz="2000" b="1" i="0" lang="ar-SA">
+              <a:rPr sz="1800" b="1" i="0" lang="ar-SA">
                 <a:solidFill>
                   <a:srgbClr val="134E4A"/>
                 </a:solidFill>
                 <a:latin typeface="Arial"/>
                 <a:cs typeface="Arial"/>
               </a:rPr>
-              <a:t>حساسيات مسجّلة مسبقاً</a:t>
+              <a:t>التسلسل العصبوني</a:t>
             </a:r>
           </a:p>
         </p:txBody>
@@ -13691,8 +13708,8 @@
         </p:nvSpPr>
         <p:spPr>
           <a:xfrm>
-            <a:off x="685799" y="2697479"/>
-            <a:ext cx="3240938" cy="822960"/>
+            <a:off x="3527983" y="2697479"/>
+            <a:ext cx="2293543" cy="822960"/>
           </a:xfrm>
           <a:prstGeom prst="rect">
             <a:avLst/>
@@ -13724,7 +13741,7 @@
                 <a:latin typeface="Arial"/>
                 <a:cs typeface="Arial"/>
               </a:rPr>
-              <a:t>الأنواع المستبعدة، نقاط القطع، السوالب المعيَّنة، سعة GRU</a:t>
+              <a:t>GRU-lite مقابل الجيران على السلال</a:t>
             </a:r>
           </a:p>
         </p:txBody>
@@ -13737,8 +13754,8 @@
         </p:nvSpPr>
         <p:spPr>
           <a:xfrm>
-            <a:off x="731519" y="3611879"/>
-            <a:ext cx="3149498" cy="2377440"/>
+            <a:off x="3573703" y="3611879"/>
+            <a:ext cx="2202103" cy="1325879"/>
           </a:xfrm>
           <a:prstGeom prst="roundRect">
             <a:avLst>
@@ -13783,25 +13800,224 @@
                 <a:latin typeface="Arial"/>
                 <a:cs typeface="Arial"/>
               </a:rPr>
-              <a:t>[2014] شكل</a:t>
-            </a:r>
-          </a:p>
-        </p:txBody>
-      </p:sp>
-      <p:sp>
-        <p:nvSpPr>
-          <p:cNvPr id="16" name="شعار الجامعة"/>
+              <a:t>[ تُكتب بعد النتائج ]</a:t>
+            </a:r>
+          </a:p>
+        </p:txBody>
+      </p:sp>
+      <p:sp>
+        <p:nvSpPr>
+          <p:cNvPr id="16" name="لوحة"/>
           <p:cNvSpPr/>
           <p:nvPr/>
         </p:nvSpPr>
         <p:spPr>
           <a:xfrm>
-            <a:off x="10957255" y="6382512"/>
-            <a:ext cx="685800" cy="292608"/>
+            <a:off x="548640" y="1874519"/>
+            <a:ext cx="2567863" cy="3246120"/>
           </a:xfrm>
           <a:prstGeom prst="roundRect">
             <a:avLst>
-              <a:gd name="adj" fmla="val 50000"/>
+              <a:gd name="adj" fmla="val 6000"/>
+            </a:avLst>
+          </a:prstGeom>
+          <a:solidFill>
+            <a:srgbClr val="FFFFFF"/>
+          </a:solidFill>
+          <a:ln w="12700">
+            <a:solidFill>
+              <a:srgbClr val="CBD5E1"/>
+            </a:solidFill>
+          </a:ln>
+          <a:effectLst/>
+        </p:spPr>
+        <p:style>
+          <a:lnRef idx="1">
+            <a:schemeClr val="accent1"/>
+          </a:lnRef>
+          <a:fillRef idx="3">
+            <a:schemeClr val="accent1"/>
+          </a:fillRef>
+          <a:effectRef idx="2">
+            <a:schemeClr val="accent1"/>
+          </a:effectRef>
+          <a:fontRef idx="minor">
+            <a:schemeClr val="lt1"/>
+          </a:fontRef>
+        </p:style>
+        <p:txBody>
+          <a:bodyPr rtlCol="0" anchor="ctr"/>
+          <a:lstStyle/>
+          <a:p>
+            <a:pPr algn="ctr"/>
+          </a:p>
+        </p:txBody>
+      </p:sp>
+      <p:sp>
+        <p:nvSpPr>
+          <p:cNvPr id="17" name="TextBox 16"/>
+          <p:cNvSpPr txBox="1"/>
+          <p:nvPr/>
+        </p:nvSpPr>
+        <p:spPr>
+          <a:xfrm>
+            <a:off x="685800" y="1965960"/>
+            <a:ext cx="2293543" cy="685800"/>
+          </a:xfrm>
+          <a:prstGeom prst="rect">
+            <a:avLst/>
+          </a:prstGeom>
+          <a:noFill/>
+        </p:spPr>
+        <p:txBody>
+          <a:bodyPr wrap="square" lIns="45720" rIns="45720" tIns="27432" bIns="27432" anchor="ctr">
+            <a:spAutoFit/>
+          </a:bodyPr>
+          <a:lstStyle/>
+          <a:p>
+            <a:pPr rtl="1" algn="r">
+              <a:lnSpc>
+                <a:spcPct val="100000"/>
+              </a:lnSpc>
+              <a:spcBef>
+                <a:spcPts val="0"/>
+              </a:spcBef>
+              <a:spcAft>
+                <a:spcPts val="0"/>
+              </a:spcAft>
+            </a:pPr>
+            <a:r>
+              <a:rPr sz="1800" b="1" i="0" lang="ar-SA">
+                <a:solidFill>
+                  <a:srgbClr val="134E4A"/>
+                </a:solidFill>
+                <a:latin typeface="Arial"/>
+                <a:cs typeface="Arial"/>
+              </a:rPr>
+              <a:t>المتعلمون والبدء البارد</a:t>
+            </a:r>
+          </a:p>
+        </p:txBody>
+      </p:sp>
+      <p:sp>
+        <p:nvSpPr>
+          <p:cNvPr id="18" name="TextBox 17"/>
+          <p:cNvSpPr txBox="1"/>
+          <p:nvPr/>
+        </p:nvSpPr>
+        <p:spPr>
+          <a:xfrm>
+            <a:off x="685800" y="2697479"/>
+            <a:ext cx="2293543" cy="822960"/>
+          </a:xfrm>
+          <a:prstGeom prst="rect">
+            <a:avLst/>
+          </a:prstGeom>
+          <a:noFill/>
+        </p:spPr>
+        <p:txBody>
+          <a:bodyPr wrap="square" lIns="45720" rIns="45720" tIns="27432" bIns="27432" anchor="t">
+            <a:spAutoFit/>
+          </a:bodyPr>
+          <a:lstStyle/>
+          <a:p>
+            <a:pPr rtl="1" algn="r">
+              <a:lnSpc>
+                <a:spcPct val="105000"/>
+              </a:lnSpc>
+              <a:spcBef>
+                <a:spcPts val="0"/>
+              </a:spcBef>
+              <a:spcAft>
+                <a:spcPts val="0"/>
+              </a:spcAft>
+            </a:pPr>
+            <a:r>
+              <a:rPr sz="1500" b="0" i="0" lang="ar-SA">
+                <a:solidFill>
+                  <a:srgbClr val="475569"/>
+                </a:solidFill>
+                <a:latin typeface="Arial"/>
+                <a:cs typeface="Arial"/>
+              </a:rPr>
+              <a:t>الخطر المبكر وسياق العنقود</a:t>
+            </a:r>
+          </a:p>
+        </p:txBody>
+      </p:sp>
+      <p:sp>
+        <p:nvSpPr>
+          <p:cNvPr id="19" name="مكان النتيجة"/>
+          <p:cNvSpPr/>
+          <p:nvPr/>
+        </p:nvSpPr>
+        <p:spPr>
+          <a:xfrm>
+            <a:off x="731520" y="3611879"/>
+            <a:ext cx="2202103" cy="1325879"/>
+          </a:xfrm>
+          <a:prstGeom prst="roundRect">
+            <a:avLst>
+              <a:gd name="adj" fmla="val 8000"/>
+            </a:avLst>
+          </a:prstGeom>
+          <a:solidFill>
+            <a:srgbClr val="FEF3C7"/>
+          </a:solidFill>
+          <a:ln w="19050">
+            <a:solidFill>
+              <a:srgbClr val="B45309"/>
+            </a:solidFill>
+            <a:prstDash val="dash"/>
+          </a:ln>
+          <a:effectLst/>
+        </p:spPr>
+        <p:style>
+          <a:lnRef idx="1">
+            <a:schemeClr val="accent1"/>
+          </a:lnRef>
+          <a:fillRef idx="3">
+            <a:schemeClr val="accent1"/>
+          </a:fillRef>
+          <a:effectRef idx="2">
+            <a:schemeClr val="accent1"/>
+          </a:effectRef>
+          <a:fontRef idx="minor">
+            <a:schemeClr val="lt1"/>
+          </a:fontRef>
+        </p:style>
+        <p:txBody>
+          <a:bodyPr rtlCol="0" anchor="ctr" wrap="square" lIns="54864" rIns="54864" tIns="18288" bIns="18288"/>
+          <a:lstStyle/>
+          <a:p>
+            <a:pPr algn="ctr" rtl="1"/>
+            <a:r>
+              <a:rPr sz="1800" b="1" i="1" lang="ar-SA">
+                <a:solidFill>
+                  <a:srgbClr val="92400E"/>
+                </a:solidFill>
+                <a:latin typeface="Arial"/>
+                <a:cs typeface="Arial"/>
+              </a:rPr>
+              <a:t>[ تُكتب بعد النتائج ]</a:t>
+            </a:r>
+          </a:p>
+        </p:txBody>
+      </p:sp>
+      <p:sp>
+        <p:nvSpPr>
+          <p:cNvPr id="20" name="خلاصة"/>
+          <p:cNvSpPr/>
+          <p:nvPr/>
+        </p:nvSpPr>
+        <p:spPr>
+          <a:xfrm>
+            <a:off x="548640" y="5257800"/>
+            <a:ext cx="11094415" cy="868680"/>
+          </a:xfrm>
+          <a:prstGeom prst="roundRect">
+            <a:avLst>
+              <a:gd name="adj" fmla="val 12000"/>
             </a:avLst>
           </a:prstGeom>
           <a:solidFill>
@@ -13827,6 +14043,62 @@
           </a:fontRef>
         </p:style>
         <p:txBody>
+          <a:bodyPr rtlCol="0" anchor="ctr" wrap="square" lIns="274320" rIns="274320" tIns="18288" bIns="18288"/>
+          <a:lstStyle/>
+          <a:p>
+            <a:pPr algn="r" rtl="1"/>
+            <a:r>
+              <a:rPr sz="2200" b="1" i="0" lang="ar-SA">
+                <a:solidFill>
+                  <a:srgbClr val="FFFFFF"/>
+                </a:solidFill>
+                <a:latin typeface="Arial"/>
+                <a:cs typeface="Arial"/>
+              </a:rPr>
+              <a:t>سياسة النتيجة السلبية: تفوّق الشعبية الآنية نتيجة رئيسية تُبلَّغ وتُحلَّل أسبابها</a:t>
+            </a:r>
+          </a:p>
+        </p:txBody>
+      </p:sp>
+      <p:sp>
+        <p:nvSpPr>
+          <p:cNvPr id="21" name="شعار الجامعة"/>
+          <p:cNvSpPr/>
+          <p:nvPr/>
+        </p:nvSpPr>
+        <p:spPr>
+          <a:xfrm>
+            <a:off x="10957255" y="6382512"/>
+            <a:ext cx="685800" cy="292608"/>
+          </a:xfrm>
+          <a:prstGeom prst="roundRect">
+            <a:avLst>
+              <a:gd name="adj" fmla="val 50000"/>
+            </a:avLst>
+          </a:prstGeom>
+          <a:solidFill>
+            <a:srgbClr val="0F766E"/>
+          </a:solidFill>
+          <a:ln>
+            <a:noFill/>
+          </a:ln>
+          <a:effectLst/>
+        </p:spPr>
+        <p:style>
+          <a:lnRef idx="1">
+            <a:schemeClr val="accent1"/>
+          </a:lnRef>
+          <a:fillRef idx="3">
+            <a:schemeClr val="accent1"/>
+          </a:fillRef>
+          <a:effectRef idx="2">
+            <a:schemeClr val="accent1"/>
+          </a:effectRef>
+          <a:fontRef idx="minor">
+            <a:schemeClr val="lt1"/>
+          </a:fontRef>
+        </p:style>
+        <p:txBody>
           <a:bodyPr rtlCol="0" anchor="ctr" wrap="square" lIns="54864" rIns="54864" tIns="18288" bIns="18288"/>
           <a:lstStyle/>
           <a:p>
@@ -13846,7 +14118,7 @@
       </p:sp>
       <p:sp>
         <p:nvSpPr>
-          <p:cNvPr id="17" name="تذييل"/>
+          <p:cNvPr id="22" name="تذييل"/>
           <p:cNvSpPr txBox="1"/>
           <p:nvPr/>
         </p:nvSpPr>
@@ -13892,7 +14164,7 @@
       </p:sp>
       <p:sp>
         <p:nvSpPr>
-          <p:cNvPr id="18" name="رقم الشريحة"/>
+          <p:cNvPr id="23" name="رقم الشريحة"/>
           <p:cNvSpPr txBox="1"/>
           <p:nvPr/>
         </p:nvSpPr>
@@ -13992,80 +14264,21 @@
                 <a:latin typeface="Arial"/>
                 <a:cs typeface="Arial"/>
               </a:rPr>
-              <a:t>المناقشة</a:t>
-            </a:r>
-          </a:p>
-        </p:txBody>
-      </p:sp>
-      <p:sp>
-        <p:nvSpPr>
-          <p:cNvPr id="3" name="شريط الحالة"/>
+              <a:t>القيود والعمل المستقبلي</a:t>
+            </a:r>
+          </a:p>
+        </p:txBody>
+      </p:sp>
+      <p:sp>
+        <p:nvSpPr>
+          <p:cNvPr id="3" name="عمود"/>
           <p:cNvSpPr/>
           <p:nvPr/>
         </p:nvSpPr>
         <p:spPr>
           <a:xfrm>
-            <a:off x="548640" y="1261872"/>
-            <a:ext cx="11094415" cy="420624"/>
-          </a:xfrm>
-          <a:prstGeom prst="roundRect">
-            <a:avLst>
-              <a:gd name="adj" fmla="val 25000"/>
-            </a:avLst>
-          </a:prstGeom>
-          <a:solidFill>
-            <a:srgbClr val="FEF3C7"/>
-          </a:solidFill>
-          <a:ln w="12700">
-            <a:solidFill>
-              <a:srgbClr val="B45309"/>
-            </a:solidFill>
-            <a:prstDash val="dash"/>
-          </a:ln>
-          <a:effectLst/>
-        </p:spPr>
-        <p:style>
-          <a:lnRef idx="1">
-            <a:schemeClr val="accent1"/>
-          </a:lnRef>
-          <a:fillRef idx="3">
-            <a:schemeClr val="accent1"/>
-          </a:fillRef>
-          <a:effectRef idx="2">
-            <a:schemeClr val="accent1"/>
-          </a:effectRef>
-          <a:fontRef idx="minor">
-            <a:schemeClr val="lt1"/>
-          </a:fontRef>
-        </p:style>
-        <p:txBody>
-          <a:bodyPr rtlCol="0" anchor="ctr" wrap="square" lIns="54864" rIns="228600" tIns="18288" bIns="18288"/>
-          <a:lstStyle/>
-          <a:p>
-            <a:pPr algn="r" rtl="1"/>
-            <a:r>
-              <a:rPr sz="1500" b="1" i="0" lang="ar-SA">
-                <a:solidFill>
-                  <a:srgbClr val="92400E"/>
-                </a:solidFill>
-                <a:latin typeface="Arial"/>
-                <a:cs typeface="Arial"/>
-              </a:rPr>
-              <a:t>قيد الاستكمال: تُكتب بعد النتائج التأكيدية</a:t>
-            </a:r>
-          </a:p>
-        </p:txBody>
-      </p:sp>
-      <p:sp>
-        <p:nvSpPr>
-          <p:cNvPr id="4" name="لوحة"/>
-          <p:cNvSpPr/>
-          <p:nvPr/>
-        </p:nvSpPr>
-        <p:spPr>
-          <a:xfrm>
-            <a:off x="9075191" y="1874519"/>
-            <a:ext cx="2567863" cy="3246120"/>
+            <a:off x="6233007" y="1463040"/>
+            <a:ext cx="5410047" cy="4709160"/>
           </a:xfrm>
           <a:prstGeom prst="roundRect">
             <a:avLst>
@@ -14106,47 +14319,101 @@
       </p:sp>
       <p:sp>
         <p:nvSpPr>
-          <p:cNvPr id="5" name="TextBox 4"/>
-          <p:cNvSpPr txBox="1"/>
-          <p:nvPr/>
-        </p:nvSpPr>
-        <p:spPr>
-          <a:xfrm>
-            <a:off x="9212351" y="1965960"/>
-            <a:ext cx="2293543" cy="685800"/>
-          </a:xfrm>
-          <a:prstGeom prst="rect">
-            <a:avLst/>
-          </a:prstGeom>
-          <a:noFill/>
-        </p:spPr>
-        <p:txBody>
-          <a:bodyPr wrap="square" lIns="45720" rIns="45720" tIns="27432" bIns="27432" anchor="ctr">
-            <a:spAutoFit/>
-          </a:bodyPr>
-          <a:lstStyle/>
-          <a:p>
-            <a:pPr rtl="1" algn="r">
-              <a:lnSpc>
-                <a:spcPct val="100000"/>
-              </a:lnSpc>
-              <a:spcBef>
-                <a:spcPts val="0"/>
-              </a:spcBef>
-              <a:spcAft>
-                <a:spcPts val="0"/>
-              </a:spcAft>
-            </a:pPr>
-            <a:r>
-              <a:rPr sz="1800" b="1" i="0" lang="ar-SA">
-                <a:solidFill>
-                  <a:srgbClr val="134E4A"/>
-                </a:solidFill>
-                <a:latin typeface="Arial"/>
-                <a:cs typeface="Arial"/>
-              </a:rPr>
-              <a:t>الجدول الدراسي والشعبية الآنية</a:t>
-            </a:r>
+          <p:cNvPr id="4" name="عنوان العمود"/>
+          <p:cNvSpPr/>
+          <p:nvPr/>
+        </p:nvSpPr>
+        <p:spPr>
+          <a:xfrm>
+            <a:off x="6233007" y="1463040"/>
+            <a:ext cx="5410047" cy="685800"/>
+          </a:xfrm>
+          <a:prstGeom prst="roundRect">
+            <a:avLst>
+              <a:gd name="adj" fmla="val 20000"/>
+            </a:avLst>
+          </a:prstGeom>
+          <a:solidFill>
+            <a:srgbClr val="0F766E"/>
+          </a:solidFill>
+          <a:ln>
+            <a:noFill/>
+          </a:ln>
+          <a:effectLst/>
+        </p:spPr>
+        <p:style>
+          <a:lnRef idx="1">
+            <a:schemeClr val="accent1"/>
+          </a:lnRef>
+          <a:fillRef idx="3">
+            <a:schemeClr val="accent1"/>
+          </a:fillRef>
+          <a:effectRef idx="2">
+            <a:schemeClr val="accent1"/>
+          </a:effectRef>
+          <a:fontRef idx="minor">
+            <a:schemeClr val="lt1"/>
+          </a:fontRef>
+        </p:style>
+        <p:txBody>
+          <a:bodyPr rtlCol="0" anchor="ctr" wrap="square" lIns="54864" rIns="182880" tIns="18288" bIns="18288"/>
+          <a:lstStyle/>
+          <a:p>
+            <a:pPr algn="r" rtl="1"/>
+            <a:r>
+              <a:rPr sz="2000" b="1" i="0" lang="ar-SA">
+                <a:solidFill>
+                  <a:srgbClr val="FFFFFF"/>
+                </a:solidFill>
+                <a:latin typeface="Arial"/>
+                <a:cs typeface="Arial"/>
+              </a:rPr>
+              <a:t>القيود</a:t>
+            </a:r>
+          </a:p>
+        </p:txBody>
+      </p:sp>
+      <p:sp>
+        <p:nvSpPr>
+          <p:cNvPr id="5" name="نقطة"/>
+          <p:cNvSpPr/>
+          <p:nvPr/>
+        </p:nvSpPr>
+        <p:spPr>
+          <a:xfrm>
+            <a:off x="11259007" y="2583180"/>
+            <a:ext cx="164592" cy="164592"/>
+          </a:xfrm>
+          <a:prstGeom prst="ellipse">
+            <a:avLst/>
+          </a:prstGeom>
+          <a:solidFill>
+            <a:srgbClr val="B45309"/>
+          </a:solidFill>
+          <a:ln>
+            <a:noFill/>
+          </a:ln>
+          <a:effectLst/>
+        </p:spPr>
+        <p:style>
+          <a:lnRef idx="1">
+            <a:schemeClr val="accent1"/>
+          </a:lnRef>
+          <a:fillRef idx="3">
+            <a:schemeClr val="accent1"/>
+          </a:fillRef>
+          <a:effectRef idx="2">
+            <a:schemeClr val="accent1"/>
+          </a:effectRef>
+          <a:fontRef idx="minor">
+            <a:schemeClr val="lt1"/>
+          </a:fontRef>
+        </p:style>
+        <p:txBody>
+          <a:bodyPr rtlCol="0" anchor="ctr"/>
+          <a:lstStyle/>
+          <a:p>
+            <a:pPr algn="ctr"/>
           </a:p>
         </p:txBody>
       </p:sp>
@@ -14158,8 +14425,8 @@
         </p:nvSpPr>
         <p:spPr>
           <a:xfrm>
-            <a:off x="9212351" y="2697479"/>
-            <a:ext cx="2293543" cy="822960"/>
+            <a:off x="6370167" y="2286000"/>
+            <a:ext cx="4769967" cy="758952"/>
           </a:xfrm>
           <a:prstGeom prst="rect">
             <a:avLst/>
@@ -14167,7 +14434,7 @@
           <a:noFill/>
         </p:spPr>
         <p:txBody>
-          <a:bodyPr wrap="square" lIns="45720" rIns="45720" tIns="27432" bIns="27432" anchor="t">
+          <a:bodyPr wrap="square" lIns="45720" rIns="45720" tIns="27432" bIns="27432" anchor="ctr">
             <a:spAutoFit/>
           </a:bodyPr>
           <a:lstStyle/>
@@ -14184,42 +14451,37 @@
               </a:spcAft>
             </a:pPr>
             <a:r>
-              <a:rPr sz="1500" b="0" i="0" lang="ar-SA">
-                <a:solidFill>
-                  <a:srgbClr val="475569"/>
-                </a:solidFill>
-                <a:latin typeface="Arial"/>
-                <a:cs typeface="Arial"/>
-              </a:rPr>
-              <a:t>كم يفرض الجدول على الوصول؟</a:t>
-            </a:r>
-          </a:p>
-        </p:txBody>
-      </p:sp>
-      <p:sp>
-        <p:nvSpPr>
-          <p:cNvPr id="7" name="مكان النتيجة"/>
+              <a:rPr sz="2000" b="0" i="0" lang="ar-SA">
+                <a:solidFill>
+                  <a:srgbClr val="134E4A"/>
+                </a:solidFill>
+                <a:latin typeface="Arial"/>
+                <a:cs typeface="Arial"/>
+              </a:rPr>
+              <a:t>مؤسسة واحدة: التعميم من 2013 إلى 2014 فقط</a:t>
+            </a:r>
+          </a:p>
+        </p:txBody>
+      </p:sp>
+      <p:sp>
+        <p:nvSpPr>
+          <p:cNvPr id="7" name="نقطة"/>
           <p:cNvSpPr/>
           <p:nvPr/>
         </p:nvSpPr>
         <p:spPr>
           <a:xfrm>
-            <a:off x="9258071" y="3611879"/>
-            <a:ext cx="2202103" cy="1325879"/>
-          </a:xfrm>
-          <a:prstGeom prst="roundRect">
-            <a:avLst>
-              <a:gd name="adj" fmla="val 8000"/>
-            </a:avLst>
+            <a:off x="11259007" y="3342132"/>
+            <a:ext cx="164592" cy="164592"/>
+          </a:xfrm>
+          <a:prstGeom prst="ellipse">
+            <a:avLst/>
           </a:prstGeom>
           <a:solidFill>
-            <a:srgbClr val="FEF3C7"/>
+            <a:srgbClr val="B45309"/>
           </a:solidFill>
-          <a:ln w="19050">
-            <a:solidFill>
-              <a:srgbClr val="B45309"/>
-            </a:solidFill>
-            <a:prstDash val="dash"/>
+          <a:ln>
+            <a:noFill/>
           </a:ln>
           <a:effectLst/>
         </p:spPr>
@@ -14238,33 +14500,339 @@
           </a:fontRef>
         </p:style>
         <p:txBody>
-          <a:bodyPr rtlCol="0" anchor="ctr" wrap="square" lIns="54864" rIns="54864" tIns="18288" bIns="18288"/>
-          <a:lstStyle/>
-          <a:p>
-            <a:pPr algn="ctr" rtl="1"/>
-            <a:r>
-              <a:rPr sz="1800" b="1" i="1" lang="ar-SA">
-                <a:solidFill>
-                  <a:srgbClr val="92400E"/>
-                </a:solidFill>
-                <a:latin typeface="Arial"/>
-                <a:cs typeface="Arial"/>
-              </a:rPr>
-              <a:t>[ تُكتب بعد النتائج ]</a:t>
-            </a:r>
-          </a:p>
-        </p:txBody>
-      </p:sp>
-      <p:sp>
-        <p:nvSpPr>
-          <p:cNvPr id="8" name="لوحة"/>
+          <a:bodyPr rtlCol="0" anchor="ctr"/>
+          <a:lstStyle/>
+          <a:p>
+            <a:pPr algn="ctr"/>
+          </a:p>
+        </p:txBody>
+      </p:sp>
+      <p:sp>
+        <p:nvSpPr>
+          <p:cNvPr id="8" name="TextBox 7"/>
+          <p:cNvSpPr txBox="1"/>
+          <p:nvPr/>
+        </p:nvSpPr>
+        <p:spPr>
+          <a:xfrm>
+            <a:off x="6370167" y="3044952"/>
+            <a:ext cx="4769967" cy="758952"/>
+          </a:xfrm>
+          <a:prstGeom prst="rect">
+            <a:avLst/>
+          </a:prstGeom>
+          <a:noFill/>
+        </p:spPr>
+        <p:txBody>
+          <a:bodyPr wrap="square" lIns="45720" rIns="45720" tIns="27432" bIns="27432" anchor="ctr">
+            <a:spAutoFit/>
+          </a:bodyPr>
+          <a:lstStyle/>
+          <a:p>
+            <a:pPr rtl="1" algn="r">
+              <a:lnSpc>
+                <a:spcPct val="105000"/>
+              </a:lnSpc>
+              <a:spcBef>
+                <a:spcPts val="0"/>
+              </a:spcBef>
+              <a:spcAft>
+                <a:spcPts val="0"/>
+              </a:spcAft>
+            </a:pPr>
+            <a:r>
+              <a:rPr sz="2000" b="0" i="0" lang="ar-SA">
+                <a:solidFill>
+                  <a:srgbClr val="134E4A"/>
+                </a:solidFill>
+                <a:latin typeface="Arial"/>
+                <a:cs typeface="Arial"/>
+              </a:rPr>
+              <a:t>تقييم دون اتصال: لا دراسة مستخدمين ولا ادعاء أثر تعليمي</a:t>
+            </a:r>
+          </a:p>
+        </p:txBody>
+      </p:sp>
+      <p:sp>
+        <p:nvSpPr>
+          <p:cNvPr id="9" name="نقطة"/>
           <p:cNvSpPr/>
           <p:nvPr/>
         </p:nvSpPr>
         <p:spPr>
           <a:xfrm>
-            <a:off x="6233007" y="1874519"/>
-            <a:ext cx="2567863" cy="3246120"/>
+            <a:off x="11259007" y="4101084"/>
+            <a:ext cx="164592" cy="164592"/>
+          </a:xfrm>
+          <a:prstGeom prst="ellipse">
+            <a:avLst/>
+          </a:prstGeom>
+          <a:solidFill>
+            <a:srgbClr val="B45309"/>
+          </a:solidFill>
+          <a:ln>
+            <a:noFill/>
+          </a:ln>
+          <a:effectLst/>
+        </p:spPr>
+        <p:style>
+          <a:lnRef idx="1">
+            <a:schemeClr val="accent1"/>
+          </a:lnRef>
+          <a:fillRef idx="3">
+            <a:schemeClr val="accent1"/>
+          </a:fillRef>
+          <a:effectRef idx="2">
+            <a:schemeClr val="accent1"/>
+          </a:effectRef>
+          <a:fontRef idx="minor">
+            <a:schemeClr val="lt1"/>
+          </a:fontRef>
+        </p:style>
+        <p:txBody>
+          <a:bodyPr rtlCol="0" anchor="ctr"/>
+          <a:lstStyle/>
+          <a:p>
+            <a:pPr algn="ctr"/>
+          </a:p>
+        </p:txBody>
+      </p:sp>
+      <p:sp>
+        <p:nvSpPr>
+          <p:cNvPr id="10" name="TextBox 9"/>
+          <p:cNvSpPr txBox="1"/>
+          <p:nvPr/>
+        </p:nvSpPr>
+        <p:spPr>
+          <a:xfrm>
+            <a:off x="6370167" y="3803904"/>
+            <a:ext cx="4769967" cy="758952"/>
+          </a:xfrm>
+          <a:prstGeom prst="rect">
+            <a:avLst/>
+          </a:prstGeom>
+          <a:noFill/>
+        </p:spPr>
+        <p:txBody>
+          <a:bodyPr wrap="square" lIns="45720" rIns="45720" tIns="27432" bIns="27432" anchor="ctr">
+            <a:spAutoFit/>
+          </a:bodyPr>
+          <a:lstStyle/>
+          <a:p>
+            <a:pPr rtl="1" algn="r">
+              <a:lnSpc>
+                <a:spcPct val="105000"/>
+              </a:lnSpc>
+              <a:spcBef>
+                <a:spcPts val="0"/>
+              </a:spcBef>
+              <a:spcAft>
+                <a:spcPts val="0"/>
+              </a:spcAft>
+            </a:pPr>
+            <a:r>
+              <a:rPr sz="2000" b="0" i="0" lang="ar-SA">
+                <a:solidFill>
+                  <a:srgbClr val="134E4A"/>
+                </a:solidFill>
+                <a:latin typeface="Arial"/>
+                <a:cs typeface="Arial"/>
+              </a:rPr>
+              <a:t>سجلات بدقة يوم: لا ترتيب داخل اليوم</a:t>
+            </a:r>
+          </a:p>
+        </p:txBody>
+      </p:sp>
+      <p:sp>
+        <p:nvSpPr>
+          <p:cNvPr id="11" name="نقطة"/>
+          <p:cNvSpPr/>
+          <p:nvPr/>
+        </p:nvSpPr>
+        <p:spPr>
+          <a:xfrm>
+            <a:off x="11259007" y="4860036"/>
+            <a:ext cx="164592" cy="164592"/>
+          </a:xfrm>
+          <a:prstGeom prst="ellipse">
+            <a:avLst/>
+          </a:prstGeom>
+          <a:solidFill>
+            <a:srgbClr val="B45309"/>
+          </a:solidFill>
+          <a:ln>
+            <a:noFill/>
+          </a:ln>
+          <a:effectLst/>
+        </p:spPr>
+        <p:style>
+          <a:lnRef idx="1">
+            <a:schemeClr val="accent1"/>
+          </a:lnRef>
+          <a:fillRef idx="3">
+            <a:schemeClr val="accent1"/>
+          </a:fillRef>
+          <a:effectRef idx="2">
+            <a:schemeClr val="accent1"/>
+          </a:effectRef>
+          <a:fontRef idx="minor">
+            <a:schemeClr val="lt1"/>
+          </a:fontRef>
+        </p:style>
+        <p:txBody>
+          <a:bodyPr rtlCol="0" anchor="ctr"/>
+          <a:lstStyle/>
+          <a:p>
+            <a:pPr algn="ctr"/>
+          </a:p>
+        </p:txBody>
+      </p:sp>
+      <p:sp>
+        <p:nvSpPr>
+          <p:cNvPr id="12" name="TextBox 11"/>
+          <p:cNvSpPr txBox="1"/>
+          <p:nvPr/>
+        </p:nvSpPr>
+        <p:spPr>
+          <a:xfrm>
+            <a:off x="6370167" y="4562856"/>
+            <a:ext cx="4769967" cy="758952"/>
+          </a:xfrm>
+          <a:prstGeom prst="rect">
+            <a:avLst/>
+          </a:prstGeom>
+          <a:noFill/>
+        </p:spPr>
+        <p:txBody>
+          <a:bodyPr wrap="square" lIns="45720" rIns="45720" tIns="27432" bIns="27432" anchor="ctr">
+            <a:spAutoFit/>
+          </a:bodyPr>
+          <a:lstStyle/>
+          <a:p>
+            <a:pPr rtl="1" algn="r">
+              <a:lnSpc>
+                <a:spcPct val="105000"/>
+              </a:lnSpc>
+              <a:spcBef>
+                <a:spcPts val="0"/>
+              </a:spcBef>
+              <a:spcAft>
+                <a:spcPts val="0"/>
+              </a:spcAft>
+            </a:pPr>
+            <a:r>
+              <a:rPr sz="2000" b="0" i="0" lang="ar-SA">
+                <a:solidFill>
+                  <a:srgbClr val="134E4A"/>
+                </a:solidFill>
+                <a:latin typeface="Arial"/>
+                <a:cs typeface="Arial"/>
+              </a:rPr>
+              <a:t>numpy فقط: GRU بطبقة واحدة</a:t>
+            </a:r>
+          </a:p>
+        </p:txBody>
+      </p:sp>
+      <p:sp>
+        <p:nvSpPr>
+          <p:cNvPr id="13" name="نقطة"/>
+          <p:cNvSpPr/>
+          <p:nvPr/>
+        </p:nvSpPr>
+        <p:spPr>
+          <a:xfrm>
+            <a:off x="11259007" y="5618988"/>
+            <a:ext cx="164592" cy="164592"/>
+          </a:xfrm>
+          <a:prstGeom prst="ellipse">
+            <a:avLst/>
+          </a:prstGeom>
+          <a:solidFill>
+            <a:srgbClr val="B45309"/>
+          </a:solidFill>
+          <a:ln>
+            <a:noFill/>
+          </a:ln>
+          <a:effectLst/>
+        </p:spPr>
+        <p:style>
+          <a:lnRef idx="1">
+            <a:schemeClr val="accent1"/>
+          </a:lnRef>
+          <a:fillRef idx="3">
+            <a:schemeClr val="accent1"/>
+          </a:fillRef>
+          <a:effectRef idx="2">
+            <a:schemeClr val="accent1"/>
+          </a:effectRef>
+          <a:fontRef idx="minor">
+            <a:schemeClr val="lt1"/>
+          </a:fontRef>
+        </p:style>
+        <p:txBody>
+          <a:bodyPr rtlCol="0" anchor="ctr"/>
+          <a:lstStyle/>
+          <a:p>
+            <a:pPr algn="ctr"/>
+          </a:p>
+        </p:txBody>
+      </p:sp>
+      <p:sp>
+        <p:nvSpPr>
+          <p:cNvPr id="14" name="TextBox 13"/>
+          <p:cNvSpPr txBox="1"/>
+          <p:nvPr/>
+        </p:nvSpPr>
+        <p:spPr>
+          <a:xfrm>
+            <a:off x="6370167" y="5321808"/>
+            <a:ext cx="4769967" cy="758952"/>
+          </a:xfrm>
+          <a:prstGeom prst="rect">
+            <a:avLst/>
+          </a:prstGeom>
+          <a:noFill/>
+        </p:spPr>
+        <p:txBody>
+          <a:bodyPr wrap="square" lIns="45720" rIns="45720" tIns="27432" bIns="27432" anchor="ctr">
+            <a:spAutoFit/>
+          </a:bodyPr>
+          <a:lstStyle/>
+          <a:p>
+            <a:pPr rtl="1" algn="r">
+              <a:lnSpc>
+                <a:spcPct val="105000"/>
+              </a:lnSpc>
+              <a:spcBef>
+                <a:spcPts val="0"/>
+              </a:spcBef>
+              <a:spcAft>
+                <a:spcPts val="0"/>
+              </a:spcAft>
+            </a:pPr>
+            <a:r>
+              <a:rPr sz="2000" b="0" i="0" lang="ar-SA">
+                <a:solidFill>
+                  <a:srgbClr val="134E4A"/>
+                </a:solidFill>
+                <a:latin typeface="Arial"/>
+                <a:cs typeface="Arial"/>
+              </a:rPr>
+              <a:t>قراءة معرّفات 2014 مقصورة على ترشيح تدريب مصنِّفات الخطر (2013)</a:t>
+            </a:r>
+          </a:p>
+        </p:txBody>
+      </p:sp>
+      <p:sp>
+        <p:nvSpPr>
+          <p:cNvPr id="15" name="عمود"/>
+          <p:cNvSpPr/>
+          <p:nvPr/>
+        </p:nvSpPr>
+        <p:spPr>
+          <a:xfrm>
+            <a:off x="548640" y="1463040"/>
+            <a:ext cx="5410047" cy="4709160"/>
           </a:xfrm>
           <a:prstGeom prst="roundRect">
             <a:avLst>
@@ -14305,567 +14873,18 @@
       </p:sp>
       <p:sp>
         <p:nvSpPr>
-          <p:cNvPr id="9" name="TextBox 8"/>
-          <p:cNvSpPr txBox="1"/>
-          <p:nvPr/>
-        </p:nvSpPr>
-        <p:spPr>
-          <a:xfrm>
-            <a:off x="6370167" y="1965960"/>
-            <a:ext cx="2293543" cy="685800"/>
-          </a:xfrm>
-          <a:prstGeom prst="rect">
-            <a:avLst/>
-          </a:prstGeom>
-          <a:noFill/>
-        </p:spPr>
-        <p:txBody>
-          <a:bodyPr wrap="square" lIns="45720" rIns="45720" tIns="27432" bIns="27432" anchor="ctr">
-            <a:spAutoFit/>
-          </a:bodyPr>
-          <a:lstStyle/>
-          <a:p>
-            <a:pPr rtl="1" algn="r">
-              <a:lnSpc>
-                <a:spcPct val="100000"/>
-              </a:lnSpc>
-              <a:spcBef>
-                <a:spcPts val="0"/>
-              </a:spcBef>
-              <a:spcAft>
-                <a:spcPts val="0"/>
-              </a:spcAft>
-            </a:pPr>
-            <a:r>
-              <a:rPr sz="1800" b="1" i="0" lang="ar-SA">
-                <a:solidFill>
-                  <a:srgbClr val="134E4A"/>
-                </a:solidFill>
-                <a:latin typeface="Arial"/>
-                <a:cs typeface="Arial"/>
-              </a:rPr>
-              <a:t>قيمة ترجيح الإشارات</a:t>
-            </a:r>
-          </a:p>
-        </p:txBody>
-      </p:sp>
-      <p:sp>
-        <p:nvSpPr>
-          <p:cNvPr id="10" name="TextBox 9"/>
-          <p:cNvSpPr txBox="1"/>
-          <p:nvPr/>
-        </p:nvSpPr>
-        <p:spPr>
-          <a:xfrm>
-            <a:off x="6370167" y="2697479"/>
-            <a:ext cx="2293543" cy="822960"/>
-          </a:xfrm>
-          <a:prstGeom prst="rect">
-            <a:avLst/>
-          </a:prstGeom>
-          <a:noFill/>
-        </p:spPr>
-        <p:txBody>
-          <a:bodyPr wrap="square" lIns="45720" rIns="45720" tIns="27432" bIns="27432" anchor="t">
-            <a:spAutoFit/>
-          </a:bodyPr>
-          <a:lstStyle/>
-          <a:p>
-            <a:pPr rtl="1" algn="r">
-              <a:lnSpc>
-                <a:spcPct val="105000"/>
-              </a:lnSpc>
-              <a:spcBef>
-                <a:spcPts val="0"/>
-              </a:spcBef>
-              <a:spcAft>
-                <a:spcPts val="0"/>
-              </a:spcAft>
-            </a:pPr>
-            <a:r>
-              <a:rPr sz="1500" b="0" i="0" lang="ar-SA">
-                <a:solidFill>
-                  <a:srgbClr val="475569"/>
-                </a:solidFill>
-                <a:latin typeface="Arial"/>
-                <a:cs typeface="Arial"/>
-              </a:rPr>
-              <a:t>أي مستوى حمل الأثر إن وُجد؟</a:t>
-            </a:r>
-          </a:p>
-        </p:txBody>
-      </p:sp>
-      <p:sp>
-        <p:nvSpPr>
-          <p:cNvPr id="11" name="مكان النتيجة"/>
+          <p:cNvPr id="16" name="عنوان العمود"/>
           <p:cNvSpPr/>
           <p:nvPr/>
         </p:nvSpPr>
         <p:spPr>
           <a:xfrm>
-            <a:off x="6415887" y="3611879"/>
-            <a:ext cx="2202103" cy="1325879"/>
+            <a:off x="548640" y="1463040"/>
+            <a:ext cx="5410047" cy="685800"/>
           </a:xfrm>
           <a:prstGeom prst="roundRect">
             <a:avLst>
-              <a:gd name="adj" fmla="val 8000"/>
-            </a:avLst>
-          </a:prstGeom>
-          <a:solidFill>
-            <a:srgbClr val="FEF3C7"/>
-          </a:solidFill>
-          <a:ln w="19050">
-            <a:solidFill>
-              <a:srgbClr val="B45309"/>
-            </a:solidFill>
-            <a:prstDash val="dash"/>
-          </a:ln>
-          <a:effectLst/>
-        </p:spPr>
-        <p:style>
-          <a:lnRef idx="1">
-            <a:schemeClr val="accent1"/>
-          </a:lnRef>
-          <a:fillRef idx="3">
-            <a:schemeClr val="accent1"/>
-          </a:fillRef>
-          <a:effectRef idx="2">
-            <a:schemeClr val="accent1"/>
-          </a:effectRef>
-          <a:fontRef idx="minor">
-            <a:schemeClr val="lt1"/>
-          </a:fontRef>
-        </p:style>
-        <p:txBody>
-          <a:bodyPr rtlCol="0" anchor="ctr" wrap="square" lIns="54864" rIns="54864" tIns="18288" bIns="18288"/>
-          <a:lstStyle/>
-          <a:p>
-            <a:pPr algn="ctr" rtl="1"/>
-            <a:r>
-              <a:rPr sz="1800" b="1" i="1" lang="ar-SA">
-                <a:solidFill>
-                  <a:srgbClr val="92400E"/>
-                </a:solidFill>
-                <a:latin typeface="Arial"/>
-                <a:cs typeface="Arial"/>
-              </a:rPr>
-              <a:t>[ تُكتب بعد النتائج ]</a:t>
-            </a:r>
-          </a:p>
-        </p:txBody>
-      </p:sp>
-      <p:sp>
-        <p:nvSpPr>
-          <p:cNvPr id="12" name="لوحة"/>
-          <p:cNvSpPr/>
-          <p:nvPr/>
-        </p:nvSpPr>
-        <p:spPr>
-          <a:xfrm>
-            <a:off x="3390823" y="1874519"/>
-            <a:ext cx="2567863" cy="3246120"/>
-          </a:xfrm>
-          <a:prstGeom prst="roundRect">
-            <a:avLst>
-              <a:gd name="adj" fmla="val 6000"/>
-            </a:avLst>
-          </a:prstGeom>
-          <a:solidFill>
-            <a:srgbClr val="FFFFFF"/>
-          </a:solidFill>
-          <a:ln w="12700">
-            <a:solidFill>
-              <a:srgbClr val="CBD5E1"/>
-            </a:solidFill>
-          </a:ln>
-          <a:effectLst/>
-        </p:spPr>
-        <p:style>
-          <a:lnRef idx="1">
-            <a:schemeClr val="accent1"/>
-          </a:lnRef>
-          <a:fillRef idx="3">
-            <a:schemeClr val="accent1"/>
-          </a:fillRef>
-          <a:effectRef idx="2">
-            <a:schemeClr val="accent1"/>
-          </a:effectRef>
-          <a:fontRef idx="minor">
-            <a:schemeClr val="lt1"/>
-          </a:fontRef>
-        </p:style>
-        <p:txBody>
-          <a:bodyPr rtlCol="0" anchor="ctr"/>
-          <a:lstStyle/>
-          <a:p>
-            <a:pPr algn="ctr"/>
-          </a:p>
-        </p:txBody>
-      </p:sp>
-      <p:sp>
-        <p:nvSpPr>
-          <p:cNvPr id="13" name="TextBox 12"/>
-          <p:cNvSpPr txBox="1"/>
-          <p:nvPr/>
-        </p:nvSpPr>
-        <p:spPr>
-          <a:xfrm>
-            <a:off x="3527983" y="1965960"/>
-            <a:ext cx="2293543" cy="685800"/>
-          </a:xfrm>
-          <a:prstGeom prst="rect">
-            <a:avLst/>
-          </a:prstGeom>
-          <a:noFill/>
-        </p:spPr>
-        <p:txBody>
-          <a:bodyPr wrap="square" lIns="45720" rIns="45720" tIns="27432" bIns="27432" anchor="ctr">
-            <a:spAutoFit/>
-          </a:bodyPr>
-          <a:lstStyle/>
-          <a:p>
-            <a:pPr rtl="1" algn="r">
-              <a:lnSpc>
-                <a:spcPct val="100000"/>
-              </a:lnSpc>
-              <a:spcBef>
-                <a:spcPts val="0"/>
-              </a:spcBef>
-              <a:spcAft>
-                <a:spcPts val="0"/>
-              </a:spcAft>
-            </a:pPr>
-            <a:r>
-              <a:rPr sz="1800" b="1" i="0" lang="ar-SA">
-                <a:solidFill>
-                  <a:srgbClr val="134E4A"/>
-                </a:solidFill>
-                <a:latin typeface="Arial"/>
-                <a:cs typeface="Arial"/>
-              </a:rPr>
-              <a:t>التسلسل العصبوني</a:t>
-            </a:r>
-          </a:p>
-        </p:txBody>
-      </p:sp>
-      <p:sp>
-        <p:nvSpPr>
-          <p:cNvPr id="14" name="TextBox 13"/>
-          <p:cNvSpPr txBox="1"/>
-          <p:nvPr/>
-        </p:nvSpPr>
-        <p:spPr>
-          <a:xfrm>
-            <a:off x="3527983" y="2697479"/>
-            <a:ext cx="2293543" cy="822960"/>
-          </a:xfrm>
-          <a:prstGeom prst="rect">
-            <a:avLst/>
-          </a:prstGeom>
-          <a:noFill/>
-        </p:spPr>
-        <p:txBody>
-          <a:bodyPr wrap="square" lIns="45720" rIns="45720" tIns="27432" bIns="27432" anchor="t">
-            <a:spAutoFit/>
-          </a:bodyPr>
-          <a:lstStyle/>
-          <a:p>
-            <a:pPr rtl="1" algn="r">
-              <a:lnSpc>
-                <a:spcPct val="105000"/>
-              </a:lnSpc>
-              <a:spcBef>
-                <a:spcPts val="0"/>
-              </a:spcBef>
-              <a:spcAft>
-                <a:spcPts val="0"/>
-              </a:spcAft>
-            </a:pPr>
-            <a:r>
-              <a:rPr sz="1500" b="0" i="0" lang="ar-SA">
-                <a:solidFill>
-                  <a:srgbClr val="475569"/>
-                </a:solidFill>
-                <a:latin typeface="Arial"/>
-                <a:cs typeface="Arial"/>
-              </a:rPr>
-              <a:t>GRU-lite مقابل الجيران على السلال</a:t>
-            </a:r>
-          </a:p>
-        </p:txBody>
-      </p:sp>
-      <p:sp>
-        <p:nvSpPr>
-          <p:cNvPr id="15" name="مكان النتيجة"/>
-          <p:cNvSpPr/>
-          <p:nvPr/>
-        </p:nvSpPr>
-        <p:spPr>
-          <a:xfrm>
-            <a:off x="3573703" y="3611879"/>
-            <a:ext cx="2202103" cy="1325879"/>
-          </a:xfrm>
-          <a:prstGeom prst="roundRect">
-            <a:avLst>
-              <a:gd name="adj" fmla="val 8000"/>
-            </a:avLst>
-          </a:prstGeom>
-          <a:solidFill>
-            <a:srgbClr val="FEF3C7"/>
-          </a:solidFill>
-          <a:ln w="19050">
-            <a:solidFill>
-              <a:srgbClr val="B45309"/>
-            </a:solidFill>
-            <a:prstDash val="dash"/>
-          </a:ln>
-          <a:effectLst/>
-        </p:spPr>
-        <p:style>
-          <a:lnRef idx="1">
-            <a:schemeClr val="accent1"/>
-          </a:lnRef>
-          <a:fillRef idx="3">
-            <a:schemeClr val="accent1"/>
-          </a:fillRef>
-          <a:effectRef idx="2">
-            <a:schemeClr val="accent1"/>
-          </a:effectRef>
-          <a:fontRef idx="minor">
-            <a:schemeClr val="lt1"/>
-          </a:fontRef>
-        </p:style>
-        <p:txBody>
-          <a:bodyPr rtlCol="0" anchor="ctr" wrap="square" lIns="54864" rIns="54864" tIns="18288" bIns="18288"/>
-          <a:lstStyle/>
-          <a:p>
-            <a:pPr algn="ctr" rtl="1"/>
-            <a:r>
-              <a:rPr sz="1800" b="1" i="1" lang="ar-SA">
-                <a:solidFill>
-                  <a:srgbClr val="92400E"/>
-                </a:solidFill>
-                <a:latin typeface="Arial"/>
-                <a:cs typeface="Arial"/>
-              </a:rPr>
-              <a:t>[ تُكتب بعد النتائج ]</a:t>
-            </a:r>
-          </a:p>
-        </p:txBody>
-      </p:sp>
-      <p:sp>
-        <p:nvSpPr>
-          <p:cNvPr id="16" name="لوحة"/>
-          <p:cNvSpPr/>
-          <p:nvPr/>
-        </p:nvSpPr>
-        <p:spPr>
-          <a:xfrm>
-            <a:off x="548640" y="1874519"/>
-            <a:ext cx="2567863" cy="3246120"/>
-          </a:xfrm>
-          <a:prstGeom prst="roundRect">
-            <a:avLst>
-              <a:gd name="adj" fmla="val 6000"/>
-            </a:avLst>
-          </a:prstGeom>
-          <a:solidFill>
-            <a:srgbClr val="FFFFFF"/>
-          </a:solidFill>
-          <a:ln w="12700">
-            <a:solidFill>
-              <a:srgbClr val="CBD5E1"/>
-            </a:solidFill>
-          </a:ln>
-          <a:effectLst/>
-        </p:spPr>
-        <p:style>
-          <a:lnRef idx="1">
-            <a:schemeClr val="accent1"/>
-          </a:lnRef>
-          <a:fillRef idx="3">
-            <a:schemeClr val="accent1"/>
-          </a:fillRef>
-          <a:effectRef idx="2">
-            <a:schemeClr val="accent1"/>
-          </a:effectRef>
-          <a:fontRef idx="minor">
-            <a:schemeClr val="lt1"/>
-          </a:fontRef>
-        </p:style>
-        <p:txBody>
-          <a:bodyPr rtlCol="0" anchor="ctr"/>
-          <a:lstStyle/>
-          <a:p>
-            <a:pPr algn="ctr"/>
-          </a:p>
-        </p:txBody>
-      </p:sp>
-      <p:sp>
-        <p:nvSpPr>
-          <p:cNvPr id="17" name="TextBox 16"/>
-          <p:cNvSpPr txBox="1"/>
-          <p:nvPr/>
-        </p:nvSpPr>
-        <p:spPr>
-          <a:xfrm>
-            <a:off x="685800" y="1965960"/>
-            <a:ext cx="2293543" cy="685800"/>
-          </a:xfrm>
-          <a:prstGeom prst="rect">
-            <a:avLst/>
-          </a:prstGeom>
-          <a:noFill/>
-        </p:spPr>
-        <p:txBody>
-          <a:bodyPr wrap="square" lIns="45720" rIns="45720" tIns="27432" bIns="27432" anchor="ctr">
-            <a:spAutoFit/>
-          </a:bodyPr>
-          <a:lstStyle/>
-          <a:p>
-            <a:pPr rtl="1" algn="r">
-              <a:lnSpc>
-                <a:spcPct val="100000"/>
-              </a:lnSpc>
-              <a:spcBef>
-                <a:spcPts val="0"/>
-              </a:spcBef>
-              <a:spcAft>
-                <a:spcPts val="0"/>
-              </a:spcAft>
-            </a:pPr>
-            <a:r>
-              <a:rPr sz="1800" b="1" i="0" lang="ar-SA">
-                <a:solidFill>
-                  <a:srgbClr val="134E4A"/>
-                </a:solidFill>
-                <a:latin typeface="Arial"/>
-                <a:cs typeface="Arial"/>
-              </a:rPr>
-              <a:t>المتعلمون والبدء البارد</a:t>
-            </a:r>
-          </a:p>
-        </p:txBody>
-      </p:sp>
-      <p:sp>
-        <p:nvSpPr>
-          <p:cNvPr id="18" name="TextBox 17"/>
-          <p:cNvSpPr txBox="1"/>
-          <p:nvPr/>
-        </p:nvSpPr>
-        <p:spPr>
-          <a:xfrm>
-            <a:off x="685800" y="2697479"/>
-            <a:ext cx="2293543" cy="822960"/>
-          </a:xfrm>
-          <a:prstGeom prst="rect">
-            <a:avLst/>
-          </a:prstGeom>
-          <a:noFill/>
-        </p:spPr>
-        <p:txBody>
-          <a:bodyPr wrap="square" lIns="45720" rIns="45720" tIns="27432" bIns="27432" anchor="t">
-            <a:spAutoFit/>
-          </a:bodyPr>
-          <a:lstStyle/>
-          <a:p>
-            <a:pPr rtl="1" algn="r">
-              <a:lnSpc>
-                <a:spcPct val="105000"/>
-              </a:lnSpc>
-              <a:spcBef>
-                <a:spcPts val="0"/>
-              </a:spcBef>
-              <a:spcAft>
-                <a:spcPts val="0"/>
-              </a:spcAft>
-            </a:pPr>
-            <a:r>
-              <a:rPr sz="1500" b="0" i="0" lang="ar-SA">
-                <a:solidFill>
-                  <a:srgbClr val="475569"/>
-                </a:solidFill>
-                <a:latin typeface="Arial"/>
-                <a:cs typeface="Arial"/>
-              </a:rPr>
-              <a:t>الخطر المبكر وسياق العنقود</a:t>
-            </a:r>
-          </a:p>
-        </p:txBody>
-      </p:sp>
-      <p:sp>
-        <p:nvSpPr>
-          <p:cNvPr id="19" name="مكان النتيجة"/>
-          <p:cNvSpPr/>
-          <p:nvPr/>
-        </p:nvSpPr>
-        <p:spPr>
-          <a:xfrm>
-            <a:off x="731520" y="3611879"/>
-            <a:ext cx="2202103" cy="1325879"/>
-          </a:xfrm>
-          <a:prstGeom prst="roundRect">
-            <a:avLst>
-              <a:gd name="adj" fmla="val 8000"/>
-            </a:avLst>
-          </a:prstGeom>
-          <a:solidFill>
-            <a:srgbClr val="FEF3C7"/>
-          </a:solidFill>
-          <a:ln w="19050">
-            <a:solidFill>
-              <a:srgbClr val="B45309"/>
-            </a:solidFill>
-            <a:prstDash val="dash"/>
-          </a:ln>
-          <a:effectLst/>
-        </p:spPr>
-        <p:style>
-          <a:lnRef idx="1">
-            <a:schemeClr val="accent1"/>
-          </a:lnRef>
-          <a:fillRef idx="3">
-            <a:schemeClr val="accent1"/>
-          </a:fillRef>
-          <a:effectRef idx="2">
-            <a:schemeClr val="accent1"/>
-          </a:effectRef>
-          <a:fontRef idx="minor">
-            <a:schemeClr val="lt1"/>
-          </a:fontRef>
-        </p:style>
-        <p:txBody>
-          <a:bodyPr rtlCol="0" anchor="ctr" wrap="square" lIns="54864" rIns="54864" tIns="18288" bIns="18288"/>
-          <a:lstStyle/>
-          <a:p>
-            <a:pPr algn="ctr" rtl="1"/>
-            <a:r>
-              <a:rPr sz="1800" b="1" i="1" lang="ar-SA">
-                <a:solidFill>
-                  <a:srgbClr val="92400E"/>
-                </a:solidFill>
-                <a:latin typeface="Arial"/>
-                <a:cs typeface="Arial"/>
-              </a:rPr>
-              <a:t>[ تُكتب بعد النتائج ]</a:t>
-            </a:r>
-          </a:p>
-        </p:txBody>
-      </p:sp>
-      <p:sp>
-        <p:nvSpPr>
-          <p:cNvPr id="20" name="خلاصة"/>
-          <p:cNvSpPr/>
-          <p:nvPr/>
-        </p:nvSpPr>
-        <p:spPr>
-          <a:xfrm>
-            <a:off x="548640" y="5257800"/>
-            <a:ext cx="11094415" cy="868680"/>
-          </a:xfrm>
-          <a:prstGeom prst="roundRect">
-            <a:avLst>
-              <a:gd name="adj" fmla="val 12000"/>
+              <a:gd name="adj" fmla="val 20000"/>
             </a:avLst>
           </a:prstGeom>
           <a:solidFill>
@@ -14891,26 +14910,386 @@
           </a:fontRef>
         </p:style>
         <p:txBody>
-          <a:bodyPr rtlCol="0" anchor="ctr" wrap="square" lIns="274320" rIns="274320" tIns="18288" bIns="18288"/>
+          <a:bodyPr rtlCol="0" anchor="ctr" wrap="square" lIns="54864" rIns="182880" tIns="18288" bIns="18288"/>
           <a:lstStyle/>
           <a:p>
             <a:pPr algn="r" rtl="1"/>
             <a:r>
-              <a:rPr sz="2200" b="1" i="0" lang="ar-SA">
+              <a:rPr sz="2000" b="1" i="0" lang="ar-SA">
                 <a:solidFill>
                   <a:srgbClr val="FFFFFF"/>
                 </a:solidFill>
                 <a:latin typeface="Arial"/>
                 <a:cs typeface="Arial"/>
               </a:rPr>
-              <a:t>سياسة النتيجة السلبية: تفوّق الشعبية الآنية نتيجة رئيسية تُبلَّغ وتُحلَّل أسبابها</a:t>
-            </a:r>
-          </a:p>
-        </p:txBody>
-      </p:sp>
-      <p:sp>
-        <p:nvSpPr>
-          <p:cNvPr id="21" name="شعار الجامعة"/>
+              <a:t>العمل المستقبلي</a:t>
+            </a:r>
+          </a:p>
+        </p:txBody>
+      </p:sp>
+      <p:sp>
+        <p:nvSpPr>
+          <p:cNvPr id="17" name="نقطة"/>
+          <p:cNvSpPr/>
+          <p:nvPr/>
+        </p:nvSpPr>
+        <p:spPr>
+          <a:xfrm>
+            <a:off x="5574639" y="2678049"/>
+            <a:ext cx="164592" cy="164592"/>
+          </a:xfrm>
+          <a:prstGeom prst="ellipse">
+            <a:avLst/>
+          </a:prstGeom>
+          <a:solidFill>
+            <a:srgbClr val="B45309"/>
+          </a:solidFill>
+          <a:ln>
+            <a:noFill/>
+          </a:ln>
+          <a:effectLst/>
+        </p:spPr>
+        <p:style>
+          <a:lnRef idx="1">
+            <a:schemeClr val="accent1"/>
+          </a:lnRef>
+          <a:fillRef idx="3">
+            <a:schemeClr val="accent1"/>
+          </a:fillRef>
+          <a:effectRef idx="2">
+            <a:schemeClr val="accent1"/>
+          </a:effectRef>
+          <a:fontRef idx="minor">
+            <a:schemeClr val="lt1"/>
+          </a:fontRef>
+        </p:style>
+        <p:txBody>
+          <a:bodyPr rtlCol="0" anchor="ctr"/>
+          <a:lstStyle/>
+          <a:p>
+            <a:pPr algn="ctr"/>
+          </a:p>
+        </p:txBody>
+      </p:sp>
+      <p:sp>
+        <p:nvSpPr>
+          <p:cNvPr id="18" name="TextBox 17"/>
+          <p:cNvSpPr txBox="1"/>
+          <p:nvPr/>
+        </p:nvSpPr>
+        <p:spPr>
+          <a:xfrm>
+            <a:off x="685800" y="2286000"/>
+            <a:ext cx="4769967" cy="948690"/>
+          </a:xfrm>
+          <a:prstGeom prst="rect">
+            <a:avLst/>
+          </a:prstGeom>
+          <a:noFill/>
+        </p:spPr>
+        <p:txBody>
+          <a:bodyPr wrap="square" lIns="45720" rIns="45720" tIns="27432" bIns="27432" anchor="ctr">
+            <a:spAutoFit/>
+          </a:bodyPr>
+          <a:lstStyle/>
+          <a:p>
+            <a:pPr rtl="1" algn="r">
+              <a:lnSpc>
+                <a:spcPct val="105000"/>
+              </a:lnSpc>
+              <a:spcBef>
+                <a:spcPts val="0"/>
+              </a:spcBef>
+              <a:spcAft>
+                <a:spcPts val="0"/>
+              </a:spcAft>
+            </a:pPr>
+            <a:r>
+              <a:rPr sz="2000" b="0" i="0" lang="ar-SA">
+                <a:solidFill>
+                  <a:srgbClr val="134E4A"/>
+                </a:solidFill>
+                <a:latin typeface="Arial"/>
+                <a:cs typeface="Arial"/>
+              </a:rPr>
+              <a:t>تجربة حية ودراسة مستخدمين للتفسيرات</a:t>
+            </a:r>
+          </a:p>
+        </p:txBody>
+      </p:sp>
+      <p:sp>
+        <p:nvSpPr>
+          <p:cNvPr id="19" name="نقطة"/>
+          <p:cNvSpPr/>
+          <p:nvPr/>
+        </p:nvSpPr>
+        <p:spPr>
+          <a:xfrm>
+            <a:off x="5574639" y="3626739"/>
+            <a:ext cx="164592" cy="164592"/>
+          </a:xfrm>
+          <a:prstGeom prst="ellipse">
+            <a:avLst/>
+          </a:prstGeom>
+          <a:solidFill>
+            <a:srgbClr val="B45309"/>
+          </a:solidFill>
+          <a:ln>
+            <a:noFill/>
+          </a:ln>
+          <a:effectLst/>
+        </p:spPr>
+        <p:style>
+          <a:lnRef idx="1">
+            <a:schemeClr val="accent1"/>
+          </a:lnRef>
+          <a:fillRef idx="3">
+            <a:schemeClr val="accent1"/>
+          </a:fillRef>
+          <a:effectRef idx="2">
+            <a:schemeClr val="accent1"/>
+          </a:effectRef>
+          <a:fontRef idx="minor">
+            <a:schemeClr val="lt1"/>
+          </a:fontRef>
+        </p:style>
+        <p:txBody>
+          <a:bodyPr rtlCol="0" anchor="ctr"/>
+          <a:lstStyle/>
+          <a:p>
+            <a:pPr algn="ctr"/>
+          </a:p>
+        </p:txBody>
+      </p:sp>
+      <p:sp>
+        <p:nvSpPr>
+          <p:cNvPr id="20" name="TextBox 19"/>
+          <p:cNvSpPr txBox="1"/>
+          <p:nvPr/>
+        </p:nvSpPr>
+        <p:spPr>
+          <a:xfrm>
+            <a:off x="685800" y="3234690"/>
+            <a:ext cx="4769967" cy="948690"/>
+          </a:xfrm>
+          <a:prstGeom prst="rect">
+            <a:avLst/>
+          </a:prstGeom>
+          <a:noFill/>
+        </p:spPr>
+        <p:txBody>
+          <a:bodyPr wrap="square" lIns="45720" rIns="45720" tIns="27432" bIns="27432" anchor="ctr">
+            <a:spAutoFit/>
+          </a:bodyPr>
+          <a:lstStyle/>
+          <a:p>
+            <a:pPr rtl="1" algn="r">
+              <a:lnSpc>
+                <a:spcPct val="105000"/>
+              </a:lnSpc>
+              <a:spcBef>
+                <a:spcPts val="0"/>
+              </a:spcBef>
+              <a:spcAft>
+                <a:spcPts val="0"/>
+              </a:spcAft>
+            </a:pPr>
+            <a:r>
+              <a:rPr sz="2000" b="0" i="0" lang="ar-SA">
+                <a:solidFill>
+                  <a:srgbClr val="134E4A"/>
+                </a:solidFill>
+                <a:latin typeface="Arial"/>
+                <a:cs typeface="Arial"/>
+              </a:rPr>
+              <a:t>إعادة البروتوكول على سجلات الجامعة الافتراضية السورية</a:t>
+            </a:r>
+          </a:p>
+        </p:txBody>
+      </p:sp>
+      <p:sp>
+        <p:nvSpPr>
+          <p:cNvPr id="21" name="نقطة"/>
+          <p:cNvSpPr/>
+          <p:nvPr/>
+        </p:nvSpPr>
+        <p:spPr>
+          <a:xfrm>
+            <a:off x="5574639" y="4575429"/>
+            <a:ext cx="164592" cy="164592"/>
+          </a:xfrm>
+          <a:prstGeom prst="ellipse">
+            <a:avLst/>
+          </a:prstGeom>
+          <a:solidFill>
+            <a:srgbClr val="B45309"/>
+          </a:solidFill>
+          <a:ln>
+            <a:noFill/>
+          </a:ln>
+          <a:effectLst/>
+        </p:spPr>
+        <p:style>
+          <a:lnRef idx="1">
+            <a:schemeClr val="accent1"/>
+          </a:lnRef>
+          <a:fillRef idx="3">
+            <a:schemeClr val="accent1"/>
+          </a:fillRef>
+          <a:effectRef idx="2">
+            <a:schemeClr val="accent1"/>
+          </a:effectRef>
+          <a:fontRef idx="minor">
+            <a:schemeClr val="lt1"/>
+          </a:fontRef>
+        </p:style>
+        <p:txBody>
+          <a:bodyPr rtlCol="0" anchor="ctr"/>
+          <a:lstStyle/>
+          <a:p>
+            <a:pPr algn="ctr"/>
+          </a:p>
+        </p:txBody>
+      </p:sp>
+      <p:sp>
+        <p:nvSpPr>
+          <p:cNvPr id="22" name="TextBox 21"/>
+          <p:cNvSpPr txBox="1"/>
+          <p:nvPr/>
+        </p:nvSpPr>
+        <p:spPr>
+          <a:xfrm>
+            <a:off x="685800" y="4183380"/>
+            <a:ext cx="4769967" cy="948690"/>
+          </a:xfrm>
+          <a:prstGeom prst="rect">
+            <a:avLst/>
+          </a:prstGeom>
+          <a:noFill/>
+        </p:spPr>
+        <p:txBody>
+          <a:bodyPr wrap="square" lIns="45720" rIns="45720" tIns="27432" bIns="27432" anchor="ctr">
+            <a:spAutoFit/>
+          </a:bodyPr>
+          <a:lstStyle/>
+          <a:p>
+            <a:pPr rtl="1" algn="r">
+              <a:lnSpc>
+                <a:spcPct val="105000"/>
+              </a:lnSpc>
+              <a:spcBef>
+                <a:spcPts val="0"/>
+              </a:spcBef>
+              <a:spcAft>
+                <a:spcPts val="0"/>
+              </a:spcAft>
+            </a:pPr>
+            <a:r>
+              <a:rPr sz="2000" b="0" i="0" lang="ar-SA">
+                <a:solidFill>
+                  <a:srgbClr val="134E4A"/>
+                </a:solidFill>
+                <a:latin typeface="Arial"/>
+                <a:cs typeface="Arial"/>
+              </a:rPr>
+              <a:t>بيانات بوصف نصي للموارد لتفعيل المحتوى</a:t>
+            </a:r>
+          </a:p>
+        </p:txBody>
+      </p:sp>
+      <p:sp>
+        <p:nvSpPr>
+          <p:cNvPr id="23" name="نقطة"/>
+          <p:cNvSpPr/>
+          <p:nvPr/>
+        </p:nvSpPr>
+        <p:spPr>
+          <a:xfrm>
+            <a:off x="5574639" y="5524119"/>
+            <a:ext cx="164592" cy="164592"/>
+          </a:xfrm>
+          <a:prstGeom prst="ellipse">
+            <a:avLst/>
+          </a:prstGeom>
+          <a:solidFill>
+            <a:srgbClr val="B45309"/>
+          </a:solidFill>
+          <a:ln>
+            <a:noFill/>
+          </a:ln>
+          <a:effectLst/>
+        </p:spPr>
+        <p:style>
+          <a:lnRef idx="1">
+            <a:schemeClr val="accent1"/>
+          </a:lnRef>
+          <a:fillRef idx="3">
+            <a:schemeClr val="accent1"/>
+          </a:fillRef>
+          <a:effectRef idx="2">
+            <a:schemeClr val="accent1"/>
+          </a:effectRef>
+          <a:fontRef idx="minor">
+            <a:schemeClr val="lt1"/>
+          </a:fontRef>
+        </p:style>
+        <p:txBody>
+          <a:bodyPr rtlCol="0" anchor="ctr"/>
+          <a:lstStyle/>
+          <a:p>
+            <a:pPr algn="ctr"/>
+          </a:p>
+        </p:txBody>
+      </p:sp>
+      <p:sp>
+        <p:nvSpPr>
+          <p:cNvPr id="24" name="TextBox 23"/>
+          <p:cNvSpPr txBox="1"/>
+          <p:nvPr/>
+        </p:nvSpPr>
+        <p:spPr>
+          <a:xfrm>
+            <a:off x="685800" y="5132070"/>
+            <a:ext cx="4769967" cy="948690"/>
+          </a:xfrm>
+          <a:prstGeom prst="rect">
+            <a:avLst/>
+          </a:prstGeom>
+          <a:noFill/>
+        </p:spPr>
+        <p:txBody>
+          <a:bodyPr wrap="square" lIns="45720" rIns="45720" tIns="27432" bIns="27432" anchor="ctr">
+            <a:spAutoFit/>
+          </a:bodyPr>
+          <a:lstStyle/>
+          <a:p>
+            <a:pPr rtl="1" algn="r">
+              <a:lnSpc>
+                <a:spcPct val="105000"/>
+              </a:lnSpc>
+              <a:spcBef>
+                <a:spcPts val="0"/>
+              </a:spcBef>
+              <a:spcAft>
+                <a:spcPts val="0"/>
+              </a:spcAft>
+            </a:pPr>
+            <a:r>
+              <a:rPr sz="2000" b="0" i="0" lang="ar-SA">
+                <a:solidFill>
+                  <a:srgbClr val="134E4A"/>
+                </a:solidFill>
+                <a:latin typeface="Arial"/>
+                <a:cs typeface="Arial"/>
+              </a:rPr>
+              <a:t>نماذج تسلسلية أعمق عند توفر المكتبات</a:t>
+            </a:r>
+          </a:p>
+        </p:txBody>
+      </p:sp>
+      <p:sp>
+        <p:nvSpPr>
+          <p:cNvPr id="25" name="شعار الجامعة"/>
           <p:cNvSpPr/>
           <p:nvPr/>
         </p:nvSpPr>
@@ -14966,7 +15345,7 @@
       </p:sp>
       <p:sp>
         <p:nvSpPr>
-          <p:cNvPr id="22" name="تذييل"/>
+          <p:cNvPr id="26" name="تذييل"/>
           <p:cNvSpPr txBox="1"/>
           <p:nvPr/>
         </p:nvSpPr>
@@ -15012,7 +15391,7 @@
       </p:sp>
       <p:sp>
         <p:nvSpPr>
-          <p:cNvPr id="23" name="رقم الشريحة"/>
+          <p:cNvPr id="27" name="رقم الشريحة"/>
           <p:cNvSpPr txBox="1"/>
           <p:nvPr/>
         </p:nvSpPr>
@@ -15059,7 +15438,7 @@
     <p:bg>
       <p:bgPr>
         <a:solidFill>
-          <a:srgbClr val="F8FAFC"/>
+          <a:srgbClr val="134E4A"/>
         </a:solidFill>
         <a:effectLst/>
       </p:bgPr>
@@ -15107,26 +15486,72 @@
             <a:r>
               <a:rPr sz="3000" b="1" i="0" lang="ar-SA">
                 <a:solidFill>
-                  <a:srgbClr val="134E4A"/>
-                </a:solidFill>
-                <a:latin typeface="Arial"/>
-                <a:cs typeface="Arial"/>
-              </a:rPr>
-              <a:t>القيود والعمل المستقبلي</a:t>
-            </a:r>
-          </a:p>
-        </p:txBody>
-      </p:sp>
-      <p:sp>
-        <p:nvSpPr>
-          <p:cNvPr id="3" name="عمود"/>
+                  <a:srgbClr val="FFFFFF"/>
+                </a:solidFill>
+                <a:latin typeface="Arial"/>
+                <a:cs typeface="Arial"/>
+              </a:rPr>
+              <a:t>الخاتمة والمساهمات</a:t>
+            </a:r>
+          </a:p>
+        </p:txBody>
+      </p:sp>
+      <p:sp>
+        <p:nvSpPr>
+          <p:cNvPr id="3" name="TextBox 2"/>
+          <p:cNvSpPr txBox="1"/>
+          <p:nvPr/>
+        </p:nvSpPr>
+        <p:spPr>
+          <a:xfrm>
+            <a:off x="548640" y="1417320"/>
+            <a:ext cx="11094415" cy="457200"/>
+          </a:xfrm>
+          <a:prstGeom prst="rect">
+            <a:avLst/>
+          </a:prstGeom>
+          <a:noFill/>
+        </p:spPr>
+        <p:txBody>
+          <a:bodyPr wrap="square" lIns="45720" rIns="45720" tIns="27432" bIns="27432" anchor="ctr">
+            <a:spAutoFit/>
+          </a:bodyPr>
+          <a:lstStyle/>
+          <a:p>
+            <a:pPr rtl="1" algn="r">
+              <a:lnSpc>
+                <a:spcPct val="115000"/>
+              </a:lnSpc>
+              <a:spcBef>
+                <a:spcPts val="0"/>
+              </a:spcBef>
+              <a:spcAft>
+                <a:spcPts val="0"/>
+              </a:spcAft>
+            </a:pPr>
+            <a:r>
+              <a:rPr sz="2000" b="1" i="0" lang="ar-SA">
+                <a:solidFill>
+                  <a:srgbClr val="CCFBF1"/>
+                </a:solidFill>
+                <a:latin typeface="Arial"/>
+                <a:cs typeface="Arial"/>
+              </a:rPr>
+              <a:t>مساهمة تجريبية ومنهجية، لا خوارزمية جديدة</a:t>
+            </a:r>
+          </a:p>
+        </p:txBody>
+      </p:sp>
+      <p:sp>
+        <p:nvSpPr>
+          <p:cNvPr id="4" name="بطاقة"/>
           <p:cNvSpPr/>
           <p:nvPr/>
         </p:nvSpPr>
         <p:spPr>
           <a:xfrm>
-            <a:off x="6233007" y="1463040"/>
-            <a:ext cx="5410047" cy="4709160"/>
+            <a:off x="6233007" y="2011680"/>
+            <a:ext cx="5410047" cy="1943100"/>
           </a:xfrm>
           <a:prstGeom prst="roundRect">
             <a:avLst>
@@ -15167,18 +15592,18 @@
       </p:sp>
       <p:sp>
         <p:nvSpPr>
-          <p:cNvPr id="4" name="عنوان العمود"/>
+          <p:cNvPr id="5" name="رقم"/>
           <p:cNvSpPr/>
           <p:nvPr/>
         </p:nvSpPr>
         <p:spPr>
           <a:xfrm>
-            <a:off x="6233007" y="1463040"/>
-            <a:ext cx="5410047" cy="685800"/>
+            <a:off x="10957255" y="2194560"/>
+            <a:ext cx="502920" cy="502920"/>
           </a:xfrm>
           <a:prstGeom prst="roundRect">
             <a:avLst>
-              <a:gd name="adj" fmla="val 20000"/>
+              <a:gd name="adj" fmla="val 50000"/>
             </a:avLst>
           </a:prstGeom>
           <a:solidFill>
@@ -15204,64 +15629,20 @@
           </a:fontRef>
         </p:style>
         <p:txBody>
-          <a:bodyPr rtlCol="0" anchor="ctr" wrap="square" lIns="54864" rIns="182880" tIns="18288" bIns="18288"/>
-          <a:lstStyle/>
-          <a:p>
-            <a:pPr algn="r" rtl="1"/>
-            <a:r>
-              <a:rPr sz="2000" b="1" i="0" lang="ar-SA">
+          <a:bodyPr rtlCol="0" anchor="ctr" wrap="square" lIns="54864" rIns="54864" tIns="18288" bIns="18288"/>
+          <a:lstStyle/>
+          <a:p>
+            <a:pPr algn="ctr" rtl="1"/>
+            <a:r>
+              <a:rPr sz="1600" b="1" i="0" lang="ar-SA">
                 <a:solidFill>
                   <a:srgbClr val="FFFFFF"/>
                 </a:solidFill>
                 <a:latin typeface="Arial"/>
                 <a:cs typeface="Arial"/>
               </a:rPr>
-              <a:t>القيود</a:t>
-            </a:r>
-          </a:p>
-        </p:txBody>
-      </p:sp>
-      <p:sp>
-        <p:nvSpPr>
-          <p:cNvPr id="5" name="نقطة"/>
-          <p:cNvSpPr/>
-          <p:nvPr/>
-        </p:nvSpPr>
-        <p:spPr>
-          <a:xfrm>
-            <a:off x="11259007" y="2583180"/>
-            <a:ext cx="164592" cy="164592"/>
-          </a:xfrm>
-          <a:prstGeom prst="ellipse">
-            <a:avLst/>
-          </a:prstGeom>
-          <a:solidFill>
-            <a:srgbClr val="B45309"/>
-          </a:solidFill>
-          <a:ln>
-            <a:noFill/>
-          </a:ln>
-          <a:effectLst/>
-        </p:spPr>
-        <p:style>
-          <a:lnRef idx="1">
-            <a:schemeClr val="accent1"/>
-          </a:lnRef>
-          <a:fillRef idx="3">
-            <a:schemeClr val="accent1"/>
-          </a:fillRef>
-          <a:effectRef idx="2">
-            <a:schemeClr val="accent1"/>
-          </a:effectRef>
-          <a:fontRef idx="minor">
-            <a:schemeClr val="lt1"/>
-          </a:fontRef>
-        </p:style>
-        <p:txBody>
-          <a:bodyPr rtlCol="0" anchor="ctr"/>
-          <a:lstStyle/>
-          <a:p>
-            <a:pPr algn="ctr"/>
+              <a:t>1</a:t>
+            </a:r>
           </a:p>
         </p:txBody>
       </p:sp>
@@ -15273,8 +15654,8 @@
         </p:nvSpPr>
         <p:spPr>
           <a:xfrm>
-            <a:off x="6370167" y="2286000"/>
-            <a:ext cx="4769967" cy="758952"/>
+            <a:off x="6370167" y="2121408"/>
+            <a:ext cx="4495647" cy="685800"/>
           </a:xfrm>
           <a:prstGeom prst="rect">
             <a:avLst/>
@@ -15289,7 +15670,7 @@
           <a:p>
             <a:pPr rtl="1" algn="r">
               <a:lnSpc>
-                <a:spcPct val="105000"/>
+                <a:spcPct val="100000"/>
               </a:lnSpc>
               <a:spcBef>
                 <a:spcPts val="0"/>
@@ -15299,72 +15680,28 @@
               </a:spcAft>
             </a:pPr>
             <a:r>
-              <a:rPr sz="2000" b="0" i="0" lang="ar-SA">
+              <a:rPr sz="2400" b="1" i="0" lang="ar-SA">
                 <a:solidFill>
                   <a:srgbClr val="134E4A"/>
                 </a:solidFill>
                 <a:latin typeface="Arial"/>
                 <a:cs typeface="Arial"/>
               </a:rPr>
-              <a:t>مؤسسة واحدة: التعميم من 2013 إلى 2014 فقط</a:t>
-            </a:r>
-          </a:p>
-        </p:txBody>
-      </p:sp>
-      <p:sp>
-        <p:nvSpPr>
-          <p:cNvPr id="7" name="نقطة"/>
-          <p:cNvSpPr/>
-          <p:nvPr/>
-        </p:nvSpPr>
-        <p:spPr>
-          <a:xfrm>
-            <a:off x="11259007" y="3342132"/>
-            <a:ext cx="164592" cy="164592"/>
-          </a:xfrm>
-          <a:prstGeom prst="ellipse">
-            <a:avLst/>
-          </a:prstGeom>
-          <a:solidFill>
-            <a:srgbClr val="B45309"/>
-          </a:solidFill>
-          <a:ln>
-            <a:noFill/>
-          </a:ln>
-          <a:effectLst/>
-        </p:spPr>
-        <p:style>
-          <a:lnRef idx="1">
-            <a:schemeClr val="accent1"/>
-          </a:lnRef>
-          <a:fillRef idx="3">
-            <a:schemeClr val="accent1"/>
-          </a:fillRef>
-          <a:effectRef idx="2">
-            <a:schemeClr val="accent1"/>
-          </a:effectRef>
-          <a:fontRef idx="minor">
-            <a:schemeClr val="lt1"/>
-          </a:fontRef>
-        </p:style>
-        <p:txBody>
-          <a:bodyPr rtlCol="0" anchor="ctr"/>
-          <a:lstStyle/>
-          <a:p>
-            <a:pPr algn="ctr"/>
-          </a:p>
-        </p:txBody>
-      </p:sp>
-      <p:sp>
-        <p:nvSpPr>
-          <p:cNvPr id="8" name="TextBox 7"/>
+              <a:t>استئصال منضبط</a:t>
+            </a:r>
+          </a:p>
+        </p:txBody>
+      </p:sp>
+      <p:sp>
+        <p:nvSpPr>
+          <p:cNvPr id="7" name="TextBox 6"/>
           <p:cNvSpPr txBox="1"/>
           <p:nvPr/>
         </p:nvSpPr>
         <p:spPr>
           <a:xfrm>
-            <a:off x="6370167" y="3044952"/>
-            <a:ext cx="4769967" cy="758952"/>
+            <a:off x="6370167" y="2880360"/>
+            <a:ext cx="5135727" cy="982980"/>
           </a:xfrm>
           <a:prstGeom prst="rect">
             <a:avLst/>
@@ -15372,14 +15709,14 @@
           <a:noFill/>
         </p:spPr>
         <p:txBody>
-          <a:bodyPr wrap="square" lIns="45720" rIns="45720" tIns="27432" bIns="27432" anchor="ctr">
+          <a:bodyPr wrap="square" lIns="45720" rIns="45720" tIns="27432" bIns="27432" anchor="t">
             <a:spAutoFit/>
           </a:bodyPr>
           <a:lstStyle/>
           <a:p>
             <a:pPr rtl="1" algn="r">
               <a:lnSpc>
-                <a:spcPct val="105000"/>
+                <a:spcPct val="115000"/>
               </a:lnSpc>
               <a:spcBef>
                 <a:spcPts val="0"/>
@@ -15391,296 +15728,26 @@
             <a:r>
               <a:rPr sz="2000" b="0" i="0" lang="ar-SA">
                 <a:solidFill>
-                  <a:srgbClr val="134E4A"/>
-                </a:solidFill>
-                <a:latin typeface="Arial"/>
-                <a:cs typeface="Arial"/>
-              </a:rPr>
-              <a:t>تقييم دون اتصال: لا دراسة مستخدمين ولا ادعاء أثر تعليمي</a:t>
-            </a:r>
-          </a:p>
-        </p:txBody>
-      </p:sp>
-      <p:sp>
-        <p:nvSpPr>
-          <p:cNvPr id="9" name="نقطة"/>
+                  <a:srgbClr val="475569"/>
+                </a:solidFill>
+                <a:latin typeface="Arial"/>
+                <a:cs typeface="Arial"/>
+              </a:rPr>
+              <a:t>اختبار قيمة ترجيح الإشارات بعائلة متداخلة من أربعة مستويات</a:t>
+            </a:r>
+          </a:p>
+        </p:txBody>
+      </p:sp>
+      <p:sp>
+        <p:nvSpPr>
+          <p:cNvPr id="8" name="بطاقة"/>
           <p:cNvSpPr/>
           <p:nvPr/>
         </p:nvSpPr>
         <p:spPr>
           <a:xfrm>
-            <a:off x="11259007" y="4101084"/>
-            <a:ext cx="164592" cy="164592"/>
-          </a:xfrm>
-          <a:prstGeom prst="ellipse">
-            <a:avLst/>
-          </a:prstGeom>
-          <a:solidFill>
-            <a:srgbClr val="B45309"/>
-          </a:solidFill>
-          <a:ln>
-            <a:noFill/>
-          </a:ln>
-          <a:effectLst/>
-        </p:spPr>
-        <p:style>
-          <a:lnRef idx="1">
-            <a:schemeClr val="accent1"/>
-          </a:lnRef>
-          <a:fillRef idx="3">
-            <a:schemeClr val="accent1"/>
-          </a:fillRef>
-          <a:effectRef idx="2">
-            <a:schemeClr val="accent1"/>
-          </a:effectRef>
-          <a:fontRef idx="minor">
-            <a:schemeClr val="lt1"/>
-          </a:fontRef>
-        </p:style>
-        <p:txBody>
-          <a:bodyPr rtlCol="0" anchor="ctr"/>
-          <a:lstStyle/>
-          <a:p>
-            <a:pPr algn="ctr"/>
-          </a:p>
-        </p:txBody>
-      </p:sp>
-      <p:sp>
-        <p:nvSpPr>
-          <p:cNvPr id="10" name="TextBox 9"/>
-          <p:cNvSpPr txBox="1"/>
-          <p:nvPr/>
-        </p:nvSpPr>
-        <p:spPr>
-          <a:xfrm>
-            <a:off x="6370167" y="3803904"/>
-            <a:ext cx="4769967" cy="758952"/>
-          </a:xfrm>
-          <a:prstGeom prst="rect">
-            <a:avLst/>
-          </a:prstGeom>
-          <a:noFill/>
-        </p:spPr>
-        <p:txBody>
-          <a:bodyPr wrap="square" lIns="45720" rIns="45720" tIns="27432" bIns="27432" anchor="ctr">
-            <a:spAutoFit/>
-          </a:bodyPr>
-          <a:lstStyle/>
-          <a:p>
-            <a:pPr rtl="1" algn="r">
-              <a:lnSpc>
-                <a:spcPct val="105000"/>
-              </a:lnSpc>
-              <a:spcBef>
-                <a:spcPts val="0"/>
-              </a:spcBef>
-              <a:spcAft>
-                <a:spcPts val="0"/>
-              </a:spcAft>
-            </a:pPr>
-            <a:r>
-              <a:rPr sz="2000" b="0" i="0" lang="ar-SA">
-                <a:solidFill>
-                  <a:srgbClr val="134E4A"/>
-                </a:solidFill>
-                <a:latin typeface="Arial"/>
-                <a:cs typeface="Arial"/>
-              </a:rPr>
-              <a:t>سجلات بدقة يوم: لا ترتيب داخل اليوم</a:t>
-            </a:r>
-          </a:p>
-        </p:txBody>
-      </p:sp>
-      <p:sp>
-        <p:nvSpPr>
-          <p:cNvPr id="11" name="نقطة"/>
-          <p:cNvSpPr/>
-          <p:nvPr/>
-        </p:nvSpPr>
-        <p:spPr>
-          <a:xfrm>
-            <a:off x="11259007" y="4860036"/>
-            <a:ext cx="164592" cy="164592"/>
-          </a:xfrm>
-          <a:prstGeom prst="ellipse">
-            <a:avLst/>
-          </a:prstGeom>
-          <a:solidFill>
-            <a:srgbClr val="B45309"/>
-          </a:solidFill>
-          <a:ln>
-            <a:noFill/>
-          </a:ln>
-          <a:effectLst/>
-        </p:spPr>
-        <p:style>
-          <a:lnRef idx="1">
-            <a:schemeClr val="accent1"/>
-          </a:lnRef>
-          <a:fillRef idx="3">
-            <a:schemeClr val="accent1"/>
-          </a:fillRef>
-          <a:effectRef idx="2">
-            <a:schemeClr val="accent1"/>
-          </a:effectRef>
-          <a:fontRef idx="minor">
-            <a:schemeClr val="lt1"/>
-          </a:fontRef>
-        </p:style>
-        <p:txBody>
-          <a:bodyPr rtlCol="0" anchor="ctr"/>
-          <a:lstStyle/>
-          <a:p>
-            <a:pPr algn="ctr"/>
-          </a:p>
-        </p:txBody>
-      </p:sp>
-      <p:sp>
-        <p:nvSpPr>
-          <p:cNvPr id="12" name="TextBox 11"/>
-          <p:cNvSpPr txBox="1"/>
-          <p:nvPr/>
-        </p:nvSpPr>
-        <p:spPr>
-          <a:xfrm>
-            <a:off x="6370167" y="4562856"/>
-            <a:ext cx="4769967" cy="758952"/>
-          </a:xfrm>
-          <a:prstGeom prst="rect">
-            <a:avLst/>
-          </a:prstGeom>
-          <a:noFill/>
-        </p:spPr>
-        <p:txBody>
-          <a:bodyPr wrap="square" lIns="45720" rIns="45720" tIns="27432" bIns="27432" anchor="ctr">
-            <a:spAutoFit/>
-          </a:bodyPr>
-          <a:lstStyle/>
-          <a:p>
-            <a:pPr rtl="1" algn="r">
-              <a:lnSpc>
-                <a:spcPct val="105000"/>
-              </a:lnSpc>
-              <a:spcBef>
-                <a:spcPts val="0"/>
-              </a:spcBef>
-              <a:spcAft>
-                <a:spcPts val="0"/>
-              </a:spcAft>
-            </a:pPr>
-            <a:r>
-              <a:rPr sz="2000" b="0" i="0" lang="ar-SA">
-                <a:solidFill>
-                  <a:srgbClr val="134E4A"/>
-                </a:solidFill>
-                <a:latin typeface="Arial"/>
-                <a:cs typeface="Arial"/>
-              </a:rPr>
-              <a:t>numpy فقط: GRU بطبقة واحدة</a:t>
-            </a:r>
-          </a:p>
-        </p:txBody>
-      </p:sp>
-      <p:sp>
-        <p:nvSpPr>
-          <p:cNvPr id="13" name="نقطة"/>
-          <p:cNvSpPr/>
-          <p:nvPr/>
-        </p:nvSpPr>
-        <p:spPr>
-          <a:xfrm>
-            <a:off x="11259007" y="5618988"/>
-            <a:ext cx="164592" cy="164592"/>
-          </a:xfrm>
-          <a:prstGeom prst="ellipse">
-            <a:avLst/>
-          </a:prstGeom>
-          <a:solidFill>
-            <a:srgbClr val="B45309"/>
-          </a:solidFill>
-          <a:ln>
-            <a:noFill/>
-          </a:ln>
-          <a:effectLst/>
-        </p:spPr>
-        <p:style>
-          <a:lnRef idx="1">
-            <a:schemeClr val="accent1"/>
-          </a:lnRef>
-          <a:fillRef idx="3">
-            <a:schemeClr val="accent1"/>
-          </a:fillRef>
-          <a:effectRef idx="2">
-            <a:schemeClr val="accent1"/>
-          </a:effectRef>
-          <a:fontRef idx="minor">
-            <a:schemeClr val="lt1"/>
-          </a:fontRef>
-        </p:style>
-        <p:txBody>
-          <a:bodyPr rtlCol="0" anchor="ctr"/>
-          <a:lstStyle/>
-          <a:p>
-            <a:pPr algn="ctr"/>
-          </a:p>
-        </p:txBody>
-      </p:sp>
-      <p:sp>
-        <p:nvSpPr>
-          <p:cNvPr id="14" name="TextBox 13"/>
-          <p:cNvSpPr txBox="1"/>
-          <p:nvPr/>
-        </p:nvSpPr>
-        <p:spPr>
-          <a:xfrm>
-            <a:off x="6370167" y="5321808"/>
-            <a:ext cx="4769967" cy="758952"/>
-          </a:xfrm>
-          <a:prstGeom prst="rect">
-            <a:avLst/>
-          </a:prstGeom>
-          <a:noFill/>
-        </p:spPr>
-        <p:txBody>
-          <a:bodyPr wrap="square" lIns="45720" rIns="45720" tIns="27432" bIns="27432" anchor="ctr">
-            <a:spAutoFit/>
-          </a:bodyPr>
-          <a:lstStyle/>
-          <a:p>
-            <a:pPr rtl="1" algn="r">
-              <a:lnSpc>
-                <a:spcPct val="105000"/>
-              </a:lnSpc>
-              <a:spcBef>
-                <a:spcPts val="0"/>
-              </a:spcBef>
-              <a:spcAft>
-                <a:spcPts val="0"/>
-              </a:spcAft>
-            </a:pPr>
-            <a:r>
-              <a:rPr sz="2000" b="0" i="0" lang="ar-SA">
-                <a:solidFill>
-                  <a:srgbClr val="134E4A"/>
-                </a:solidFill>
-                <a:latin typeface="Arial"/>
-                <a:cs typeface="Arial"/>
-              </a:rPr>
-              <a:t>قراءة معرّفات 2014 مقصورة على ترشيح تدريب مصنِّفات الخطر (2013)</a:t>
-            </a:r>
-          </a:p>
-        </p:txBody>
-      </p:sp>
-      <p:sp>
-        <p:nvSpPr>
-          <p:cNvPr id="15" name="عمود"/>
-          <p:cNvSpPr/>
-          <p:nvPr/>
-        </p:nvSpPr>
-        <p:spPr>
-          <a:xfrm>
-            <a:off x="548640" y="1463040"/>
-            <a:ext cx="5410047" cy="4709160"/>
+            <a:off x="548640" y="2011680"/>
+            <a:ext cx="5410047" cy="1943100"/>
           </a:xfrm>
           <a:prstGeom prst="roundRect">
             <a:avLst>
@@ -15721,18 +15788,18 @@
       </p:sp>
       <p:sp>
         <p:nvSpPr>
-          <p:cNvPr id="16" name="عنوان العمود"/>
+          <p:cNvPr id="9" name="رقم"/>
           <p:cNvSpPr/>
           <p:nvPr/>
         </p:nvSpPr>
         <p:spPr>
           <a:xfrm>
-            <a:off x="548640" y="1463040"/>
-            <a:ext cx="5410047" cy="685800"/>
+            <a:off x="5272887" y="2194560"/>
+            <a:ext cx="502920" cy="502920"/>
           </a:xfrm>
           <a:prstGeom prst="roundRect">
             <a:avLst>
-              <a:gd name="adj" fmla="val 20000"/>
+              <a:gd name="adj" fmla="val 50000"/>
             </a:avLst>
           </a:prstGeom>
           <a:solidFill>
@@ -15758,42 +15825,138 @@
           </a:fontRef>
         </p:style>
         <p:txBody>
-          <a:bodyPr rtlCol="0" anchor="ctr" wrap="square" lIns="54864" rIns="182880" tIns="18288" bIns="18288"/>
-          <a:lstStyle/>
-          <a:p>
-            <a:pPr algn="r" rtl="1"/>
-            <a:r>
-              <a:rPr sz="2000" b="1" i="0" lang="ar-SA">
+          <a:bodyPr rtlCol="0" anchor="ctr" wrap="square" lIns="54864" rIns="54864" tIns="18288" bIns="18288"/>
+          <a:lstStyle/>
+          <a:p>
+            <a:pPr algn="ctr" rtl="1"/>
+            <a:r>
+              <a:rPr sz="1600" b="1" i="0" lang="ar-SA">
                 <a:solidFill>
                   <a:srgbClr val="FFFFFF"/>
                 </a:solidFill>
                 <a:latin typeface="Arial"/>
                 <a:cs typeface="Arial"/>
               </a:rPr>
-              <a:t>العمل المستقبلي</a:t>
-            </a:r>
-          </a:p>
-        </p:txBody>
-      </p:sp>
-      <p:sp>
-        <p:nvSpPr>
-          <p:cNvPr id="17" name="نقطة"/>
+              <a:t>2</a:t>
+            </a:r>
+          </a:p>
+        </p:txBody>
+      </p:sp>
+      <p:sp>
+        <p:nvSpPr>
+          <p:cNvPr id="10" name="TextBox 9"/>
+          <p:cNvSpPr txBox="1"/>
+          <p:nvPr/>
+        </p:nvSpPr>
+        <p:spPr>
+          <a:xfrm>
+            <a:off x="685800" y="2121408"/>
+            <a:ext cx="4495647" cy="685800"/>
+          </a:xfrm>
+          <a:prstGeom prst="rect">
+            <a:avLst/>
+          </a:prstGeom>
+          <a:noFill/>
+        </p:spPr>
+        <p:txBody>
+          <a:bodyPr wrap="square" lIns="45720" rIns="45720" tIns="27432" bIns="27432" anchor="ctr">
+            <a:spAutoFit/>
+          </a:bodyPr>
+          <a:lstStyle/>
+          <a:p>
+            <a:pPr rtl="1" algn="r">
+              <a:lnSpc>
+                <a:spcPct val="100000"/>
+              </a:lnSpc>
+              <a:spcBef>
+                <a:spcPts val="0"/>
+              </a:spcBef>
+              <a:spcAft>
+                <a:spcPts val="0"/>
+              </a:spcAft>
+            </a:pPr>
+            <a:r>
+              <a:rPr sz="2400" b="1" i="0" lang="ar-SA">
+                <a:solidFill>
+                  <a:srgbClr val="134E4A"/>
+                </a:solidFill>
+                <a:latin typeface="Arial"/>
+                <a:cs typeface="Arial"/>
+              </a:rPr>
+              <a:t>بروتوكول مسجَّل مسبقاً</a:t>
+            </a:r>
+          </a:p>
+        </p:txBody>
+      </p:sp>
+      <p:sp>
+        <p:nvSpPr>
+          <p:cNvPr id="11" name="TextBox 10"/>
+          <p:cNvSpPr txBox="1"/>
+          <p:nvPr/>
+        </p:nvSpPr>
+        <p:spPr>
+          <a:xfrm>
+            <a:off x="685800" y="2880360"/>
+            <a:ext cx="5135727" cy="982980"/>
+          </a:xfrm>
+          <a:prstGeom prst="rect">
+            <a:avLst/>
+          </a:prstGeom>
+          <a:noFill/>
+        </p:spPr>
+        <p:txBody>
+          <a:bodyPr wrap="square" lIns="45720" rIns="45720" tIns="27432" bIns="27432" anchor="t">
+            <a:spAutoFit/>
+          </a:bodyPr>
+          <a:lstStyle/>
+          <a:p>
+            <a:pPr rtl="1" algn="r">
+              <a:lnSpc>
+                <a:spcPct val="115000"/>
+              </a:lnSpc>
+              <a:spcBef>
+                <a:spcPts val="0"/>
+              </a:spcBef>
+              <a:spcAft>
+                <a:spcPts val="0"/>
+              </a:spcAft>
+            </a:pPr>
+            <a:r>
+              <a:rPr sz="2000" b="0" i="0" lang="ar-SA">
+                <a:solidFill>
+                  <a:srgbClr val="475569"/>
+                </a:solidFill>
+                <a:latin typeface="Arial"/>
+                <a:cs typeface="Arial"/>
+              </a:rPr>
+              <a:t>تقسيم زمني وكتالوج كامل وعشرة خطوط أساس وإحصاء عنقودي</a:t>
+            </a:r>
+          </a:p>
+        </p:txBody>
+      </p:sp>
+      <p:sp>
+        <p:nvSpPr>
+          <p:cNvPr id="12" name="بطاقة"/>
           <p:cNvSpPr/>
           <p:nvPr/>
         </p:nvSpPr>
         <p:spPr>
           <a:xfrm>
-            <a:off x="5574639" y="2678049"/>
-            <a:ext cx="164592" cy="164592"/>
-          </a:xfrm>
-          <a:prstGeom prst="ellipse">
-            <a:avLst/>
+            <a:off x="6233007" y="4229100"/>
+            <a:ext cx="5410047" cy="1943100"/>
+          </a:xfrm>
+          <a:prstGeom prst="roundRect">
+            <a:avLst>
+              <a:gd name="adj" fmla="val 6000"/>
+            </a:avLst>
           </a:prstGeom>
           <a:solidFill>
-            <a:srgbClr val="B45309"/>
+            <a:srgbClr val="FFFFFF"/>
           </a:solidFill>
-          <a:ln>
-            <a:noFill/>
+          <a:ln w="12700">
+            <a:solidFill>
+              <a:srgbClr val="CBD5E1"/>
+            </a:solidFill>
           </a:ln>
           <a:effectLst/>
         </p:spPr>
@@ -15821,330 +15984,14 @@
       </p:sp>
       <p:sp>
         <p:nvSpPr>
-          <p:cNvPr id="18" name="TextBox 17"/>
-          <p:cNvSpPr txBox="1"/>
-          <p:nvPr/>
-        </p:nvSpPr>
-        <p:spPr>
-          <a:xfrm>
-            <a:off x="685800" y="2286000"/>
-            <a:ext cx="4769967" cy="948690"/>
-          </a:xfrm>
-          <a:prstGeom prst="rect">
-            <a:avLst/>
-          </a:prstGeom>
-          <a:noFill/>
-        </p:spPr>
-        <p:txBody>
-          <a:bodyPr wrap="square" lIns="45720" rIns="45720" tIns="27432" bIns="27432" anchor="ctr">
-            <a:spAutoFit/>
-          </a:bodyPr>
-          <a:lstStyle/>
-          <a:p>
-            <a:pPr rtl="1" algn="r">
-              <a:lnSpc>
-                <a:spcPct val="105000"/>
-              </a:lnSpc>
-              <a:spcBef>
-                <a:spcPts val="0"/>
-              </a:spcBef>
-              <a:spcAft>
-                <a:spcPts val="0"/>
-              </a:spcAft>
-            </a:pPr>
-            <a:r>
-              <a:rPr sz="2000" b="0" i="0" lang="ar-SA">
-                <a:solidFill>
-                  <a:srgbClr val="134E4A"/>
-                </a:solidFill>
-                <a:latin typeface="Arial"/>
-                <a:cs typeface="Arial"/>
-              </a:rPr>
-              <a:t>تجربة حية ودراسة مستخدمين للتفسيرات</a:t>
-            </a:r>
-          </a:p>
-        </p:txBody>
-      </p:sp>
-      <p:sp>
-        <p:nvSpPr>
-          <p:cNvPr id="19" name="نقطة"/>
+          <p:cNvPr id="13" name="رقم"/>
           <p:cNvSpPr/>
           <p:nvPr/>
         </p:nvSpPr>
         <p:spPr>
           <a:xfrm>
-            <a:off x="5574639" y="3626739"/>
-            <a:ext cx="164592" cy="164592"/>
-          </a:xfrm>
-          <a:prstGeom prst="ellipse">
-            <a:avLst/>
-          </a:prstGeom>
-          <a:solidFill>
-            <a:srgbClr val="B45309"/>
-          </a:solidFill>
-          <a:ln>
-            <a:noFill/>
-          </a:ln>
-          <a:effectLst/>
-        </p:spPr>
-        <p:style>
-          <a:lnRef idx="1">
-            <a:schemeClr val="accent1"/>
-          </a:lnRef>
-          <a:fillRef idx="3">
-            <a:schemeClr val="accent1"/>
-          </a:fillRef>
-          <a:effectRef idx="2">
-            <a:schemeClr val="accent1"/>
-          </a:effectRef>
-          <a:fontRef idx="minor">
-            <a:schemeClr val="lt1"/>
-          </a:fontRef>
-        </p:style>
-        <p:txBody>
-          <a:bodyPr rtlCol="0" anchor="ctr"/>
-          <a:lstStyle/>
-          <a:p>
-            <a:pPr algn="ctr"/>
-          </a:p>
-        </p:txBody>
-      </p:sp>
-      <p:sp>
-        <p:nvSpPr>
-          <p:cNvPr id="20" name="TextBox 19"/>
-          <p:cNvSpPr txBox="1"/>
-          <p:nvPr/>
-        </p:nvSpPr>
-        <p:spPr>
-          <a:xfrm>
-            <a:off x="685800" y="3234690"/>
-            <a:ext cx="4769967" cy="948690"/>
-          </a:xfrm>
-          <a:prstGeom prst="rect">
-            <a:avLst/>
-          </a:prstGeom>
-          <a:noFill/>
-        </p:spPr>
-        <p:txBody>
-          <a:bodyPr wrap="square" lIns="45720" rIns="45720" tIns="27432" bIns="27432" anchor="ctr">
-            <a:spAutoFit/>
-          </a:bodyPr>
-          <a:lstStyle/>
-          <a:p>
-            <a:pPr rtl="1" algn="r">
-              <a:lnSpc>
-                <a:spcPct val="105000"/>
-              </a:lnSpc>
-              <a:spcBef>
-                <a:spcPts val="0"/>
-              </a:spcBef>
-              <a:spcAft>
-                <a:spcPts val="0"/>
-              </a:spcAft>
-            </a:pPr>
-            <a:r>
-              <a:rPr sz="2000" b="0" i="0" lang="ar-SA">
-                <a:solidFill>
-                  <a:srgbClr val="134E4A"/>
-                </a:solidFill>
-                <a:latin typeface="Arial"/>
-                <a:cs typeface="Arial"/>
-              </a:rPr>
-              <a:t>إعادة البروتوكول على سجلات الجامعة الافتراضية السورية</a:t>
-            </a:r>
-          </a:p>
-        </p:txBody>
-      </p:sp>
-      <p:sp>
-        <p:nvSpPr>
-          <p:cNvPr id="21" name="نقطة"/>
-          <p:cNvSpPr/>
-          <p:nvPr/>
-        </p:nvSpPr>
-        <p:spPr>
-          <a:xfrm>
-            <a:off x="5574639" y="4575429"/>
-            <a:ext cx="164592" cy="164592"/>
-          </a:xfrm>
-          <a:prstGeom prst="ellipse">
-            <a:avLst/>
-          </a:prstGeom>
-          <a:solidFill>
-            <a:srgbClr val="B45309"/>
-          </a:solidFill>
-          <a:ln>
-            <a:noFill/>
-          </a:ln>
-          <a:effectLst/>
-        </p:spPr>
-        <p:style>
-          <a:lnRef idx="1">
-            <a:schemeClr val="accent1"/>
-          </a:lnRef>
-          <a:fillRef idx="3">
-            <a:schemeClr val="accent1"/>
-          </a:fillRef>
-          <a:effectRef idx="2">
-            <a:schemeClr val="accent1"/>
-          </a:effectRef>
-          <a:fontRef idx="minor">
-            <a:schemeClr val="lt1"/>
-          </a:fontRef>
-        </p:style>
-        <p:txBody>
-          <a:bodyPr rtlCol="0" anchor="ctr"/>
-          <a:lstStyle/>
-          <a:p>
-            <a:pPr algn="ctr"/>
-          </a:p>
-        </p:txBody>
-      </p:sp>
-      <p:sp>
-        <p:nvSpPr>
-          <p:cNvPr id="22" name="TextBox 21"/>
-          <p:cNvSpPr txBox="1"/>
-          <p:nvPr/>
-        </p:nvSpPr>
-        <p:spPr>
-          <a:xfrm>
-            <a:off x="685800" y="4183380"/>
-            <a:ext cx="4769967" cy="948690"/>
-          </a:xfrm>
-          <a:prstGeom prst="rect">
-            <a:avLst/>
-          </a:prstGeom>
-          <a:noFill/>
-        </p:spPr>
-        <p:txBody>
-          <a:bodyPr wrap="square" lIns="45720" rIns="45720" tIns="27432" bIns="27432" anchor="ctr">
-            <a:spAutoFit/>
-          </a:bodyPr>
-          <a:lstStyle/>
-          <a:p>
-            <a:pPr rtl="1" algn="r">
-              <a:lnSpc>
-                <a:spcPct val="105000"/>
-              </a:lnSpc>
-              <a:spcBef>
-                <a:spcPts val="0"/>
-              </a:spcBef>
-              <a:spcAft>
-                <a:spcPts val="0"/>
-              </a:spcAft>
-            </a:pPr>
-            <a:r>
-              <a:rPr sz="2000" b="0" i="0" lang="ar-SA">
-                <a:solidFill>
-                  <a:srgbClr val="134E4A"/>
-                </a:solidFill>
-                <a:latin typeface="Arial"/>
-                <a:cs typeface="Arial"/>
-              </a:rPr>
-              <a:t>بيانات بوصف نصي للموارد لتفعيل المحتوى</a:t>
-            </a:r>
-          </a:p>
-        </p:txBody>
-      </p:sp>
-      <p:sp>
-        <p:nvSpPr>
-          <p:cNvPr id="23" name="نقطة"/>
-          <p:cNvSpPr/>
-          <p:nvPr/>
-        </p:nvSpPr>
-        <p:spPr>
-          <a:xfrm>
-            <a:off x="5574639" y="5524119"/>
-            <a:ext cx="164592" cy="164592"/>
-          </a:xfrm>
-          <a:prstGeom prst="ellipse">
-            <a:avLst/>
-          </a:prstGeom>
-          <a:solidFill>
-            <a:srgbClr val="B45309"/>
-          </a:solidFill>
-          <a:ln>
-            <a:noFill/>
-          </a:ln>
-          <a:effectLst/>
-        </p:spPr>
-        <p:style>
-          <a:lnRef idx="1">
-            <a:schemeClr val="accent1"/>
-          </a:lnRef>
-          <a:fillRef idx="3">
-            <a:schemeClr val="accent1"/>
-          </a:fillRef>
-          <a:effectRef idx="2">
-            <a:schemeClr val="accent1"/>
-          </a:effectRef>
-          <a:fontRef idx="minor">
-            <a:schemeClr val="lt1"/>
-          </a:fontRef>
-        </p:style>
-        <p:txBody>
-          <a:bodyPr rtlCol="0" anchor="ctr"/>
-          <a:lstStyle/>
-          <a:p>
-            <a:pPr algn="ctr"/>
-          </a:p>
-        </p:txBody>
-      </p:sp>
-      <p:sp>
-        <p:nvSpPr>
-          <p:cNvPr id="24" name="TextBox 23"/>
-          <p:cNvSpPr txBox="1"/>
-          <p:nvPr/>
-        </p:nvSpPr>
-        <p:spPr>
-          <a:xfrm>
-            <a:off x="685800" y="5132070"/>
-            <a:ext cx="4769967" cy="948690"/>
-          </a:xfrm>
-          <a:prstGeom prst="rect">
-            <a:avLst/>
-          </a:prstGeom>
-          <a:noFill/>
-        </p:spPr>
-        <p:txBody>
-          <a:bodyPr wrap="square" lIns="45720" rIns="45720" tIns="27432" bIns="27432" anchor="ctr">
-            <a:spAutoFit/>
-          </a:bodyPr>
-          <a:lstStyle/>
-          <a:p>
-            <a:pPr rtl="1" algn="r">
-              <a:lnSpc>
-                <a:spcPct val="105000"/>
-              </a:lnSpc>
-              <a:spcBef>
-                <a:spcPts val="0"/>
-              </a:spcBef>
-              <a:spcAft>
-                <a:spcPts val="0"/>
-              </a:spcAft>
-            </a:pPr>
-            <a:r>
-              <a:rPr sz="2000" b="0" i="0" lang="ar-SA">
-                <a:solidFill>
-                  <a:srgbClr val="134E4A"/>
-                </a:solidFill>
-                <a:latin typeface="Arial"/>
-                <a:cs typeface="Arial"/>
-              </a:rPr>
-              <a:t>نماذج تسلسلية أعمق عند توفر المكتبات</a:t>
-            </a:r>
-          </a:p>
-        </p:txBody>
-      </p:sp>
-      <p:sp>
-        <p:nvSpPr>
-          <p:cNvPr id="25" name="شعار الجامعة"/>
-          <p:cNvSpPr/>
-          <p:nvPr/>
-        </p:nvSpPr>
-        <p:spPr>
-          <a:xfrm>
-            <a:off x="10957255" y="6382512"/>
-            <a:ext cx="685800" cy="292608"/>
+            <a:off x="10957255" y="4411980"/>
+            <a:ext cx="502920" cy="502920"/>
           </a:xfrm>
           <a:prstGeom prst="roundRect">
             <a:avLst>
@@ -16179,28 +16026,28 @@
           <a:p>
             <a:pPr algn="ctr" rtl="1"/>
             <a:r>
-              <a:rPr sz="1200" b="1" i="0" lang="ar-SA">
+              <a:rPr sz="1600" b="1" i="0" lang="ar-SA">
                 <a:solidFill>
                   <a:srgbClr val="FFFFFF"/>
                 </a:solidFill>
                 <a:latin typeface="Arial"/>
                 <a:cs typeface="Arial"/>
               </a:rPr>
-              <a:t>SVU</a:t>
-            </a:r>
-          </a:p>
-        </p:txBody>
-      </p:sp>
-      <p:sp>
-        <p:nvSpPr>
-          <p:cNvPr id="26" name="تذييل"/>
+              <a:t>3</a:t>
+            </a:r>
+          </a:p>
+        </p:txBody>
+      </p:sp>
+      <p:sp>
+        <p:nvSpPr>
+          <p:cNvPr id="14" name="TextBox 13"/>
           <p:cNvSpPr txBox="1"/>
           <p:nvPr/>
         </p:nvSpPr>
         <p:spPr>
           <a:xfrm>
-            <a:off x="5287975" y="6373368"/>
-            <a:ext cx="5577840" cy="310896"/>
+            <a:off x="6370167" y="4338828"/>
+            <a:ext cx="4495647" cy="685800"/>
           </a:xfrm>
           <a:prstGeom prst="rect">
             <a:avLst/>
@@ -16209,6 +16056,52 @@
         </p:spPr>
         <p:txBody>
           <a:bodyPr wrap="square" lIns="45720" rIns="45720" tIns="27432" bIns="27432" anchor="ctr">
+            <a:spAutoFit/>
+          </a:bodyPr>
+          <a:lstStyle/>
+          <a:p>
+            <a:pPr rtl="1" algn="r">
+              <a:lnSpc>
+                <a:spcPct val="100000"/>
+              </a:lnSpc>
+              <a:spcBef>
+                <a:spcPts val="0"/>
+              </a:spcBef>
+              <a:spcAft>
+                <a:spcPts val="0"/>
+              </a:spcAft>
+            </a:pPr>
+            <a:r>
+              <a:rPr sz="2400" b="1" i="0" lang="ar-SA">
+                <a:solidFill>
+                  <a:srgbClr val="134E4A"/>
+                </a:solidFill>
+                <a:latin typeface="Arial"/>
+                <a:cs typeface="Arial"/>
+              </a:rPr>
+              <a:t>نظام قابل لإعادة الإنتاج</a:t>
+            </a:r>
+          </a:p>
+        </p:txBody>
+      </p:sp>
+      <p:sp>
+        <p:nvSpPr>
+          <p:cNvPr id="15" name="TextBox 14"/>
+          <p:cNvSpPr txBox="1"/>
+          <p:nvPr/>
+        </p:nvSpPr>
+        <p:spPr>
+          <a:xfrm>
+            <a:off x="6370167" y="5097780"/>
+            <a:ext cx="5135727" cy="982980"/>
+          </a:xfrm>
+          <a:prstGeom prst="rect">
+            <a:avLst/>
+          </a:prstGeom>
+          <a:noFill/>
+        </p:spPr>
+        <p:txBody>
+          <a:bodyPr wrap="square" lIns="45720" rIns="45720" tIns="27432" bIns="27432" anchor="t">
             <a:spAutoFit/>
           </a:bodyPr>
           <a:lstStyle/>
@@ -16225,9 +16118,307 @@
               </a:spcAft>
             </a:pPr>
             <a:r>
+              <a:rPr sz="2000" b="0" i="0" lang="ar-SA">
+                <a:solidFill>
+                  <a:srgbClr val="475569"/>
+                </a:solidFill>
+                <a:latin typeface="Arial"/>
+                <a:cs typeface="Arial"/>
+              </a:rPr>
+              <a:t>numpy وpandas مع اختبار تحقق لكل تنفيذ، وواجهتان للمتعلم والمدرّس</a:t>
+            </a:r>
+          </a:p>
+        </p:txBody>
+      </p:sp>
+      <p:sp>
+        <p:nvSpPr>
+          <p:cNvPr id="16" name="بطاقة"/>
+          <p:cNvSpPr/>
+          <p:nvPr/>
+        </p:nvSpPr>
+        <p:spPr>
+          <a:xfrm>
+            <a:off x="548640" y="4229100"/>
+            <a:ext cx="5410047" cy="1943100"/>
+          </a:xfrm>
+          <a:prstGeom prst="roundRect">
+            <a:avLst>
+              <a:gd name="adj" fmla="val 6000"/>
+            </a:avLst>
+          </a:prstGeom>
+          <a:solidFill>
+            <a:srgbClr val="FFFFFF"/>
+          </a:solidFill>
+          <a:ln w="12700">
+            <a:solidFill>
+              <a:srgbClr val="CBD5E1"/>
+            </a:solidFill>
+          </a:ln>
+          <a:effectLst/>
+        </p:spPr>
+        <p:style>
+          <a:lnRef idx="1">
+            <a:schemeClr val="accent1"/>
+          </a:lnRef>
+          <a:fillRef idx="3">
+            <a:schemeClr val="accent1"/>
+          </a:fillRef>
+          <a:effectRef idx="2">
+            <a:schemeClr val="accent1"/>
+          </a:effectRef>
+          <a:fontRef idx="minor">
+            <a:schemeClr val="lt1"/>
+          </a:fontRef>
+        </p:style>
+        <p:txBody>
+          <a:bodyPr rtlCol="0" anchor="ctr"/>
+          <a:lstStyle/>
+          <a:p>
+            <a:pPr algn="ctr"/>
+          </a:p>
+        </p:txBody>
+      </p:sp>
+      <p:sp>
+        <p:nvSpPr>
+          <p:cNvPr id="17" name="رقم"/>
+          <p:cNvSpPr/>
+          <p:nvPr/>
+        </p:nvSpPr>
+        <p:spPr>
+          <a:xfrm>
+            <a:off x="5272887" y="4411980"/>
+            <a:ext cx="502920" cy="502920"/>
+          </a:xfrm>
+          <a:prstGeom prst="roundRect">
+            <a:avLst>
+              <a:gd name="adj" fmla="val 50000"/>
+            </a:avLst>
+          </a:prstGeom>
+          <a:solidFill>
+            <a:srgbClr val="0F766E"/>
+          </a:solidFill>
+          <a:ln>
+            <a:noFill/>
+          </a:ln>
+          <a:effectLst/>
+        </p:spPr>
+        <p:style>
+          <a:lnRef idx="1">
+            <a:schemeClr val="accent1"/>
+          </a:lnRef>
+          <a:fillRef idx="3">
+            <a:schemeClr val="accent1"/>
+          </a:fillRef>
+          <a:effectRef idx="2">
+            <a:schemeClr val="accent1"/>
+          </a:effectRef>
+          <a:fontRef idx="minor">
+            <a:schemeClr val="lt1"/>
+          </a:fontRef>
+        </p:style>
+        <p:txBody>
+          <a:bodyPr rtlCol="0" anchor="ctr" wrap="square" lIns="54864" rIns="54864" tIns="18288" bIns="18288"/>
+          <a:lstStyle/>
+          <a:p>
+            <a:pPr algn="ctr" rtl="1"/>
+            <a:r>
+              <a:rPr sz="1600" b="1" i="0" lang="ar-SA">
+                <a:solidFill>
+                  <a:srgbClr val="FFFFFF"/>
+                </a:solidFill>
+                <a:latin typeface="Arial"/>
+                <a:cs typeface="Arial"/>
+              </a:rPr>
+              <a:t>4</a:t>
+            </a:r>
+          </a:p>
+        </p:txBody>
+      </p:sp>
+      <p:sp>
+        <p:nvSpPr>
+          <p:cNvPr id="18" name="TextBox 17"/>
+          <p:cNvSpPr txBox="1"/>
+          <p:nvPr/>
+        </p:nvSpPr>
+        <p:spPr>
+          <a:xfrm>
+            <a:off x="685800" y="4338828"/>
+            <a:ext cx="4495647" cy="685800"/>
+          </a:xfrm>
+          <a:prstGeom prst="rect">
+            <a:avLst/>
+          </a:prstGeom>
+          <a:noFill/>
+        </p:spPr>
+        <p:txBody>
+          <a:bodyPr wrap="square" lIns="45720" rIns="45720" tIns="27432" bIns="27432" anchor="ctr">
+            <a:spAutoFit/>
+          </a:bodyPr>
+          <a:lstStyle/>
+          <a:p>
+            <a:pPr rtl="1" algn="r">
+              <a:lnSpc>
+                <a:spcPct val="100000"/>
+              </a:lnSpc>
+              <a:spcBef>
+                <a:spcPts val="0"/>
+              </a:spcBef>
+              <a:spcAft>
+                <a:spcPts val="0"/>
+              </a:spcAft>
+            </a:pPr>
+            <a:r>
+              <a:rPr sz="2400" b="1" i="0" lang="ar-SA">
+                <a:solidFill>
+                  <a:srgbClr val="134E4A"/>
+                </a:solidFill>
+                <a:latin typeface="Arial"/>
+                <a:cs typeface="Arial"/>
+              </a:rPr>
+              <a:t>دليل على قوة الشعبية الآنية</a:t>
+            </a:r>
+          </a:p>
+        </p:txBody>
+      </p:sp>
+      <p:sp>
+        <p:nvSpPr>
+          <p:cNvPr id="19" name="TextBox 18"/>
+          <p:cNvSpPr txBox="1"/>
+          <p:nvPr/>
+        </p:nvSpPr>
+        <p:spPr>
+          <a:xfrm>
+            <a:off x="685800" y="5097780"/>
+            <a:ext cx="5135727" cy="982980"/>
+          </a:xfrm>
+          <a:prstGeom prst="rect">
+            <a:avLst/>
+          </a:prstGeom>
+          <a:noFill/>
+        </p:spPr>
+        <p:txBody>
+          <a:bodyPr wrap="square" lIns="45720" rIns="45720" tIns="27432" bIns="27432" anchor="t">
+            <a:spAutoFit/>
+          </a:bodyPr>
+          <a:lstStyle/>
+          <a:p>
+            <a:pPr rtl="1" algn="r">
+              <a:lnSpc>
+                <a:spcPct val="115000"/>
+              </a:lnSpc>
+              <a:spcBef>
+                <a:spcPts val="0"/>
+              </a:spcBef>
+              <a:spcAft>
+                <a:spcPts val="0"/>
+              </a:spcAft>
+            </a:pPr>
+            <a:r>
+              <a:rPr sz="2000" b="0" i="0" lang="ar-SA">
+                <a:solidFill>
+                  <a:srgbClr val="475569"/>
+                </a:solidFill>
+                <a:latin typeface="Arial"/>
+                <a:cs typeface="Arial"/>
+              </a:rPr>
+              <a:t>حجم ما يفرضه الجدول الدراسي على الوصول [يُستكمل بنتائج التأكيد]</a:t>
+            </a:r>
+          </a:p>
+        </p:txBody>
+      </p:sp>
+      <p:sp>
+        <p:nvSpPr>
+          <p:cNvPr id="20" name="شعار الجامعة"/>
+          <p:cNvSpPr/>
+          <p:nvPr/>
+        </p:nvSpPr>
+        <p:spPr>
+          <a:xfrm>
+            <a:off x="10957255" y="6382512"/>
+            <a:ext cx="685800" cy="292608"/>
+          </a:xfrm>
+          <a:prstGeom prst="roundRect">
+            <a:avLst>
+              <a:gd name="adj" fmla="val 50000"/>
+            </a:avLst>
+          </a:prstGeom>
+          <a:solidFill>
+            <a:srgbClr val="FFFFFF"/>
+          </a:solidFill>
+          <a:ln>
+            <a:noFill/>
+          </a:ln>
+          <a:effectLst/>
+        </p:spPr>
+        <p:style>
+          <a:lnRef idx="1">
+            <a:schemeClr val="accent1"/>
+          </a:lnRef>
+          <a:fillRef idx="3">
+            <a:schemeClr val="accent1"/>
+          </a:fillRef>
+          <a:effectRef idx="2">
+            <a:schemeClr val="accent1"/>
+          </a:effectRef>
+          <a:fontRef idx="minor">
+            <a:schemeClr val="lt1"/>
+          </a:fontRef>
+        </p:style>
+        <p:txBody>
+          <a:bodyPr rtlCol="0" anchor="ctr" wrap="square" lIns="54864" rIns="54864" tIns="18288" bIns="18288"/>
+          <a:lstStyle/>
+          <a:p>
+            <a:pPr algn="ctr" rtl="1"/>
+            <a:r>
+              <a:rPr sz="1200" b="1" i="0" lang="ar-SA">
+                <a:solidFill>
+                  <a:srgbClr val="134E4A"/>
+                </a:solidFill>
+                <a:latin typeface="Arial"/>
+                <a:cs typeface="Arial"/>
+              </a:rPr>
+              <a:t>SVU</a:t>
+            </a:r>
+          </a:p>
+        </p:txBody>
+      </p:sp>
+      <p:sp>
+        <p:nvSpPr>
+          <p:cNvPr id="21" name="تذييل"/>
+          <p:cNvSpPr txBox="1"/>
+          <p:nvPr/>
+        </p:nvSpPr>
+        <p:spPr>
+          <a:xfrm>
+            <a:off x="5287975" y="6373368"/>
+            <a:ext cx="5577840" cy="310896"/>
+          </a:xfrm>
+          <a:prstGeom prst="rect">
+            <a:avLst/>
+          </a:prstGeom>
+          <a:noFill/>
+        </p:spPr>
+        <p:txBody>
+          <a:bodyPr wrap="square" lIns="45720" rIns="45720" tIns="27432" bIns="27432" anchor="ctr">
+            <a:spAutoFit/>
+          </a:bodyPr>
+          <a:lstStyle/>
+          <a:p>
+            <a:pPr rtl="1" algn="r">
+              <a:lnSpc>
+                <a:spcPct val="115000"/>
+              </a:lnSpc>
+              <a:spcBef>
+                <a:spcPts val="0"/>
+              </a:spcBef>
+              <a:spcAft>
+                <a:spcPts val="0"/>
+              </a:spcAft>
+            </a:pPr>
+            <a:r>
               <a:rPr sz="1200" b="0" i="0" lang="ar-SA">
                 <a:solidFill>
-                  <a:srgbClr val="475569"/>
+                  <a:srgbClr val="A7F3D0"/>
                 </a:solidFill>
                 <a:latin typeface="Arial"/>
                 <a:cs typeface="Arial"/>
@@ -16239,7 +16430,7 @@
       </p:sp>
       <p:sp>
         <p:nvSpPr>
-          <p:cNvPr id="27" name="رقم الشريحة"/>
+          <p:cNvPr id="22" name="رقم الشريحة"/>
           <p:cNvSpPr txBox="1"/>
           <p:nvPr/>
         </p:nvSpPr>
@@ -16263,7 +16454,7 @@
             <a:fld id="{B6F15528-21DE-4FAA-801E-634DDDAF4B2B}" type="slidenum">
               <a:rPr lang="en-US" sz="1200">
                 <a:solidFill>
-                  <a:srgbClr val="475569"/>
+                  <a:srgbClr val="A7F3D0"/>
                 </a:solidFill>
                 <a:latin typeface="Arial"/>
               </a:rPr>
@@ -18077,119 +18268,23 @@
       <p:grpSpPr/>
       <p:sp>
         <p:nvSpPr>
-          <p:cNvPr id="2" name="العنوان"/>
-          <p:cNvSpPr txBox="1"/>
-          <p:nvPr/>
-        </p:nvSpPr>
-        <p:spPr>
-          <a:xfrm>
-            <a:off x="548640" y="347472"/>
-            <a:ext cx="11094415" cy="868680"/>
-          </a:xfrm>
-          <a:prstGeom prst="rect">
-            <a:avLst/>
-          </a:prstGeom>
-          <a:noFill/>
-        </p:spPr>
-        <p:txBody>
-          <a:bodyPr wrap="square" lIns="45720" rIns="45720" tIns="27432" bIns="27432" anchor="ctr">
-            <a:spAutoFit/>
-          </a:bodyPr>
-          <a:lstStyle/>
-          <a:p>
-            <a:pPr rtl="1" algn="r">
-              <a:lnSpc>
-                <a:spcPct val="115000"/>
-              </a:lnSpc>
-              <a:spcBef>
-                <a:spcPts val="0"/>
-              </a:spcBef>
-              <a:spcAft>
-                <a:spcPts val="0"/>
-              </a:spcAft>
-            </a:pPr>
-            <a:r>
-              <a:rPr sz="3000" b="1" i="0" lang="ar-SA">
-                <a:solidFill>
-                  <a:srgbClr val="FFFFFF"/>
-                </a:solidFill>
-                <a:latin typeface="Arial"/>
-                <a:cs typeface="Arial"/>
-              </a:rPr>
-              <a:t>الخاتمة والمساهمات</a:t>
-            </a:r>
-          </a:p>
-        </p:txBody>
-      </p:sp>
-      <p:sp>
-        <p:nvSpPr>
-          <p:cNvPr id="3" name="TextBox 2"/>
-          <p:cNvSpPr txBox="1"/>
-          <p:nvPr/>
-        </p:nvSpPr>
-        <p:spPr>
-          <a:xfrm>
-            <a:off x="548640" y="1417320"/>
-            <a:ext cx="11094415" cy="457200"/>
-          </a:xfrm>
-          <a:prstGeom prst="rect">
-            <a:avLst/>
-          </a:prstGeom>
-          <a:noFill/>
-        </p:spPr>
-        <p:txBody>
-          <a:bodyPr wrap="square" lIns="45720" rIns="45720" tIns="27432" bIns="27432" anchor="ctr">
-            <a:spAutoFit/>
-          </a:bodyPr>
-          <a:lstStyle/>
-          <a:p>
-            <a:pPr rtl="1" algn="r">
-              <a:lnSpc>
-                <a:spcPct val="115000"/>
-              </a:lnSpc>
-              <a:spcBef>
-                <a:spcPts val="0"/>
-              </a:spcBef>
-              <a:spcAft>
-                <a:spcPts val="0"/>
-              </a:spcAft>
-            </a:pPr>
-            <a:r>
-              <a:rPr sz="2000" b="1" i="0" lang="ar-SA">
-                <a:solidFill>
-                  <a:srgbClr val="CCFBF1"/>
-                </a:solidFill>
-                <a:latin typeface="Arial"/>
-                <a:cs typeface="Arial"/>
-              </a:rPr>
-              <a:t>مساهمة تجريبية ومنهجية، لا خوارزمية جديدة</a:t>
-            </a:r>
-          </a:p>
-        </p:txBody>
-      </p:sp>
-      <p:sp>
-        <p:nvSpPr>
-          <p:cNvPr id="4" name="بطاقة"/>
+          <p:cNvPr id="2" name="زخرفة"/>
           <p:cNvSpPr/>
           <p:nvPr/>
         </p:nvSpPr>
         <p:spPr>
           <a:xfrm>
-            <a:off x="6233007" y="2011680"/>
-            <a:ext cx="5410047" cy="1943100"/>
-          </a:xfrm>
-          <a:prstGeom prst="roundRect">
-            <a:avLst>
-              <a:gd name="adj" fmla="val 6000"/>
-            </a:avLst>
+            <a:off x="-2011680" y="3108960"/>
+            <a:ext cx="5669280" cy="5669280"/>
+          </a:xfrm>
+          <a:prstGeom prst="ellipse">
+            <a:avLst/>
           </a:prstGeom>
           <a:solidFill>
-            <a:srgbClr val="FFFFFF"/>
+            <a:srgbClr val="115E59"/>
           </a:solidFill>
-          <a:ln w="12700">
-            <a:solidFill>
-              <a:srgbClr val="CBD5E1"/>
-            </a:solidFill>
+          <a:ln>
+            <a:noFill/>
           </a:ln>
           <a:effectLst/>
         </p:spPr>
@@ -18217,19 +18312,17 @@
       </p:sp>
       <p:sp>
         <p:nvSpPr>
-          <p:cNvPr id="5" name="رقم"/>
+          <p:cNvPr id="3" name="زخرفة"/>
           <p:cNvSpPr/>
           <p:nvPr/>
         </p:nvSpPr>
         <p:spPr>
           <a:xfrm>
-            <a:off x="10957255" y="2194560"/>
-            <a:ext cx="502920" cy="502920"/>
-          </a:xfrm>
-          <a:prstGeom prst="roundRect">
-            <a:avLst>
-              <a:gd name="adj" fmla="val 50000"/>
-            </a:avLst>
+            <a:off x="274320" y="-1463040"/>
+            <a:ext cx="3291840" cy="3291840"/>
+          </a:xfrm>
+          <a:prstGeom prst="ellipse">
+            <a:avLst/>
           </a:prstGeom>
           <a:solidFill>
             <a:srgbClr val="0F766E"/>
@@ -18254,33 +18347,23 @@
           </a:fontRef>
         </p:style>
         <p:txBody>
-          <a:bodyPr rtlCol="0" anchor="ctr" wrap="square" lIns="54864" rIns="54864" tIns="18288" bIns="18288"/>
-          <a:lstStyle/>
-          <a:p>
-            <a:pPr algn="ctr" rtl="1"/>
-            <a:r>
-              <a:rPr sz="1600" b="1" i="0" lang="ar-SA">
-                <a:solidFill>
-                  <a:srgbClr val="FFFFFF"/>
-                </a:solidFill>
-                <a:latin typeface="Arial"/>
-                <a:cs typeface="Arial"/>
-              </a:rPr>
-              <a:t>1</a:t>
-            </a:r>
-          </a:p>
-        </p:txBody>
-      </p:sp>
-      <p:sp>
-        <p:nvSpPr>
-          <p:cNvPr id="6" name="TextBox 5"/>
+          <a:bodyPr rtlCol="0" anchor="ctr"/>
+          <a:lstStyle/>
+          <a:p>
+            <a:pPr algn="ctr"/>
+          </a:p>
+        </p:txBody>
+      </p:sp>
+      <p:sp>
+        <p:nvSpPr>
+          <p:cNvPr id="4" name="العنوان"/>
           <p:cNvSpPr txBox="1"/>
           <p:nvPr/>
         </p:nvSpPr>
         <p:spPr>
           <a:xfrm>
-            <a:off x="6370167" y="2121408"/>
-            <a:ext cx="4495647" cy="685800"/>
+            <a:off x="3474720" y="1554480"/>
+            <a:ext cx="8168335" cy="1280160"/>
           </a:xfrm>
           <a:prstGeom prst="rect">
             <a:avLst/>
@@ -18289,52 +18372,6 @@
         </p:spPr>
         <p:txBody>
           <a:bodyPr wrap="square" lIns="45720" rIns="45720" tIns="27432" bIns="27432" anchor="ctr">
-            <a:spAutoFit/>
-          </a:bodyPr>
-          <a:lstStyle/>
-          <a:p>
-            <a:pPr rtl="1" algn="r">
-              <a:lnSpc>
-                <a:spcPct val="100000"/>
-              </a:lnSpc>
-              <a:spcBef>
-                <a:spcPts val="0"/>
-              </a:spcBef>
-              <a:spcAft>
-                <a:spcPts val="0"/>
-              </a:spcAft>
-            </a:pPr>
-            <a:r>
-              <a:rPr sz="2400" b="1" i="0" lang="ar-SA">
-                <a:solidFill>
-                  <a:srgbClr val="134E4A"/>
-                </a:solidFill>
-                <a:latin typeface="Arial"/>
-                <a:cs typeface="Arial"/>
-              </a:rPr>
-              <a:t>استئصال منضبط</a:t>
-            </a:r>
-          </a:p>
-        </p:txBody>
-      </p:sp>
-      <p:sp>
-        <p:nvSpPr>
-          <p:cNvPr id="7" name="TextBox 6"/>
-          <p:cNvSpPr txBox="1"/>
-          <p:nvPr/>
-        </p:nvSpPr>
-        <p:spPr>
-          <a:xfrm>
-            <a:off x="6370167" y="2880360"/>
-            <a:ext cx="5135727" cy="982980"/>
-          </a:xfrm>
-          <a:prstGeom prst="rect">
-            <a:avLst/>
-          </a:prstGeom>
-          <a:noFill/>
-        </p:spPr>
-        <p:txBody>
-          <a:bodyPr wrap="square" lIns="45720" rIns="45720" tIns="27432" bIns="27432" anchor="t">
             <a:spAutoFit/>
           </a:bodyPr>
           <a:lstStyle/>
@@ -18351,41 +18388,39 @@
               </a:spcAft>
             </a:pPr>
             <a:r>
-              <a:rPr sz="2000" b="0" i="0" lang="ar-SA">
-                <a:solidFill>
-                  <a:srgbClr val="475569"/>
-                </a:solidFill>
-                <a:latin typeface="Arial"/>
-                <a:cs typeface="Arial"/>
-              </a:rPr>
-              <a:t>اختبار قيمة ترجيح الإشارات بعائلة متداخلة من أربعة مستويات</a:t>
-            </a:r>
-          </a:p>
-        </p:txBody>
-      </p:sp>
-      <p:sp>
-        <p:nvSpPr>
-          <p:cNvPr id="8" name="بطاقة"/>
+              <a:rPr sz="5400" b="1" i="0" lang="ar-SA">
+                <a:solidFill>
+                  <a:srgbClr val="FFFFFF"/>
+                </a:solidFill>
+                <a:latin typeface="Arial"/>
+                <a:cs typeface="Arial"/>
+              </a:rPr>
+              <a:t>شكراً لكم</a:t>
+            </a:r>
+          </a:p>
+        </p:txBody>
+      </p:sp>
+      <p:sp>
+        <p:nvSpPr>
+          <p:cNvPr id="5" name="أسئلة"/>
           <p:cNvSpPr/>
           <p:nvPr/>
         </p:nvSpPr>
         <p:spPr>
           <a:xfrm>
-            <a:off x="548640" y="2011680"/>
-            <a:ext cx="5410047" cy="1943100"/>
+            <a:off x="8351215" y="3017520"/>
+            <a:ext cx="3291840" cy="548640"/>
           </a:xfrm>
           <a:prstGeom prst="roundRect">
             <a:avLst>
-              <a:gd name="adj" fmla="val 6000"/>
+              <a:gd name="adj" fmla="val 50000"/>
             </a:avLst>
           </a:prstGeom>
           <a:solidFill>
-            <a:srgbClr val="FFFFFF"/>
+            <a:srgbClr val="B45309"/>
           </a:solidFill>
-          <a:ln w="12700">
-            <a:solidFill>
-              <a:srgbClr val="CBD5E1"/>
-            </a:solidFill>
+          <a:ln>
+            <a:noFill/>
           </a:ln>
           <a:effectLst/>
         </p:spPr>
@@ -18404,125 +18439,33 @@
           </a:fontRef>
         </p:style>
         <p:txBody>
-          <a:bodyPr rtlCol="0" anchor="ctr"/>
-          <a:lstStyle/>
-          <a:p>
-            <a:pPr algn="ctr"/>
-          </a:p>
-        </p:txBody>
-      </p:sp>
-      <p:sp>
-        <p:nvSpPr>
-          <p:cNvPr id="9" name="رقم"/>
-          <p:cNvSpPr/>
-          <p:nvPr/>
-        </p:nvSpPr>
-        <p:spPr>
-          <a:xfrm>
-            <a:off x="5272887" y="2194560"/>
-            <a:ext cx="502920" cy="502920"/>
-          </a:xfrm>
-          <a:prstGeom prst="roundRect">
-            <a:avLst>
-              <a:gd name="adj" fmla="val 50000"/>
-            </a:avLst>
-          </a:prstGeom>
-          <a:solidFill>
-            <a:srgbClr val="0F766E"/>
-          </a:solidFill>
-          <a:ln>
-            <a:noFill/>
-          </a:ln>
-          <a:effectLst/>
-        </p:spPr>
-        <p:style>
-          <a:lnRef idx="1">
-            <a:schemeClr val="accent1"/>
-          </a:lnRef>
-          <a:fillRef idx="3">
-            <a:schemeClr val="accent1"/>
-          </a:fillRef>
-          <a:effectRef idx="2">
-            <a:schemeClr val="accent1"/>
-          </a:effectRef>
-          <a:fontRef idx="minor">
-            <a:schemeClr val="lt1"/>
-          </a:fontRef>
-        </p:style>
-        <p:txBody>
           <a:bodyPr rtlCol="0" anchor="ctr" wrap="square" lIns="54864" rIns="54864" tIns="18288" bIns="18288"/>
           <a:lstStyle/>
           <a:p>
             <a:pPr algn="ctr" rtl="1"/>
             <a:r>
-              <a:rPr sz="1600" b="1" i="0" lang="ar-SA">
+              <a:rPr sz="2400" b="1" i="0" lang="ar-SA">
                 <a:solidFill>
                   <a:srgbClr val="FFFFFF"/>
                 </a:solidFill>
                 <a:latin typeface="Arial"/>
                 <a:cs typeface="Arial"/>
               </a:rPr>
-              <a:t>2</a:t>
-            </a:r>
-          </a:p>
-        </p:txBody>
-      </p:sp>
-      <p:sp>
-        <p:nvSpPr>
-          <p:cNvPr id="10" name="TextBox 9"/>
+              <a:t>الأسئلة والمناقشة</a:t>
+            </a:r>
+          </a:p>
+        </p:txBody>
+      </p:sp>
+      <p:sp>
+        <p:nvSpPr>
+          <p:cNvPr id="6" name="TextBox 5"/>
           <p:cNvSpPr txBox="1"/>
           <p:nvPr/>
         </p:nvSpPr>
         <p:spPr>
           <a:xfrm>
-            <a:off x="685800" y="2121408"/>
-            <a:ext cx="4495647" cy="685800"/>
-          </a:xfrm>
-          <a:prstGeom prst="rect">
-            <a:avLst/>
-          </a:prstGeom>
-          <a:noFill/>
-        </p:spPr>
-        <p:txBody>
-          <a:bodyPr wrap="square" lIns="45720" rIns="45720" tIns="27432" bIns="27432" anchor="ctr">
-            <a:spAutoFit/>
-          </a:bodyPr>
-          <a:lstStyle/>
-          <a:p>
-            <a:pPr rtl="1" algn="r">
-              <a:lnSpc>
-                <a:spcPct val="100000"/>
-              </a:lnSpc>
-              <a:spcBef>
-                <a:spcPts val="0"/>
-              </a:spcBef>
-              <a:spcAft>
-                <a:spcPts val="0"/>
-              </a:spcAft>
-            </a:pPr>
-            <a:r>
-              <a:rPr sz="2400" b="1" i="0" lang="ar-SA">
-                <a:solidFill>
-                  <a:srgbClr val="134E4A"/>
-                </a:solidFill>
-                <a:latin typeface="Arial"/>
-                <a:cs typeface="Arial"/>
-              </a:rPr>
-              <a:t>بروتوكول مسجَّل مسبقاً</a:t>
-            </a:r>
-          </a:p>
-        </p:txBody>
-      </p:sp>
-      <p:sp>
-        <p:nvSpPr>
-          <p:cNvPr id="11" name="TextBox 10"/>
-          <p:cNvSpPr txBox="1"/>
-          <p:nvPr/>
-        </p:nvSpPr>
-        <p:spPr>
-          <a:xfrm>
-            <a:off x="685800" y="2880360"/>
-            <a:ext cx="5135727" cy="982980"/>
+            <a:off x="3474720" y="4114800"/>
+            <a:ext cx="8168335" cy="1280160"/>
           </a:xfrm>
           <a:prstGeom prst="rect">
             <a:avLst/>
@@ -18537,423 +18480,54 @@
           <a:p>
             <a:pPr rtl="1" algn="r">
               <a:lnSpc>
-                <a:spcPct val="115000"/>
+                <a:spcPct val="120000"/>
               </a:lnSpc>
               <a:spcBef>
                 <a:spcPts val="0"/>
               </a:spcBef>
               <a:spcAft>
-                <a:spcPts val="0"/>
+                <a:spcPts val="400"/>
               </a:spcAft>
             </a:pPr>
             <a:r>
-              <a:rPr sz="2000" b="0" i="0" lang="ar-SA">
-                <a:solidFill>
-                  <a:srgbClr val="475569"/>
-                </a:solidFill>
-                <a:latin typeface="Arial"/>
-                <a:cs typeface="Arial"/>
-              </a:rPr>
-              <a:t>تقسيم زمني وكتالوج كامل وعشرة خطوط أساس وإحصاء عنقودي</a:t>
-            </a:r>
-          </a:p>
-        </p:txBody>
-      </p:sp>
-      <p:sp>
-        <p:nvSpPr>
-          <p:cNvPr id="12" name="بطاقة"/>
-          <p:cNvSpPr/>
-          <p:nvPr/>
-        </p:nvSpPr>
-        <p:spPr>
-          <a:xfrm>
-            <a:off x="6233007" y="4229100"/>
-            <a:ext cx="5410047" cy="1943100"/>
-          </a:xfrm>
-          <a:prstGeom prst="roundRect">
-            <a:avLst>
-              <a:gd name="adj" fmla="val 6000"/>
-            </a:avLst>
-          </a:prstGeom>
-          <a:solidFill>
-            <a:srgbClr val="FFFFFF"/>
-          </a:solidFill>
-          <a:ln w="12700">
-            <a:solidFill>
-              <a:srgbClr val="CBD5E1"/>
-            </a:solidFill>
-          </a:ln>
-          <a:effectLst/>
-        </p:spPr>
-        <p:style>
-          <a:lnRef idx="1">
-            <a:schemeClr val="accent1"/>
-          </a:lnRef>
-          <a:fillRef idx="3">
-            <a:schemeClr val="accent1"/>
-          </a:fillRef>
-          <a:effectRef idx="2">
-            <a:schemeClr val="accent1"/>
-          </a:effectRef>
-          <a:fontRef idx="minor">
-            <a:schemeClr val="lt1"/>
-          </a:fontRef>
-        </p:style>
-        <p:txBody>
-          <a:bodyPr rtlCol="0" anchor="ctr"/>
-          <a:lstStyle/>
-          <a:p>
-            <a:pPr algn="ctr"/>
-          </a:p>
-        </p:txBody>
-      </p:sp>
-      <p:sp>
-        <p:nvSpPr>
-          <p:cNvPr id="13" name="رقم"/>
-          <p:cNvSpPr/>
-          <p:nvPr/>
-        </p:nvSpPr>
-        <p:spPr>
-          <a:xfrm>
-            <a:off x="10957255" y="4411980"/>
-            <a:ext cx="502920" cy="502920"/>
-          </a:xfrm>
-          <a:prstGeom prst="roundRect">
-            <a:avLst>
-              <a:gd name="adj" fmla="val 50000"/>
-            </a:avLst>
-          </a:prstGeom>
-          <a:solidFill>
-            <a:srgbClr val="0F766E"/>
-          </a:solidFill>
-          <a:ln>
-            <a:noFill/>
-          </a:ln>
-          <a:effectLst/>
-        </p:spPr>
-        <p:style>
-          <a:lnRef idx="1">
-            <a:schemeClr val="accent1"/>
-          </a:lnRef>
-          <a:fillRef idx="3">
-            <a:schemeClr val="accent1"/>
-          </a:fillRef>
-          <a:effectRef idx="2">
-            <a:schemeClr val="accent1"/>
-          </a:effectRef>
-          <a:fontRef idx="minor">
-            <a:schemeClr val="lt1"/>
-          </a:fontRef>
-        </p:style>
-        <p:txBody>
-          <a:bodyPr rtlCol="0" anchor="ctr" wrap="square" lIns="54864" rIns="54864" tIns="18288" bIns="18288"/>
-          <a:lstStyle/>
-          <a:p>
-            <a:pPr algn="ctr" rtl="1"/>
-            <a:r>
-              <a:rPr sz="1600" b="1" i="0" lang="ar-SA">
-                <a:solidFill>
-                  <a:srgbClr val="FFFFFF"/>
-                </a:solidFill>
-                <a:latin typeface="Arial"/>
-                <a:cs typeface="Arial"/>
-              </a:rPr>
-              <a:t>3</a:t>
-            </a:r>
-          </a:p>
-        </p:txBody>
-      </p:sp>
-      <p:sp>
-        <p:nvSpPr>
-          <p:cNvPr id="14" name="TextBox 13"/>
-          <p:cNvSpPr txBox="1"/>
-          <p:nvPr/>
-        </p:nvSpPr>
-        <p:spPr>
-          <a:xfrm>
-            <a:off x="6370167" y="4338828"/>
-            <a:ext cx="4495647" cy="685800"/>
-          </a:xfrm>
-          <a:prstGeom prst="rect">
-            <a:avLst/>
-          </a:prstGeom>
-          <a:noFill/>
-        </p:spPr>
-        <p:txBody>
-          <a:bodyPr wrap="square" lIns="45720" rIns="45720" tIns="27432" bIns="27432" anchor="ctr">
-            <a:spAutoFit/>
-          </a:bodyPr>
-          <a:lstStyle/>
+              <a:rPr sz="2200" b="0" i="0" lang="ar-SA">
+                <a:solidFill>
+                  <a:srgbClr val="CCFBF1"/>
+                </a:solidFill>
+                <a:latin typeface="Arial"/>
+                <a:cs typeface="Arial"/>
+              </a:rPr>
+              <a:t>كنان محمد قرحالي</a:t>
+            </a:r>
+          </a:p>
           <a:p>
             <a:pPr rtl="1" algn="r">
               <a:lnSpc>
-                <a:spcPct val="100000"/>
+                <a:spcPct val="120000"/>
               </a:lnSpc>
               <a:spcBef>
                 <a:spcPts val="0"/>
               </a:spcBef>
               <a:spcAft>
-                <a:spcPts val="0"/>
+                <a:spcPts val="400"/>
               </a:spcAft>
             </a:pPr>
             <a:r>
-              <a:rPr sz="2400" b="1" i="0" lang="ar-SA">
-                <a:solidFill>
-                  <a:srgbClr val="134E4A"/>
-                </a:solidFill>
-                <a:latin typeface="Arial"/>
-                <a:cs typeface="Arial"/>
-              </a:rPr>
-              <a:t>نظام قابل لإعادة الإنتاج</a:t>
-            </a:r>
-          </a:p>
-        </p:txBody>
-      </p:sp>
-      <p:sp>
-        <p:nvSpPr>
-          <p:cNvPr id="15" name="TextBox 14"/>
-          <p:cNvSpPr txBox="1"/>
-          <p:nvPr/>
-        </p:nvSpPr>
-        <p:spPr>
-          <a:xfrm>
-            <a:off x="6370167" y="5097780"/>
-            <a:ext cx="5135727" cy="982980"/>
-          </a:xfrm>
-          <a:prstGeom prst="rect">
-            <a:avLst/>
-          </a:prstGeom>
-          <a:noFill/>
-        </p:spPr>
-        <p:txBody>
-          <a:bodyPr wrap="square" lIns="45720" rIns="45720" tIns="27432" bIns="27432" anchor="t">
-            <a:spAutoFit/>
-          </a:bodyPr>
-          <a:lstStyle/>
-          <a:p>
-            <a:pPr rtl="1" algn="r">
-              <a:lnSpc>
-                <a:spcPct val="115000"/>
-              </a:lnSpc>
-              <a:spcBef>
-                <a:spcPts val="0"/>
-              </a:spcBef>
-              <a:spcAft>
-                <a:spcPts val="0"/>
-              </a:spcAft>
-            </a:pPr>
-            <a:r>
-              <a:rPr sz="2000" b="0" i="0" lang="ar-SA">
-                <a:solidFill>
-                  <a:srgbClr val="475569"/>
-                </a:solidFill>
-                <a:latin typeface="Arial"/>
-                <a:cs typeface="Arial"/>
-              </a:rPr>
-              <a:t>numpy وpandas مع اختبار تحقق لكل تنفيذ، وواجهتان للمتعلم والمدرّس</a:t>
-            </a:r>
-          </a:p>
-        </p:txBody>
-      </p:sp>
-      <p:sp>
-        <p:nvSpPr>
-          <p:cNvPr id="16" name="بطاقة"/>
-          <p:cNvSpPr/>
-          <p:nvPr/>
-        </p:nvSpPr>
-        <p:spPr>
-          <a:xfrm>
-            <a:off x="548640" y="4229100"/>
-            <a:ext cx="5410047" cy="1943100"/>
-          </a:xfrm>
-          <a:prstGeom prst="roundRect">
-            <a:avLst>
-              <a:gd name="adj" fmla="val 6000"/>
-            </a:avLst>
-          </a:prstGeom>
-          <a:solidFill>
-            <a:srgbClr val="FFFFFF"/>
-          </a:solidFill>
-          <a:ln w="12700">
-            <a:solidFill>
-              <a:srgbClr val="CBD5E1"/>
-            </a:solidFill>
-          </a:ln>
-          <a:effectLst/>
-        </p:spPr>
-        <p:style>
-          <a:lnRef idx="1">
-            <a:schemeClr val="accent1"/>
-          </a:lnRef>
-          <a:fillRef idx="3">
-            <a:schemeClr val="accent1"/>
-          </a:fillRef>
-          <a:effectRef idx="2">
-            <a:schemeClr val="accent1"/>
-          </a:effectRef>
-          <a:fontRef idx="minor">
-            <a:schemeClr val="lt1"/>
-          </a:fontRef>
-        </p:style>
-        <p:txBody>
-          <a:bodyPr rtlCol="0" anchor="ctr"/>
-          <a:lstStyle/>
-          <a:p>
-            <a:pPr algn="ctr"/>
-          </a:p>
-        </p:txBody>
-      </p:sp>
-      <p:sp>
-        <p:nvSpPr>
-          <p:cNvPr id="17" name="رقم"/>
-          <p:cNvSpPr/>
-          <p:nvPr/>
-        </p:nvSpPr>
-        <p:spPr>
-          <a:xfrm>
-            <a:off x="5272887" y="4411980"/>
-            <a:ext cx="502920" cy="502920"/>
-          </a:xfrm>
-          <a:prstGeom prst="roundRect">
-            <a:avLst>
-              <a:gd name="adj" fmla="val 50000"/>
-            </a:avLst>
-          </a:prstGeom>
-          <a:solidFill>
-            <a:srgbClr val="0F766E"/>
-          </a:solidFill>
-          <a:ln>
-            <a:noFill/>
-          </a:ln>
-          <a:effectLst/>
-        </p:spPr>
-        <p:style>
-          <a:lnRef idx="1">
-            <a:schemeClr val="accent1"/>
-          </a:lnRef>
-          <a:fillRef idx="3">
-            <a:schemeClr val="accent1"/>
-          </a:fillRef>
-          <a:effectRef idx="2">
-            <a:schemeClr val="accent1"/>
-          </a:effectRef>
-          <a:fontRef idx="minor">
-            <a:schemeClr val="lt1"/>
-          </a:fontRef>
-        </p:style>
-        <p:txBody>
-          <a:bodyPr rtlCol="0" anchor="ctr" wrap="square" lIns="54864" rIns="54864" tIns="18288" bIns="18288"/>
-          <a:lstStyle/>
-          <a:p>
-            <a:pPr algn="ctr" rtl="1"/>
-            <a:r>
-              <a:rPr sz="1600" b="1" i="0" lang="ar-SA">
-                <a:solidFill>
-                  <a:srgbClr val="FFFFFF"/>
-                </a:solidFill>
-                <a:latin typeface="Arial"/>
-                <a:cs typeface="Arial"/>
-              </a:rPr>
-              <a:t>4</a:t>
-            </a:r>
-          </a:p>
-        </p:txBody>
-      </p:sp>
-      <p:sp>
-        <p:nvSpPr>
-          <p:cNvPr id="18" name="TextBox 17"/>
-          <p:cNvSpPr txBox="1"/>
-          <p:nvPr/>
-        </p:nvSpPr>
-        <p:spPr>
-          <a:xfrm>
-            <a:off x="685800" y="4338828"/>
-            <a:ext cx="4495647" cy="685800"/>
-          </a:xfrm>
-          <a:prstGeom prst="rect">
-            <a:avLst/>
-          </a:prstGeom>
-          <a:noFill/>
-        </p:spPr>
-        <p:txBody>
-          <a:bodyPr wrap="square" lIns="45720" rIns="45720" tIns="27432" bIns="27432" anchor="ctr">
-            <a:spAutoFit/>
-          </a:bodyPr>
-          <a:lstStyle/>
-          <a:p>
-            <a:pPr rtl="1" algn="r">
-              <a:lnSpc>
-                <a:spcPct val="100000"/>
-              </a:lnSpc>
-              <a:spcBef>
-                <a:spcPts val="0"/>
-              </a:spcBef>
-              <a:spcAft>
-                <a:spcPts val="0"/>
-              </a:spcAft>
-            </a:pPr>
-            <a:r>
-              <a:rPr sz="2400" b="1" i="0" lang="ar-SA">
-                <a:solidFill>
-                  <a:srgbClr val="134E4A"/>
-                </a:solidFill>
-                <a:latin typeface="Arial"/>
-                <a:cs typeface="Arial"/>
-              </a:rPr>
-              <a:t>دليل على قوة الشعبية الآنية</a:t>
-            </a:r>
-          </a:p>
-        </p:txBody>
-      </p:sp>
-      <p:sp>
-        <p:nvSpPr>
-          <p:cNvPr id="19" name="TextBox 18"/>
-          <p:cNvSpPr txBox="1"/>
-          <p:nvPr/>
-        </p:nvSpPr>
-        <p:spPr>
-          <a:xfrm>
-            <a:off x="685800" y="5097780"/>
-            <a:ext cx="5135727" cy="982980"/>
-          </a:xfrm>
-          <a:prstGeom prst="rect">
-            <a:avLst/>
-          </a:prstGeom>
-          <a:noFill/>
-        </p:spPr>
-        <p:txBody>
-          <a:bodyPr wrap="square" lIns="45720" rIns="45720" tIns="27432" bIns="27432" anchor="t">
-            <a:spAutoFit/>
-          </a:bodyPr>
-          <a:lstStyle/>
-          <a:p>
-            <a:pPr rtl="1" algn="r">
-              <a:lnSpc>
-                <a:spcPct val="115000"/>
-              </a:lnSpc>
-              <a:spcBef>
-                <a:spcPts val="0"/>
-              </a:spcBef>
-              <a:spcAft>
-                <a:spcPts val="0"/>
-              </a:spcAft>
-            </a:pPr>
-            <a:r>
-              <a:rPr sz="2000" b="0" i="0" lang="ar-SA">
-                <a:solidFill>
-                  <a:srgbClr val="475569"/>
-                </a:solidFill>
-                <a:latin typeface="Arial"/>
-                <a:cs typeface="Arial"/>
-              </a:rPr>
-              <a:t>حجم ما يفرضه الجدول الدراسي على الوصول [يُستكمل بنتائج التأكيد]</a:t>
-            </a:r>
-          </a:p>
-        </p:txBody>
-      </p:sp>
-      <p:sp>
-        <p:nvSpPr>
-          <p:cNvPr id="20" name="شعار الجامعة"/>
+              <a:rPr sz="2200" b="0" i="0" lang="ar-SA">
+                <a:solidFill>
+                  <a:srgbClr val="CCFBF1"/>
+                </a:solidFill>
+                <a:latin typeface="Arial"/>
+                <a:cs typeface="Arial"/>
+              </a:rPr>
+              <a:t>إشراف: د. باسل الخطيب</a:t>
+            </a:r>
+          </a:p>
+        </p:txBody>
+      </p:sp>
+      <p:sp>
+        <p:nvSpPr>
+          <p:cNvPr id="7" name="شعار الجامعة"/>
           <p:cNvSpPr/>
           <p:nvPr/>
         </p:nvSpPr>
@@ -19009,7 +18583,7 @@
       </p:sp>
       <p:sp>
         <p:nvSpPr>
-          <p:cNvPr id="21" name="تذييل"/>
+          <p:cNvPr id="8" name="تذييل"/>
           <p:cNvSpPr txBox="1"/>
           <p:nvPr/>
         </p:nvSpPr>
@@ -19055,7 +18629,7 @@
       </p:sp>
       <p:sp>
         <p:nvSpPr>
-          <p:cNvPr id="22" name="رقم الشريحة"/>
+          <p:cNvPr id="9" name="رقم الشريحة"/>
           <p:cNvSpPr txBox="1"/>
           <p:nvPr/>
         </p:nvSpPr>
@@ -19102,7 +18676,7 @@
     <p:bg>
       <p:bgPr>
         <a:solidFill>
-          <a:srgbClr val="134E4A"/>
+          <a:srgbClr val="F8FAFC"/>
         </a:solidFill>
         <a:effectLst/>
       </p:bgPr>
@@ -19116,20 +18690,116 @@
       <p:grpSpPr/>
       <p:sp>
         <p:nvSpPr>
-          <p:cNvPr id="2" name="زخرفة"/>
+          <p:cNvPr id="2" name="العنوان"/>
+          <p:cNvSpPr txBox="1"/>
+          <p:nvPr/>
+        </p:nvSpPr>
+        <p:spPr>
+          <a:xfrm>
+            <a:off x="548640" y="347472"/>
+            <a:ext cx="11094415" cy="868680"/>
+          </a:xfrm>
+          <a:prstGeom prst="rect">
+            <a:avLst/>
+          </a:prstGeom>
+          <a:noFill/>
+        </p:spPr>
+        <p:txBody>
+          <a:bodyPr wrap="square" lIns="45720" rIns="45720" tIns="27432" bIns="27432" anchor="ctr">
+            <a:spAutoFit/>
+          </a:bodyPr>
+          <a:lstStyle/>
+          <a:p>
+            <a:pPr rtl="1" algn="r">
+              <a:lnSpc>
+                <a:spcPct val="115000"/>
+              </a:lnSpc>
+              <a:spcBef>
+                <a:spcPts val="0"/>
+              </a:spcBef>
+              <a:spcAft>
+                <a:spcPts val="0"/>
+              </a:spcAft>
+            </a:pPr>
+            <a:r>
+              <a:rPr sz="3000" b="1" i="0" lang="ar-SA">
+                <a:solidFill>
+                  <a:srgbClr val="134E4A"/>
+                </a:solidFill>
+                <a:latin typeface="Arial"/>
+                <a:cs typeface="Arial"/>
+              </a:rPr>
+              <a:t>احتياطي: لماذا numpy فقط؟ ولماذا لا CNN؟</a:t>
+            </a:r>
+          </a:p>
+        </p:txBody>
+      </p:sp>
+      <p:sp>
+        <p:nvSpPr>
+          <p:cNvPr id="3" name="بطاقة"/>
           <p:cNvSpPr/>
           <p:nvPr/>
         </p:nvSpPr>
         <p:spPr>
           <a:xfrm>
-            <a:off x="-2011680" y="3108960"/>
-            <a:ext cx="5669280" cy="5669280"/>
-          </a:xfrm>
-          <a:prstGeom prst="ellipse">
-            <a:avLst/>
+            <a:off x="6233007" y="1463040"/>
+            <a:ext cx="5410047" cy="4709160"/>
+          </a:xfrm>
+          <a:prstGeom prst="roundRect">
+            <a:avLst>
+              <a:gd name="adj" fmla="val 6000"/>
+            </a:avLst>
           </a:prstGeom>
           <a:solidFill>
-            <a:srgbClr val="115E59"/>
+            <a:srgbClr val="FFFFFF"/>
+          </a:solidFill>
+          <a:ln w="12700">
+            <a:solidFill>
+              <a:srgbClr val="CBD5E1"/>
+            </a:solidFill>
+          </a:ln>
+          <a:effectLst/>
+        </p:spPr>
+        <p:style>
+          <a:lnRef idx="1">
+            <a:schemeClr val="accent1"/>
+          </a:lnRef>
+          <a:fillRef idx="3">
+            <a:schemeClr val="accent1"/>
+          </a:fillRef>
+          <a:effectRef idx="2">
+            <a:schemeClr val="accent1"/>
+          </a:effectRef>
+          <a:fontRef idx="minor">
+            <a:schemeClr val="lt1"/>
+          </a:fontRef>
+        </p:style>
+        <p:txBody>
+          <a:bodyPr rtlCol="0" anchor="ctr"/>
+          <a:lstStyle/>
+          <a:p>
+            <a:pPr algn="ctr"/>
+          </a:p>
+        </p:txBody>
+      </p:sp>
+      <p:sp>
+        <p:nvSpPr>
+          <p:cNvPr id="4" name="السؤال"/>
+          <p:cNvSpPr/>
+          <p:nvPr/>
+        </p:nvSpPr>
+        <p:spPr>
+          <a:xfrm>
+            <a:off x="6233007" y="1463040"/>
+            <a:ext cx="5410047" cy="822960"/>
+          </a:xfrm>
+          <a:prstGeom prst="roundRect">
+            <a:avLst>
+              <a:gd name="adj" fmla="val 20000"/>
+            </a:avLst>
+          </a:prstGeom>
+          <a:solidFill>
+            <a:srgbClr val="CCFBF1"/>
           </a:solidFill>
           <a:ln>
             <a:noFill/>
@@ -19151,6 +18821,60 @@
           </a:fontRef>
         </p:style>
         <p:txBody>
+          <a:bodyPr rtlCol="0" anchor="ctr" wrap="square" lIns="54864" rIns="228600" tIns="18288" bIns="18288"/>
+          <a:lstStyle/>
+          <a:p>
+            <a:pPr algn="r" rtl="1"/>
+            <a:r>
+              <a:rPr sz="2400" b="1" i="0" lang="ar-SA">
+                <a:solidFill>
+                  <a:srgbClr val="134E4A"/>
+                </a:solidFill>
+                <a:latin typeface="Arial"/>
+                <a:cs typeface="Arial"/>
+              </a:rPr>
+              <a:t>س: لماذا numpy فقط؟</a:t>
+            </a:r>
+          </a:p>
+        </p:txBody>
+      </p:sp>
+      <p:sp>
+        <p:nvSpPr>
+          <p:cNvPr id="5" name="نقطة"/>
+          <p:cNvSpPr/>
+          <p:nvPr/>
+        </p:nvSpPr>
+        <p:spPr>
+          <a:xfrm>
+            <a:off x="11259007" y="2792349"/>
+            <a:ext cx="164592" cy="164592"/>
+          </a:xfrm>
+          <a:prstGeom prst="ellipse">
+            <a:avLst/>
+          </a:prstGeom>
+          <a:solidFill>
+            <a:srgbClr val="B45309"/>
+          </a:solidFill>
+          <a:ln>
+            <a:noFill/>
+          </a:ln>
+          <a:effectLst/>
+        </p:spPr>
+        <p:style>
+          <a:lnRef idx="1">
+            <a:schemeClr val="accent1"/>
+          </a:lnRef>
+          <a:fillRef idx="3">
+            <a:schemeClr val="accent1"/>
+          </a:fillRef>
+          <a:effectRef idx="2">
+            <a:schemeClr val="accent1"/>
+          </a:effectRef>
+          <a:fontRef idx="minor">
+            <a:schemeClr val="lt1"/>
+          </a:fontRef>
+        </p:style>
+        <p:txBody>
           <a:bodyPr rtlCol="0" anchor="ctr"/>
           <a:lstStyle/>
           <a:p>
@@ -19160,17 +18884,799 @@
       </p:sp>
       <p:sp>
         <p:nvSpPr>
-          <p:cNvPr id="3" name="زخرفة"/>
+          <p:cNvPr id="6" name="TextBox 5"/>
+          <p:cNvSpPr txBox="1"/>
+          <p:nvPr/>
+        </p:nvSpPr>
+        <p:spPr>
+          <a:xfrm>
+            <a:off x="6370167" y="2423160"/>
+            <a:ext cx="4769967" cy="902970"/>
+          </a:xfrm>
+          <a:prstGeom prst="rect">
+            <a:avLst/>
+          </a:prstGeom>
+          <a:noFill/>
+        </p:spPr>
+        <p:txBody>
+          <a:bodyPr wrap="square" lIns="45720" rIns="45720" tIns="27432" bIns="27432" anchor="ctr">
+            <a:spAutoFit/>
+          </a:bodyPr>
+          <a:lstStyle/>
+          <a:p>
+            <a:pPr rtl="1" algn="r">
+              <a:lnSpc>
+                <a:spcPct val="105000"/>
+              </a:lnSpc>
+              <a:spcBef>
+                <a:spcPts val="0"/>
+              </a:spcBef>
+              <a:spcAft>
+                <a:spcPts val="0"/>
+              </a:spcAft>
+            </a:pPr>
+            <a:r>
+              <a:rPr sz="1700" b="0" i="0" lang="ar-SA">
+                <a:solidFill>
+                  <a:srgbClr val="134E4A"/>
+                </a:solidFill>
+                <a:latin typeface="Arial"/>
+                <a:cs typeface="Arial"/>
+              </a:rPr>
+              <a:t>بيئة التنفيذ لا تتيح TensorFlow ولا Keras ولا scikit-learn</a:t>
+            </a:r>
+          </a:p>
+        </p:txBody>
+      </p:sp>
+      <p:sp>
+        <p:nvSpPr>
+          <p:cNvPr id="7" name="نقطة"/>
           <p:cNvSpPr/>
           <p:nvPr/>
         </p:nvSpPr>
         <p:spPr>
           <a:xfrm>
-            <a:off x="274320" y="-1463040"/>
-            <a:ext cx="3291840" cy="3291840"/>
+            <a:off x="11259007" y="3695319"/>
+            <a:ext cx="164592" cy="164592"/>
           </a:xfrm>
           <a:prstGeom prst="ellipse">
             <a:avLst/>
+          </a:prstGeom>
+          <a:solidFill>
+            <a:srgbClr val="B45309"/>
+          </a:solidFill>
+          <a:ln>
+            <a:noFill/>
+          </a:ln>
+          <a:effectLst/>
+        </p:spPr>
+        <p:style>
+          <a:lnRef idx="1">
+            <a:schemeClr val="accent1"/>
+          </a:lnRef>
+          <a:fillRef idx="3">
+            <a:schemeClr val="accent1"/>
+          </a:fillRef>
+          <a:effectRef idx="2">
+            <a:schemeClr val="accent1"/>
+          </a:effectRef>
+          <a:fontRef idx="minor">
+            <a:schemeClr val="lt1"/>
+          </a:fontRef>
+        </p:style>
+        <p:txBody>
+          <a:bodyPr rtlCol="0" anchor="ctr"/>
+          <a:lstStyle/>
+          <a:p>
+            <a:pPr algn="ctr"/>
+          </a:p>
+        </p:txBody>
+      </p:sp>
+      <p:sp>
+        <p:nvSpPr>
+          <p:cNvPr id="8" name="TextBox 7"/>
+          <p:cNvSpPr txBox="1"/>
+          <p:nvPr/>
+        </p:nvSpPr>
+        <p:spPr>
+          <a:xfrm>
+            <a:off x="6370167" y="3326130"/>
+            <a:ext cx="4769967" cy="902970"/>
+          </a:xfrm>
+          <a:prstGeom prst="rect">
+            <a:avLst/>
+          </a:prstGeom>
+          <a:noFill/>
+        </p:spPr>
+        <p:txBody>
+          <a:bodyPr wrap="square" lIns="45720" rIns="45720" tIns="27432" bIns="27432" anchor="ctr">
+            <a:spAutoFit/>
+          </a:bodyPr>
+          <a:lstStyle/>
+          <a:p>
+            <a:pPr rtl="1" algn="r">
+              <a:lnSpc>
+                <a:spcPct val="105000"/>
+              </a:lnSpc>
+              <a:spcBef>
+                <a:spcPts val="0"/>
+              </a:spcBef>
+              <a:spcAft>
+                <a:spcPts val="0"/>
+              </a:spcAft>
+            </a:pPr>
+            <a:r>
+              <a:rPr sz="1700" b="0" i="0" lang="ar-SA">
+                <a:solidFill>
+                  <a:srgbClr val="134E4A"/>
+                </a:solidFill>
+                <a:latin typeface="Arial"/>
+                <a:cs typeface="Arial"/>
+              </a:rPr>
+              <a:t>كُتبت الخوارزميات يدوياً مع اختبار تحقق لكل تنفيذ</a:t>
+            </a:r>
+          </a:p>
+        </p:txBody>
+      </p:sp>
+      <p:sp>
+        <p:nvSpPr>
+          <p:cNvPr id="9" name="نقطة"/>
+          <p:cNvSpPr/>
+          <p:nvPr/>
+        </p:nvSpPr>
+        <p:spPr>
+          <a:xfrm>
+            <a:off x="11259007" y="4598289"/>
+            <a:ext cx="164592" cy="164592"/>
+          </a:xfrm>
+          <a:prstGeom prst="ellipse">
+            <a:avLst/>
+          </a:prstGeom>
+          <a:solidFill>
+            <a:srgbClr val="B45309"/>
+          </a:solidFill>
+          <a:ln>
+            <a:noFill/>
+          </a:ln>
+          <a:effectLst/>
+        </p:spPr>
+        <p:style>
+          <a:lnRef idx="1">
+            <a:schemeClr val="accent1"/>
+          </a:lnRef>
+          <a:fillRef idx="3">
+            <a:schemeClr val="accent1"/>
+          </a:fillRef>
+          <a:effectRef idx="2">
+            <a:schemeClr val="accent1"/>
+          </a:effectRef>
+          <a:fontRef idx="minor">
+            <a:schemeClr val="lt1"/>
+          </a:fontRef>
+        </p:style>
+        <p:txBody>
+          <a:bodyPr rtlCol="0" anchor="ctr"/>
+          <a:lstStyle/>
+          <a:p>
+            <a:pPr algn="ctr"/>
+          </a:p>
+        </p:txBody>
+      </p:sp>
+      <p:sp>
+        <p:nvSpPr>
+          <p:cNvPr id="10" name="TextBox 9"/>
+          <p:cNvSpPr txBox="1"/>
+          <p:nvPr/>
+        </p:nvSpPr>
+        <p:spPr>
+          <a:xfrm>
+            <a:off x="6370167" y="4229100"/>
+            <a:ext cx="4769967" cy="902970"/>
+          </a:xfrm>
+          <a:prstGeom prst="rect">
+            <a:avLst/>
+          </a:prstGeom>
+          <a:noFill/>
+        </p:spPr>
+        <p:txBody>
+          <a:bodyPr wrap="square" lIns="45720" rIns="45720" tIns="27432" bIns="27432" anchor="ctr">
+            <a:spAutoFit/>
+          </a:bodyPr>
+          <a:lstStyle/>
+          <a:p>
+            <a:pPr rtl="1" algn="r">
+              <a:lnSpc>
+                <a:spcPct val="105000"/>
+              </a:lnSpc>
+              <a:spcBef>
+                <a:spcPts val="0"/>
+              </a:spcBef>
+              <a:spcAft>
+                <a:spcPts val="0"/>
+              </a:spcAft>
+            </a:pPr>
+            <a:r>
+              <a:rPr sz="1700" b="0" i="0" lang="ar-SA">
+                <a:solidFill>
+                  <a:srgbClr val="134E4A"/>
+                </a:solidFill>
+                <a:latin typeface="Arial"/>
+                <a:cs typeface="Arial"/>
+              </a:rPr>
+              <a:t>مثال: فحص تدرج GRU-lite بخطأ نسبي 4.3e-06</a:t>
+            </a:r>
+          </a:p>
+        </p:txBody>
+      </p:sp>
+      <p:sp>
+        <p:nvSpPr>
+          <p:cNvPr id="11" name="نقطة"/>
+          <p:cNvSpPr/>
+          <p:nvPr/>
+        </p:nvSpPr>
+        <p:spPr>
+          <a:xfrm>
+            <a:off x="11259007" y="5501259"/>
+            <a:ext cx="164592" cy="164592"/>
+          </a:xfrm>
+          <a:prstGeom prst="ellipse">
+            <a:avLst/>
+          </a:prstGeom>
+          <a:solidFill>
+            <a:srgbClr val="B45309"/>
+          </a:solidFill>
+          <a:ln>
+            <a:noFill/>
+          </a:ln>
+          <a:effectLst/>
+        </p:spPr>
+        <p:style>
+          <a:lnRef idx="1">
+            <a:schemeClr val="accent1"/>
+          </a:lnRef>
+          <a:fillRef idx="3">
+            <a:schemeClr val="accent1"/>
+          </a:fillRef>
+          <a:effectRef idx="2">
+            <a:schemeClr val="accent1"/>
+          </a:effectRef>
+          <a:fontRef idx="minor">
+            <a:schemeClr val="lt1"/>
+          </a:fontRef>
+        </p:style>
+        <p:txBody>
+          <a:bodyPr rtlCol="0" anchor="ctr"/>
+          <a:lstStyle/>
+          <a:p>
+            <a:pPr algn="ctr"/>
+          </a:p>
+        </p:txBody>
+      </p:sp>
+      <p:sp>
+        <p:nvSpPr>
+          <p:cNvPr id="12" name="TextBox 11"/>
+          <p:cNvSpPr txBox="1"/>
+          <p:nvPr/>
+        </p:nvSpPr>
+        <p:spPr>
+          <a:xfrm>
+            <a:off x="6370167" y="5132070"/>
+            <a:ext cx="4769967" cy="902970"/>
+          </a:xfrm>
+          <a:prstGeom prst="rect">
+            <a:avLst/>
+          </a:prstGeom>
+          <a:noFill/>
+        </p:spPr>
+        <p:txBody>
+          <a:bodyPr wrap="square" lIns="45720" rIns="45720" tIns="27432" bIns="27432" anchor="ctr">
+            <a:spAutoFit/>
+          </a:bodyPr>
+          <a:lstStyle/>
+          <a:p>
+            <a:pPr rtl="1" algn="r">
+              <a:lnSpc>
+                <a:spcPct val="105000"/>
+              </a:lnSpc>
+              <a:spcBef>
+                <a:spcPts val="0"/>
+              </a:spcBef>
+              <a:spcAft>
+                <a:spcPts val="0"/>
+              </a:spcAft>
+            </a:pPr>
+            <a:r>
+              <a:rPr sz="1700" b="0" i="0" lang="ar-SA">
+                <a:solidFill>
+                  <a:srgbClr val="134E4A"/>
+                </a:solidFill>
+                <a:latin typeface="Arial"/>
+                <a:cs typeface="Arial"/>
+              </a:rPr>
+              <a:t>القيد معلن في الفصل الثالث (3-6-3)</a:t>
+            </a:r>
+          </a:p>
+        </p:txBody>
+      </p:sp>
+      <p:sp>
+        <p:nvSpPr>
+          <p:cNvPr id="13" name="بطاقة"/>
+          <p:cNvSpPr/>
+          <p:nvPr/>
+        </p:nvSpPr>
+        <p:spPr>
+          <a:xfrm>
+            <a:off x="548640" y="1463040"/>
+            <a:ext cx="5410047" cy="4709160"/>
+          </a:xfrm>
+          <a:prstGeom prst="roundRect">
+            <a:avLst>
+              <a:gd name="adj" fmla="val 6000"/>
+            </a:avLst>
+          </a:prstGeom>
+          <a:solidFill>
+            <a:srgbClr val="FFFFFF"/>
+          </a:solidFill>
+          <a:ln w="12700">
+            <a:solidFill>
+              <a:srgbClr val="CBD5E1"/>
+            </a:solidFill>
+          </a:ln>
+          <a:effectLst/>
+        </p:spPr>
+        <p:style>
+          <a:lnRef idx="1">
+            <a:schemeClr val="accent1"/>
+          </a:lnRef>
+          <a:fillRef idx="3">
+            <a:schemeClr val="accent1"/>
+          </a:fillRef>
+          <a:effectRef idx="2">
+            <a:schemeClr val="accent1"/>
+          </a:effectRef>
+          <a:fontRef idx="minor">
+            <a:schemeClr val="lt1"/>
+          </a:fontRef>
+        </p:style>
+        <p:txBody>
+          <a:bodyPr rtlCol="0" anchor="ctr"/>
+          <a:lstStyle/>
+          <a:p>
+            <a:pPr algn="ctr"/>
+          </a:p>
+        </p:txBody>
+      </p:sp>
+      <p:sp>
+        <p:nvSpPr>
+          <p:cNvPr id="14" name="السؤال"/>
+          <p:cNvSpPr/>
+          <p:nvPr/>
+        </p:nvSpPr>
+        <p:spPr>
+          <a:xfrm>
+            <a:off x="548640" y="1463040"/>
+            <a:ext cx="5410047" cy="822960"/>
+          </a:xfrm>
+          <a:prstGeom prst="roundRect">
+            <a:avLst>
+              <a:gd name="adj" fmla="val 20000"/>
+            </a:avLst>
+          </a:prstGeom>
+          <a:solidFill>
+            <a:srgbClr val="CCFBF1"/>
+          </a:solidFill>
+          <a:ln>
+            <a:noFill/>
+          </a:ln>
+          <a:effectLst/>
+        </p:spPr>
+        <p:style>
+          <a:lnRef idx="1">
+            <a:schemeClr val="accent1"/>
+          </a:lnRef>
+          <a:fillRef idx="3">
+            <a:schemeClr val="accent1"/>
+          </a:fillRef>
+          <a:effectRef idx="2">
+            <a:schemeClr val="accent1"/>
+          </a:effectRef>
+          <a:fontRef idx="minor">
+            <a:schemeClr val="lt1"/>
+          </a:fontRef>
+        </p:style>
+        <p:txBody>
+          <a:bodyPr rtlCol="0" anchor="ctr" wrap="square" lIns="54864" rIns="228600" tIns="18288" bIns="18288"/>
+          <a:lstStyle/>
+          <a:p>
+            <a:pPr algn="r" rtl="1"/>
+            <a:r>
+              <a:rPr sz="2400" b="1" i="0" lang="ar-SA">
+                <a:solidFill>
+                  <a:srgbClr val="134E4A"/>
+                </a:solidFill>
+                <a:latin typeface="Arial"/>
+                <a:cs typeface="Arial"/>
+              </a:rPr>
+              <a:t>س: لماذا لا CNN؟</a:t>
+            </a:r>
+          </a:p>
+        </p:txBody>
+      </p:sp>
+      <p:sp>
+        <p:nvSpPr>
+          <p:cNvPr id="15" name="نقطة"/>
+          <p:cNvSpPr/>
+          <p:nvPr/>
+        </p:nvSpPr>
+        <p:spPr>
+          <a:xfrm>
+            <a:off x="5574639" y="2792349"/>
+            <a:ext cx="164592" cy="164592"/>
+          </a:xfrm>
+          <a:prstGeom prst="ellipse">
+            <a:avLst/>
+          </a:prstGeom>
+          <a:solidFill>
+            <a:srgbClr val="B45309"/>
+          </a:solidFill>
+          <a:ln>
+            <a:noFill/>
+          </a:ln>
+          <a:effectLst/>
+        </p:spPr>
+        <p:style>
+          <a:lnRef idx="1">
+            <a:schemeClr val="accent1"/>
+          </a:lnRef>
+          <a:fillRef idx="3">
+            <a:schemeClr val="accent1"/>
+          </a:fillRef>
+          <a:effectRef idx="2">
+            <a:schemeClr val="accent1"/>
+          </a:effectRef>
+          <a:fontRef idx="minor">
+            <a:schemeClr val="lt1"/>
+          </a:fontRef>
+        </p:style>
+        <p:txBody>
+          <a:bodyPr rtlCol="0" anchor="ctr"/>
+          <a:lstStyle/>
+          <a:p>
+            <a:pPr algn="ctr"/>
+          </a:p>
+        </p:txBody>
+      </p:sp>
+      <p:sp>
+        <p:nvSpPr>
+          <p:cNvPr id="16" name="TextBox 15"/>
+          <p:cNvSpPr txBox="1"/>
+          <p:nvPr/>
+        </p:nvSpPr>
+        <p:spPr>
+          <a:xfrm>
+            <a:off x="685800" y="2423160"/>
+            <a:ext cx="4769967" cy="902970"/>
+          </a:xfrm>
+          <a:prstGeom prst="rect">
+            <a:avLst/>
+          </a:prstGeom>
+          <a:noFill/>
+        </p:spPr>
+        <p:txBody>
+          <a:bodyPr wrap="square" lIns="45720" rIns="45720" tIns="27432" bIns="27432" anchor="ctr">
+            <a:spAutoFit/>
+          </a:bodyPr>
+          <a:lstStyle/>
+          <a:p>
+            <a:pPr rtl="1" algn="r">
+              <a:lnSpc>
+                <a:spcPct val="105000"/>
+              </a:lnSpc>
+              <a:spcBef>
+                <a:spcPts val="0"/>
+              </a:spcBef>
+              <a:spcAft>
+                <a:spcPts val="0"/>
+              </a:spcAft>
+            </a:pPr>
+            <a:r>
+              <a:rPr sz="1700" b="0" i="0" lang="ar-SA">
+                <a:solidFill>
+                  <a:srgbClr val="134E4A"/>
+                </a:solidFill>
+                <a:latin typeface="Arial"/>
+                <a:cs typeface="Arial"/>
+              </a:rPr>
+              <a:t>مرجعه الوحيد في الأدبيات المدروسة غير قابل للتكرار</a:t>
+            </a:r>
+          </a:p>
+        </p:txBody>
+      </p:sp>
+      <p:sp>
+        <p:nvSpPr>
+          <p:cNvPr id="17" name="نقطة"/>
+          <p:cNvSpPr/>
+          <p:nvPr/>
+        </p:nvSpPr>
+        <p:spPr>
+          <a:xfrm>
+            <a:off x="5574639" y="3695319"/>
+            <a:ext cx="164592" cy="164592"/>
+          </a:xfrm>
+          <a:prstGeom prst="ellipse">
+            <a:avLst/>
+          </a:prstGeom>
+          <a:solidFill>
+            <a:srgbClr val="B45309"/>
+          </a:solidFill>
+          <a:ln>
+            <a:noFill/>
+          </a:ln>
+          <a:effectLst/>
+        </p:spPr>
+        <p:style>
+          <a:lnRef idx="1">
+            <a:schemeClr val="accent1"/>
+          </a:lnRef>
+          <a:fillRef idx="3">
+            <a:schemeClr val="accent1"/>
+          </a:fillRef>
+          <a:effectRef idx="2">
+            <a:schemeClr val="accent1"/>
+          </a:effectRef>
+          <a:fontRef idx="minor">
+            <a:schemeClr val="lt1"/>
+          </a:fontRef>
+        </p:style>
+        <p:txBody>
+          <a:bodyPr rtlCol="0" anchor="ctr"/>
+          <a:lstStyle/>
+          <a:p>
+            <a:pPr algn="ctr"/>
+          </a:p>
+        </p:txBody>
+      </p:sp>
+      <p:sp>
+        <p:nvSpPr>
+          <p:cNvPr id="18" name="TextBox 17"/>
+          <p:cNvSpPr txBox="1"/>
+          <p:nvPr/>
+        </p:nvSpPr>
+        <p:spPr>
+          <a:xfrm>
+            <a:off x="685800" y="3326130"/>
+            <a:ext cx="4769967" cy="902970"/>
+          </a:xfrm>
+          <a:prstGeom prst="rect">
+            <a:avLst/>
+          </a:prstGeom>
+          <a:noFill/>
+        </p:spPr>
+        <p:txBody>
+          <a:bodyPr wrap="square" lIns="45720" rIns="45720" tIns="27432" bIns="27432" anchor="ctr">
+            <a:spAutoFit/>
+          </a:bodyPr>
+          <a:lstStyle/>
+          <a:p>
+            <a:pPr rtl="1" algn="r">
+              <a:lnSpc>
+                <a:spcPct val="105000"/>
+              </a:lnSpc>
+              <a:spcBef>
+                <a:spcPts val="0"/>
+              </a:spcBef>
+              <a:spcAft>
+                <a:spcPts val="0"/>
+              </a:spcAft>
+            </a:pPr>
+            <a:r>
+              <a:rPr sz="1700" b="0" i="0" lang="ar-SA">
+                <a:solidFill>
+                  <a:srgbClr val="134E4A"/>
+                </a:solidFill>
+                <a:latin typeface="Arial"/>
+                <a:cs typeface="Arial"/>
+              </a:rPr>
+              <a:t>سلال الأيام غير مرتبة داخلياً: لا بنية محلية تستفيد منها التلافيف</a:t>
+            </a:r>
+          </a:p>
+        </p:txBody>
+      </p:sp>
+      <p:sp>
+        <p:nvSpPr>
+          <p:cNvPr id="19" name="نقطة"/>
+          <p:cNvSpPr/>
+          <p:nvPr/>
+        </p:nvSpPr>
+        <p:spPr>
+          <a:xfrm>
+            <a:off x="5574639" y="4598289"/>
+            <a:ext cx="164592" cy="164592"/>
+          </a:xfrm>
+          <a:prstGeom prst="ellipse">
+            <a:avLst/>
+          </a:prstGeom>
+          <a:solidFill>
+            <a:srgbClr val="B45309"/>
+          </a:solidFill>
+          <a:ln>
+            <a:noFill/>
+          </a:ln>
+          <a:effectLst/>
+        </p:spPr>
+        <p:style>
+          <a:lnRef idx="1">
+            <a:schemeClr val="accent1"/>
+          </a:lnRef>
+          <a:fillRef idx="3">
+            <a:schemeClr val="accent1"/>
+          </a:fillRef>
+          <a:effectRef idx="2">
+            <a:schemeClr val="accent1"/>
+          </a:effectRef>
+          <a:fontRef idx="minor">
+            <a:schemeClr val="lt1"/>
+          </a:fontRef>
+        </p:style>
+        <p:txBody>
+          <a:bodyPr rtlCol="0" anchor="ctr"/>
+          <a:lstStyle/>
+          <a:p>
+            <a:pPr algn="ctr"/>
+          </a:p>
+        </p:txBody>
+      </p:sp>
+      <p:sp>
+        <p:nvSpPr>
+          <p:cNvPr id="20" name="TextBox 19"/>
+          <p:cNvSpPr txBox="1"/>
+          <p:nvPr/>
+        </p:nvSpPr>
+        <p:spPr>
+          <a:xfrm>
+            <a:off x="685800" y="4229100"/>
+            <a:ext cx="4769967" cy="902970"/>
+          </a:xfrm>
+          <a:prstGeom prst="rect">
+            <a:avLst/>
+          </a:prstGeom>
+          <a:noFill/>
+        </p:spPr>
+        <p:txBody>
+          <a:bodyPr wrap="square" lIns="45720" rIns="45720" tIns="27432" bIns="27432" anchor="ctr">
+            <a:spAutoFit/>
+          </a:bodyPr>
+          <a:lstStyle/>
+          <a:p>
+            <a:pPr rtl="1" algn="r">
+              <a:lnSpc>
+                <a:spcPct val="105000"/>
+              </a:lnSpc>
+              <a:spcBef>
+                <a:spcPts val="0"/>
+              </a:spcBef>
+              <a:spcAft>
+                <a:spcPts val="0"/>
+              </a:spcAft>
+            </a:pPr>
+            <a:r>
+              <a:rPr sz="1700" b="0" i="0" lang="ar-SA">
+                <a:solidFill>
+                  <a:srgbClr val="134E4A"/>
+                </a:solidFill>
+                <a:latin typeface="Arial"/>
+                <a:cs typeface="Arial"/>
+              </a:rPr>
+              <a:t>بقي الاتجاه العصبوني ممثلاً بـ GRU-lite</a:t>
+            </a:r>
+          </a:p>
+        </p:txBody>
+      </p:sp>
+      <p:sp>
+        <p:nvSpPr>
+          <p:cNvPr id="21" name="نقطة"/>
+          <p:cNvSpPr/>
+          <p:nvPr/>
+        </p:nvSpPr>
+        <p:spPr>
+          <a:xfrm>
+            <a:off x="5574639" y="5501259"/>
+            <a:ext cx="164592" cy="164592"/>
+          </a:xfrm>
+          <a:prstGeom prst="ellipse">
+            <a:avLst/>
+          </a:prstGeom>
+          <a:solidFill>
+            <a:srgbClr val="B45309"/>
+          </a:solidFill>
+          <a:ln>
+            <a:noFill/>
+          </a:ln>
+          <a:effectLst/>
+        </p:spPr>
+        <p:style>
+          <a:lnRef idx="1">
+            <a:schemeClr val="accent1"/>
+          </a:lnRef>
+          <a:fillRef idx="3">
+            <a:schemeClr val="accent1"/>
+          </a:fillRef>
+          <a:effectRef idx="2">
+            <a:schemeClr val="accent1"/>
+          </a:effectRef>
+          <a:fontRef idx="minor">
+            <a:schemeClr val="lt1"/>
+          </a:fontRef>
+        </p:style>
+        <p:txBody>
+          <a:bodyPr rtlCol="0" anchor="ctr"/>
+          <a:lstStyle/>
+          <a:p>
+            <a:pPr algn="ctr"/>
+          </a:p>
+        </p:txBody>
+      </p:sp>
+      <p:sp>
+        <p:nvSpPr>
+          <p:cNvPr id="22" name="TextBox 21"/>
+          <p:cNvSpPr txBox="1"/>
+          <p:nvPr/>
+        </p:nvSpPr>
+        <p:spPr>
+          <a:xfrm>
+            <a:off x="685800" y="5132070"/>
+            <a:ext cx="4769967" cy="902970"/>
+          </a:xfrm>
+          <a:prstGeom prst="rect">
+            <a:avLst/>
+          </a:prstGeom>
+          <a:noFill/>
+        </p:spPr>
+        <p:txBody>
+          <a:bodyPr wrap="square" lIns="45720" rIns="45720" tIns="27432" bIns="27432" anchor="ctr">
+            <a:spAutoFit/>
+          </a:bodyPr>
+          <a:lstStyle/>
+          <a:p>
+            <a:pPr rtl="1" algn="r">
+              <a:lnSpc>
+                <a:spcPct val="105000"/>
+              </a:lnSpc>
+              <a:spcBef>
+                <a:spcPts val="0"/>
+              </a:spcBef>
+              <a:spcAft>
+                <a:spcPts val="0"/>
+              </a:spcAft>
+            </a:pPr>
+            <a:r>
+              <a:rPr sz="1700" b="0" i="0" lang="ar-SA">
+                <a:solidFill>
+                  <a:srgbClr val="134E4A"/>
+                </a:solidFill>
+                <a:latin typeface="Arial"/>
+                <a:cs typeface="Arial"/>
+              </a:rPr>
+              <a:t>الخطة نفسها تركت اختيار الأنسب أثناء البحث</a:t>
+            </a:r>
+          </a:p>
+        </p:txBody>
+      </p:sp>
+      <p:sp>
+        <p:nvSpPr>
+          <p:cNvPr id="23" name="شعار الجامعة"/>
+          <p:cNvSpPr/>
+          <p:nvPr/>
+        </p:nvSpPr>
+        <p:spPr>
+          <a:xfrm>
+            <a:off x="10957255" y="6382512"/>
+            <a:ext cx="685800" cy="292608"/>
+          </a:xfrm>
+          <a:prstGeom prst="roundRect">
+            <a:avLst>
+              <a:gd name="adj" fmla="val 50000"/>
+            </a:avLst>
           </a:prstGeom>
           <a:solidFill>
             <a:srgbClr val="0F766E"/>
@@ -19195,23 +19701,33 @@
           </a:fontRef>
         </p:style>
         <p:txBody>
-          <a:bodyPr rtlCol="0" anchor="ctr"/>
-          <a:lstStyle/>
-          <a:p>
-            <a:pPr algn="ctr"/>
-          </a:p>
-        </p:txBody>
-      </p:sp>
-      <p:sp>
-        <p:nvSpPr>
-          <p:cNvPr id="4" name="العنوان"/>
+          <a:bodyPr rtlCol="0" anchor="ctr" wrap="square" lIns="54864" rIns="54864" tIns="18288" bIns="18288"/>
+          <a:lstStyle/>
+          <a:p>
+            <a:pPr algn="ctr" rtl="1"/>
+            <a:r>
+              <a:rPr sz="1200" b="1" i="0" lang="ar-SA">
+                <a:solidFill>
+                  <a:srgbClr val="FFFFFF"/>
+                </a:solidFill>
+                <a:latin typeface="Arial"/>
+                <a:cs typeface="Arial"/>
+              </a:rPr>
+              <a:t>SVU</a:t>
+            </a:r>
+          </a:p>
+        </p:txBody>
+      </p:sp>
+      <p:sp>
+        <p:nvSpPr>
+          <p:cNvPr id="24" name="تذييل"/>
           <p:cNvSpPr txBox="1"/>
           <p:nvPr/>
         </p:nvSpPr>
         <p:spPr>
           <a:xfrm>
-            <a:off x="3474720" y="1554480"/>
-            <a:ext cx="8168335" cy="1280160"/>
+            <a:off x="5287975" y="6373368"/>
+            <a:ext cx="5577840" cy="310896"/>
           </a:xfrm>
           <a:prstGeom prst="rect">
             <a:avLst/>
@@ -19236,236 +19752,9 @@
               </a:spcAft>
             </a:pPr>
             <a:r>
-              <a:rPr sz="5400" b="1" i="0" lang="ar-SA">
-                <a:solidFill>
-                  <a:srgbClr val="FFFFFF"/>
-                </a:solidFill>
-                <a:latin typeface="Arial"/>
-                <a:cs typeface="Arial"/>
-              </a:rPr>
-              <a:t>شكراً لكم</a:t>
-            </a:r>
-          </a:p>
-        </p:txBody>
-      </p:sp>
-      <p:sp>
-        <p:nvSpPr>
-          <p:cNvPr id="5" name="أسئلة"/>
-          <p:cNvSpPr/>
-          <p:nvPr/>
-        </p:nvSpPr>
-        <p:spPr>
-          <a:xfrm>
-            <a:off x="8351215" y="3017520"/>
-            <a:ext cx="3291840" cy="548640"/>
-          </a:xfrm>
-          <a:prstGeom prst="roundRect">
-            <a:avLst>
-              <a:gd name="adj" fmla="val 50000"/>
-            </a:avLst>
-          </a:prstGeom>
-          <a:solidFill>
-            <a:srgbClr val="B45309"/>
-          </a:solidFill>
-          <a:ln>
-            <a:noFill/>
-          </a:ln>
-          <a:effectLst/>
-        </p:spPr>
-        <p:style>
-          <a:lnRef idx="1">
-            <a:schemeClr val="accent1"/>
-          </a:lnRef>
-          <a:fillRef idx="3">
-            <a:schemeClr val="accent1"/>
-          </a:fillRef>
-          <a:effectRef idx="2">
-            <a:schemeClr val="accent1"/>
-          </a:effectRef>
-          <a:fontRef idx="minor">
-            <a:schemeClr val="lt1"/>
-          </a:fontRef>
-        </p:style>
-        <p:txBody>
-          <a:bodyPr rtlCol="0" anchor="ctr" wrap="square" lIns="54864" rIns="54864" tIns="18288" bIns="18288"/>
-          <a:lstStyle/>
-          <a:p>
-            <a:pPr algn="ctr" rtl="1"/>
-            <a:r>
-              <a:rPr sz="2400" b="1" i="0" lang="ar-SA">
-                <a:solidFill>
-                  <a:srgbClr val="FFFFFF"/>
-                </a:solidFill>
-                <a:latin typeface="Arial"/>
-                <a:cs typeface="Arial"/>
-              </a:rPr>
-              <a:t>الأسئلة والمناقشة</a:t>
-            </a:r>
-          </a:p>
-        </p:txBody>
-      </p:sp>
-      <p:sp>
-        <p:nvSpPr>
-          <p:cNvPr id="6" name="TextBox 5"/>
-          <p:cNvSpPr txBox="1"/>
-          <p:nvPr/>
-        </p:nvSpPr>
-        <p:spPr>
-          <a:xfrm>
-            <a:off x="3474720" y="4114800"/>
-            <a:ext cx="8168335" cy="1280160"/>
-          </a:xfrm>
-          <a:prstGeom prst="rect">
-            <a:avLst/>
-          </a:prstGeom>
-          <a:noFill/>
-        </p:spPr>
-        <p:txBody>
-          <a:bodyPr wrap="square" lIns="45720" rIns="45720" tIns="27432" bIns="27432" anchor="t">
-            <a:spAutoFit/>
-          </a:bodyPr>
-          <a:lstStyle/>
-          <a:p>
-            <a:pPr rtl="1" algn="r">
-              <a:lnSpc>
-                <a:spcPct val="120000"/>
-              </a:lnSpc>
-              <a:spcBef>
-                <a:spcPts val="0"/>
-              </a:spcBef>
-              <a:spcAft>
-                <a:spcPts val="400"/>
-              </a:spcAft>
-            </a:pPr>
-            <a:r>
-              <a:rPr sz="2200" b="0" i="0" lang="ar-SA">
-                <a:solidFill>
-                  <a:srgbClr val="CCFBF1"/>
-                </a:solidFill>
-                <a:latin typeface="Arial"/>
-                <a:cs typeface="Arial"/>
-              </a:rPr>
-              <a:t>كنان محمد قرحالي</a:t>
-            </a:r>
-          </a:p>
-          <a:p>
-            <a:pPr rtl="1" algn="r">
-              <a:lnSpc>
-                <a:spcPct val="120000"/>
-              </a:lnSpc>
-              <a:spcBef>
-                <a:spcPts val="0"/>
-              </a:spcBef>
-              <a:spcAft>
-                <a:spcPts val="400"/>
-              </a:spcAft>
-            </a:pPr>
-            <a:r>
-              <a:rPr sz="2200" b="0" i="0" lang="ar-SA">
-                <a:solidFill>
-                  <a:srgbClr val="CCFBF1"/>
-                </a:solidFill>
-                <a:latin typeface="Arial"/>
-                <a:cs typeface="Arial"/>
-              </a:rPr>
-              <a:t>إشراف: د. باسل الخطيب</a:t>
-            </a:r>
-          </a:p>
-        </p:txBody>
-      </p:sp>
-      <p:sp>
-        <p:nvSpPr>
-          <p:cNvPr id="7" name="شعار الجامعة"/>
-          <p:cNvSpPr/>
-          <p:nvPr/>
-        </p:nvSpPr>
-        <p:spPr>
-          <a:xfrm>
-            <a:off x="10957255" y="6382512"/>
-            <a:ext cx="685800" cy="292608"/>
-          </a:xfrm>
-          <a:prstGeom prst="roundRect">
-            <a:avLst>
-              <a:gd name="adj" fmla="val 50000"/>
-            </a:avLst>
-          </a:prstGeom>
-          <a:solidFill>
-            <a:srgbClr val="FFFFFF"/>
-          </a:solidFill>
-          <a:ln>
-            <a:noFill/>
-          </a:ln>
-          <a:effectLst/>
-        </p:spPr>
-        <p:style>
-          <a:lnRef idx="1">
-            <a:schemeClr val="accent1"/>
-          </a:lnRef>
-          <a:fillRef idx="3">
-            <a:schemeClr val="accent1"/>
-          </a:fillRef>
-          <a:effectRef idx="2">
-            <a:schemeClr val="accent1"/>
-          </a:effectRef>
-          <a:fontRef idx="minor">
-            <a:schemeClr val="lt1"/>
-          </a:fontRef>
-        </p:style>
-        <p:txBody>
-          <a:bodyPr rtlCol="0" anchor="ctr" wrap="square" lIns="54864" rIns="54864" tIns="18288" bIns="18288"/>
-          <a:lstStyle/>
-          <a:p>
-            <a:pPr algn="ctr" rtl="1"/>
-            <a:r>
-              <a:rPr sz="1200" b="1" i="0" lang="ar-SA">
-                <a:solidFill>
-                  <a:srgbClr val="134E4A"/>
-                </a:solidFill>
-                <a:latin typeface="Arial"/>
-                <a:cs typeface="Arial"/>
-              </a:rPr>
-              <a:t>SVU</a:t>
-            </a:r>
-          </a:p>
-        </p:txBody>
-      </p:sp>
-      <p:sp>
-        <p:nvSpPr>
-          <p:cNvPr id="8" name="تذييل"/>
-          <p:cNvSpPr txBox="1"/>
-          <p:nvPr/>
-        </p:nvSpPr>
-        <p:spPr>
-          <a:xfrm>
-            <a:off x="5287975" y="6373368"/>
-            <a:ext cx="5577840" cy="310896"/>
-          </a:xfrm>
-          <a:prstGeom prst="rect">
-            <a:avLst/>
-          </a:prstGeom>
-          <a:noFill/>
-        </p:spPr>
-        <p:txBody>
-          <a:bodyPr wrap="square" lIns="45720" rIns="45720" tIns="27432" bIns="27432" anchor="ctr">
-            <a:spAutoFit/>
-          </a:bodyPr>
-          <a:lstStyle/>
-          <a:p>
-            <a:pPr rtl="1" algn="r">
-              <a:lnSpc>
-                <a:spcPct val="115000"/>
-              </a:lnSpc>
-              <a:spcBef>
-                <a:spcPts val="0"/>
-              </a:spcBef>
-              <a:spcAft>
-                <a:spcPts val="0"/>
-              </a:spcAft>
-            </a:pPr>
-            <a:r>
               <a:rPr sz="1200" b="0" i="0" lang="ar-SA">
                 <a:solidFill>
-                  <a:srgbClr val="A7F3D0"/>
+                  <a:srgbClr val="475569"/>
                 </a:solidFill>
                 <a:latin typeface="Arial"/>
                 <a:cs typeface="Arial"/>
@@ -19477,7 +19766,7 @@
       </p:sp>
       <p:sp>
         <p:nvSpPr>
-          <p:cNvPr id="9" name="رقم الشريحة"/>
+          <p:cNvPr id="25" name="رقم الشريحة"/>
           <p:cNvSpPr txBox="1"/>
           <p:nvPr/>
         </p:nvSpPr>
@@ -19501,7 +19790,7 @@
             <a:fld id="{B6F15528-21DE-4FAA-801E-634DDDAF4B2B}" type="slidenum">
               <a:rPr lang="en-US" sz="1200">
                 <a:solidFill>
-                  <a:srgbClr val="A7F3D0"/>
+                  <a:srgbClr val="475569"/>
                 </a:solidFill>
                 <a:latin typeface="Arial"/>
               </a:rPr>
@@ -19577,7 +19866,7 @@
                 <a:latin typeface="Arial"/>
                 <a:cs typeface="Arial"/>
               </a:rPr>
-              <a:t>احتياطي: لماذا numpy فقط؟ ولماذا لا CNN؟</a:t>
+              <a:t>احتياطي: ما الدلالة الإحصائية؟</a:t>
             </a:r>
           </a:p>
         </p:txBody>
@@ -19590,8 +19879,8 @@
         </p:nvSpPr>
         <p:spPr>
           <a:xfrm>
-            <a:off x="6233007" y="1463040"/>
-            <a:ext cx="5410047" cy="4709160"/>
+            <a:off x="548639" y="1463040"/>
+            <a:ext cx="11094415" cy="4709160"/>
           </a:xfrm>
           <a:prstGeom prst="roundRect">
             <a:avLst>
@@ -19638,8 +19927,8 @@
         </p:nvSpPr>
         <p:spPr>
           <a:xfrm>
-            <a:off x="6233007" y="1463040"/>
-            <a:ext cx="5410047" cy="822960"/>
+            <a:off x="548639" y="1463040"/>
+            <a:ext cx="11094415" cy="822960"/>
           </a:xfrm>
           <a:prstGeom prst="roundRect">
             <a:avLst>
@@ -19681,7 +19970,7 @@
                 <a:latin typeface="Arial"/>
                 <a:cs typeface="Arial"/>
               </a:rPr>
-              <a:t>س: لماذا numpy فقط؟</a:t>
+              <a:t>س: كيف يُحكم على الفرق بين نموذجين؟</a:t>
             </a:r>
           </a:p>
         </p:txBody>
@@ -19694,7 +19983,7 @@
         </p:nvSpPr>
         <p:spPr>
           <a:xfrm>
-            <a:off x="11259007" y="2792349"/>
+            <a:off x="11259007" y="2702052"/>
             <a:ext cx="164592" cy="164592"/>
           </a:xfrm>
           <a:prstGeom prst="ellipse">
@@ -19738,8 +20027,8 @@
         </p:nvSpPr>
         <p:spPr>
           <a:xfrm>
-            <a:off x="6370167" y="2423160"/>
-            <a:ext cx="4769967" cy="902970"/>
+            <a:off x="685799" y="2423160"/>
+            <a:ext cx="10454335" cy="722376"/>
           </a:xfrm>
           <a:prstGeom prst="rect">
             <a:avLst/>
@@ -19764,14 +20053,14 @@
               </a:spcAft>
             </a:pPr>
             <a:r>
-              <a:rPr sz="1700" b="0" i="0" lang="ar-SA">
+              <a:rPr sz="2000" b="0" i="0" lang="ar-SA">
                 <a:solidFill>
                   <a:srgbClr val="134E4A"/>
                 </a:solidFill>
                 <a:latin typeface="Arial"/>
                 <a:cs typeface="Arial"/>
               </a:rPr>
-              <a:t>بيئة التنفيذ لا تتيح TensorFlow ولا Keras ولا scikit-learn</a:t>
+              <a:t>وحدة التحليل العرض: 13 عرضاً في 2014، ومتوسط الفروق على 3 قطوع</a:t>
             </a:r>
           </a:p>
         </p:txBody>
@@ -19784,7 +20073,7 @@
         </p:nvSpPr>
         <p:spPr>
           <a:xfrm>
-            <a:off x="11259007" y="3695319"/>
+            <a:off x="11259007" y="3424428"/>
             <a:ext cx="164592" cy="164592"/>
           </a:xfrm>
           <a:prstGeom prst="ellipse">
@@ -19828,8 +20117,8 @@
         </p:nvSpPr>
         <p:spPr>
           <a:xfrm>
-            <a:off x="6370167" y="3326130"/>
-            <a:ext cx="4769967" cy="902970"/>
+            <a:off x="685799" y="3145536"/>
+            <a:ext cx="10454335" cy="722376"/>
           </a:xfrm>
           <a:prstGeom prst="rect">
             <a:avLst/>
@@ -19854,14 +20143,14 @@
               </a:spcAft>
             </a:pPr>
             <a:r>
-              <a:rPr sz="1700" b="0" i="0" lang="ar-SA">
+              <a:rPr sz="2000" b="0" i="0" lang="ar-SA">
                 <a:solidFill>
                   <a:srgbClr val="134E4A"/>
                 </a:solidFill>
                 <a:latin typeface="Arial"/>
                 <a:cs typeface="Arial"/>
               </a:rPr>
-              <a:t>كُتبت الخوارزميات يدوياً مع اختبار تحقق لكل تنفيذ</a:t>
+              <a:t>فاصل ثقة 95% بـ bootstrap-t العنقودي المعيَّر، بعشرة آلاف إعادة</a:t>
             </a:r>
           </a:p>
         </p:txBody>
@@ -19874,7 +20163,7 @@
         </p:nvSpPr>
         <p:spPr>
           <a:xfrm>
-            <a:off x="11259007" y="4598289"/>
+            <a:off x="11259007" y="4146804"/>
             <a:ext cx="164592" cy="164592"/>
           </a:xfrm>
           <a:prstGeom prst="ellipse">
@@ -19918,8 +20207,8 @@
         </p:nvSpPr>
         <p:spPr>
           <a:xfrm>
-            <a:off x="6370167" y="4229100"/>
-            <a:ext cx="4769967" cy="902970"/>
+            <a:off x="685799" y="3867912"/>
+            <a:ext cx="10454335" cy="722376"/>
           </a:xfrm>
           <a:prstGeom prst="rect">
             <a:avLst/>
@@ -19944,14 +20233,14 @@
               </a:spcAft>
             </a:pPr>
             <a:r>
-              <a:rPr sz="1700" b="0" i="0" lang="ar-SA">
+              <a:rPr sz="2000" b="0" i="0" lang="ar-SA">
                 <a:solidFill>
                   <a:srgbClr val="134E4A"/>
                 </a:solidFill>
                 <a:latin typeface="Arial"/>
                 <a:cs typeface="Arial"/>
               </a:rPr>
-              <a:t>مثال: فحص تدرج GRU-lite بخطأ نسبي 4.3e-06</a:t>
+              <a:t>قيمة p بقلب الإشارات الدقيق (8,192 تركيبة)، وتصحيح هولم على 4 فرضيات</a:t>
             </a:r>
           </a:p>
         </p:txBody>
@@ -19964,7 +20253,7 @@
         </p:nvSpPr>
         <p:spPr>
           <a:xfrm>
-            <a:off x="11259007" y="5501259"/>
+            <a:off x="11259007" y="4869179"/>
             <a:ext cx="164592" cy="164592"/>
           </a:xfrm>
           <a:prstGeom prst="ellipse">
@@ -20008,8 +20297,8 @@
         </p:nvSpPr>
         <p:spPr>
           <a:xfrm>
-            <a:off x="6370167" y="5132070"/>
-            <a:ext cx="4769967" cy="902970"/>
+            <a:off x="685799" y="4590288"/>
+            <a:ext cx="10454335" cy="722376"/>
           </a:xfrm>
           <a:prstGeom prst="rect">
             <a:avLst/>
@@ -20034,131 +20323,27 @@
               </a:spcAft>
             </a:pPr>
             <a:r>
-              <a:rPr sz="1700" b="0" i="0" lang="ar-SA">
+              <a:rPr sz="2000" b="0" i="0" lang="ar-SA">
                 <a:solidFill>
                   <a:srgbClr val="134E4A"/>
                 </a:solidFill>
                 <a:latin typeface="Arial"/>
                 <a:cs typeface="Arial"/>
               </a:rPr>
-              <a:t>القيد معلن في الفصل الثالث (3-6-3)</a:t>
-            </a:r>
-          </a:p>
-        </p:txBody>
-      </p:sp>
-      <p:sp>
-        <p:nvSpPr>
-          <p:cNvPr id="13" name="بطاقة"/>
+              <a:t>تُؤكَّد الفرضية إن بلغ الأثر 0.02 على الأقل وكان الحد الأدنى للفاصل موجباً وp المصحَّحة أقل من 0.05</a:t>
+            </a:r>
+          </a:p>
+        </p:txBody>
+      </p:sp>
+      <p:sp>
+        <p:nvSpPr>
+          <p:cNvPr id="13" name="نقطة"/>
           <p:cNvSpPr/>
           <p:nvPr/>
         </p:nvSpPr>
         <p:spPr>
           <a:xfrm>
-            <a:off x="548640" y="1463040"/>
-            <a:ext cx="5410047" cy="4709160"/>
-          </a:xfrm>
-          <a:prstGeom prst="roundRect">
-            <a:avLst>
-              <a:gd name="adj" fmla="val 6000"/>
-            </a:avLst>
-          </a:prstGeom>
-          <a:solidFill>
-            <a:srgbClr val="FFFFFF"/>
-          </a:solidFill>
-          <a:ln w="12700">
-            <a:solidFill>
-              <a:srgbClr val="CBD5E1"/>
-            </a:solidFill>
-          </a:ln>
-          <a:effectLst/>
-        </p:spPr>
-        <p:style>
-          <a:lnRef idx="1">
-            <a:schemeClr val="accent1"/>
-          </a:lnRef>
-          <a:fillRef idx="3">
-            <a:schemeClr val="accent1"/>
-          </a:fillRef>
-          <a:effectRef idx="2">
-            <a:schemeClr val="accent1"/>
-          </a:effectRef>
-          <a:fontRef idx="minor">
-            <a:schemeClr val="lt1"/>
-          </a:fontRef>
-        </p:style>
-        <p:txBody>
-          <a:bodyPr rtlCol="0" anchor="ctr"/>
-          <a:lstStyle/>
-          <a:p>
-            <a:pPr algn="ctr"/>
-          </a:p>
-        </p:txBody>
-      </p:sp>
-      <p:sp>
-        <p:nvSpPr>
-          <p:cNvPr id="14" name="السؤال"/>
-          <p:cNvSpPr/>
-          <p:nvPr/>
-        </p:nvSpPr>
-        <p:spPr>
-          <a:xfrm>
-            <a:off x="548640" y="1463040"/>
-            <a:ext cx="5410047" cy="822960"/>
-          </a:xfrm>
-          <a:prstGeom prst="roundRect">
-            <a:avLst>
-              <a:gd name="adj" fmla="val 20000"/>
-            </a:avLst>
-          </a:prstGeom>
-          <a:solidFill>
-            <a:srgbClr val="CCFBF1"/>
-          </a:solidFill>
-          <a:ln>
-            <a:noFill/>
-          </a:ln>
-          <a:effectLst/>
-        </p:spPr>
-        <p:style>
-          <a:lnRef idx="1">
-            <a:schemeClr val="accent1"/>
-          </a:lnRef>
-          <a:fillRef idx="3">
-            <a:schemeClr val="accent1"/>
-          </a:fillRef>
-          <a:effectRef idx="2">
-            <a:schemeClr val="accent1"/>
-          </a:effectRef>
-          <a:fontRef idx="minor">
-            <a:schemeClr val="lt1"/>
-          </a:fontRef>
-        </p:style>
-        <p:txBody>
-          <a:bodyPr rtlCol="0" anchor="ctr" wrap="square" lIns="54864" rIns="228600" tIns="18288" bIns="18288"/>
-          <a:lstStyle/>
-          <a:p>
-            <a:pPr algn="r" rtl="1"/>
-            <a:r>
-              <a:rPr sz="2400" b="1" i="0" lang="ar-SA">
-                <a:solidFill>
-                  <a:srgbClr val="134E4A"/>
-                </a:solidFill>
-                <a:latin typeface="Arial"/>
-                <a:cs typeface="Arial"/>
-              </a:rPr>
-              <a:t>س: لماذا لا CNN؟</a:t>
-            </a:r>
-          </a:p>
-        </p:txBody>
-      </p:sp>
-      <p:sp>
-        <p:nvSpPr>
-          <p:cNvPr id="15" name="نقطة"/>
-          <p:cNvSpPr/>
-          <p:nvPr/>
-        </p:nvSpPr>
-        <p:spPr>
-          <a:xfrm>
-            <a:off x="5574639" y="2792349"/>
+            <a:off x="11259007" y="5591556"/>
             <a:ext cx="164592" cy="164592"/>
           </a:xfrm>
           <a:prstGeom prst="ellipse">
@@ -20196,14 +20381,14 @@
       </p:sp>
       <p:sp>
         <p:nvSpPr>
-          <p:cNvPr id="16" name="TextBox 15"/>
+          <p:cNvPr id="14" name="TextBox 13"/>
           <p:cNvSpPr txBox="1"/>
           <p:nvPr/>
         </p:nvSpPr>
         <p:spPr>
           <a:xfrm>
-            <a:off x="685800" y="2423160"/>
-            <a:ext cx="4769967" cy="902970"/>
+            <a:off x="685799" y="5312664"/>
+            <a:ext cx="10454335" cy="722376"/>
           </a:xfrm>
           <a:prstGeom prst="rect">
             <a:avLst/>
@@ -20228,291 +20413,21 @@
               </a:spcAft>
             </a:pPr>
             <a:r>
-              <a:rPr sz="1700" b="0" i="0" lang="ar-SA">
+              <a:rPr sz="2000" b="0" i="0" lang="ar-SA">
                 <a:solidFill>
                   <a:srgbClr val="134E4A"/>
                 </a:solidFill>
                 <a:latin typeface="Arial"/>
                 <a:cs typeface="Arial"/>
               </a:rPr>
-              <a:t>مرجعه الوحيد في الأدبيات المدروسة غير قابل للتكرار</a:t>
-            </a:r>
-          </a:p>
-        </p:txBody>
-      </p:sp>
-      <p:sp>
-        <p:nvSpPr>
-          <p:cNvPr id="17" name="نقطة"/>
-          <p:cNvSpPr/>
-          <p:nvPr/>
-        </p:nvSpPr>
-        <p:spPr>
-          <a:xfrm>
-            <a:off x="5574639" y="3695319"/>
-            <a:ext cx="164592" cy="164592"/>
-          </a:xfrm>
-          <a:prstGeom prst="ellipse">
-            <a:avLst/>
-          </a:prstGeom>
-          <a:solidFill>
-            <a:srgbClr val="B45309"/>
-          </a:solidFill>
-          <a:ln>
-            <a:noFill/>
-          </a:ln>
-          <a:effectLst/>
-        </p:spPr>
-        <p:style>
-          <a:lnRef idx="1">
-            <a:schemeClr val="accent1"/>
-          </a:lnRef>
-          <a:fillRef idx="3">
-            <a:schemeClr val="accent1"/>
-          </a:fillRef>
-          <a:effectRef idx="2">
-            <a:schemeClr val="accent1"/>
-          </a:effectRef>
-          <a:fontRef idx="minor">
-            <a:schemeClr val="lt1"/>
-          </a:fontRef>
-        </p:style>
-        <p:txBody>
-          <a:bodyPr rtlCol="0" anchor="ctr"/>
-          <a:lstStyle/>
-          <a:p>
-            <a:pPr algn="ctr"/>
-          </a:p>
-        </p:txBody>
-      </p:sp>
-      <p:sp>
-        <p:nvSpPr>
-          <p:cNvPr id="18" name="TextBox 17"/>
-          <p:cNvSpPr txBox="1"/>
-          <p:nvPr/>
-        </p:nvSpPr>
-        <p:spPr>
-          <a:xfrm>
-            <a:off x="685800" y="3326130"/>
-            <a:ext cx="4769967" cy="902970"/>
-          </a:xfrm>
-          <a:prstGeom prst="rect">
-            <a:avLst/>
-          </a:prstGeom>
-          <a:noFill/>
-        </p:spPr>
-        <p:txBody>
-          <a:bodyPr wrap="square" lIns="45720" rIns="45720" tIns="27432" bIns="27432" anchor="ctr">
-            <a:spAutoFit/>
-          </a:bodyPr>
-          <a:lstStyle/>
-          <a:p>
-            <a:pPr rtl="1" algn="r">
-              <a:lnSpc>
-                <a:spcPct val="105000"/>
-              </a:lnSpc>
-              <a:spcBef>
-                <a:spcPts val="0"/>
-              </a:spcBef>
-              <a:spcAft>
-                <a:spcPts val="0"/>
-              </a:spcAft>
-            </a:pPr>
-            <a:r>
-              <a:rPr sz="1700" b="0" i="0" lang="ar-SA">
-                <a:solidFill>
-                  <a:srgbClr val="134E4A"/>
-                </a:solidFill>
-                <a:latin typeface="Arial"/>
-                <a:cs typeface="Arial"/>
-              </a:rPr>
-              <a:t>سلال الأيام غير مرتبة داخلياً: لا بنية محلية تستفيد منها التلافيف</a:t>
-            </a:r>
-          </a:p>
-        </p:txBody>
-      </p:sp>
-      <p:sp>
-        <p:nvSpPr>
-          <p:cNvPr id="19" name="نقطة"/>
-          <p:cNvSpPr/>
-          <p:nvPr/>
-        </p:nvSpPr>
-        <p:spPr>
-          <a:xfrm>
-            <a:off x="5574639" y="4598289"/>
-            <a:ext cx="164592" cy="164592"/>
-          </a:xfrm>
-          <a:prstGeom prst="ellipse">
-            <a:avLst/>
-          </a:prstGeom>
-          <a:solidFill>
-            <a:srgbClr val="B45309"/>
-          </a:solidFill>
-          <a:ln>
-            <a:noFill/>
-          </a:ln>
-          <a:effectLst/>
-        </p:spPr>
-        <p:style>
-          <a:lnRef idx="1">
-            <a:schemeClr val="accent1"/>
-          </a:lnRef>
-          <a:fillRef idx="3">
-            <a:schemeClr val="accent1"/>
-          </a:fillRef>
-          <a:effectRef idx="2">
-            <a:schemeClr val="accent1"/>
-          </a:effectRef>
-          <a:fontRef idx="minor">
-            <a:schemeClr val="lt1"/>
-          </a:fontRef>
-        </p:style>
-        <p:txBody>
-          <a:bodyPr rtlCol="0" anchor="ctr"/>
-          <a:lstStyle/>
-          <a:p>
-            <a:pPr algn="ctr"/>
-          </a:p>
-        </p:txBody>
-      </p:sp>
-      <p:sp>
-        <p:nvSpPr>
-          <p:cNvPr id="20" name="TextBox 19"/>
-          <p:cNvSpPr txBox="1"/>
-          <p:nvPr/>
-        </p:nvSpPr>
-        <p:spPr>
-          <a:xfrm>
-            <a:off x="685800" y="4229100"/>
-            <a:ext cx="4769967" cy="902970"/>
-          </a:xfrm>
-          <a:prstGeom prst="rect">
-            <a:avLst/>
-          </a:prstGeom>
-          <a:noFill/>
-        </p:spPr>
-        <p:txBody>
-          <a:bodyPr wrap="square" lIns="45720" rIns="45720" tIns="27432" bIns="27432" anchor="ctr">
-            <a:spAutoFit/>
-          </a:bodyPr>
-          <a:lstStyle/>
-          <a:p>
-            <a:pPr rtl="1" algn="r">
-              <a:lnSpc>
-                <a:spcPct val="105000"/>
-              </a:lnSpc>
-              <a:spcBef>
-                <a:spcPts val="0"/>
-              </a:spcBef>
-              <a:spcAft>
-                <a:spcPts val="0"/>
-              </a:spcAft>
-            </a:pPr>
-            <a:r>
-              <a:rPr sz="1700" b="0" i="0" lang="ar-SA">
-                <a:solidFill>
-                  <a:srgbClr val="134E4A"/>
-                </a:solidFill>
-                <a:latin typeface="Arial"/>
-                <a:cs typeface="Arial"/>
-              </a:rPr>
-              <a:t>بقي الاتجاه العصبوني ممثلاً بـ GRU-lite</a:t>
-            </a:r>
-          </a:p>
-        </p:txBody>
-      </p:sp>
-      <p:sp>
-        <p:nvSpPr>
-          <p:cNvPr id="21" name="نقطة"/>
-          <p:cNvSpPr/>
-          <p:nvPr/>
-        </p:nvSpPr>
-        <p:spPr>
-          <a:xfrm>
-            <a:off x="5574639" y="5501259"/>
-            <a:ext cx="164592" cy="164592"/>
-          </a:xfrm>
-          <a:prstGeom prst="ellipse">
-            <a:avLst/>
-          </a:prstGeom>
-          <a:solidFill>
-            <a:srgbClr val="B45309"/>
-          </a:solidFill>
-          <a:ln>
-            <a:noFill/>
-          </a:ln>
-          <a:effectLst/>
-        </p:spPr>
-        <p:style>
-          <a:lnRef idx="1">
-            <a:schemeClr val="accent1"/>
-          </a:lnRef>
-          <a:fillRef idx="3">
-            <a:schemeClr val="accent1"/>
-          </a:fillRef>
-          <a:effectRef idx="2">
-            <a:schemeClr val="accent1"/>
-          </a:effectRef>
-          <a:fontRef idx="minor">
-            <a:schemeClr val="lt1"/>
-          </a:fontRef>
-        </p:style>
-        <p:txBody>
-          <a:bodyPr rtlCol="0" anchor="ctr"/>
-          <a:lstStyle/>
-          <a:p>
-            <a:pPr algn="ctr"/>
-          </a:p>
-        </p:txBody>
-      </p:sp>
-      <p:sp>
-        <p:nvSpPr>
-          <p:cNvPr id="22" name="TextBox 21"/>
-          <p:cNvSpPr txBox="1"/>
-          <p:nvPr/>
-        </p:nvSpPr>
-        <p:spPr>
-          <a:xfrm>
-            <a:off x="685800" y="5132070"/>
-            <a:ext cx="4769967" cy="902970"/>
-          </a:xfrm>
-          <a:prstGeom prst="rect">
-            <a:avLst/>
-          </a:prstGeom>
-          <a:noFill/>
-        </p:spPr>
-        <p:txBody>
-          <a:bodyPr wrap="square" lIns="45720" rIns="45720" tIns="27432" bIns="27432" anchor="ctr">
-            <a:spAutoFit/>
-          </a:bodyPr>
-          <a:lstStyle/>
-          <a:p>
-            <a:pPr rtl="1" algn="r">
-              <a:lnSpc>
-                <a:spcPct val="105000"/>
-              </a:lnSpc>
-              <a:spcBef>
-                <a:spcPts val="0"/>
-              </a:spcBef>
-              <a:spcAft>
-                <a:spcPts val="0"/>
-              </a:spcAft>
-            </a:pPr>
-            <a:r>
-              <a:rPr sz="1700" b="0" i="0" lang="ar-SA">
-                <a:solidFill>
-                  <a:srgbClr val="134E4A"/>
-                </a:solidFill>
-                <a:latin typeface="Arial"/>
-                <a:cs typeface="Arial"/>
-              </a:rPr>
-              <a:t>الخطة نفسها تركت اختيار الأنسب أثناء البحث</a:t>
-            </a:r>
-          </a:p>
-        </p:txBody>
-      </p:sp>
-      <p:sp>
-        <p:nvSpPr>
-          <p:cNvPr id="23" name="شعار الجامعة"/>
+              <a:t>MDE80 المجمَّد: H1 0.0375، H2-أ 0.045، H3 0.050، H4-أ 0.0225</a:t>
+            </a:r>
+          </a:p>
+        </p:txBody>
+      </p:sp>
+      <p:sp>
+        <p:nvSpPr>
+          <p:cNvPr id="15" name="شعار الجامعة"/>
           <p:cNvSpPr/>
           <p:nvPr/>
         </p:nvSpPr>
@@ -20568,7 +20483,7 @@
       </p:sp>
       <p:sp>
         <p:nvSpPr>
-          <p:cNvPr id="24" name="تذييل"/>
+          <p:cNvPr id="16" name="تذييل"/>
           <p:cNvSpPr txBox="1"/>
           <p:nvPr/>
         </p:nvSpPr>
@@ -20614,7 +20529,7 @@
       </p:sp>
       <p:sp>
         <p:nvSpPr>
-          <p:cNvPr id="25" name="رقم الشريحة"/>
+          <p:cNvPr id="17" name="رقم الشريحة"/>
           <p:cNvSpPr txBox="1"/>
           <p:nvPr/>
         </p:nvSpPr>
@@ -20656,769 +20571,6 @@
 </file>
 
 <file path=ppt/slides/slide23.xml><?xml version="1.0" encoding="utf-8"?>
-<p:sld xmlns:a="http://schemas.openxmlformats.org/drawingml/2006/main" xmlns:p="http://schemas.openxmlformats.org/presentationml/2006/main" xmlns:r="http://schemas.openxmlformats.org/officeDocument/2006/relationships">
-  <p:cSld>
-    <p:bg>
-      <p:bgPr>
-        <a:solidFill>
-          <a:srgbClr val="F8FAFC"/>
-        </a:solidFill>
-        <a:effectLst/>
-      </p:bgPr>
-    </p:bg>
-    <p:spTree>
-      <p:nvGrpSpPr>
-        <p:cNvPr id="1" name=""/>
-        <p:cNvGrpSpPr/>
-        <p:nvPr/>
-      </p:nvGrpSpPr>
-      <p:grpSpPr/>
-      <p:sp>
-        <p:nvSpPr>
-          <p:cNvPr id="2" name="العنوان"/>
-          <p:cNvSpPr txBox="1"/>
-          <p:nvPr/>
-        </p:nvSpPr>
-        <p:spPr>
-          <a:xfrm>
-            <a:off x="548640" y="347472"/>
-            <a:ext cx="11094415" cy="868680"/>
-          </a:xfrm>
-          <a:prstGeom prst="rect">
-            <a:avLst/>
-          </a:prstGeom>
-          <a:noFill/>
-        </p:spPr>
-        <p:txBody>
-          <a:bodyPr wrap="square" lIns="45720" rIns="45720" tIns="27432" bIns="27432" anchor="ctr">
-            <a:spAutoFit/>
-          </a:bodyPr>
-          <a:lstStyle/>
-          <a:p>
-            <a:pPr rtl="1" algn="r">
-              <a:lnSpc>
-                <a:spcPct val="115000"/>
-              </a:lnSpc>
-              <a:spcBef>
-                <a:spcPts val="0"/>
-              </a:spcBef>
-              <a:spcAft>
-                <a:spcPts val="0"/>
-              </a:spcAft>
-            </a:pPr>
-            <a:r>
-              <a:rPr sz="3000" b="1" i="0" lang="ar-SA">
-                <a:solidFill>
-                  <a:srgbClr val="134E4A"/>
-                </a:solidFill>
-                <a:latin typeface="Arial"/>
-                <a:cs typeface="Arial"/>
-              </a:rPr>
-              <a:t>احتياطي: ما الدلالة الإحصائية؟</a:t>
-            </a:r>
-          </a:p>
-        </p:txBody>
-      </p:sp>
-      <p:sp>
-        <p:nvSpPr>
-          <p:cNvPr id="3" name="بطاقة"/>
-          <p:cNvSpPr/>
-          <p:nvPr/>
-        </p:nvSpPr>
-        <p:spPr>
-          <a:xfrm>
-            <a:off x="548639" y="1463040"/>
-            <a:ext cx="11094415" cy="4709160"/>
-          </a:xfrm>
-          <a:prstGeom prst="roundRect">
-            <a:avLst>
-              <a:gd name="adj" fmla="val 6000"/>
-            </a:avLst>
-          </a:prstGeom>
-          <a:solidFill>
-            <a:srgbClr val="FFFFFF"/>
-          </a:solidFill>
-          <a:ln w="12700">
-            <a:solidFill>
-              <a:srgbClr val="CBD5E1"/>
-            </a:solidFill>
-          </a:ln>
-          <a:effectLst/>
-        </p:spPr>
-        <p:style>
-          <a:lnRef idx="1">
-            <a:schemeClr val="accent1"/>
-          </a:lnRef>
-          <a:fillRef idx="3">
-            <a:schemeClr val="accent1"/>
-          </a:fillRef>
-          <a:effectRef idx="2">
-            <a:schemeClr val="accent1"/>
-          </a:effectRef>
-          <a:fontRef idx="minor">
-            <a:schemeClr val="lt1"/>
-          </a:fontRef>
-        </p:style>
-        <p:txBody>
-          <a:bodyPr rtlCol="0" anchor="ctr"/>
-          <a:lstStyle/>
-          <a:p>
-            <a:pPr algn="ctr"/>
-          </a:p>
-        </p:txBody>
-      </p:sp>
-      <p:sp>
-        <p:nvSpPr>
-          <p:cNvPr id="4" name="السؤال"/>
-          <p:cNvSpPr/>
-          <p:nvPr/>
-        </p:nvSpPr>
-        <p:spPr>
-          <a:xfrm>
-            <a:off x="548639" y="1463040"/>
-            <a:ext cx="11094415" cy="822960"/>
-          </a:xfrm>
-          <a:prstGeom prst="roundRect">
-            <a:avLst>
-              <a:gd name="adj" fmla="val 20000"/>
-            </a:avLst>
-          </a:prstGeom>
-          <a:solidFill>
-            <a:srgbClr val="CCFBF1"/>
-          </a:solidFill>
-          <a:ln>
-            <a:noFill/>
-          </a:ln>
-          <a:effectLst/>
-        </p:spPr>
-        <p:style>
-          <a:lnRef idx="1">
-            <a:schemeClr val="accent1"/>
-          </a:lnRef>
-          <a:fillRef idx="3">
-            <a:schemeClr val="accent1"/>
-          </a:fillRef>
-          <a:effectRef idx="2">
-            <a:schemeClr val="accent1"/>
-          </a:effectRef>
-          <a:fontRef idx="minor">
-            <a:schemeClr val="lt1"/>
-          </a:fontRef>
-        </p:style>
-        <p:txBody>
-          <a:bodyPr rtlCol="0" anchor="ctr" wrap="square" lIns="54864" rIns="228600" tIns="18288" bIns="18288"/>
-          <a:lstStyle/>
-          <a:p>
-            <a:pPr algn="r" rtl="1"/>
-            <a:r>
-              <a:rPr sz="2400" b="1" i="0" lang="ar-SA">
-                <a:solidFill>
-                  <a:srgbClr val="134E4A"/>
-                </a:solidFill>
-                <a:latin typeface="Arial"/>
-                <a:cs typeface="Arial"/>
-              </a:rPr>
-              <a:t>س: كيف يُحكم على الفرق بين نموذجين؟</a:t>
-            </a:r>
-          </a:p>
-        </p:txBody>
-      </p:sp>
-      <p:sp>
-        <p:nvSpPr>
-          <p:cNvPr id="5" name="نقطة"/>
-          <p:cNvSpPr/>
-          <p:nvPr/>
-        </p:nvSpPr>
-        <p:spPr>
-          <a:xfrm>
-            <a:off x="11259007" y="2702052"/>
-            <a:ext cx="164592" cy="164592"/>
-          </a:xfrm>
-          <a:prstGeom prst="ellipse">
-            <a:avLst/>
-          </a:prstGeom>
-          <a:solidFill>
-            <a:srgbClr val="B45309"/>
-          </a:solidFill>
-          <a:ln>
-            <a:noFill/>
-          </a:ln>
-          <a:effectLst/>
-        </p:spPr>
-        <p:style>
-          <a:lnRef idx="1">
-            <a:schemeClr val="accent1"/>
-          </a:lnRef>
-          <a:fillRef idx="3">
-            <a:schemeClr val="accent1"/>
-          </a:fillRef>
-          <a:effectRef idx="2">
-            <a:schemeClr val="accent1"/>
-          </a:effectRef>
-          <a:fontRef idx="minor">
-            <a:schemeClr val="lt1"/>
-          </a:fontRef>
-        </p:style>
-        <p:txBody>
-          <a:bodyPr rtlCol="0" anchor="ctr"/>
-          <a:lstStyle/>
-          <a:p>
-            <a:pPr algn="ctr"/>
-          </a:p>
-        </p:txBody>
-      </p:sp>
-      <p:sp>
-        <p:nvSpPr>
-          <p:cNvPr id="6" name="TextBox 5"/>
-          <p:cNvSpPr txBox="1"/>
-          <p:nvPr/>
-        </p:nvSpPr>
-        <p:spPr>
-          <a:xfrm>
-            <a:off x="685799" y="2423160"/>
-            <a:ext cx="10454335" cy="722376"/>
-          </a:xfrm>
-          <a:prstGeom prst="rect">
-            <a:avLst/>
-          </a:prstGeom>
-          <a:noFill/>
-        </p:spPr>
-        <p:txBody>
-          <a:bodyPr wrap="square" lIns="45720" rIns="45720" tIns="27432" bIns="27432" anchor="ctr">
-            <a:spAutoFit/>
-          </a:bodyPr>
-          <a:lstStyle/>
-          <a:p>
-            <a:pPr rtl="1" algn="r">
-              <a:lnSpc>
-                <a:spcPct val="105000"/>
-              </a:lnSpc>
-              <a:spcBef>
-                <a:spcPts val="0"/>
-              </a:spcBef>
-              <a:spcAft>
-                <a:spcPts val="0"/>
-              </a:spcAft>
-            </a:pPr>
-            <a:r>
-              <a:rPr sz="2000" b="0" i="0" lang="ar-SA">
-                <a:solidFill>
-                  <a:srgbClr val="134E4A"/>
-                </a:solidFill>
-                <a:latin typeface="Arial"/>
-                <a:cs typeface="Arial"/>
-              </a:rPr>
-              <a:t>وحدة التحليل العرض: 13 عرضاً في 2014، ومتوسط الفروق على 3 قطوع</a:t>
-            </a:r>
-          </a:p>
-        </p:txBody>
-      </p:sp>
-      <p:sp>
-        <p:nvSpPr>
-          <p:cNvPr id="7" name="نقطة"/>
-          <p:cNvSpPr/>
-          <p:nvPr/>
-        </p:nvSpPr>
-        <p:spPr>
-          <a:xfrm>
-            <a:off x="11259007" y="3424428"/>
-            <a:ext cx="164592" cy="164592"/>
-          </a:xfrm>
-          <a:prstGeom prst="ellipse">
-            <a:avLst/>
-          </a:prstGeom>
-          <a:solidFill>
-            <a:srgbClr val="B45309"/>
-          </a:solidFill>
-          <a:ln>
-            <a:noFill/>
-          </a:ln>
-          <a:effectLst/>
-        </p:spPr>
-        <p:style>
-          <a:lnRef idx="1">
-            <a:schemeClr val="accent1"/>
-          </a:lnRef>
-          <a:fillRef idx="3">
-            <a:schemeClr val="accent1"/>
-          </a:fillRef>
-          <a:effectRef idx="2">
-            <a:schemeClr val="accent1"/>
-          </a:effectRef>
-          <a:fontRef idx="minor">
-            <a:schemeClr val="lt1"/>
-          </a:fontRef>
-        </p:style>
-        <p:txBody>
-          <a:bodyPr rtlCol="0" anchor="ctr"/>
-          <a:lstStyle/>
-          <a:p>
-            <a:pPr algn="ctr"/>
-          </a:p>
-        </p:txBody>
-      </p:sp>
-      <p:sp>
-        <p:nvSpPr>
-          <p:cNvPr id="8" name="TextBox 7"/>
-          <p:cNvSpPr txBox="1"/>
-          <p:nvPr/>
-        </p:nvSpPr>
-        <p:spPr>
-          <a:xfrm>
-            <a:off x="685799" y="3145536"/>
-            <a:ext cx="10454335" cy="722376"/>
-          </a:xfrm>
-          <a:prstGeom prst="rect">
-            <a:avLst/>
-          </a:prstGeom>
-          <a:noFill/>
-        </p:spPr>
-        <p:txBody>
-          <a:bodyPr wrap="square" lIns="45720" rIns="45720" tIns="27432" bIns="27432" anchor="ctr">
-            <a:spAutoFit/>
-          </a:bodyPr>
-          <a:lstStyle/>
-          <a:p>
-            <a:pPr rtl="1" algn="r">
-              <a:lnSpc>
-                <a:spcPct val="105000"/>
-              </a:lnSpc>
-              <a:spcBef>
-                <a:spcPts val="0"/>
-              </a:spcBef>
-              <a:spcAft>
-                <a:spcPts val="0"/>
-              </a:spcAft>
-            </a:pPr>
-            <a:r>
-              <a:rPr sz="2000" b="0" i="0" lang="ar-SA">
-                <a:solidFill>
-                  <a:srgbClr val="134E4A"/>
-                </a:solidFill>
-                <a:latin typeface="Arial"/>
-                <a:cs typeface="Arial"/>
-              </a:rPr>
-              <a:t>فاصل ثقة 95% بـ bootstrap-t العنقودي المعيَّر، بعشرة آلاف إعادة</a:t>
-            </a:r>
-          </a:p>
-        </p:txBody>
-      </p:sp>
-      <p:sp>
-        <p:nvSpPr>
-          <p:cNvPr id="9" name="نقطة"/>
-          <p:cNvSpPr/>
-          <p:nvPr/>
-        </p:nvSpPr>
-        <p:spPr>
-          <a:xfrm>
-            <a:off x="11259007" y="4146804"/>
-            <a:ext cx="164592" cy="164592"/>
-          </a:xfrm>
-          <a:prstGeom prst="ellipse">
-            <a:avLst/>
-          </a:prstGeom>
-          <a:solidFill>
-            <a:srgbClr val="B45309"/>
-          </a:solidFill>
-          <a:ln>
-            <a:noFill/>
-          </a:ln>
-          <a:effectLst/>
-        </p:spPr>
-        <p:style>
-          <a:lnRef idx="1">
-            <a:schemeClr val="accent1"/>
-          </a:lnRef>
-          <a:fillRef idx="3">
-            <a:schemeClr val="accent1"/>
-          </a:fillRef>
-          <a:effectRef idx="2">
-            <a:schemeClr val="accent1"/>
-          </a:effectRef>
-          <a:fontRef idx="minor">
-            <a:schemeClr val="lt1"/>
-          </a:fontRef>
-        </p:style>
-        <p:txBody>
-          <a:bodyPr rtlCol="0" anchor="ctr"/>
-          <a:lstStyle/>
-          <a:p>
-            <a:pPr algn="ctr"/>
-          </a:p>
-        </p:txBody>
-      </p:sp>
-      <p:sp>
-        <p:nvSpPr>
-          <p:cNvPr id="10" name="TextBox 9"/>
-          <p:cNvSpPr txBox="1"/>
-          <p:nvPr/>
-        </p:nvSpPr>
-        <p:spPr>
-          <a:xfrm>
-            <a:off x="685799" y="3867912"/>
-            <a:ext cx="10454335" cy="722376"/>
-          </a:xfrm>
-          <a:prstGeom prst="rect">
-            <a:avLst/>
-          </a:prstGeom>
-          <a:noFill/>
-        </p:spPr>
-        <p:txBody>
-          <a:bodyPr wrap="square" lIns="45720" rIns="45720" tIns="27432" bIns="27432" anchor="ctr">
-            <a:spAutoFit/>
-          </a:bodyPr>
-          <a:lstStyle/>
-          <a:p>
-            <a:pPr rtl="1" algn="r">
-              <a:lnSpc>
-                <a:spcPct val="105000"/>
-              </a:lnSpc>
-              <a:spcBef>
-                <a:spcPts val="0"/>
-              </a:spcBef>
-              <a:spcAft>
-                <a:spcPts val="0"/>
-              </a:spcAft>
-            </a:pPr>
-            <a:r>
-              <a:rPr sz="2000" b="0" i="0" lang="ar-SA">
-                <a:solidFill>
-                  <a:srgbClr val="134E4A"/>
-                </a:solidFill>
-                <a:latin typeface="Arial"/>
-                <a:cs typeface="Arial"/>
-              </a:rPr>
-              <a:t>قيمة p بقلب الإشارات الدقيق (8,192 تركيبة)، وتصحيح هولم على 4 فرضيات</a:t>
-            </a:r>
-          </a:p>
-        </p:txBody>
-      </p:sp>
-      <p:sp>
-        <p:nvSpPr>
-          <p:cNvPr id="11" name="نقطة"/>
-          <p:cNvSpPr/>
-          <p:nvPr/>
-        </p:nvSpPr>
-        <p:spPr>
-          <a:xfrm>
-            <a:off x="11259007" y="4869179"/>
-            <a:ext cx="164592" cy="164592"/>
-          </a:xfrm>
-          <a:prstGeom prst="ellipse">
-            <a:avLst/>
-          </a:prstGeom>
-          <a:solidFill>
-            <a:srgbClr val="B45309"/>
-          </a:solidFill>
-          <a:ln>
-            <a:noFill/>
-          </a:ln>
-          <a:effectLst/>
-        </p:spPr>
-        <p:style>
-          <a:lnRef idx="1">
-            <a:schemeClr val="accent1"/>
-          </a:lnRef>
-          <a:fillRef idx="3">
-            <a:schemeClr val="accent1"/>
-          </a:fillRef>
-          <a:effectRef idx="2">
-            <a:schemeClr val="accent1"/>
-          </a:effectRef>
-          <a:fontRef idx="minor">
-            <a:schemeClr val="lt1"/>
-          </a:fontRef>
-        </p:style>
-        <p:txBody>
-          <a:bodyPr rtlCol="0" anchor="ctr"/>
-          <a:lstStyle/>
-          <a:p>
-            <a:pPr algn="ctr"/>
-          </a:p>
-        </p:txBody>
-      </p:sp>
-      <p:sp>
-        <p:nvSpPr>
-          <p:cNvPr id="12" name="TextBox 11"/>
-          <p:cNvSpPr txBox="1"/>
-          <p:nvPr/>
-        </p:nvSpPr>
-        <p:spPr>
-          <a:xfrm>
-            <a:off x="685799" y="4590288"/>
-            <a:ext cx="10454335" cy="722376"/>
-          </a:xfrm>
-          <a:prstGeom prst="rect">
-            <a:avLst/>
-          </a:prstGeom>
-          <a:noFill/>
-        </p:spPr>
-        <p:txBody>
-          <a:bodyPr wrap="square" lIns="45720" rIns="45720" tIns="27432" bIns="27432" anchor="ctr">
-            <a:spAutoFit/>
-          </a:bodyPr>
-          <a:lstStyle/>
-          <a:p>
-            <a:pPr rtl="1" algn="r">
-              <a:lnSpc>
-                <a:spcPct val="105000"/>
-              </a:lnSpc>
-              <a:spcBef>
-                <a:spcPts val="0"/>
-              </a:spcBef>
-              <a:spcAft>
-                <a:spcPts val="0"/>
-              </a:spcAft>
-            </a:pPr>
-            <a:r>
-              <a:rPr sz="2000" b="0" i="0" lang="ar-SA">
-                <a:solidFill>
-                  <a:srgbClr val="134E4A"/>
-                </a:solidFill>
-                <a:latin typeface="Arial"/>
-                <a:cs typeface="Arial"/>
-              </a:rPr>
-              <a:t>تُؤكَّد الفرضية إن بلغ الأثر 0.02 على الأقل وكان الحد الأدنى للفاصل موجباً وp المصحَّحة أقل من 0.05</a:t>
-            </a:r>
-          </a:p>
-        </p:txBody>
-      </p:sp>
-      <p:sp>
-        <p:nvSpPr>
-          <p:cNvPr id="13" name="نقطة"/>
-          <p:cNvSpPr/>
-          <p:nvPr/>
-        </p:nvSpPr>
-        <p:spPr>
-          <a:xfrm>
-            <a:off x="11259007" y="5591556"/>
-            <a:ext cx="164592" cy="164592"/>
-          </a:xfrm>
-          <a:prstGeom prst="ellipse">
-            <a:avLst/>
-          </a:prstGeom>
-          <a:solidFill>
-            <a:srgbClr val="B45309"/>
-          </a:solidFill>
-          <a:ln>
-            <a:noFill/>
-          </a:ln>
-          <a:effectLst/>
-        </p:spPr>
-        <p:style>
-          <a:lnRef idx="1">
-            <a:schemeClr val="accent1"/>
-          </a:lnRef>
-          <a:fillRef idx="3">
-            <a:schemeClr val="accent1"/>
-          </a:fillRef>
-          <a:effectRef idx="2">
-            <a:schemeClr val="accent1"/>
-          </a:effectRef>
-          <a:fontRef idx="minor">
-            <a:schemeClr val="lt1"/>
-          </a:fontRef>
-        </p:style>
-        <p:txBody>
-          <a:bodyPr rtlCol="0" anchor="ctr"/>
-          <a:lstStyle/>
-          <a:p>
-            <a:pPr algn="ctr"/>
-          </a:p>
-        </p:txBody>
-      </p:sp>
-      <p:sp>
-        <p:nvSpPr>
-          <p:cNvPr id="14" name="TextBox 13"/>
-          <p:cNvSpPr txBox="1"/>
-          <p:nvPr/>
-        </p:nvSpPr>
-        <p:spPr>
-          <a:xfrm>
-            <a:off x="685799" y="5312664"/>
-            <a:ext cx="10454335" cy="722376"/>
-          </a:xfrm>
-          <a:prstGeom prst="rect">
-            <a:avLst/>
-          </a:prstGeom>
-          <a:noFill/>
-        </p:spPr>
-        <p:txBody>
-          <a:bodyPr wrap="square" lIns="45720" rIns="45720" tIns="27432" bIns="27432" anchor="ctr">
-            <a:spAutoFit/>
-          </a:bodyPr>
-          <a:lstStyle/>
-          <a:p>
-            <a:pPr rtl="1" algn="r">
-              <a:lnSpc>
-                <a:spcPct val="105000"/>
-              </a:lnSpc>
-              <a:spcBef>
-                <a:spcPts val="0"/>
-              </a:spcBef>
-              <a:spcAft>
-                <a:spcPts val="0"/>
-              </a:spcAft>
-            </a:pPr>
-            <a:r>
-              <a:rPr sz="2000" b="0" i="0" lang="ar-SA">
-                <a:solidFill>
-                  <a:srgbClr val="134E4A"/>
-                </a:solidFill>
-                <a:latin typeface="Arial"/>
-                <a:cs typeface="Arial"/>
-              </a:rPr>
-              <a:t>MDE80 المجمَّد: H1 0.0375، H2-أ 0.045، H3 0.050، H4-أ 0.0225</a:t>
-            </a:r>
-          </a:p>
-        </p:txBody>
-      </p:sp>
-      <p:sp>
-        <p:nvSpPr>
-          <p:cNvPr id="15" name="شعار الجامعة"/>
-          <p:cNvSpPr/>
-          <p:nvPr/>
-        </p:nvSpPr>
-        <p:spPr>
-          <a:xfrm>
-            <a:off x="10957255" y="6382512"/>
-            <a:ext cx="685800" cy="292608"/>
-          </a:xfrm>
-          <a:prstGeom prst="roundRect">
-            <a:avLst>
-              <a:gd name="adj" fmla="val 50000"/>
-            </a:avLst>
-          </a:prstGeom>
-          <a:solidFill>
-            <a:srgbClr val="0F766E"/>
-          </a:solidFill>
-          <a:ln>
-            <a:noFill/>
-          </a:ln>
-          <a:effectLst/>
-        </p:spPr>
-        <p:style>
-          <a:lnRef idx="1">
-            <a:schemeClr val="accent1"/>
-          </a:lnRef>
-          <a:fillRef idx="3">
-            <a:schemeClr val="accent1"/>
-          </a:fillRef>
-          <a:effectRef idx="2">
-            <a:schemeClr val="accent1"/>
-          </a:effectRef>
-          <a:fontRef idx="minor">
-            <a:schemeClr val="lt1"/>
-          </a:fontRef>
-        </p:style>
-        <p:txBody>
-          <a:bodyPr rtlCol="0" anchor="ctr" wrap="square" lIns="54864" rIns="54864" tIns="18288" bIns="18288"/>
-          <a:lstStyle/>
-          <a:p>
-            <a:pPr algn="ctr" rtl="1"/>
-            <a:r>
-              <a:rPr sz="1200" b="1" i="0" lang="ar-SA">
-                <a:solidFill>
-                  <a:srgbClr val="FFFFFF"/>
-                </a:solidFill>
-                <a:latin typeface="Arial"/>
-                <a:cs typeface="Arial"/>
-              </a:rPr>
-              <a:t>SVU</a:t>
-            </a:r>
-          </a:p>
-        </p:txBody>
-      </p:sp>
-      <p:sp>
-        <p:nvSpPr>
-          <p:cNvPr id="16" name="تذييل"/>
-          <p:cNvSpPr txBox="1"/>
-          <p:nvPr/>
-        </p:nvSpPr>
-        <p:spPr>
-          <a:xfrm>
-            <a:off x="5287975" y="6373368"/>
-            <a:ext cx="5577840" cy="310896"/>
-          </a:xfrm>
-          <a:prstGeom prst="rect">
-            <a:avLst/>
-          </a:prstGeom>
-          <a:noFill/>
-        </p:spPr>
-        <p:txBody>
-          <a:bodyPr wrap="square" lIns="45720" rIns="45720" tIns="27432" bIns="27432" anchor="ctr">
-            <a:spAutoFit/>
-          </a:bodyPr>
-          <a:lstStyle/>
-          <a:p>
-            <a:pPr rtl="1" algn="r">
-              <a:lnSpc>
-                <a:spcPct val="115000"/>
-              </a:lnSpc>
-              <a:spcBef>
-                <a:spcPts val="0"/>
-              </a:spcBef>
-              <a:spcAft>
-                <a:spcPts val="0"/>
-              </a:spcAft>
-            </a:pPr>
-            <a:r>
-              <a:rPr sz="1200" b="0" i="0" lang="ar-SA">
-                <a:solidFill>
-                  <a:srgbClr val="475569"/>
-                </a:solidFill>
-                <a:latin typeface="Arial"/>
-                <a:cs typeface="Arial"/>
-              </a:rPr>
-              <a:t>الجامعة الافتراضية السورية  |  ماجستير علوم الوب</a:t>
-            </a:r>
-          </a:p>
-        </p:txBody>
-      </p:sp>
-      <p:sp>
-        <p:nvSpPr>
-          <p:cNvPr id="17" name="رقم الشريحة"/>
-          <p:cNvSpPr txBox="1"/>
-          <p:nvPr/>
-        </p:nvSpPr>
-        <p:spPr>
-          <a:xfrm>
-            <a:off x="548640" y="6373368"/>
-            <a:ext cx="914400" cy="310896"/>
-          </a:xfrm>
-          <a:prstGeom prst="rect">
-            <a:avLst/>
-          </a:prstGeom>
-          <a:noFill/>
-        </p:spPr>
-        <p:txBody>
-          <a:bodyPr wrap="none">
-            <a:spAutoFit/>
-          </a:bodyPr>
-          <a:lstStyle/>
-          <a:p>
-            <a:pPr rtl="1" algn="l"/>
-            <a:fld id="{B6F15528-21DE-4FAA-801E-634DDDAF4B2B}" type="slidenum">
-              <a:rPr lang="en-US" sz="1200">
-                <a:solidFill>
-                  <a:srgbClr val="475569"/>
-                </a:solidFill>
-                <a:latin typeface="Arial"/>
-              </a:rPr>
-              <a:t>‹#›</a:t>
-            </a:fld>
-          </a:p>
-        </p:txBody>
-      </p:sp>
-    </p:spTree>
-  </p:cSld>
-  <p:clrMapOvr>
-    <a:masterClrMapping/>
-  </p:clrMapOvr>
-</p:sld>
-</file>
-
-<file path=ppt/slides/slide24.xml><?xml version="1.0" encoding="utf-8"?>
 <p:sld xmlns:a="http://schemas.openxmlformats.org/drawingml/2006/main" xmlns:p="http://schemas.openxmlformats.org/presentationml/2006/main" xmlns:r="http://schemas.openxmlformats.org/officeDocument/2006/relationships">
   <p:cSld>
     <p:bg>

--- a/deliverables/07-presentation/العرض-التقديمي.pptx
+++ b/deliverables/07-presentation/العرض-التقديمي.pptx
@@ -28,6 +28,7 @@
     <p:sldId id="276" r:id="rId28"/>
     <p:sldId id="277" r:id="rId29"/>
     <p:sldId id="278" r:id="rId30"/>
+    <p:sldId id="279" r:id="rId31"/>
   </p:sldIdLst>
   <p:sldSz cx="12191695" cy="6858000" type="screen4x3"/>
   <p:notesSz cx="6858000" cy="9144000"/>
@@ -1173,7 +1174,7 @@
             <a:pPr rtl="1" algn="r"/>
             <a:r>
               <a:rPr lang="ar-SA"/>
-              <a:t>[2014: يُملأ من verdicts.csv بعد التشغيل التأكيدي.] الأحكام بالأسبقية وفق الجدولين 3-14 و3-15: مؤكَّدة، مدحوضة عكسياً، مدحوضة عملياً، غير حاسمة (وفي H3 أيضاً تكافؤ عملي وتأخر مؤكَّد). قيم MDE80 مجمَّدة قبل التشغيل من results/dev2013/mde80.md ولا قوة ملاحَظة من 2014. النتيجة السلبية نتيجة رئيسية مقبولة. H2-ب غير منطبقة بالبناء ولا تظهر. H4-ب استكشافية: المعالَجة الهجين المجمَّد والمقارِن SKNN وحده على الربع الأدنى تاريخاً؛ بلا حكم تأكيدي. للمرجع فقط (تطوير — وصفي): +0.052 [+0.022، +0.133].</a:t>
+              <a:t>الجدول مولَّد آلياً من results/conf2014/verdicts.csv المقفل. H2-أ مؤكَّدة بهامش في 13 من 13 عرضاً. H1 غير حاسمة: لا يكشف التصميم بقوة 80% أثراً أصغر من MDE80 المجمَّد. H3 وسمها «مدحوضة للتفوق» (الصف الخامس من جدول الحكم السداسي) وH4-أ مدحوضة عملياً، والشرط واحد: الحد الأعلى دون العتبة 0.02؛ وH4-أ موجبة ودالة إحصائياً لكن حدّها الأعلى دون العتبة. H2-ب غير منطبقة بالبناء. الدلالة تجيب «هل الأثر غير صفري؟» والعتبة تجيب «هل هو بحجم يستحق؟».</a:t>
             </a:r>
           </a:p>
         </p:txBody>
@@ -1245,7 +1246,7 @@
             <a:pPr rtl="1" algn="r"/>
             <a:r>
               <a:rPr lang="ar-SA"/>
-              <a:t>[2014: تُملأ من results/conf2014/ بصيغة PNG (تُحوَّل SVG عبر scripts/svg2png.py). في JSON: panel.image بمسار PNG فيحلّ محلّ المكان النائب.] التحليلات الثانوية مسجّلة مسبقاً ولا تغيّر حكم الفرضيات.</a:t>
+              <a:t>الشكل من results/conf2014/figures/fig1_forest.png (قُصّت أطرافه الفارغة؛ الأحكام في الجدول السابق). أشكال أخرى متاحة للاستعمال: fig2 الفروق لكل عرض، fig3 استئصال الإشارة، fig4 النماذج، fig5 منحنيات ROC، fig6 H4-ب، fig7 الإنصاف.</a:t>
             </a:r>
           </a:p>
         </p:txBody>
@@ -1317,7 +1318,7 @@
             <a:pPr rtl="1" algn="r"/>
             <a:r>
               <a:rPr lang="ar-SA"/>
-              <a:t>[تُكتب بعد النتائج.] المحاور الأربعة مسجّلة سلفاً. سياسة النتيجة السلبية مكتوبة في الفصل الثالث: تفوّق الشعبية الآنية على الهجين، أو الجيران على GRU-lite، نتيجة رئيسية مقبولة.</a:t>
+              <a:t>الرسائل الأربع بصياغة المشرف. (أ) الدلالة تجيب هل الأثر غير صفري، والعتبة تجيب هل هو بحجم يستحق. (ب) لا «تكافؤ» ولا أرقام تطوير في الملخص؛ التفكيك الثانوي في الشريحة الاحتياطية. (ج) H3 هي GRU-lite مقابل SKNN، ولا علاقة لها بالعناقيد؛ العنقود سياق شعبي مكمّل للجيران يظهر في التفكيك وH4-ب. (د) H2-ب غير منطبقة بالبناء.</a:t>
             </a:r>
           </a:p>
         </p:txBody>
@@ -1389,7 +1390,7 @@
             <a:pPr rtl="1" algn="r"/>
             <a:r>
               <a:rPr lang="ar-SA"/>
-              <a:t>حدود الادعاء: الوصول المستقبلي وكيل للملاءمة لا للتعلم، والتعميم داخل المؤسسة نفسها، ولم تُدمج السمات الديموغرافية في أي نموذج. من العمل المستقبلي ما يعالج هذه القيود مباشرة. [يُراجع هذا القسم بعد النتائج التأكيدية إن ظهرت قيود إضافية.]</a:t>
+              <a:t>حدود الادعاء: الوصول المستقبلي وكيل للملاءمة لا للتعلم، والتعميم داخل المؤسسة نفسها، ولم تُدمج السمات الديموغرافية في أي نموذج. من العمل المستقبلي ما يعالج هذه القيود مباشرة.</a:t>
             </a:r>
           </a:p>
         </p:txBody>
@@ -1461,7 +1462,7 @@
             <a:pPr rtl="1" algn="r"/>
             <a:r>
               <a:rPr lang="ar-SA"/>
-              <a:t>الخاتمة: أربع مساهمات تجريبية ومنهجية. لا أدّعي ابتكار خوارزمية، بل اختبار أفكار قائمة اختباراً منضبطاً على سجلات تعليمية عامة. [الجملة الختامية عن نتيجة التأكيد تُستكمل في الجولة التالية.] سواء كانت النتيجة إيجابية أم سلبية، فهي تجيب عن سؤال تحتاجه أي منصة تعليمية: ما الذي يضيفه التخصيص فوق مواد الأسبوع الحالي؟</a:t>
+              <a:t>الخاتمة: أربع مساهمات تجريبية ومنهجية، لا خوارزمية جديدة. الأحكام: H2-أ مؤكَّدة، وH1 غير حاسمة، وH3 وH4-أ مدحوضتان عملياً (وH4-أ دالة إحصائياً). والجواب عن السؤال التطبيقي: ما الذي يضيفه التخصيص فوق مواد الأسبوع الحالي؟ أثر مؤكَّد لترجيح الإشارات داخل WRMF، ولا تفوق مثبت للهجين على الشعبية الآنية.</a:t>
             </a:r>
           </a:p>
         </p:txBody>
@@ -1677,7 +1678,7 @@
             <a:pPr rtl="1" algn="r"/>
             <a:r>
               <a:rPr lang="ar-SA"/>
-              <a:t>الجواب الموثّق: قرار منهجي مبرَّر بقيد بيئي وبديل معلن. استُبعدت الـCNN لسببين: مرجعها غير قابل للتكرار، وغياب بنية محلية في سلال الأيام. الشبكة العصبونية المتكررة ممثَّلة بـ GRU-lite، وقد اجتازت حزمة صحة قبل أي تقييم.</a:t>
+              <a:t>للاستعمال عند السؤال عن الثانوي والاستكشافي فقط. الأرقام مولَّدة آلياً من ملفات التأكيد، وكلها موسومة ثانوية أو استكشافية ولا تغيّر الأحكام.</a:t>
             </a:r>
           </a:p>
         </p:txBody>
@@ -1749,7 +1750,7 @@
             <a:pPr rtl="1" algn="r"/>
             <a:r>
               <a:rPr lang="ar-SA"/>
-              <a:t>القاعدة مسجّلة قبل رؤية نتائج 2014 وتُطبَّق آلياً بالأسبقية. الفواصل على 9 عروض في التطوير وصفية فقط. الفاصل المعيَّر يغطي نحو 95% عند 13 وحدة مقابل نحو 92% للمئيني. أصغر p ممكنة نحو 0.00024. والنماذج العشوائية تُقرَّر بخمس بذور. قيم MDE80 من results/dev2013/mde80.md؛ تُلحق بـ«غير حاسمة» عبارة: لا يكشف التصميم بقوة 80% أثراً أصغر من MDE80.</a:t>
+              <a:t>الجواب الموثّق: قرار منهجي مبرَّر بقيد بيئي وبديل معلن. استُبعدت الـCNN لسببين: مرجعها غير قابل للتكرار، وغياب بنية محلية في سلال الأيام. الشبكة العصبونية المتكررة ممثَّلة بـ GRU-lite، وقد اجتازت حزمة صحة قبل أي تقييم.</a:t>
             </a:r>
           </a:p>
         </p:txBody>
@@ -1775,6 +1776,78 @@
 </file>
 
 <file path=ppt/notesSlides/notesSlide23.xml><?xml version="1.0" encoding="utf-8"?>
+<p:notes xmlns:a="http://schemas.openxmlformats.org/drawingml/2006/main" xmlns:p="http://schemas.openxmlformats.org/presentationml/2006/main" xmlns:r="http://schemas.openxmlformats.org/officeDocument/2006/relationships">
+  <p:cSld>
+    <p:spTree>
+      <p:nvGrpSpPr>
+        <p:cNvPr id="1" name=""/>
+        <p:cNvGrpSpPr/>
+        <p:nvPr/>
+      </p:nvGrpSpPr>
+      <p:grpSpPr>
+        <a:xfrm>
+          <a:off x="0" y="0"/>
+          <a:ext cx="0" cy="0"/>
+          <a:chOff x="0" y="0"/>
+          <a:chExt cx="0" cy="0"/>
+        </a:xfrm>
+      </p:grpSpPr>
+      <p:sp>
+        <p:nvSpPr>
+          <p:cNvPr id="2" name="Slide Image Placeholder 1"/>
+          <p:cNvSpPr>
+            <a:spLocks noGrp="1"/>
+          </p:cNvSpPr>
+          <p:nvPr>
+            <p:ph type="sldImg" idx="2"/>
+          </p:nvPr>
+        </p:nvSpPr>
+        <p:spPr/>
+      </p:sp>
+      <p:sp>
+        <p:nvSpPr>
+          <p:cNvPr id="3" name="Notes Placeholder 2"/>
+          <p:cNvSpPr>
+            <a:spLocks noGrp="1"/>
+          </p:cNvSpPr>
+          <p:nvPr>
+            <p:ph type="body" idx="3" sz="quarter"/>
+          </p:nvPr>
+        </p:nvSpPr>
+        <p:spPr/>
+        <p:txBody>
+          <a:bodyPr/>
+          <a:lstStyle/>
+          <a:p>
+            <a:pPr rtl="1" algn="r"/>
+            <a:r>
+              <a:rPr lang="ar-SA"/>
+              <a:t>القاعدة مسجّلة قبل رؤية نتائج 2014 وتُطبَّق آلياً بالأسبقية. الفواصل على 9 عروض في التطوير وصفية فقط. الفاصل المعيَّر يغطي نحو 95% عند 13 وحدة مقابل نحو 92% للمئيني. أصغر p ممكنة نحو 0.00024. والنماذج العشوائية تُقرَّر بخمس بذور. قيم MDE80 من results/dev2013/mde80.md؛ تُلحق بـ«غير حاسمة» عبارة: لا يكشف التصميم بقوة 80% أثراً أصغر من MDE80.</a:t>
+            </a:r>
+          </a:p>
+        </p:txBody>
+      </p:sp>
+      <p:sp>
+        <p:nvSpPr>
+          <p:cNvPr id="4" name="Slide Number Placeholder 3"/>
+          <p:cNvSpPr>
+            <a:spLocks noGrp="1"/>
+          </p:cNvSpPr>
+          <p:nvPr>
+            <p:ph type="sldNum" idx="5" sz="quarter"/>
+          </p:nvPr>
+        </p:nvSpPr>
+        <p:spPr/>
+      </p:sp>
+    </p:spTree>
+  </p:cSld>
+  <p:clrMapOvr>
+    <a:masterClrMapping/>
+  </p:clrMapOvr>
+</p:notes>
+</file>
+
+<file path=ppt/notesSlides/notesSlide24.xml><?xml version="1.0" encoding="utf-8"?>
 <p:notes xmlns:a="http://schemas.openxmlformats.org/drawingml/2006/main" xmlns:p="http://schemas.openxmlformats.org/presentationml/2006/main" xmlns:r="http://schemas.openxmlformats.org/officeDocument/2006/relationships">
   <p:cSld>
     <p:spTree>
@@ -11059,81 +11132,22 @@
                 <a:latin typeface="Arial"/>
                 <a:cs typeface="Arial"/>
               </a:rPr>
-              <a:t>نتائج التأكيد 2014: الفرضيات الأربع والاستكشافية</a:t>
-            </a:r>
-          </a:p>
-        </p:txBody>
-      </p:sp>
-      <p:sp>
-        <p:nvSpPr>
-          <p:cNvPr id="3" name="شريط الحالة"/>
-          <p:cNvSpPr/>
-          <p:nvPr/>
-        </p:nvSpPr>
-        <p:spPr>
-          <a:xfrm>
-            <a:off x="548640" y="1261872"/>
-            <a:ext cx="11094415" cy="420624"/>
-          </a:xfrm>
-          <a:prstGeom prst="roundRect">
-            <a:avLst>
-              <a:gd name="adj" fmla="val 25000"/>
-            </a:avLst>
-          </a:prstGeom>
-          <a:solidFill>
-            <a:srgbClr val="FEF3C7"/>
-          </a:solidFill>
-          <a:ln w="12700">
-            <a:solidFill>
-              <a:srgbClr val="B45309"/>
-            </a:solidFill>
-            <a:prstDash val="dash"/>
-          </a:ln>
-          <a:effectLst/>
-        </p:spPr>
-        <p:style>
-          <a:lnRef idx="1">
-            <a:schemeClr val="accent1"/>
-          </a:lnRef>
-          <a:fillRef idx="3">
-            <a:schemeClr val="accent1"/>
-          </a:fillRef>
-          <a:effectRef idx="2">
-            <a:schemeClr val="accent1"/>
-          </a:effectRef>
-          <a:fontRef idx="minor">
-            <a:schemeClr val="lt1"/>
-          </a:fontRef>
-        </p:style>
-        <p:txBody>
-          <a:bodyPr rtlCol="0" anchor="ctr" wrap="square" lIns="54864" rIns="228600" tIns="18288" bIns="18288"/>
-          <a:lstStyle/>
-          <a:p>
-            <a:pPr algn="r" rtl="1"/>
-            <a:r>
-              <a:rPr sz="1500" b="1" i="0" lang="ar-SA">
-                <a:solidFill>
-                  <a:srgbClr val="92400E"/>
-                </a:solidFill>
-                <a:latin typeface="Arial"/>
-                <a:cs typeface="Arial"/>
-              </a:rPr>
-              <a:t>[2014] قيد الاستكمال: تُملأ من نتائج التشغيل التأكيدي الوحيد</a:t>
+              <a:t>نتائج التأكيد 2014: أحكام الفرضيات الأربع</a:t>
             </a:r>
           </a:p>
         </p:txBody>
       </p:sp>
       <p:graphicFrame>
         <p:nvGraphicFramePr>
-          <p:cNvPr id="4" name="جدول"/>
+          <p:cNvPr id="3" name="جدول"/>
           <p:cNvGraphicFramePr>
             <a:graphicFrameLocks noGrp="1"/>
           </p:cNvGraphicFramePr>
           <p:nvPr/>
         </p:nvGraphicFramePr>
         <p:xfrm>
-          <a:off x="548640" y="1874519"/>
-          <a:ext cx="11094412" cy="3794760"/>
+          <a:off x="548640" y="1463040"/>
+          <a:ext cx="11094410" cy="3657600"/>
         </p:xfrm>
         <a:graphic>
           <a:graphicData uri="http://schemas.openxmlformats.org/drawingml/2006/table">
@@ -11142,14 +11156,14 @@
                 <a:tableStyleId>{5C22544A-7EE6-4342-B048-85BDC9FD1C3A}</a:tableStyleId>
               </a:tblPr>
               <a:tblGrid>
-                <a:gridCol w="1636880"/>
-                <a:gridCol w="1545943"/>
-                <a:gridCol w="1455005"/>
-                <a:gridCol w="1818756"/>
-                <a:gridCol w="1364067"/>
-                <a:gridCol w="3273761"/>
+                <a:gridCol w="2025170"/>
+                <a:gridCol w="1232712"/>
+                <a:gridCol w="1320763"/>
+                <a:gridCol w="2113221"/>
+                <a:gridCol w="1232712"/>
+                <a:gridCol w="3169832"/>
               </a:tblGrid>
-              <a:tr h="632460">
+              <a:tr h="731520">
                 <a:tc>
                   <a:txBody>
                     <a:bodyPr wrap="square"/>
@@ -11188,7 +11202,7 @@
                           <a:latin typeface="Arial"/>
                           <a:cs typeface="Arial"/>
                         </a:rPr>
-                        <a:t>MDE80 المجمَّد</a:t>
+                        <a:t>عروض Δ&gt;0</a:t>
                       </a:r>
                     </a:p>
                   </a:txBody>
@@ -11212,7 +11226,7 @@
                           <a:latin typeface="Arial"/>
                           <a:cs typeface="Arial"/>
                         </a:rPr>
-                        <a:t>p المصحَّحة</a:t>
+                        <a:t>p بعد هولم</a:t>
                       </a:r>
                     </a:p>
                   </a:txBody>
@@ -11295,28 +11309,28 @@
                   </a:tcPr>
                 </a:tc>
               </a:tr>
-              <a:tr h="632460">
+              <a:tr h="731520">
                 <a:tc>
                   <a:txBody>
                     <a:bodyPr wrap="square"/>
                     <a:lstStyle/>
                     <a:p>
-                      <a:pPr rtl="1" algn="ctr"/>
+                      <a:pPr rtl="1" algn="r"/>
                       <a:r>
-                        <a:rPr sz="1500" b="0" i="1" lang="ar-SA">
+                        <a:rPr sz="1500" b="0" i="0" lang="ar-SA">
                           <a:solidFill>
-                            <a:srgbClr val="92400E"/>
+                            <a:srgbClr val="134E4A"/>
                           </a:solidFill>
                           <a:latin typeface="Arial"/>
                           <a:cs typeface="Arial"/>
                         </a:rPr>
-                        <a:t>[2014]</a:t>
+                        <a:t>غير حاسمة</a:t>
                       </a:r>
                     </a:p>
                   </a:txBody>
                   <a:tcPr anchor="ctr" marL="91440" marR="91440" marT="36576" marB="36576">
                     <a:solidFill>
-                      <a:srgbClr val="FEF3C7"/>
+                      <a:srgbClr val="FFFFFF"/>
                     </a:solidFill>
                   </a:tcPr>
                 </a:tc>
@@ -11334,7 +11348,7 @@
                           <a:latin typeface="Arial"/>
                           <a:cs typeface="Arial"/>
                         </a:rPr>
-                        <a:t>0.0375</a:t>
+                        <a:t>‭4/13‬</a:t>
                       </a:r>
                     </a:p>
                   </a:txBody>
@@ -11349,22 +11363,22 @@
                     <a:bodyPr wrap="square"/>
                     <a:lstStyle/>
                     <a:p>
-                      <a:pPr rtl="1" algn="ctr"/>
+                      <a:pPr rtl="1" algn="r"/>
                       <a:r>
-                        <a:rPr sz="1500" b="0" i="1" lang="ar-SA">
+                        <a:rPr sz="1500" b="0" i="0" lang="ar-SA">
                           <a:solidFill>
-                            <a:srgbClr val="92400E"/>
+                            <a:srgbClr val="134E4A"/>
                           </a:solidFill>
                           <a:latin typeface="Arial"/>
                           <a:cs typeface="Arial"/>
                         </a:rPr>
-                        <a:t>[2014]</a:t>
+                        <a:t>‭0.9429‬</a:t>
                       </a:r>
                     </a:p>
                   </a:txBody>
                   <a:tcPr anchor="ctr" marL="91440" marR="91440" marT="36576" marB="36576">
                     <a:solidFill>
-                      <a:srgbClr val="FEF3C7"/>
+                      <a:srgbClr val="FFFFFF"/>
                     </a:solidFill>
                   </a:tcPr>
                 </a:tc>
@@ -11373,22 +11387,22 @@
                     <a:bodyPr wrap="square"/>
                     <a:lstStyle/>
                     <a:p>
-                      <a:pPr rtl="1" algn="ctr"/>
+                      <a:pPr rtl="1" algn="r"/>
                       <a:r>
-                        <a:rPr sz="1500" b="0" i="1" lang="ar-SA">
+                        <a:rPr sz="1500" b="0" i="0" lang="ar-SA">
                           <a:solidFill>
-                            <a:srgbClr val="92400E"/>
+                            <a:srgbClr val="134E4A"/>
                           </a:solidFill>
                           <a:latin typeface="Arial"/>
                           <a:cs typeface="Arial"/>
                         </a:rPr>
-                        <a:t>[2014]</a:t>
+                        <a:t>‭[-0.0166, +0.0204]‬</a:t>
                       </a:r>
                     </a:p>
                   </a:txBody>
                   <a:tcPr anchor="ctr" marL="91440" marR="91440" marT="36576" marB="36576">
                     <a:solidFill>
-                      <a:srgbClr val="FEF3C7"/>
+                      <a:srgbClr val="FFFFFF"/>
                     </a:solidFill>
                   </a:tcPr>
                 </a:tc>
@@ -11397,22 +11411,22 @@
                     <a:bodyPr wrap="square"/>
                     <a:lstStyle/>
                     <a:p>
-                      <a:pPr rtl="1" algn="ctr"/>
+                      <a:pPr rtl="1" algn="r"/>
                       <a:r>
-                        <a:rPr sz="1500" b="0" i="1" lang="ar-SA">
+                        <a:rPr sz="1500" b="0" i="0" lang="ar-SA">
                           <a:solidFill>
-                            <a:srgbClr val="92400E"/>
+                            <a:srgbClr val="134E4A"/>
                           </a:solidFill>
                           <a:latin typeface="Arial"/>
                           <a:cs typeface="Arial"/>
                         </a:rPr>
-                        <a:t>[2014]</a:t>
+                        <a:t>‭-0.0006‬</a:t>
                       </a:r>
                     </a:p>
                   </a:txBody>
                   <a:tcPr anchor="ctr" marL="91440" marR="91440" marT="36576" marB="36576">
                     <a:solidFill>
-                      <a:srgbClr val="FEF3C7"/>
+                      <a:srgbClr val="FFFFFF"/>
                     </a:solidFill>
                   </a:tcPr>
                 </a:tc>
@@ -11430,7 +11444,7 @@
                           <a:latin typeface="Arial"/>
                           <a:cs typeface="Arial"/>
                         </a:rPr>
-                        <a:t>H1 · الهجين مقابل أقوى خط أساس غير شخصي</a:t>
+                        <a:t>H1 · الهجين مقابل الشعبية الآنية</a:t>
                       </a:r>
                     </a:p>
                   </a:txBody>
@@ -11441,28 +11455,28 @@
                   </a:tcPr>
                 </a:tc>
               </a:tr>
-              <a:tr h="632460">
+              <a:tr h="731520">
                 <a:tc>
                   <a:txBody>
                     <a:bodyPr wrap="square"/>
                     <a:lstStyle/>
                     <a:p>
-                      <a:pPr rtl="1" algn="ctr"/>
+                      <a:pPr rtl="1" algn="r"/>
                       <a:r>
-                        <a:rPr sz="1500" b="0" i="1" lang="ar-SA">
+                        <a:rPr sz="1500" b="0" i="0" lang="ar-SA">
                           <a:solidFill>
-                            <a:srgbClr val="92400E"/>
+                            <a:srgbClr val="134E4A"/>
                           </a:solidFill>
                           <a:latin typeface="Arial"/>
                           <a:cs typeface="Arial"/>
                         </a:rPr>
-                        <a:t>[2014]</a:t>
+                        <a:t>مؤكَّدة (بهامش)</a:t>
                       </a:r>
                     </a:p>
                   </a:txBody>
                   <a:tcPr anchor="ctr" marL="91440" marR="91440" marT="36576" marB="36576">
                     <a:solidFill>
-                      <a:srgbClr val="FEF3C7"/>
+                      <a:srgbClr val="EEF2F6"/>
                     </a:solidFill>
                   </a:tcPr>
                 </a:tc>
@@ -11480,7 +11494,7 @@
                           <a:latin typeface="Arial"/>
                           <a:cs typeface="Arial"/>
                         </a:rPr>
-                        <a:t>0.045</a:t>
+                        <a:t>‭13/13‬</a:t>
                       </a:r>
                     </a:p>
                   </a:txBody>
@@ -11495,22 +11509,22 @@
                     <a:bodyPr wrap="square"/>
                     <a:lstStyle/>
                     <a:p>
-                      <a:pPr rtl="1" algn="ctr"/>
+                      <a:pPr rtl="1" algn="r"/>
                       <a:r>
-                        <a:rPr sz="1500" b="0" i="1" lang="ar-SA">
+                        <a:rPr sz="1500" b="0" i="0" lang="ar-SA">
                           <a:solidFill>
-                            <a:srgbClr val="92400E"/>
+                            <a:srgbClr val="134E4A"/>
                           </a:solidFill>
                           <a:latin typeface="Arial"/>
                           <a:cs typeface="Arial"/>
                         </a:rPr>
-                        <a:t>[2014]</a:t>
+                        <a:t>‭0.0010‬</a:t>
                       </a:r>
                     </a:p>
                   </a:txBody>
                   <a:tcPr anchor="ctr" marL="91440" marR="91440" marT="36576" marB="36576">
                     <a:solidFill>
-                      <a:srgbClr val="FEF3C7"/>
+                      <a:srgbClr val="EEF2F6"/>
                     </a:solidFill>
                   </a:tcPr>
                 </a:tc>
@@ -11519,22 +11533,22 @@
                     <a:bodyPr wrap="square"/>
                     <a:lstStyle/>
                     <a:p>
-                      <a:pPr rtl="1" algn="ctr"/>
+                      <a:pPr rtl="1" algn="r"/>
                       <a:r>
-                        <a:rPr sz="1500" b="0" i="1" lang="ar-SA">
+                        <a:rPr sz="1500" b="0" i="0" lang="ar-SA">
                           <a:solidFill>
-                            <a:srgbClr val="92400E"/>
+                            <a:srgbClr val="134E4A"/>
                           </a:solidFill>
                           <a:latin typeface="Arial"/>
                           <a:cs typeface="Arial"/>
                         </a:rPr>
-                        <a:t>[2014]</a:t>
+                        <a:t>‭[+0.0352, +0.0659]‬</a:t>
                       </a:r>
                     </a:p>
                   </a:txBody>
                   <a:tcPr anchor="ctr" marL="91440" marR="91440" marT="36576" marB="36576">
                     <a:solidFill>
-                      <a:srgbClr val="FEF3C7"/>
+                      <a:srgbClr val="EEF2F6"/>
                     </a:solidFill>
                   </a:tcPr>
                 </a:tc>
@@ -11543,22 +11557,22 @@
                     <a:bodyPr wrap="square"/>
                     <a:lstStyle/>
                     <a:p>
-                      <a:pPr rtl="1" algn="ctr"/>
+                      <a:pPr rtl="1" algn="r"/>
                       <a:r>
-                        <a:rPr sz="1500" b="0" i="1" lang="ar-SA">
+                        <a:rPr sz="1500" b="0" i="0" lang="ar-SA">
                           <a:solidFill>
-                            <a:srgbClr val="92400E"/>
+                            <a:srgbClr val="134E4A"/>
                           </a:solidFill>
                           <a:latin typeface="Arial"/>
                           <a:cs typeface="Arial"/>
                         </a:rPr>
-                        <a:t>[2014]</a:t>
+                        <a:t>‭+0.0497‬</a:t>
                       </a:r>
                     </a:p>
                   </a:txBody>
                   <a:tcPr anchor="ctr" marL="91440" marR="91440" marT="36576" marB="36576">
                     <a:solidFill>
-                      <a:srgbClr val="FEF3C7"/>
+                      <a:srgbClr val="EEF2F6"/>
                     </a:solidFill>
                   </a:tcPr>
                 </a:tc>
@@ -11587,28 +11601,28 @@
                   </a:tcPr>
                 </a:tc>
               </a:tr>
-              <a:tr h="632460">
+              <a:tr h="731520">
                 <a:tc>
                   <a:txBody>
                     <a:bodyPr wrap="square"/>
                     <a:lstStyle/>
                     <a:p>
-                      <a:pPr rtl="1" algn="ctr"/>
+                      <a:pPr rtl="1" algn="r"/>
                       <a:r>
-                        <a:rPr sz="1500" b="0" i="1" lang="ar-SA">
+                        <a:rPr sz="1500" b="0" i="0" lang="ar-SA">
                           <a:solidFill>
-                            <a:srgbClr val="92400E"/>
+                            <a:srgbClr val="134E4A"/>
                           </a:solidFill>
                           <a:latin typeface="Arial"/>
                           <a:cs typeface="Arial"/>
                         </a:rPr>
-                        <a:t>[2014]</a:t>
+                        <a:t>مدحوضة للتفوق</a:t>
                       </a:r>
                     </a:p>
                   </a:txBody>
                   <a:tcPr anchor="ctr" marL="91440" marR="91440" marT="36576" marB="36576">
                     <a:solidFill>
-                      <a:srgbClr val="FEF3C7"/>
+                      <a:srgbClr val="FFFFFF"/>
                     </a:solidFill>
                   </a:tcPr>
                 </a:tc>
@@ -11626,7 +11640,7 @@
                           <a:latin typeface="Arial"/>
                           <a:cs typeface="Arial"/>
                         </a:rPr>
-                        <a:t>0.050</a:t>
+                        <a:t>‭5/13‬</a:t>
                       </a:r>
                     </a:p>
                   </a:txBody>
@@ -11641,22 +11655,22 @@
                     <a:bodyPr wrap="square"/>
                     <a:lstStyle/>
                     <a:p>
-                      <a:pPr rtl="1" algn="ctr"/>
+                      <a:pPr rtl="1" algn="r"/>
                       <a:r>
-                        <a:rPr sz="1500" b="0" i="1" lang="ar-SA">
+                        <a:rPr sz="1500" b="0" i="0" lang="ar-SA">
                           <a:solidFill>
-                            <a:srgbClr val="92400E"/>
+                            <a:srgbClr val="134E4A"/>
                           </a:solidFill>
                           <a:latin typeface="Arial"/>
                           <a:cs typeface="Arial"/>
                         </a:rPr>
-                        <a:t>[2014]</a:t>
+                        <a:t>‭0.7305‬</a:t>
                       </a:r>
                     </a:p>
                   </a:txBody>
                   <a:tcPr anchor="ctr" marL="91440" marR="91440" marT="36576" marB="36576">
                     <a:solidFill>
-                      <a:srgbClr val="FEF3C7"/>
+                      <a:srgbClr val="FFFFFF"/>
                     </a:solidFill>
                   </a:tcPr>
                 </a:tc>
@@ -11665,22 +11679,22 @@
                     <a:bodyPr wrap="square"/>
                     <a:lstStyle/>
                     <a:p>
-                      <a:pPr rtl="1" algn="ctr"/>
+                      <a:pPr rtl="1" algn="r"/>
                       <a:r>
-                        <a:rPr sz="1500" b="0" i="1" lang="ar-SA">
+                        <a:rPr sz="1500" b="0" i="0" lang="ar-SA">
                           <a:solidFill>
-                            <a:srgbClr val="92400E"/>
+                            <a:srgbClr val="134E4A"/>
                           </a:solidFill>
                           <a:latin typeface="Arial"/>
                           <a:cs typeface="Arial"/>
                         </a:rPr>
-                        <a:t>[2014]</a:t>
+                        <a:t>‭[-0.0349, +0.0123]‬</a:t>
                       </a:r>
                     </a:p>
                   </a:txBody>
                   <a:tcPr anchor="ctr" marL="91440" marR="91440" marT="36576" marB="36576">
                     <a:solidFill>
-                      <a:srgbClr val="FEF3C7"/>
+                      <a:srgbClr val="FFFFFF"/>
                     </a:solidFill>
                   </a:tcPr>
                 </a:tc>
@@ -11689,22 +11703,22 @@
                     <a:bodyPr wrap="square"/>
                     <a:lstStyle/>
                     <a:p>
-                      <a:pPr rtl="1" algn="ctr"/>
+                      <a:pPr rtl="1" algn="r"/>
                       <a:r>
-                        <a:rPr sz="1500" b="0" i="1" lang="ar-SA">
+                        <a:rPr sz="1500" b="0" i="0" lang="ar-SA">
                           <a:solidFill>
-                            <a:srgbClr val="92400E"/>
+                            <a:srgbClr val="134E4A"/>
                           </a:solidFill>
                           <a:latin typeface="Arial"/>
                           <a:cs typeface="Arial"/>
                         </a:rPr>
-                        <a:t>[2014]</a:t>
+                        <a:t>‭-0.0100‬</a:t>
                       </a:r>
                     </a:p>
                   </a:txBody>
                   <a:tcPr anchor="ctr" marL="91440" marR="91440" marT="36576" marB="36576">
                     <a:solidFill>
-                      <a:srgbClr val="FEF3C7"/>
+                      <a:srgbClr val="FFFFFF"/>
                     </a:solidFill>
                   </a:tcPr>
                 </a:tc>
@@ -11722,7 +11736,7 @@
                           <a:latin typeface="Arial"/>
                           <a:cs typeface="Arial"/>
                         </a:rPr>
-                        <a:t>H3 · GRU-lite مقابل أفضل تسلسلي غير عصبوني</a:t>
+                        <a:t>H3 · GRU-lite مقابل SKNN</a:t>
                       </a:r>
                     </a:p>
                   </a:txBody>
@@ -11733,28 +11747,28 @@
                   </a:tcPr>
                 </a:tc>
               </a:tr>
-              <a:tr h="632460">
+              <a:tr h="731520">
                 <a:tc>
                   <a:txBody>
                     <a:bodyPr wrap="square"/>
                     <a:lstStyle/>
                     <a:p>
-                      <a:pPr rtl="1" algn="ctr"/>
+                      <a:pPr rtl="1" algn="r"/>
                       <a:r>
-                        <a:rPr sz="1500" b="0" i="1" lang="ar-SA">
+                        <a:rPr sz="1500" b="0" i="0" lang="ar-SA">
                           <a:solidFill>
-                            <a:srgbClr val="92400E"/>
+                            <a:srgbClr val="134E4A"/>
                           </a:solidFill>
                           <a:latin typeface="Arial"/>
                           <a:cs typeface="Arial"/>
                         </a:rPr>
-                        <a:t>[2014]</a:t>
+                        <a:t>مدحوضة عملياً</a:t>
                       </a:r>
                     </a:p>
                   </a:txBody>
                   <a:tcPr anchor="ctr" marL="91440" marR="91440" marT="36576" marB="36576">
                     <a:solidFill>
-                      <a:srgbClr val="FEF3C7"/>
+                      <a:srgbClr val="EEF2F6"/>
                     </a:solidFill>
                   </a:tcPr>
                 </a:tc>
@@ -11772,7 +11786,7 @@
                           <a:latin typeface="Arial"/>
                           <a:cs typeface="Arial"/>
                         </a:rPr>
-                        <a:t>0.0225</a:t>
+                        <a:t>‭11/13‬</a:t>
                       </a:r>
                     </a:p>
                   </a:txBody>
@@ -11787,22 +11801,22 @@
                     <a:bodyPr wrap="square"/>
                     <a:lstStyle/>
                     <a:p>
-                      <a:pPr rtl="1" algn="ctr"/>
+                      <a:pPr rtl="1" algn="r"/>
                       <a:r>
-                        <a:rPr sz="1500" b="0" i="1" lang="ar-SA">
+                        <a:rPr sz="1500" b="0" i="0" lang="ar-SA">
                           <a:solidFill>
-                            <a:srgbClr val="92400E"/>
+                            <a:srgbClr val="134E4A"/>
                           </a:solidFill>
                           <a:latin typeface="Arial"/>
                           <a:cs typeface="Arial"/>
                         </a:rPr>
-                        <a:t>[2014]</a:t>
+                        <a:t>‭0.0439‬</a:t>
                       </a:r>
                     </a:p>
                   </a:txBody>
                   <a:tcPr anchor="ctr" marL="91440" marR="91440" marT="36576" marB="36576">
                     <a:solidFill>
-                      <a:srgbClr val="FEF3C7"/>
+                      <a:srgbClr val="EEF2F6"/>
                     </a:solidFill>
                   </a:tcPr>
                 </a:tc>
@@ -11811,22 +11825,22 @@
                     <a:bodyPr wrap="square"/>
                     <a:lstStyle/>
                     <a:p>
-                      <a:pPr rtl="1" algn="ctr"/>
+                      <a:pPr rtl="1" algn="r"/>
                       <a:r>
-                        <a:rPr sz="1500" b="0" i="1" lang="ar-SA">
+                        <a:rPr sz="1500" b="0" i="0" lang="ar-SA">
                           <a:solidFill>
-                            <a:srgbClr val="92400E"/>
+                            <a:srgbClr val="134E4A"/>
                           </a:solidFill>
                           <a:latin typeface="Arial"/>
                           <a:cs typeface="Arial"/>
                         </a:rPr>
-                        <a:t>[2014]</a:t>
+                        <a:t>‭[+0.0019, +0.0144]‬</a:t>
                       </a:r>
                     </a:p>
                   </a:txBody>
                   <a:tcPr anchor="ctr" marL="91440" marR="91440" marT="36576" marB="36576">
                     <a:solidFill>
-                      <a:srgbClr val="FEF3C7"/>
+                      <a:srgbClr val="EEF2F6"/>
                     </a:solidFill>
                   </a:tcPr>
                 </a:tc>
@@ -11835,22 +11849,22 @@
                     <a:bodyPr wrap="square"/>
                     <a:lstStyle/>
                     <a:p>
-                      <a:pPr rtl="1" algn="ctr"/>
+                      <a:pPr rtl="1" algn="r"/>
                       <a:r>
-                        <a:rPr sz="1500" b="0" i="1" lang="ar-SA">
+                        <a:rPr sz="1500" b="0" i="0" lang="ar-SA">
                           <a:solidFill>
-                            <a:srgbClr val="92400E"/>
+                            <a:srgbClr val="134E4A"/>
                           </a:solidFill>
                           <a:latin typeface="Arial"/>
                           <a:cs typeface="Arial"/>
                         </a:rPr>
-                        <a:t>[2014]</a:t>
+                        <a:t>‭+0.0083‬</a:t>
                       </a:r>
                     </a:p>
                   </a:txBody>
                   <a:tcPr anchor="ctr" marL="91440" marR="91440" marT="36576" marB="36576">
                     <a:solidFill>
-                      <a:srgbClr val="FEF3C7"/>
+                      <a:srgbClr val="EEF2F6"/>
                     </a:solidFill>
                   </a:tcPr>
                 </a:tc>
@@ -11868,7 +11882,7 @@
                           <a:latin typeface="Arial"/>
                           <a:cs typeface="Arial"/>
                         </a:rPr>
-                        <a:t>H4-أ · ملامح VLE مقابل مجموع النقرات (AUC)</a:t>
+                        <a:t>H4-أ · ملامح السلوك مقابل مجموع النقرات (AUC)</a:t>
                       </a:r>
                     </a:p>
                   </a:txBody>
@@ -11879,165 +11893,19 @@
                   </a:tcPr>
                 </a:tc>
               </a:tr>
-              <a:tr h="632460">
-                <a:tc>
-                  <a:txBody>
-                    <a:bodyPr wrap="square"/>
-                    <a:lstStyle/>
-                    <a:p>
-                      <a:pPr rtl="1" algn="r"/>
-                      <a:r>
-                        <a:rPr sz="1500" b="1" i="0" lang="ar-SA">
-                          <a:solidFill>
-                            <a:srgbClr val="134E4A"/>
-                          </a:solidFill>
-                          <a:latin typeface="Arial"/>
-                          <a:cs typeface="Arial"/>
-                        </a:rPr>
-                        <a:t>استكشافي — لا حكم</a:t>
-                      </a:r>
-                    </a:p>
-                  </a:txBody>
-                  <a:tcPr anchor="ctr" marL="91440" marR="91440" marT="36576" marB="36576">
-                    <a:solidFill>
-                      <a:srgbClr val="CCFBF1"/>
-                    </a:solidFill>
-                  </a:tcPr>
-                </a:tc>
-                <a:tc>
-                  <a:txBody>
-                    <a:bodyPr wrap="square"/>
-                    <a:lstStyle/>
-                    <a:p>
-                      <a:pPr rtl="1" algn="r"/>
-                      <a:r>
-                        <a:rPr sz="1500" b="0" i="0" lang="ar-SA">
-                          <a:solidFill>
-                            <a:srgbClr val="134E4A"/>
-                          </a:solidFill>
-                          <a:latin typeface="Arial"/>
-                          <a:cs typeface="Arial"/>
-                        </a:rPr>
-                        <a:t>—</a:t>
-                      </a:r>
-                    </a:p>
-                  </a:txBody>
-                  <a:tcPr anchor="ctr" marL="91440" marR="91440" marT="36576" marB="36576">
-                    <a:solidFill>
-                      <a:srgbClr val="CCFBF1"/>
-                    </a:solidFill>
-                  </a:tcPr>
-                </a:tc>
-                <a:tc>
-                  <a:txBody>
-                    <a:bodyPr wrap="square"/>
-                    <a:lstStyle/>
-                    <a:p>
-                      <a:pPr rtl="1" algn="ctr"/>
-                      <a:r>
-                        <a:rPr sz="1500" b="0" i="1" lang="ar-SA">
-                          <a:solidFill>
-                            <a:srgbClr val="92400E"/>
-                          </a:solidFill>
-                          <a:latin typeface="Arial"/>
-                          <a:cs typeface="Arial"/>
-                        </a:rPr>
-                        <a:t>[2014] غير مصحَّحة</a:t>
-                      </a:r>
-                    </a:p>
-                  </a:txBody>
-                  <a:tcPr anchor="ctr" marL="91440" marR="91440" marT="36576" marB="36576">
-                    <a:solidFill>
-                      <a:srgbClr val="FEF3C7"/>
-                    </a:solidFill>
-                  </a:tcPr>
-                </a:tc>
-                <a:tc>
-                  <a:txBody>
-                    <a:bodyPr wrap="square"/>
-                    <a:lstStyle/>
-                    <a:p>
-                      <a:pPr rtl="1" algn="ctr"/>
-                      <a:r>
-                        <a:rPr sz="1500" b="0" i="1" lang="ar-SA">
-                          <a:solidFill>
-                            <a:srgbClr val="92400E"/>
-                          </a:solidFill>
-                          <a:latin typeface="Arial"/>
-                          <a:cs typeface="Arial"/>
-                        </a:rPr>
-                        <a:t>[2014]</a:t>
-                      </a:r>
-                    </a:p>
-                  </a:txBody>
-                  <a:tcPr anchor="ctr" marL="91440" marR="91440" marT="36576" marB="36576">
-                    <a:solidFill>
-                      <a:srgbClr val="FEF3C7"/>
-                    </a:solidFill>
-                  </a:tcPr>
-                </a:tc>
-                <a:tc>
-                  <a:txBody>
-                    <a:bodyPr wrap="square"/>
-                    <a:lstStyle/>
-                    <a:p>
-                      <a:pPr rtl="1" algn="ctr"/>
-                      <a:r>
-                        <a:rPr sz="1500" b="0" i="1" lang="ar-SA">
-                          <a:solidFill>
-                            <a:srgbClr val="92400E"/>
-                          </a:solidFill>
-                          <a:latin typeface="Arial"/>
-                          <a:cs typeface="Arial"/>
-                        </a:rPr>
-                        <a:t>[2014]</a:t>
-                      </a:r>
-                    </a:p>
-                  </a:txBody>
-                  <a:tcPr anchor="ctr" marL="91440" marR="91440" marT="36576" marB="36576">
-                    <a:solidFill>
-                      <a:srgbClr val="FEF3C7"/>
-                    </a:solidFill>
-                  </a:tcPr>
-                </a:tc>
-                <a:tc>
-                  <a:txBody>
-                    <a:bodyPr wrap="square"/>
-                    <a:lstStyle/>
-                    <a:p>
-                      <a:pPr rtl="1" algn="ctr"/>
-                      <a:r>
-                        <a:rPr sz="1500" b="1" i="0" lang="ar-SA">
-                          <a:solidFill>
-                            <a:srgbClr val="134E4A"/>
-                          </a:solidFill>
-                          <a:latin typeface="Arial"/>
-                          <a:cs typeface="Arial"/>
-                        </a:rPr>
-                        <a:t>H4-ب · الهجين مع شعبية العنقود مقابل SKNN وحده (الربع الأقل تاريخاً)</a:t>
-                      </a:r>
-                    </a:p>
-                  </a:txBody>
-                  <a:tcPr anchor="ctr" marL="91440" marR="91440" marT="36576" marB="36576">
-                    <a:solidFill>
-                      <a:srgbClr val="CCFBF1"/>
-                    </a:solidFill>
-                  </a:tcPr>
-                </a:tc>
-              </a:tr>
             </a:tbl>
           </a:graphicData>
         </a:graphic>
       </p:graphicFrame>
       <p:sp>
         <p:nvSpPr>
-          <p:cNvPr id="5" name="TextBox 4"/>
+          <p:cNvPr id="4" name="TextBox 3"/>
           <p:cNvSpPr txBox="1"/>
           <p:nvPr/>
         </p:nvSpPr>
         <p:spPr>
           <a:xfrm>
-            <a:off x="548640" y="5760720"/>
+            <a:off x="548640" y="5212079"/>
             <a:ext cx="11094415" cy="502920"/>
           </a:xfrm>
           <a:prstGeom prst="rect">
@@ -12070,14 +11938,14 @@
                 <a:latin typeface="Arial"/>
                 <a:cs typeface="Arial"/>
               </a:rPr>
-              <a:t>13 عرضاً؛ δ = 0.02؛ هولم على الأربع. «غير حاسمة: لا يكشف التصميم بقوة 80% أثراً أصغر من MDE80 = x»؛ ويُكتب صراحةً حين يتجاوز MDE80 ضعف δ (H2-أ وH3). الصف الأخير استكشافي: فاصل وp غير مصحَّحة ولا يدخل عائلة هولم.</a:t>
-            </a:r>
-          </a:p>
-        </p:txBody>
-      </p:sp>
-      <p:sp>
-        <p:nvSpPr>
-          <p:cNvPr id="6" name="شعار الجامعة"/>
+              <a:t>13 عرضاً من 2014؛ العتبة δ = 0.02؛ تُقرأ الأحكام ولا تُعاد. H3: يطبع ملف الأحكام لهذا الصف «مدحوضة عملياً (استُبعد أثر ≥ δ)»؛ الشرط واحد: الحد الأعلى &lt; δ. غير حاسمة: لا يكشف التصميم بقوة 80% أثراً أصغر من MDE80 = 0.0375</a:t>
+            </a:r>
+          </a:p>
+        </p:txBody>
+      </p:sp>
+      <p:sp>
+        <p:nvSpPr>
+          <p:cNvPr id="5" name="شعار الجامعة"/>
           <p:cNvSpPr/>
           <p:nvPr/>
         </p:nvSpPr>
@@ -12133,7 +12001,7 @@
       </p:sp>
       <p:sp>
         <p:nvSpPr>
-          <p:cNvPr id="7" name="تذييل"/>
+          <p:cNvPr id="6" name="تذييل"/>
           <p:cNvSpPr txBox="1"/>
           <p:nvPr/>
         </p:nvSpPr>
@@ -12179,7 +12047,7 @@
       </p:sp>
       <p:sp>
         <p:nvSpPr>
-          <p:cNvPr id="8" name="رقم الشريحة"/>
+          <p:cNvPr id="7" name="رقم الشريحة"/>
           <p:cNvSpPr txBox="1"/>
           <p:nvPr/>
         </p:nvSpPr>
@@ -12279,80 +12147,97 @@
                 <a:latin typeface="Arial"/>
                 <a:cs typeface="Arial"/>
               </a:rPr>
-              <a:t>الأشكال: الاستئصال والحساسيات</a:t>
-            </a:r>
-          </a:p>
-        </p:txBody>
-      </p:sp>
-      <p:sp>
-        <p:nvSpPr>
-          <p:cNvPr id="3" name="شريط الحالة"/>
-          <p:cNvSpPr/>
-          <p:nvPr/>
-        </p:nvSpPr>
-        <p:spPr>
-          <a:xfrm>
-            <a:off x="548640" y="1261872"/>
-            <a:ext cx="11094415" cy="420624"/>
-          </a:xfrm>
-          <a:prstGeom prst="roundRect">
-            <a:avLst>
-              <a:gd name="adj" fmla="val 25000"/>
-            </a:avLst>
-          </a:prstGeom>
-          <a:solidFill>
-            <a:srgbClr val="FEF3C7"/>
-          </a:solidFill>
+              <a:t>الفرق لكل فرضية وفاصل الثقة</a:t>
+            </a:r>
+          </a:p>
+        </p:txBody>
+      </p:sp>
+      <p:pic>
+        <p:nvPicPr>
+          <p:cNvPr id="3" name="صورة" descr="مخطط غابي لفروق الفرضيات الأربع وفواصلها"/>
+          <p:cNvPicPr>
+            <a:picLocks noChangeAspect="1"/>
+          </p:cNvPicPr>
+          <p:nvPr/>
+        </p:nvPicPr>
+        <p:blipFill>
+          <a:blip r:embed="rId2"/>
+          <a:srcRect l="27000" r="22000"/>
+          <a:stretch>
+            <a:fillRect/>
+          </a:stretch>
+        </p:blipFill>
+        <p:spPr>
+          <a:xfrm>
+            <a:off x="548640" y="1371600"/>
+            <a:ext cx="6907031" cy="4526279"/>
+          </a:xfrm>
+          <a:prstGeom prst="rect">
+            <a:avLst/>
+          </a:prstGeom>
           <a:ln w="12700">
             <a:solidFill>
-              <a:srgbClr val="B45309"/>
+              <a:srgbClr val="CBD5E1"/>
             </a:solidFill>
-            <a:prstDash val="dash"/>
           </a:ln>
-          <a:effectLst/>
-        </p:spPr>
-        <p:style>
-          <a:lnRef idx="1">
-            <a:schemeClr val="accent1"/>
-          </a:lnRef>
-          <a:fillRef idx="3">
-            <a:schemeClr val="accent1"/>
-          </a:fillRef>
-          <a:effectRef idx="2">
-            <a:schemeClr val="accent1"/>
-          </a:effectRef>
-          <a:fontRef idx="minor">
-            <a:schemeClr val="lt1"/>
-          </a:fontRef>
-        </p:style>
-        <p:txBody>
-          <a:bodyPr rtlCol="0" anchor="ctr" wrap="square" lIns="54864" rIns="228600" tIns="18288" bIns="18288"/>
-          <a:lstStyle/>
-          <a:p>
-            <a:pPr algn="r" rtl="1"/>
-            <a:r>
-              <a:rPr sz="1500" b="1" i="0" lang="ar-SA">
-                <a:solidFill>
-                  <a:srgbClr val="92400E"/>
-                </a:solidFill>
-                <a:latin typeface="Arial"/>
-                <a:cs typeface="Arial"/>
-              </a:rPr>
-              <a:t>[2014] قيد الاستكمال: تُملأ بأشكال PNG من results/conf2014/</a:t>
-            </a:r>
-          </a:p>
-        </p:txBody>
-      </p:sp>
-      <p:sp>
-        <p:nvSpPr>
-          <p:cNvPr id="4" name="لوحة"/>
+        </p:spPr>
+      </p:pic>
+      <p:sp>
+        <p:nvSpPr>
+          <p:cNvPr id="4" name="TextBox 3"/>
+          <p:cNvSpPr txBox="1"/>
+          <p:nvPr/>
+        </p:nvSpPr>
+        <p:spPr>
+          <a:xfrm>
+            <a:off x="548640" y="5943599"/>
+            <a:ext cx="6907031" cy="365760"/>
+          </a:xfrm>
+          <a:prstGeom prst="rect">
+            <a:avLst/>
+          </a:prstGeom>
+          <a:noFill/>
+        </p:spPr>
+        <p:txBody>
+          <a:bodyPr wrap="square" lIns="45720" rIns="45720" tIns="27432" bIns="27432" anchor="ctr">
+            <a:spAutoFit/>
+          </a:bodyPr>
+          <a:lstStyle/>
+          <a:p>
+            <a:pPr rtl="1" algn="ctr">
+              <a:lnSpc>
+                <a:spcPct val="115000"/>
+              </a:lnSpc>
+              <a:spcBef>
+                <a:spcPts val="0"/>
+              </a:spcBef>
+              <a:spcAft>
+                <a:spcPts val="0"/>
+              </a:spcAft>
+            </a:pPr>
+            <a:r>
+              <a:rPr sz="1300" b="0" i="0" lang="ar-SA">
+                <a:solidFill>
+                  <a:srgbClr val="475569"/>
+                </a:solidFill>
+                <a:latin typeface="Arial"/>
+                <a:cs typeface="Arial"/>
+              </a:rPr>
+              <a:t>الشكل: Δ̄ وفاصل bootstrap-t لكل فرضية (results/conf2014/figures)</a:t>
+            </a:r>
+          </a:p>
+        </p:txBody>
+      </p:sp>
+      <p:sp>
+        <p:nvSpPr>
+          <p:cNvPr id="5" name="بطاقة"/>
           <p:cNvSpPr/>
           <p:nvPr/>
         </p:nvSpPr>
         <p:spPr>
           <a:xfrm>
-            <a:off x="8127796" y="1874519"/>
-            <a:ext cx="3515258" cy="4297680"/>
+            <a:off x="7821431" y="1371600"/>
+            <a:ext cx="3821623" cy="1447800"/>
           </a:xfrm>
           <a:prstGeom prst="roundRect">
             <a:avLst>
@@ -12393,14 +12278,70 @@
       </p:sp>
       <p:sp>
         <p:nvSpPr>
-          <p:cNvPr id="5" name="TextBox 4"/>
+          <p:cNvPr id="6" name="رقم"/>
+          <p:cNvSpPr/>
+          <p:nvPr/>
+        </p:nvSpPr>
+        <p:spPr>
+          <a:xfrm>
+            <a:off x="10957255" y="1554480"/>
+            <a:ext cx="502920" cy="502920"/>
+          </a:xfrm>
+          <a:prstGeom prst="roundRect">
+            <a:avLst>
+              <a:gd name="adj" fmla="val 50000"/>
+            </a:avLst>
+          </a:prstGeom>
+          <a:solidFill>
+            <a:srgbClr val="0F766E"/>
+          </a:solidFill>
+          <a:ln>
+            <a:noFill/>
+          </a:ln>
+          <a:effectLst/>
+        </p:spPr>
+        <p:style>
+          <a:lnRef idx="1">
+            <a:schemeClr val="accent1"/>
+          </a:lnRef>
+          <a:fillRef idx="3">
+            <a:schemeClr val="accent1"/>
+          </a:fillRef>
+          <a:effectRef idx="2">
+            <a:schemeClr val="accent1"/>
+          </a:effectRef>
+          <a:fontRef idx="minor">
+            <a:schemeClr val="lt1"/>
+          </a:fontRef>
+        </p:style>
+        <p:txBody>
+          <a:bodyPr rtlCol="0" anchor="ctr" wrap="square" lIns="54864" rIns="54864" tIns="18288" bIns="18288"/>
+          <a:lstStyle/>
+          <a:p>
+            <a:pPr algn="ctr" rtl="1"/>
+            <a:r>
+              <a:rPr sz="1600" b="1" i="0" lang="ar-SA">
+                <a:solidFill>
+                  <a:srgbClr val="FFFFFF"/>
+                </a:solidFill>
+                <a:latin typeface="Arial"/>
+                <a:cs typeface="Arial"/>
+              </a:rPr>
+              <a:t>1</a:t>
+            </a:r>
+          </a:p>
+        </p:txBody>
+      </p:sp>
+      <p:sp>
+        <p:nvSpPr>
+          <p:cNvPr id="7" name="TextBox 6"/>
           <p:cNvSpPr txBox="1"/>
           <p:nvPr/>
         </p:nvSpPr>
         <p:spPr>
           <a:xfrm>
-            <a:off x="8264956" y="1965960"/>
-            <a:ext cx="3240938" cy="685800"/>
+            <a:off x="7958592" y="1444752"/>
+            <a:ext cx="2907223" cy="594360"/>
           </a:xfrm>
           <a:prstGeom prst="rect">
             <a:avLst/>
@@ -12425,28 +12366,28 @@
               </a:spcAft>
             </a:pPr>
             <a:r>
-              <a:rPr sz="2000" b="1" i="0" lang="ar-SA">
+              <a:rPr sz="2100" b="1" i="0" lang="ar-SA">
                 <a:solidFill>
                   <a:srgbClr val="134E4A"/>
                 </a:solidFill>
                 <a:latin typeface="Arial"/>
                 <a:cs typeface="Arial"/>
               </a:rPr>
-              <a:t>استئصال الإشارة</a:t>
-            </a:r>
-          </a:p>
-        </p:txBody>
-      </p:sp>
-      <p:sp>
-        <p:nvSpPr>
-          <p:cNvPr id="6" name="TextBox 5"/>
+              <a:t>الخطان المتقطعان</a:t>
+            </a:r>
+          </a:p>
+        </p:txBody>
+      </p:sp>
+      <p:sp>
+        <p:nvSpPr>
+          <p:cNvPr id="8" name="TextBox 7"/>
           <p:cNvSpPr txBox="1"/>
           <p:nvPr/>
         </p:nvSpPr>
         <p:spPr>
           <a:xfrm>
-            <a:off x="8264956" y="2697479"/>
-            <a:ext cx="3240938" cy="822960"/>
+            <a:off x="7958592" y="2084832"/>
+            <a:ext cx="3547303" cy="670560"/>
           </a:xfrm>
           <a:prstGeom prst="rect">
             <a:avLst/>
@@ -12461,7 +12402,7 @@
           <a:p>
             <a:pPr rtl="1" algn="r">
               <a:lnSpc>
-                <a:spcPct val="105000"/>
+                <a:spcPct val="110000"/>
               </a:lnSpc>
               <a:spcBef>
                 <a:spcPts val="0"/>
@@ -12471,87 +12412,28 @@
               </a:spcAft>
             </a:pPr>
             <a:r>
-              <a:rPr sz="1500" b="0" i="0" lang="ar-SA">
+              <a:rPr sz="1700" b="0" i="0" lang="ar-SA">
                 <a:solidFill>
                   <a:srgbClr val="475569"/>
                 </a:solidFill>
                 <a:latin typeface="Arial"/>
                 <a:cs typeface="Arial"/>
               </a:rPr>
-              <a:t>L0 ⊂ L1 ⊂ L2 ⊂ L3 في WRMF وItem-kNN</a:t>
-            </a:r>
-          </a:p>
-        </p:txBody>
-      </p:sp>
-      <p:sp>
-        <p:nvSpPr>
-          <p:cNvPr id="7" name="مكان النتيجة"/>
+              <a:t>الصفر والعتبة العملية 0.02</a:t>
+            </a:r>
+          </a:p>
+        </p:txBody>
+      </p:sp>
+      <p:sp>
+        <p:nvSpPr>
+          <p:cNvPr id="9" name="بطاقة"/>
           <p:cNvSpPr/>
           <p:nvPr/>
         </p:nvSpPr>
         <p:spPr>
           <a:xfrm>
-            <a:off x="8310676" y="3611879"/>
-            <a:ext cx="3149498" cy="2377440"/>
-          </a:xfrm>
-          <a:prstGeom prst="roundRect">
-            <a:avLst>
-              <a:gd name="adj" fmla="val 8000"/>
-            </a:avLst>
-          </a:prstGeom>
-          <a:solidFill>
-            <a:srgbClr val="FEF3C7"/>
-          </a:solidFill>
-          <a:ln w="19050">
-            <a:solidFill>
-              <a:srgbClr val="B45309"/>
-            </a:solidFill>
-            <a:prstDash val="dash"/>
-          </a:ln>
-          <a:effectLst/>
-        </p:spPr>
-        <p:style>
-          <a:lnRef idx="1">
-            <a:schemeClr val="accent1"/>
-          </a:lnRef>
-          <a:fillRef idx="3">
-            <a:schemeClr val="accent1"/>
-          </a:fillRef>
-          <a:effectRef idx="2">
-            <a:schemeClr val="accent1"/>
-          </a:effectRef>
-          <a:fontRef idx="minor">
-            <a:schemeClr val="lt1"/>
-          </a:fontRef>
-        </p:style>
-        <p:txBody>
-          <a:bodyPr rtlCol="0" anchor="ctr" wrap="square" lIns="54864" rIns="54864" tIns="18288" bIns="18288"/>
-          <a:lstStyle/>
-          <a:p>
-            <a:pPr algn="ctr" rtl="1"/>
-            <a:r>
-              <a:rPr sz="1800" b="1" i="1" lang="ar-SA">
-                <a:solidFill>
-                  <a:srgbClr val="92400E"/>
-                </a:solidFill>
-                <a:latin typeface="Arial"/>
-                <a:cs typeface="Arial"/>
-              </a:rPr>
-              <a:t>[2014] شكل</a:t>
-            </a:r>
-          </a:p>
-        </p:txBody>
-      </p:sp>
-      <p:sp>
-        <p:nvSpPr>
-          <p:cNvPr id="8" name="لوحة"/>
-          <p:cNvSpPr/>
-          <p:nvPr/>
-        </p:nvSpPr>
-        <p:spPr>
-          <a:xfrm>
-            <a:off x="4338218" y="1874519"/>
-            <a:ext cx="3515258" cy="4297680"/>
+            <a:off x="7821431" y="3047999"/>
+            <a:ext cx="3821623" cy="1447800"/>
           </a:xfrm>
           <a:prstGeom prst="roundRect">
             <a:avLst>
@@ -12592,14 +12474,70 @@
       </p:sp>
       <p:sp>
         <p:nvSpPr>
-          <p:cNvPr id="9" name="TextBox 8"/>
+          <p:cNvPr id="10" name="رقم"/>
+          <p:cNvSpPr/>
+          <p:nvPr/>
+        </p:nvSpPr>
+        <p:spPr>
+          <a:xfrm>
+            <a:off x="10957255" y="3230880"/>
+            <a:ext cx="502920" cy="502920"/>
+          </a:xfrm>
+          <a:prstGeom prst="roundRect">
+            <a:avLst>
+              <a:gd name="adj" fmla="val 50000"/>
+            </a:avLst>
+          </a:prstGeom>
+          <a:solidFill>
+            <a:srgbClr val="0F766E"/>
+          </a:solidFill>
+          <a:ln>
+            <a:noFill/>
+          </a:ln>
+          <a:effectLst/>
+        </p:spPr>
+        <p:style>
+          <a:lnRef idx="1">
+            <a:schemeClr val="accent1"/>
+          </a:lnRef>
+          <a:fillRef idx="3">
+            <a:schemeClr val="accent1"/>
+          </a:fillRef>
+          <a:effectRef idx="2">
+            <a:schemeClr val="accent1"/>
+          </a:effectRef>
+          <a:fontRef idx="minor">
+            <a:schemeClr val="lt1"/>
+          </a:fontRef>
+        </p:style>
+        <p:txBody>
+          <a:bodyPr rtlCol="0" anchor="ctr" wrap="square" lIns="54864" rIns="54864" tIns="18288" bIns="18288"/>
+          <a:lstStyle/>
+          <a:p>
+            <a:pPr algn="ctr" rtl="1"/>
+            <a:r>
+              <a:rPr sz="1600" b="1" i="0" lang="ar-SA">
+                <a:solidFill>
+                  <a:srgbClr val="FFFFFF"/>
+                </a:solidFill>
+                <a:latin typeface="Arial"/>
+                <a:cs typeface="Arial"/>
+              </a:rPr>
+              <a:t>2</a:t>
+            </a:r>
+          </a:p>
+        </p:txBody>
+      </p:sp>
+      <p:sp>
+        <p:nvSpPr>
+          <p:cNvPr id="11" name="TextBox 10"/>
           <p:cNvSpPr txBox="1"/>
           <p:nvPr/>
         </p:nvSpPr>
         <p:spPr>
           <a:xfrm>
-            <a:off x="4475378" y="1965960"/>
-            <a:ext cx="3240938" cy="685800"/>
+            <a:off x="7958592" y="3121152"/>
+            <a:ext cx="2907223" cy="594360"/>
           </a:xfrm>
           <a:prstGeom prst="rect">
             <a:avLst/>
@@ -12624,28 +12562,28 @@
               </a:spcAft>
             </a:pPr>
             <a:r>
-              <a:rPr sz="2000" b="1" i="0" lang="ar-SA">
+              <a:rPr sz="2100" b="1" i="0" lang="ar-SA">
                 <a:solidFill>
                   <a:srgbClr val="134E4A"/>
                 </a:solidFill>
                 <a:latin typeface="Arial"/>
                 <a:cs typeface="Arial"/>
               </a:rPr>
-              <a:t>استئصال مكوّنات الهجين</a:t>
-            </a:r>
-          </a:p>
-        </p:txBody>
-      </p:sp>
-      <p:sp>
-        <p:nvSpPr>
-          <p:cNvPr id="10" name="TextBox 9"/>
+              <a:t>H2-أ</a:t>
+            </a:r>
+          </a:p>
+        </p:txBody>
+      </p:sp>
+      <p:sp>
+        <p:nvSpPr>
+          <p:cNvPr id="12" name="TextBox 11"/>
           <p:cNvSpPr txBox="1"/>
           <p:nvPr/>
         </p:nvSpPr>
         <p:spPr>
           <a:xfrm>
-            <a:off x="4475378" y="2697479"/>
-            <a:ext cx="3240938" cy="822960"/>
+            <a:off x="7958592" y="3761232"/>
+            <a:ext cx="3547303" cy="670560"/>
           </a:xfrm>
           <a:prstGeom prst="rect">
             <a:avLst/>
@@ -12660,7 +12598,7 @@
           <a:p>
             <a:pPr rtl="1" algn="r">
               <a:lnSpc>
-                <a:spcPct val="105000"/>
+                <a:spcPct val="110000"/>
               </a:lnSpc>
               <a:spcBef>
                 <a:spcPts val="0"/>
@@ -12670,87 +12608,28 @@
               </a:spcAft>
             </a:pPr>
             <a:r>
-              <a:rPr sz="1500" b="0" i="0" lang="ar-SA">
+              <a:rPr sz="1700" b="0" i="0" lang="ar-SA">
                 <a:solidFill>
                   <a:srgbClr val="475569"/>
                 </a:solidFill>
                 <a:latin typeface="Arial"/>
                 <a:cs typeface="Arial"/>
               </a:rPr>
-              <a:t>حذف كل مكوّن مع إعادة ضبط الأوزان</a:t>
-            </a:r>
-          </a:p>
-        </p:txBody>
-      </p:sp>
-      <p:sp>
-        <p:nvSpPr>
-          <p:cNvPr id="11" name="مكان النتيجة"/>
+              <a:t>الفاصل كله فوق العتبة في 13 من 13 عرضاً</a:t>
+            </a:r>
+          </a:p>
+        </p:txBody>
+      </p:sp>
+      <p:sp>
+        <p:nvSpPr>
+          <p:cNvPr id="13" name="بطاقة"/>
           <p:cNvSpPr/>
           <p:nvPr/>
         </p:nvSpPr>
         <p:spPr>
           <a:xfrm>
-            <a:off x="4521098" y="3611879"/>
-            <a:ext cx="3149498" cy="2377440"/>
-          </a:xfrm>
-          <a:prstGeom prst="roundRect">
-            <a:avLst>
-              <a:gd name="adj" fmla="val 8000"/>
-            </a:avLst>
-          </a:prstGeom>
-          <a:solidFill>
-            <a:srgbClr val="FEF3C7"/>
-          </a:solidFill>
-          <a:ln w="19050">
-            <a:solidFill>
-              <a:srgbClr val="B45309"/>
-            </a:solidFill>
-            <a:prstDash val="dash"/>
-          </a:ln>
-          <a:effectLst/>
-        </p:spPr>
-        <p:style>
-          <a:lnRef idx="1">
-            <a:schemeClr val="accent1"/>
-          </a:lnRef>
-          <a:fillRef idx="3">
-            <a:schemeClr val="accent1"/>
-          </a:fillRef>
-          <a:effectRef idx="2">
-            <a:schemeClr val="accent1"/>
-          </a:effectRef>
-          <a:fontRef idx="minor">
-            <a:schemeClr val="lt1"/>
-          </a:fontRef>
-        </p:style>
-        <p:txBody>
-          <a:bodyPr rtlCol="0" anchor="ctr" wrap="square" lIns="54864" rIns="54864" tIns="18288" bIns="18288"/>
-          <a:lstStyle/>
-          <a:p>
-            <a:pPr algn="ctr" rtl="1"/>
-            <a:r>
-              <a:rPr sz="1800" b="1" i="1" lang="ar-SA">
-                <a:solidFill>
-                  <a:srgbClr val="92400E"/>
-                </a:solidFill>
-                <a:latin typeface="Arial"/>
-                <a:cs typeface="Arial"/>
-              </a:rPr>
-              <a:t>[2014] شكل</a:t>
-            </a:r>
-          </a:p>
-        </p:txBody>
-      </p:sp>
-      <p:sp>
-        <p:nvSpPr>
-          <p:cNvPr id="12" name="لوحة"/>
-          <p:cNvSpPr/>
-          <p:nvPr/>
-        </p:nvSpPr>
-        <p:spPr>
-          <a:xfrm>
-            <a:off x="548639" y="1874519"/>
-            <a:ext cx="3515258" cy="4297680"/>
+            <a:off x="7821431" y="4724399"/>
+            <a:ext cx="3821623" cy="1447800"/>
           </a:xfrm>
           <a:prstGeom prst="roundRect">
             <a:avLst>
@@ -12791,165 +12670,14 @@
       </p:sp>
       <p:sp>
         <p:nvSpPr>
-          <p:cNvPr id="13" name="TextBox 12"/>
-          <p:cNvSpPr txBox="1"/>
-          <p:nvPr/>
-        </p:nvSpPr>
-        <p:spPr>
-          <a:xfrm>
-            <a:off x="685799" y="1965960"/>
-            <a:ext cx="3240938" cy="685800"/>
-          </a:xfrm>
-          <a:prstGeom prst="rect">
-            <a:avLst/>
-          </a:prstGeom>
-          <a:noFill/>
-        </p:spPr>
-        <p:txBody>
-          <a:bodyPr wrap="square" lIns="45720" rIns="45720" tIns="27432" bIns="27432" anchor="ctr">
-            <a:spAutoFit/>
-          </a:bodyPr>
-          <a:lstStyle/>
-          <a:p>
-            <a:pPr rtl="1" algn="r">
-              <a:lnSpc>
-                <a:spcPct val="100000"/>
-              </a:lnSpc>
-              <a:spcBef>
-                <a:spcPts val="0"/>
-              </a:spcBef>
-              <a:spcAft>
-                <a:spcPts val="0"/>
-              </a:spcAft>
-            </a:pPr>
-            <a:r>
-              <a:rPr sz="2000" b="1" i="0" lang="ar-SA">
-                <a:solidFill>
-                  <a:srgbClr val="134E4A"/>
-                </a:solidFill>
-                <a:latin typeface="Arial"/>
-                <a:cs typeface="Arial"/>
-              </a:rPr>
-              <a:t>حساسيات مسجّلة مسبقاً</a:t>
-            </a:r>
-          </a:p>
-        </p:txBody>
-      </p:sp>
-      <p:sp>
-        <p:nvSpPr>
-          <p:cNvPr id="14" name="TextBox 13"/>
-          <p:cNvSpPr txBox="1"/>
-          <p:nvPr/>
-        </p:nvSpPr>
-        <p:spPr>
-          <a:xfrm>
-            <a:off x="685799" y="2697479"/>
-            <a:ext cx="3240938" cy="822960"/>
-          </a:xfrm>
-          <a:prstGeom prst="rect">
-            <a:avLst/>
-          </a:prstGeom>
-          <a:noFill/>
-        </p:spPr>
-        <p:txBody>
-          <a:bodyPr wrap="square" lIns="45720" rIns="45720" tIns="27432" bIns="27432" anchor="t">
-            <a:spAutoFit/>
-          </a:bodyPr>
-          <a:lstStyle/>
-          <a:p>
-            <a:pPr rtl="1" algn="r">
-              <a:lnSpc>
-                <a:spcPct val="105000"/>
-              </a:lnSpc>
-              <a:spcBef>
-                <a:spcPts val="0"/>
-              </a:spcBef>
-              <a:spcAft>
-                <a:spcPts val="0"/>
-              </a:spcAft>
-            </a:pPr>
-            <a:r>
-              <a:rPr sz="1500" b="0" i="0" lang="ar-SA">
-                <a:solidFill>
-                  <a:srgbClr val="475569"/>
-                </a:solidFill>
-                <a:latin typeface="Arial"/>
-                <a:cs typeface="Arial"/>
-              </a:rPr>
-              <a:t>الأنواع المستبعدة، نقاط القطع، السوالب المعيَّنة، سعة GRU</a:t>
-            </a:r>
-          </a:p>
-        </p:txBody>
-      </p:sp>
-      <p:sp>
-        <p:nvSpPr>
-          <p:cNvPr id="15" name="مكان النتيجة"/>
+          <p:cNvPr id="14" name="رقم"/>
           <p:cNvSpPr/>
           <p:nvPr/>
         </p:nvSpPr>
         <p:spPr>
           <a:xfrm>
-            <a:off x="731519" y="3611879"/>
-            <a:ext cx="3149498" cy="2377440"/>
-          </a:xfrm>
-          <a:prstGeom prst="roundRect">
-            <a:avLst>
-              <a:gd name="adj" fmla="val 8000"/>
-            </a:avLst>
-          </a:prstGeom>
-          <a:solidFill>
-            <a:srgbClr val="FEF3C7"/>
-          </a:solidFill>
-          <a:ln w="19050">
-            <a:solidFill>
-              <a:srgbClr val="B45309"/>
-            </a:solidFill>
-            <a:prstDash val="dash"/>
-          </a:ln>
-          <a:effectLst/>
-        </p:spPr>
-        <p:style>
-          <a:lnRef idx="1">
-            <a:schemeClr val="accent1"/>
-          </a:lnRef>
-          <a:fillRef idx="3">
-            <a:schemeClr val="accent1"/>
-          </a:fillRef>
-          <a:effectRef idx="2">
-            <a:schemeClr val="accent1"/>
-          </a:effectRef>
-          <a:fontRef idx="minor">
-            <a:schemeClr val="lt1"/>
-          </a:fontRef>
-        </p:style>
-        <p:txBody>
-          <a:bodyPr rtlCol="0" anchor="ctr" wrap="square" lIns="54864" rIns="54864" tIns="18288" bIns="18288"/>
-          <a:lstStyle/>
-          <a:p>
-            <a:pPr algn="ctr" rtl="1"/>
-            <a:r>
-              <a:rPr sz="1800" b="1" i="1" lang="ar-SA">
-                <a:solidFill>
-                  <a:srgbClr val="92400E"/>
-                </a:solidFill>
-                <a:latin typeface="Arial"/>
-                <a:cs typeface="Arial"/>
-              </a:rPr>
-              <a:t>[2014] شكل</a:t>
-            </a:r>
-          </a:p>
-        </p:txBody>
-      </p:sp>
-      <p:sp>
-        <p:nvSpPr>
-          <p:cNvPr id="16" name="شعار الجامعة"/>
-          <p:cNvSpPr/>
-          <p:nvPr/>
-        </p:nvSpPr>
-        <p:spPr>
-          <a:xfrm>
-            <a:off x="10957255" y="6382512"/>
-            <a:ext cx="685800" cy="292608"/>
+            <a:off x="10957255" y="4907280"/>
+            <a:ext cx="502920" cy="502920"/>
           </a:xfrm>
           <a:prstGeom prst="roundRect">
             <a:avLst>
@@ -12984,6 +12712,154 @@
           <a:p>
             <a:pPr algn="ctr" rtl="1"/>
             <a:r>
+              <a:rPr sz="1600" b="1" i="0" lang="ar-SA">
+                <a:solidFill>
+                  <a:srgbClr val="FFFFFF"/>
+                </a:solidFill>
+                <a:latin typeface="Arial"/>
+                <a:cs typeface="Arial"/>
+              </a:rPr>
+              <a:t>3</a:t>
+            </a:r>
+          </a:p>
+        </p:txBody>
+      </p:sp>
+      <p:sp>
+        <p:nvSpPr>
+          <p:cNvPr id="15" name="TextBox 14"/>
+          <p:cNvSpPr txBox="1"/>
+          <p:nvPr/>
+        </p:nvSpPr>
+        <p:spPr>
+          <a:xfrm>
+            <a:off x="7958592" y="4797551"/>
+            <a:ext cx="2907223" cy="594360"/>
+          </a:xfrm>
+          <a:prstGeom prst="rect">
+            <a:avLst/>
+          </a:prstGeom>
+          <a:noFill/>
+        </p:spPr>
+        <p:txBody>
+          <a:bodyPr wrap="square" lIns="45720" rIns="45720" tIns="27432" bIns="27432" anchor="ctr">
+            <a:spAutoFit/>
+          </a:bodyPr>
+          <a:lstStyle/>
+          <a:p>
+            <a:pPr rtl="1" algn="r">
+              <a:lnSpc>
+                <a:spcPct val="100000"/>
+              </a:lnSpc>
+              <a:spcBef>
+                <a:spcPts val="0"/>
+              </a:spcBef>
+              <a:spcAft>
+                <a:spcPts val="0"/>
+              </a:spcAft>
+            </a:pPr>
+            <a:r>
+              <a:rPr sz="2100" b="1" i="0" lang="ar-SA">
+                <a:solidFill>
+                  <a:srgbClr val="134E4A"/>
+                </a:solidFill>
+                <a:latin typeface="Arial"/>
+                <a:cs typeface="Arial"/>
+              </a:rPr>
+              <a:t>بقية الفرضيات</a:t>
+            </a:r>
+          </a:p>
+        </p:txBody>
+      </p:sp>
+      <p:sp>
+        <p:nvSpPr>
+          <p:cNvPr id="16" name="TextBox 15"/>
+          <p:cNvSpPr txBox="1"/>
+          <p:nvPr/>
+        </p:nvSpPr>
+        <p:spPr>
+          <a:xfrm>
+            <a:off x="7958592" y="5437632"/>
+            <a:ext cx="3547303" cy="670560"/>
+          </a:xfrm>
+          <a:prstGeom prst="rect">
+            <a:avLst/>
+          </a:prstGeom>
+          <a:noFill/>
+        </p:spPr>
+        <p:txBody>
+          <a:bodyPr wrap="square" lIns="45720" rIns="45720" tIns="27432" bIns="27432" anchor="t">
+            <a:spAutoFit/>
+          </a:bodyPr>
+          <a:lstStyle/>
+          <a:p>
+            <a:pPr rtl="1" algn="r">
+              <a:lnSpc>
+                <a:spcPct val="110000"/>
+              </a:lnSpc>
+              <a:spcBef>
+                <a:spcPts val="0"/>
+              </a:spcBef>
+              <a:spcAft>
+                <a:spcPts val="0"/>
+              </a:spcAft>
+            </a:pPr>
+            <a:r>
+              <a:rPr sz="1700" b="0" i="0" lang="ar-SA">
+                <a:solidFill>
+                  <a:srgbClr val="475569"/>
+                </a:solidFill>
+                <a:latin typeface="Arial"/>
+                <a:cs typeface="Arial"/>
+              </a:rPr>
+              <a:t>H1 غير حاسمة؛ H3 وH4-أ حدّها الأعلى دون العتبة</a:t>
+            </a:r>
+          </a:p>
+        </p:txBody>
+      </p:sp>
+      <p:sp>
+        <p:nvSpPr>
+          <p:cNvPr id="17" name="شعار الجامعة"/>
+          <p:cNvSpPr/>
+          <p:nvPr/>
+        </p:nvSpPr>
+        <p:spPr>
+          <a:xfrm>
+            <a:off x="10957255" y="6382512"/>
+            <a:ext cx="685800" cy="292608"/>
+          </a:xfrm>
+          <a:prstGeom prst="roundRect">
+            <a:avLst>
+              <a:gd name="adj" fmla="val 50000"/>
+            </a:avLst>
+          </a:prstGeom>
+          <a:solidFill>
+            <a:srgbClr val="0F766E"/>
+          </a:solidFill>
+          <a:ln>
+            <a:noFill/>
+          </a:ln>
+          <a:effectLst/>
+        </p:spPr>
+        <p:style>
+          <a:lnRef idx="1">
+            <a:schemeClr val="accent1"/>
+          </a:lnRef>
+          <a:fillRef idx="3">
+            <a:schemeClr val="accent1"/>
+          </a:fillRef>
+          <a:effectRef idx="2">
+            <a:schemeClr val="accent1"/>
+          </a:effectRef>
+          <a:fontRef idx="minor">
+            <a:schemeClr val="lt1"/>
+          </a:fontRef>
+        </p:style>
+        <p:txBody>
+          <a:bodyPr rtlCol="0" anchor="ctr" wrap="square" lIns="54864" rIns="54864" tIns="18288" bIns="18288"/>
+          <a:lstStyle/>
+          <a:p>
+            <a:pPr algn="ctr" rtl="1"/>
+            <a:r>
               <a:rPr sz="1200" b="1" i="0" lang="ar-SA">
                 <a:solidFill>
                   <a:srgbClr val="FFFFFF"/>
@@ -12998,7 +12874,7 @@
       </p:sp>
       <p:sp>
         <p:nvSpPr>
-          <p:cNvPr id="17" name="تذييل"/>
+          <p:cNvPr id="18" name="تذييل"/>
           <p:cNvSpPr txBox="1"/>
           <p:nvPr/>
         </p:nvSpPr>
@@ -13044,7 +12920,7 @@
       </p:sp>
       <p:sp>
         <p:nvSpPr>
-          <p:cNvPr id="18" name="رقم الشريحة"/>
+          <p:cNvPr id="19" name="رقم الشريحة"/>
           <p:cNvSpPr txBox="1"/>
           <p:nvPr/>
         </p:nvSpPr>
@@ -13144,80 +13020,21 @@
                 <a:latin typeface="Arial"/>
                 <a:cs typeface="Arial"/>
               </a:rPr>
-              <a:t>المناقشة</a:t>
-            </a:r>
-          </a:p>
-        </p:txBody>
-      </p:sp>
-      <p:sp>
-        <p:nvSpPr>
-          <p:cNvPr id="3" name="شريط الحالة"/>
+              <a:t>المناقشة: أربع رسائل</a:t>
+            </a:r>
+          </a:p>
+        </p:txBody>
+      </p:sp>
+      <p:sp>
+        <p:nvSpPr>
+          <p:cNvPr id="3" name="بطاقة"/>
           <p:cNvSpPr/>
           <p:nvPr/>
         </p:nvSpPr>
         <p:spPr>
           <a:xfrm>
-            <a:off x="548640" y="1261872"/>
-            <a:ext cx="11094415" cy="420624"/>
-          </a:xfrm>
-          <a:prstGeom prst="roundRect">
-            <a:avLst>
-              <a:gd name="adj" fmla="val 25000"/>
-            </a:avLst>
-          </a:prstGeom>
-          <a:solidFill>
-            <a:srgbClr val="FEF3C7"/>
-          </a:solidFill>
-          <a:ln w="12700">
-            <a:solidFill>
-              <a:srgbClr val="B45309"/>
-            </a:solidFill>
-            <a:prstDash val="dash"/>
-          </a:ln>
-          <a:effectLst/>
-        </p:spPr>
-        <p:style>
-          <a:lnRef idx="1">
-            <a:schemeClr val="accent1"/>
-          </a:lnRef>
-          <a:fillRef idx="3">
-            <a:schemeClr val="accent1"/>
-          </a:fillRef>
-          <a:effectRef idx="2">
-            <a:schemeClr val="accent1"/>
-          </a:effectRef>
-          <a:fontRef idx="minor">
-            <a:schemeClr val="lt1"/>
-          </a:fontRef>
-        </p:style>
-        <p:txBody>
-          <a:bodyPr rtlCol="0" anchor="ctr" wrap="square" lIns="54864" rIns="228600" tIns="18288" bIns="18288"/>
-          <a:lstStyle/>
-          <a:p>
-            <a:pPr algn="r" rtl="1"/>
-            <a:r>
-              <a:rPr sz="1500" b="1" i="0" lang="ar-SA">
-                <a:solidFill>
-                  <a:srgbClr val="92400E"/>
-                </a:solidFill>
-                <a:latin typeface="Arial"/>
-                <a:cs typeface="Arial"/>
-              </a:rPr>
-              <a:t>قيد الاستكمال: تُكتب بعد النتائج التأكيدية</a:t>
-            </a:r>
-          </a:p>
-        </p:txBody>
-      </p:sp>
-      <p:sp>
-        <p:nvSpPr>
-          <p:cNvPr id="4" name="لوحة"/>
-          <p:cNvSpPr/>
-          <p:nvPr/>
-        </p:nvSpPr>
-        <p:spPr>
-          <a:xfrm>
-            <a:off x="9075191" y="1874519"/>
-            <a:ext cx="2567863" cy="3246120"/>
+            <a:off x="6233007" y="1463040"/>
+            <a:ext cx="5410047" cy="2217420"/>
           </a:xfrm>
           <a:prstGeom prst="roundRect">
             <a:avLst>
@@ -13258,14 +13075,70 @@
       </p:sp>
       <p:sp>
         <p:nvSpPr>
+          <p:cNvPr id="4" name="رقم"/>
+          <p:cNvSpPr/>
+          <p:nvPr/>
+        </p:nvSpPr>
+        <p:spPr>
+          <a:xfrm>
+            <a:off x="10682935" y="1645920"/>
+            <a:ext cx="777240" cy="502920"/>
+          </a:xfrm>
+          <a:prstGeom prst="roundRect">
+            <a:avLst>
+              <a:gd name="adj" fmla="val 50000"/>
+            </a:avLst>
+          </a:prstGeom>
+          <a:solidFill>
+            <a:srgbClr val="0F766E"/>
+          </a:solidFill>
+          <a:ln>
+            <a:noFill/>
+          </a:ln>
+          <a:effectLst/>
+        </p:spPr>
+        <p:style>
+          <a:lnRef idx="1">
+            <a:schemeClr val="accent1"/>
+          </a:lnRef>
+          <a:fillRef idx="3">
+            <a:schemeClr val="accent1"/>
+          </a:fillRef>
+          <a:effectRef idx="2">
+            <a:schemeClr val="accent1"/>
+          </a:effectRef>
+          <a:fontRef idx="minor">
+            <a:schemeClr val="lt1"/>
+          </a:fontRef>
+        </p:style>
+        <p:txBody>
+          <a:bodyPr rtlCol="0" anchor="ctr" wrap="square" lIns="54864" rIns="54864" tIns="18288" bIns="18288"/>
+          <a:lstStyle/>
+          <a:p>
+            <a:pPr algn="ctr" rtl="1"/>
+            <a:r>
+              <a:rPr sz="1400" b="1" i="0" lang="ar-SA">
+                <a:solidFill>
+                  <a:srgbClr val="FFFFFF"/>
+                </a:solidFill>
+                <a:latin typeface="Arial"/>
+                <a:cs typeface="Arial"/>
+              </a:rPr>
+              <a:t>H4-أ</a:t>
+            </a:r>
+          </a:p>
+        </p:txBody>
+      </p:sp>
+      <p:sp>
+        <p:nvSpPr>
           <p:cNvPr id="5" name="TextBox 4"/>
           <p:cNvSpPr txBox="1"/>
           <p:nvPr/>
         </p:nvSpPr>
         <p:spPr>
           <a:xfrm>
-            <a:off x="9212351" y="1965960"/>
-            <a:ext cx="2293543" cy="685800"/>
+            <a:off x="6370167" y="1572768"/>
+            <a:ext cx="4221327" cy="685800"/>
           </a:xfrm>
           <a:prstGeom prst="rect">
             <a:avLst/>
@@ -13290,14 +13163,14 @@
               </a:spcAft>
             </a:pPr>
             <a:r>
-              <a:rPr sz="1800" b="1" i="0" lang="ar-SA">
+              <a:rPr sz="2400" b="1" i="0" lang="ar-SA">
                 <a:solidFill>
                   <a:srgbClr val="134E4A"/>
                 </a:solidFill>
                 <a:latin typeface="Arial"/>
                 <a:cs typeface="Arial"/>
               </a:rPr>
-              <a:t>الجدول الدراسي والشعبية الآنية</a:t>
+              <a:t>أثر دال لكنه دون العتبة العملية</a:t>
             </a:r>
           </a:p>
         </p:txBody>
@@ -13310,8 +13183,8 @@
         </p:nvSpPr>
         <p:spPr>
           <a:xfrm>
-            <a:off x="9212351" y="2697479"/>
-            <a:ext cx="2293543" cy="822960"/>
+            <a:off x="6370167" y="2331720"/>
+            <a:ext cx="5135727" cy="1257300"/>
           </a:xfrm>
           <a:prstGeom prst="rect">
             <a:avLst/>
@@ -13326,7 +13199,7 @@
           <a:p>
             <a:pPr rtl="1" algn="r">
               <a:lnSpc>
-                <a:spcPct val="105000"/>
+                <a:spcPct val="115000"/>
               </a:lnSpc>
               <a:spcBef>
                 <a:spcPts val="0"/>
@@ -13336,87 +13209,28 @@
               </a:spcAft>
             </a:pPr>
             <a:r>
-              <a:rPr sz="1500" b="0" i="0" lang="ar-SA">
+              <a:rPr sz="2000" b="0" i="0" lang="ar-SA">
                 <a:solidFill>
                   <a:srgbClr val="475569"/>
                 </a:solidFill>
                 <a:latin typeface="Arial"/>
                 <a:cs typeface="Arial"/>
               </a:rPr>
-              <a:t>كم يفرض الجدول على الوصول؟</a:t>
-            </a:r>
-          </a:p>
-        </p:txBody>
-      </p:sp>
-      <p:sp>
-        <p:nvSpPr>
-          <p:cNvPr id="7" name="مكان النتيجة"/>
+              <a:t>زيادة AUC قدرها 0.0083 موجبة ودالة، لكن حدّها الأعلى 0.0144 دون 0.02: مدحوضة عملياً، وليست «لا أثر».</a:t>
+            </a:r>
+          </a:p>
+        </p:txBody>
+      </p:sp>
+      <p:sp>
+        <p:nvSpPr>
+          <p:cNvPr id="7" name="بطاقة"/>
           <p:cNvSpPr/>
           <p:nvPr/>
         </p:nvSpPr>
         <p:spPr>
           <a:xfrm>
-            <a:off x="9258071" y="3611879"/>
-            <a:ext cx="2202103" cy="1325879"/>
-          </a:xfrm>
-          <a:prstGeom prst="roundRect">
-            <a:avLst>
-              <a:gd name="adj" fmla="val 8000"/>
-            </a:avLst>
-          </a:prstGeom>
-          <a:solidFill>
-            <a:srgbClr val="FEF3C7"/>
-          </a:solidFill>
-          <a:ln w="19050">
-            <a:solidFill>
-              <a:srgbClr val="B45309"/>
-            </a:solidFill>
-            <a:prstDash val="dash"/>
-          </a:ln>
-          <a:effectLst/>
-        </p:spPr>
-        <p:style>
-          <a:lnRef idx="1">
-            <a:schemeClr val="accent1"/>
-          </a:lnRef>
-          <a:fillRef idx="3">
-            <a:schemeClr val="accent1"/>
-          </a:fillRef>
-          <a:effectRef idx="2">
-            <a:schemeClr val="accent1"/>
-          </a:effectRef>
-          <a:fontRef idx="minor">
-            <a:schemeClr val="lt1"/>
-          </a:fontRef>
-        </p:style>
-        <p:txBody>
-          <a:bodyPr rtlCol="0" anchor="ctr" wrap="square" lIns="54864" rIns="54864" tIns="18288" bIns="18288"/>
-          <a:lstStyle/>
-          <a:p>
-            <a:pPr algn="ctr" rtl="1"/>
-            <a:r>
-              <a:rPr sz="1800" b="1" i="1" lang="ar-SA">
-                <a:solidFill>
-                  <a:srgbClr val="92400E"/>
-                </a:solidFill>
-                <a:latin typeface="Arial"/>
-                <a:cs typeface="Arial"/>
-              </a:rPr>
-              <a:t>[ تُكتب بعد النتائج ]</a:t>
-            </a:r>
-          </a:p>
-        </p:txBody>
-      </p:sp>
-      <p:sp>
-        <p:nvSpPr>
-          <p:cNvPr id="8" name="لوحة"/>
-          <p:cNvSpPr/>
-          <p:nvPr/>
-        </p:nvSpPr>
-        <p:spPr>
-          <a:xfrm>
-            <a:off x="6233007" y="1874519"/>
-            <a:ext cx="2567863" cy="3246120"/>
+            <a:off x="548640" y="1463040"/>
+            <a:ext cx="5410047" cy="2217420"/>
           </a:xfrm>
           <a:prstGeom prst="roundRect">
             <a:avLst>
@@ -13457,14 +13271,70 @@
       </p:sp>
       <p:sp>
         <p:nvSpPr>
+          <p:cNvPr id="8" name="رقم"/>
+          <p:cNvSpPr/>
+          <p:nvPr/>
+        </p:nvSpPr>
+        <p:spPr>
+          <a:xfrm>
+            <a:off x="4998567" y="1645920"/>
+            <a:ext cx="777240" cy="502920"/>
+          </a:xfrm>
+          <a:prstGeom prst="roundRect">
+            <a:avLst>
+              <a:gd name="adj" fmla="val 50000"/>
+            </a:avLst>
+          </a:prstGeom>
+          <a:solidFill>
+            <a:srgbClr val="0F766E"/>
+          </a:solidFill>
+          <a:ln>
+            <a:noFill/>
+          </a:ln>
+          <a:effectLst/>
+        </p:spPr>
+        <p:style>
+          <a:lnRef idx="1">
+            <a:schemeClr val="accent1"/>
+          </a:lnRef>
+          <a:fillRef idx="3">
+            <a:schemeClr val="accent1"/>
+          </a:fillRef>
+          <a:effectRef idx="2">
+            <a:schemeClr val="accent1"/>
+          </a:effectRef>
+          <a:fontRef idx="minor">
+            <a:schemeClr val="lt1"/>
+          </a:fontRef>
+        </p:style>
+        <p:txBody>
+          <a:bodyPr rtlCol="0" anchor="ctr" wrap="square" lIns="54864" rIns="54864" tIns="18288" bIns="18288"/>
+          <a:lstStyle/>
+          <a:p>
+            <a:pPr algn="ctr" rtl="1"/>
+            <a:r>
+              <a:rPr sz="1400" b="1" i="0" lang="ar-SA">
+                <a:solidFill>
+                  <a:srgbClr val="FFFFFF"/>
+                </a:solidFill>
+                <a:latin typeface="Arial"/>
+                <a:cs typeface="Arial"/>
+              </a:rPr>
+              <a:t>H1</a:t>
+            </a:r>
+          </a:p>
+        </p:txBody>
+      </p:sp>
+      <p:sp>
+        <p:nvSpPr>
           <p:cNvPr id="9" name="TextBox 8"/>
           <p:cNvSpPr txBox="1"/>
           <p:nvPr/>
         </p:nvSpPr>
         <p:spPr>
           <a:xfrm>
-            <a:off x="6370167" y="1965960"/>
-            <a:ext cx="2293543" cy="685800"/>
+            <a:off x="685800" y="1572768"/>
+            <a:ext cx="4221327" cy="685800"/>
           </a:xfrm>
           <a:prstGeom prst="rect">
             <a:avLst/>
@@ -13489,14 +13359,14 @@
               </a:spcAft>
             </a:pPr>
             <a:r>
-              <a:rPr sz="1800" b="1" i="0" lang="ar-SA">
+              <a:rPr sz="2400" b="1" i="0" lang="ar-SA">
                 <a:solidFill>
                   <a:srgbClr val="134E4A"/>
                 </a:solidFill>
                 <a:latin typeface="Arial"/>
                 <a:cs typeface="Arial"/>
               </a:rPr>
-              <a:t>قيمة ترجيح الإشارات</a:t>
+              <a:t>الهجين لم يتفوق على الشعبية الآنية</a:t>
             </a:r>
           </a:p>
         </p:txBody>
@@ -13509,8 +13379,8 @@
         </p:nvSpPr>
         <p:spPr>
           <a:xfrm>
-            <a:off x="6370167" y="2697479"/>
-            <a:ext cx="2293543" cy="822960"/>
+            <a:off x="685800" y="2331720"/>
+            <a:ext cx="5135727" cy="1257300"/>
           </a:xfrm>
           <a:prstGeom prst="rect">
             <a:avLst/>
@@ -13525,7 +13395,7 @@
           <a:p>
             <a:pPr rtl="1" algn="r">
               <a:lnSpc>
-                <a:spcPct val="105000"/>
+                <a:spcPct val="115000"/>
               </a:lnSpc>
               <a:spcBef>
                 <a:spcPts val="0"/>
@@ -13535,87 +13405,28 @@
               </a:spcAft>
             </a:pPr>
             <a:r>
-              <a:rPr sz="1500" b="0" i="0" lang="ar-SA">
+              <a:rPr sz="2000" b="0" i="0" lang="ar-SA">
                 <a:solidFill>
                   <a:srgbClr val="475569"/>
                 </a:solidFill>
                 <a:latin typeface="Arial"/>
                 <a:cs typeface="Arial"/>
               </a:rPr>
-              <a:t>أي مستوى حمل الأثر إن وُجد؟</a:t>
-            </a:r>
-          </a:p>
-        </p:txBody>
-      </p:sp>
-      <p:sp>
-        <p:nvSpPr>
-          <p:cNvPr id="11" name="مكان النتيجة"/>
+              <a:t>الحكم غير حاسمة، وليس «تكافؤاً»: الفرق صفري تقريباً وفاصله يشمل الصفر والعتبة. المساهمة منهجية وتجريبية.</a:t>
+            </a:r>
+          </a:p>
+        </p:txBody>
+      </p:sp>
+      <p:sp>
+        <p:nvSpPr>
+          <p:cNvPr id="11" name="بطاقة"/>
           <p:cNvSpPr/>
           <p:nvPr/>
         </p:nvSpPr>
         <p:spPr>
           <a:xfrm>
-            <a:off x="6415887" y="3611879"/>
-            <a:ext cx="2202103" cy="1325879"/>
-          </a:xfrm>
-          <a:prstGeom prst="roundRect">
-            <a:avLst>
-              <a:gd name="adj" fmla="val 8000"/>
-            </a:avLst>
-          </a:prstGeom>
-          <a:solidFill>
-            <a:srgbClr val="FEF3C7"/>
-          </a:solidFill>
-          <a:ln w="19050">
-            <a:solidFill>
-              <a:srgbClr val="B45309"/>
-            </a:solidFill>
-            <a:prstDash val="dash"/>
-          </a:ln>
-          <a:effectLst/>
-        </p:spPr>
-        <p:style>
-          <a:lnRef idx="1">
-            <a:schemeClr val="accent1"/>
-          </a:lnRef>
-          <a:fillRef idx="3">
-            <a:schemeClr val="accent1"/>
-          </a:fillRef>
-          <a:effectRef idx="2">
-            <a:schemeClr val="accent1"/>
-          </a:effectRef>
-          <a:fontRef idx="minor">
-            <a:schemeClr val="lt1"/>
-          </a:fontRef>
-        </p:style>
-        <p:txBody>
-          <a:bodyPr rtlCol="0" anchor="ctr" wrap="square" lIns="54864" rIns="54864" tIns="18288" bIns="18288"/>
-          <a:lstStyle/>
-          <a:p>
-            <a:pPr algn="ctr" rtl="1"/>
-            <a:r>
-              <a:rPr sz="1800" b="1" i="1" lang="ar-SA">
-                <a:solidFill>
-                  <a:srgbClr val="92400E"/>
-                </a:solidFill>
-                <a:latin typeface="Arial"/>
-                <a:cs typeface="Arial"/>
-              </a:rPr>
-              <a:t>[ تُكتب بعد النتائج ]</a:t>
-            </a:r>
-          </a:p>
-        </p:txBody>
-      </p:sp>
-      <p:sp>
-        <p:nvSpPr>
-          <p:cNvPr id="12" name="لوحة"/>
-          <p:cNvSpPr/>
-          <p:nvPr/>
-        </p:nvSpPr>
-        <p:spPr>
-          <a:xfrm>
-            <a:off x="3390823" y="1874519"/>
-            <a:ext cx="2567863" cy="3246120"/>
+            <a:off x="6233007" y="3954780"/>
+            <a:ext cx="5410047" cy="2217420"/>
           </a:xfrm>
           <a:prstGeom prst="roundRect">
             <a:avLst>
@@ -13656,14 +13467,70 @@
       </p:sp>
       <p:sp>
         <p:nvSpPr>
+          <p:cNvPr id="12" name="رقم"/>
+          <p:cNvSpPr/>
+          <p:nvPr/>
+        </p:nvSpPr>
+        <p:spPr>
+          <a:xfrm>
+            <a:off x="10682935" y="4137660"/>
+            <a:ext cx="777240" cy="502920"/>
+          </a:xfrm>
+          <a:prstGeom prst="roundRect">
+            <a:avLst>
+              <a:gd name="adj" fmla="val 50000"/>
+            </a:avLst>
+          </a:prstGeom>
+          <a:solidFill>
+            <a:srgbClr val="0F766E"/>
+          </a:solidFill>
+          <a:ln>
+            <a:noFill/>
+          </a:ln>
+          <a:effectLst/>
+        </p:spPr>
+        <p:style>
+          <a:lnRef idx="1">
+            <a:schemeClr val="accent1"/>
+          </a:lnRef>
+          <a:fillRef idx="3">
+            <a:schemeClr val="accent1"/>
+          </a:fillRef>
+          <a:effectRef idx="2">
+            <a:schemeClr val="accent1"/>
+          </a:effectRef>
+          <a:fontRef idx="minor">
+            <a:schemeClr val="lt1"/>
+          </a:fontRef>
+        </p:style>
+        <p:txBody>
+          <a:bodyPr rtlCol="0" anchor="ctr" wrap="square" lIns="54864" rIns="54864" tIns="18288" bIns="18288"/>
+          <a:lstStyle/>
+          <a:p>
+            <a:pPr algn="ctr" rtl="1"/>
+            <a:r>
+              <a:rPr sz="1400" b="1" i="0" lang="ar-SA">
+                <a:solidFill>
+                  <a:srgbClr val="FFFFFF"/>
+                </a:solidFill>
+                <a:latin typeface="Arial"/>
+                <a:cs typeface="Arial"/>
+              </a:rPr>
+              <a:t>H3</a:t>
+            </a:r>
+          </a:p>
+        </p:txBody>
+      </p:sp>
+      <p:sp>
+        <p:nvSpPr>
           <p:cNvPr id="13" name="TextBox 12"/>
           <p:cNvSpPr txBox="1"/>
           <p:nvPr/>
         </p:nvSpPr>
         <p:spPr>
           <a:xfrm>
-            <a:off x="3527983" y="1965960"/>
-            <a:ext cx="2293543" cy="685800"/>
+            <a:off x="6370167" y="4064508"/>
+            <a:ext cx="4221327" cy="685800"/>
           </a:xfrm>
           <a:prstGeom prst="rect">
             <a:avLst/>
@@ -13688,14 +13555,14 @@
               </a:spcAft>
             </a:pPr>
             <a:r>
-              <a:rPr sz="1800" b="1" i="0" lang="ar-SA">
+              <a:rPr sz="2400" b="1" i="0" lang="ar-SA">
                 <a:solidFill>
                   <a:srgbClr val="134E4A"/>
                 </a:solidFill>
                 <a:latin typeface="Arial"/>
                 <a:cs typeface="Arial"/>
               </a:rPr>
-              <a:t>التسلسل العصبوني</a:t>
+              <a:t>GRU-lite لم يتفوق على SKNN بالقدر المسجل</a:t>
             </a:r>
           </a:p>
         </p:txBody>
@@ -13708,8 +13575,8 @@
         </p:nvSpPr>
         <p:spPr>
           <a:xfrm>
-            <a:off x="3527983" y="2697479"/>
-            <a:ext cx="2293543" cy="822960"/>
+            <a:off x="6370167" y="4823460"/>
+            <a:ext cx="5135727" cy="1257300"/>
           </a:xfrm>
           <a:prstGeom prst="rect">
             <a:avLst/>
@@ -13724,7 +13591,7 @@
           <a:p>
             <a:pPr rtl="1" algn="r">
               <a:lnSpc>
-                <a:spcPct val="105000"/>
+                <a:spcPct val="115000"/>
               </a:lnSpc>
               <a:spcBef>
                 <a:spcPts val="0"/>
@@ -13734,87 +13601,28 @@
               </a:spcAft>
             </a:pPr>
             <a:r>
-              <a:rPr sz="1500" b="0" i="0" lang="ar-SA">
+              <a:rPr sz="2000" b="0" i="0" lang="ar-SA">
                 <a:solidFill>
                   <a:srgbClr val="475569"/>
                 </a:solidFill>
                 <a:latin typeface="Arial"/>
                 <a:cs typeface="Arial"/>
               </a:rPr>
-              <a:t>GRU-lite مقابل الجيران على السلال</a:t>
-            </a:r>
-          </a:p>
-        </p:txBody>
-      </p:sp>
-      <p:sp>
-        <p:nvSpPr>
-          <p:cNvPr id="15" name="مكان النتيجة"/>
+              <a:t>لا «أسوأ» ولا «مكافئ»، والنتيجة مقيَّدة بتنفيذ GRU-lite المكتوب بـ numpy.</a:t>
+            </a:r>
+          </a:p>
+        </p:txBody>
+      </p:sp>
+      <p:sp>
+        <p:nvSpPr>
+          <p:cNvPr id="15" name="بطاقة"/>
           <p:cNvSpPr/>
           <p:nvPr/>
         </p:nvSpPr>
         <p:spPr>
           <a:xfrm>
-            <a:off x="3573703" y="3611879"/>
-            <a:ext cx="2202103" cy="1325879"/>
-          </a:xfrm>
-          <a:prstGeom prst="roundRect">
-            <a:avLst>
-              <a:gd name="adj" fmla="val 8000"/>
-            </a:avLst>
-          </a:prstGeom>
-          <a:solidFill>
-            <a:srgbClr val="FEF3C7"/>
-          </a:solidFill>
-          <a:ln w="19050">
-            <a:solidFill>
-              <a:srgbClr val="B45309"/>
-            </a:solidFill>
-            <a:prstDash val="dash"/>
-          </a:ln>
-          <a:effectLst/>
-        </p:spPr>
-        <p:style>
-          <a:lnRef idx="1">
-            <a:schemeClr val="accent1"/>
-          </a:lnRef>
-          <a:fillRef idx="3">
-            <a:schemeClr val="accent1"/>
-          </a:fillRef>
-          <a:effectRef idx="2">
-            <a:schemeClr val="accent1"/>
-          </a:effectRef>
-          <a:fontRef idx="minor">
-            <a:schemeClr val="lt1"/>
-          </a:fontRef>
-        </p:style>
-        <p:txBody>
-          <a:bodyPr rtlCol="0" anchor="ctr" wrap="square" lIns="54864" rIns="54864" tIns="18288" bIns="18288"/>
-          <a:lstStyle/>
-          <a:p>
-            <a:pPr algn="ctr" rtl="1"/>
-            <a:r>
-              <a:rPr sz="1800" b="1" i="1" lang="ar-SA">
-                <a:solidFill>
-                  <a:srgbClr val="92400E"/>
-                </a:solidFill>
-                <a:latin typeface="Arial"/>
-                <a:cs typeface="Arial"/>
-              </a:rPr>
-              <a:t>[ تُكتب بعد النتائج ]</a:t>
-            </a:r>
-          </a:p>
-        </p:txBody>
-      </p:sp>
-      <p:sp>
-        <p:nvSpPr>
-          <p:cNvPr id="16" name="لوحة"/>
-          <p:cNvSpPr/>
-          <p:nvPr/>
-        </p:nvSpPr>
-        <p:spPr>
-          <a:xfrm>
-            <a:off x="548640" y="1874519"/>
-            <a:ext cx="2567863" cy="3246120"/>
+            <a:off x="548640" y="3954780"/>
+            <a:ext cx="5410047" cy="2217420"/>
           </a:xfrm>
           <a:prstGeom prst="roundRect">
             <a:avLst>
@@ -13855,169 +13663,18 @@
       </p:sp>
       <p:sp>
         <p:nvSpPr>
-          <p:cNvPr id="17" name="TextBox 16"/>
-          <p:cNvSpPr txBox="1"/>
-          <p:nvPr/>
-        </p:nvSpPr>
-        <p:spPr>
-          <a:xfrm>
-            <a:off x="685800" y="1965960"/>
-            <a:ext cx="2293543" cy="685800"/>
-          </a:xfrm>
-          <a:prstGeom prst="rect">
-            <a:avLst/>
-          </a:prstGeom>
-          <a:noFill/>
-        </p:spPr>
-        <p:txBody>
-          <a:bodyPr wrap="square" lIns="45720" rIns="45720" tIns="27432" bIns="27432" anchor="ctr">
-            <a:spAutoFit/>
-          </a:bodyPr>
-          <a:lstStyle/>
-          <a:p>
-            <a:pPr rtl="1" algn="r">
-              <a:lnSpc>
-                <a:spcPct val="100000"/>
-              </a:lnSpc>
-              <a:spcBef>
-                <a:spcPts val="0"/>
-              </a:spcBef>
-              <a:spcAft>
-                <a:spcPts val="0"/>
-              </a:spcAft>
-            </a:pPr>
-            <a:r>
-              <a:rPr sz="1800" b="1" i="0" lang="ar-SA">
-                <a:solidFill>
-                  <a:srgbClr val="134E4A"/>
-                </a:solidFill>
-                <a:latin typeface="Arial"/>
-                <a:cs typeface="Arial"/>
-              </a:rPr>
-              <a:t>المتعلمون والبدء البارد</a:t>
-            </a:r>
-          </a:p>
-        </p:txBody>
-      </p:sp>
-      <p:sp>
-        <p:nvSpPr>
-          <p:cNvPr id="18" name="TextBox 17"/>
-          <p:cNvSpPr txBox="1"/>
-          <p:nvPr/>
-        </p:nvSpPr>
-        <p:spPr>
-          <a:xfrm>
-            <a:off x="685800" y="2697479"/>
-            <a:ext cx="2293543" cy="822960"/>
-          </a:xfrm>
-          <a:prstGeom prst="rect">
-            <a:avLst/>
-          </a:prstGeom>
-          <a:noFill/>
-        </p:spPr>
-        <p:txBody>
-          <a:bodyPr wrap="square" lIns="45720" rIns="45720" tIns="27432" bIns="27432" anchor="t">
-            <a:spAutoFit/>
-          </a:bodyPr>
-          <a:lstStyle/>
-          <a:p>
-            <a:pPr rtl="1" algn="r">
-              <a:lnSpc>
-                <a:spcPct val="105000"/>
-              </a:lnSpc>
-              <a:spcBef>
-                <a:spcPts val="0"/>
-              </a:spcBef>
-              <a:spcAft>
-                <a:spcPts val="0"/>
-              </a:spcAft>
-            </a:pPr>
-            <a:r>
-              <a:rPr sz="1500" b="0" i="0" lang="ar-SA">
-                <a:solidFill>
-                  <a:srgbClr val="475569"/>
-                </a:solidFill>
-                <a:latin typeface="Arial"/>
-                <a:cs typeface="Arial"/>
-              </a:rPr>
-              <a:t>الخطر المبكر وسياق العنقود</a:t>
-            </a:r>
-          </a:p>
-        </p:txBody>
-      </p:sp>
-      <p:sp>
-        <p:nvSpPr>
-          <p:cNvPr id="19" name="مكان النتيجة"/>
+          <p:cNvPr id="16" name="رقم"/>
           <p:cNvSpPr/>
           <p:nvPr/>
         </p:nvSpPr>
         <p:spPr>
           <a:xfrm>
-            <a:off x="731520" y="3611879"/>
-            <a:ext cx="2202103" cy="1325879"/>
+            <a:off x="4998567" y="4137660"/>
+            <a:ext cx="777240" cy="502920"/>
           </a:xfrm>
           <a:prstGeom prst="roundRect">
             <a:avLst>
-              <a:gd name="adj" fmla="val 8000"/>
-            </a:avLst>
-          </a:prstGeom>
-          <a:solidFill>
-            <a:srgbClr val="FEF3C7"/>
-          </a:solidFill>
-          <a:ln w="19050">
-            <a:solidFill>
-              <a:srgbClr val="B45309"/>
-            </a:solidFill>
-            <a:prstDash val="dash"/>
-          </a:ln>
-          <a:effectLst/>
-        </p:spPr>
-        <p:style>
-          <a:lnRef idx="1">
-            <a:schemeClr val="accent1"/>
-          </a:lnRef>
-          <a:fillRef idx="3">
-            <a:schemeClr val="accent1"/>
-          </a:fillRef>
-          <a:effectRef idx="2">
-            <a:schemeClr val="accent1"/>
-          </a:effectRef>
-          <a:fontRef idx="minor">
-            <a:schemeClr val="lt1"/>
-          </a:fontRef>
-        </p:style>
-        <p:txBody>
-          <a:bodyPr rtlCol="0" anchor="ctr" wrap="square" lIns="54864" rIns="54864" tIns="18288" bIns="18288"/>
-          <a:lstStyle/>
-          <a:p>
-            <a:pPr algn="ctr" rtl="1"/>
-            <a:r>
-              <a:rPr sz="1800" b="1" i="1" lang="ar-SA">
-                <a:solidFill>
-                  <a:srgbClr val="92400E"/>
-                </a:solidFill>
-                <a:latin typeface="Arial"/>
-                <a:cs typeface="Arial"/>
-              </a:rPr>
-              <a:t>[ تُكتب بعد النتائج ]</a:t>
-            </a:r>
-          </a:p>
-        </p:txBody>
-      </p:sp>
-      <p:sp>
-        <p:nvSpPr>
-          <p:cNvPr id="20" name="خلاصة"/>
-          <p:cNvSpPr/>
-          <p:nvPr/>
-        </p:nvSpPr>
-        <p:spPr>
-          <a:xfrm>
-            <a:off x="548640" y="5257800"/>
-            <a:ext cx="11094415" cy="868680"/>
-          </a:xfrm>
-          <a:prstGeom prst="roundRect">
-            <a:avLst>
-              <a:gd name="adj" fmla="val 12000"/>
+              <a:gd name="adj" fmla="val 50000"/>
             </a:avLst>
           </a:prstGeom>
           <a:solidFill>
@@ -14043,26 +13700,118 @@
           </a:fontRef>
         </p:style>
         <p:txBody>
-          <a:bodyPr rtlCol="0" anchor="ctr" wrap="square" lIns="274320" rIns="274320" tIns="18288" bIns="18288"/>
-          <a:lstStyle/>
-          <a:p>
-            <a:pPr algn="r" rtl="1"/>
-            <a:r>
-              <a:rPr sz="2200" b="1" i="0" lang="ar-SA">
+          <a:bodyPr rtlCol="0" anchor="ctr" wrap="square" lIns="54864" rIns="54864" tIns="18288" bIns="18288"/>
+          <a:lstStyle/>
+          <a:p>
+            <a:pPr algn="ctr" rtl="1"/>
+            <a:r>
+              <a:rPr sz="1400" b="1" i="0" lang="ar-SA">
                 <a:solidFill>
                   <a:srgbClr val="FFFFFF"/>
                 </a:solidFill>
                 <a:latin typeface="Arial"/>
                 <a:cs typeface="Arial"/>
               </a:rPr>
-              <a:t>سياسة النتيجة السلبية: تفوّق الشعبية الآنية نتيجة رئيسية تُبلَّغ وتُحلَّل أسبابها</a:t>
-            </a:r>
-          </a:p>
-        </p:txBody>
-      </p:sp>
-      <p:sp>
-        <p:nvSpPr>
-          <p:cNvPr id="21" name="شعار الجامعة"/>
+              <a:t>H2-أ</a:t>
+            </a:r>
+          </a:p>
+        </p:txBody>
+      </p:sp>
+      <p:sp>
+        <p:nvSpPr>
+          <p:cNvPr id="17" name="TextBox 16"/>
+          <p:cNvSpPr txBox="1"/>
+          <p:nvPr/>
+        </p:nvSpPr>
+        <p:spPr>
+          <a:xfrm>
+            <a:off x="685800" y="4064508"/>
+            <a:ext cx="4221327" cy="685800"/>
+          </a:xfrm>
+          <a:prstGeom prst="rect">
+            <a:avLst/>
+          </a:prstGeom>
+          <a:noFill/>
+        </p:spPr>
+        <p:txBody>
+          <a:bodyPr wrap="square" lIns="45720" rIns="45720" tIns="27432" bIns="27432" anchor="ctr">
+            <a:spAutoFit/>
+          </a:bodyPr>
+          <a:lstStyle/>
+          <a:p>
+            <a:pPr rtl="1" algn="r">
+              <a:lnSpc>
+                <a:spcPct val="100000"/>
+              </a:lnSpc>
+              <a:spcBef>
+                <a:spcPts val="0"/>
+              </a:spcBef>
+              <a:spcAft>
+                <a:spcPts val="0"/>
+              </a:spcAft>
+            </a:pPr>
+            <a:r>
+              <a:rPr sz="2400" b="1" i="0" lang="ar-SA">
+                <a:solidFill>
+                  <a:srgbClr val="134E4A"/>
+                </a:solidFill>
+                <a:latin typeface="Arial"/>
+                <a:cs typeface="Arial"/>
+              </a:rPr>
+              <a:t>ترجيح الإشارات رفع WRMF</a:t>
+            </a:r>
+          </a:p>
+        </p:txBody>
+      </p:sp>
+      <p:sp>
+        <p:nvSpPr>
+          <p:cNvPr id="18" name="TextBox 17"/>
+          <p:cNvSpPr txBox="1"/>
+          <p:nvPr/>
+        </p:nvSpPr>
+        <p:spPr>
+          <a:xfrm>
+            <a:off x="685800" y="4823460"/>
+            <a:ext cx="5135727" cy="1257300"/>
+          </a:xfrm>
+          <a:prstGeom prst="rect">
+            <a:avLst/>
+          </a:prstGeom>
+          <a:noFill/>
+        </p:spPr>
+        <p:txBody>
+          <a:bodyPr wrap="square" lIns="45720" rIns="45720" tIns="27432" bIns="27432" anchor="t">
+            <a:spAutoFit/>
+          </a:bodyPr>
+          <a:lstStyle/>
+          <a:p>
+            <a:pPr rtl="1" algn="r">
+              <a:lnSpc>
+                <a:spcPct val="115000"/>
+              </a:lnSpc>
+              <a:spcBef>
+                <a:spcPts val="0"/>
+              </a:spcBef>
+              <a:spcAft>
+                <a:spcPts val="0"/>
+              </a:spcAft>
+            </a:pPr>
+            <a:r>
+              <a:rPr sz="2000" b="0" i="0" lang="ar-SA">
+                <a:solidFill>
+                  <a:srgbClr val="475569"/>
+                </a:solidFill>
+                <a:latin typeface="Arial"/>
+                <a:cs typeface="Arial"/>
+              </a:rPr>
+              <a:t>مؤكَّدة في 13 من 13 عرضاً، داخل WRMF وبيانات 2014 فقط، دون تعميم إلى النظام أو نماذج أخرى.</a:t>
+            </a:r>
+          </a:p>
+        </p:txBody>
+      </p:sp>
+      <p:sp>
+        <p:nvSpPr>
+          <p:cNvPr id="19" name="شعار الجامعة"/>
           <p:cNvSpPr/>
           <p:nvPr/>
         </p:nvSpPr>
@@ -14118,7 +13867,7 @@
       </p:sp>
       <p:sp>
         <p:nvSpPr>
-          <p:cNvPr id="22" name="تذييل"/>
+          <p:cNvPr id="20" name="تذييل"/>
           <p:cNvSpPr txBox="1"/>
           <p:nvPr/>
         </p:nvSpPr>
@@ -14164,7 +13913,7 @@
       </p:sp>
       <p:sp>
         <p:nvSpPr>
-          <p:cNvPr id="23" name="رقم الشريحة"/>
+          <p:cNvPr id="21" name="رقم الشريحة"/>
           <p:cNvSpPr txBox="1"/>
           <p:nvPr/>
         </p:nvSpPr>
@@ -15733,7 +15482,7 @@
                 <a:latin typeface="Arial"/>
                 <a:cs typeface="Arial"/>
               </a:rPr>
-              <a:t>اختبار قيمة ترجيح الإشارات بعائلة متداخلة من أربعة مستويات</a:t>
+              <a:t>ترجيح الإشارات رفع WRMF في 13 من 13 عرضاً، داخل WRMF وOULAD 2014 فقط</a:t>
             </a:r>
           </a:p>
         </p:txBody>
@@ -16275,7 +16024,7 @@
                 <a:latin typeface="Arial"/>
                 <a:cs typeface="Arial"/>
               </a:rPr>
-              <a:t>دليل على قوة الشعبية الآنية</a:t>
+              <a:t>قوة الشعبية الآنية</a:t>
             </a:r>
           </a:p>
         </p:txBody>
@@ -16321,7 +16070,7 @@
                 <a:latin typeface="Arial"/>
                 <a:cs typeface="Arial"/>
               </a:rPr>
-              <a:t>حجم ما يفرضه الجدول الدراسي على الوصول [يُستكمل بنتائج التأكيد]</a:t>
+              <a:t>الهجين لم يتفوق عليها في 2014 (غير حاسمة): الجدول الدراسي يفرض الكثير من الوصول</a:t>
             </a:r>
           </a:p>
         </p:txBody>
@@ -18729,33 +18478,33 @@
                 <a:latin typeface="Arial"/>
                 <a:cs typeface="Arial"/>
               </a:rPr>
-              <a:t>احتياطي: لماذا numpy فقط؟ ولماذا لا CNN؟</a:t>
-            </a:r>
-          </a:p>
-        </p:txBody>
-      </p:sp>
-      <p:sp>
-        <p:nvSpPr>
-          <p:cNvPr id="3" name="بطاقة"/>
+              <a:t>احتياطي: التحليلات الثانوية والاستكشافية</a:t>
+            </a:r>
+          </a:p>
+        </p:txBody>
+      </p:sp>
+      <p:sp>
+        <p:nvSpPr>
+          <p:cNvPr id="3" name="شريط الحالة"/>
           <p:cNvSpPr/>
           <p:nvPr/>
         </p:nvSpPr>
         <p:spPr>
           <a:xfrm>
-            <a:off x="6233007" y="1463040"/>
-            <a:ext cx="5410047" cy="4709160"/>
+            <a:off x="548640" y="1261872"/>
+            <a:ext cx="11094415" cy="420624"/>
           </a:xfrm>
           <a:prstGeom prst="roundRect">
             <a:avLst>
-              <a:gd name="adj" fmla="val 6000"/>
+              <a:gd name="adj" fmla="val 25000"/>
             </a:avLst>
           </a:prstGeom>
           <a:solidFill>
-            <a:srgbClr val="FFFFFF"/>
+            <a:srgbClr val="CCFBF1"/>
           </a:solidFill>
           <a:ln w="12700">
             <a:solidFill>
-              <a:srgbClr val="CBD5E1"/>
+              <a:srgbClr val="0F766E"/>
             </a:solidFill>
           </a:ln>
           <a:effectLst/>
@@ -18775,123 +18524,794 @@
           </a:fontRef>
         </p:style>
         <p:txBody>
-          <a:bodyPr rtlCol="0" anchor="ctr"/>
-          <a:lstStyle/>
-          <a:p>
-            <a:pPr algn="ctr"/>
-          </a:p>
-        </p:txBody>
-      </p:sp>
-      <p:sp>
-        <p:nvSpPr>
-          <p:cNvPr id="4" name="السؤال"/>
-          <p:cNvSpPr/>
-          <p:nvPr/>
-        </p:nvSpPr>
-        <p:spPr>
-          <a:xfrm>
-            <a:off x="6233007" y="1463040"/>
-            <a:ext cx="5410047" cy="822960"/>
-          </a:xfrm>
-          <a:prstGeom prst="roundRect">
-            <a:avLst>
-              <a:gd name="adj" fmla="val 20000"/>
-            </a:avLst>
-          </a:prstGeom>
-          <a:solidFill>
-            <a:srgbClr val="CCFBF1"/>
-          </a:solidFill>
-          <a:ln>
-            <a:noFill/>
-          </a:ln>
-          <a:effectLst/>
-        </p:spPr>
-        <p:style>
-          <a:lnRef idx="1">
-            <a:schemeClr val="accent1"/>
-          </a:lnRef>
-          <a:fillRef idx="3">
-            <a:schemeClr val="accent1"/>
-          </a:fillRef>
-          <a:effectRef idx="2">
-            <a:schemeClr val="accent1"/>
-          </a:effectRef>
-          <a:fontRef idx="minor">
-            <a:schemeClr val="lt1"/>
-          </a:fontRef>
-        </p:style>
-        <p:txBody>
           <a:bodyPr rtlCol="0" anchor="ctr" wrap="square" lIns="54864" rIns="228600" tIns="18288" bIns="18288"/>
           <a:lstStyle/>
           <a:p>
             <a:pPr algn="r" rtl="1"/>
             <a:r>
-              <a:rPr sz="2400" b="1" i="0" lang="ar-SA">
+              <a:rPr sz="1500" b="1" i="0" lang="ar-SA">
                 <a:solidFill>
                   <a:srgbClr val="134E4A"/>
                 </a:solidFill>
                 <a:latin typeface="Arial"/>
                 <a:cs typeface="Arial"/>
               </a:rPr>
-              <a:t>س: لماذا numpy فقط؟</a:t>
-            </a:r>
-          </a:p>
-        </p:txBody>
-      </p:sp>
-      <p:sp>
-        <p:nvSpPr>
-          <p:cNvPr id="5" name="نقطة"/>
-          <p:cNvSpPr/>
-          <p:nvPr/>
-        </p:nvSpPr>
-        <p:spPr>
-          <a:xfrm>
-            <a:off x="11259007" y="2792349"/>
-            <a:ext cx="164592" cy="164592"/>
-          </a:xfrm>
-          <a:prstGeom prst="ellipse">
-            <a:avLst/>
-          </a:prstGeom>
-          <a:solidFill>
-            <a:srgbClr val="B45309"/>
-          </a:solidFill>
-          <a:ln>
-            <a:noFill/>
-          </a:ln>
-          <a:effectLst/>
-        </p:spPr>
-        <p:style>
-          <a:lnRef idx="1">
-            <a:schemeClr val="accent1"/>
-          </a:lnRef>
-          <a:fillRef idx="3">
-            <a:schemeClr val="accent1"/>
-          </a:fillRef>
-          <a:effectRef idx="2">
-            <a:schemeClr val="accent1"/>
-          </a:effectRef>
-          <a:fontRef idx="minor">
-            <a:schemeClr val="lt1"/>
-          </a:fontRef>
-        </p:style>
-        <p:txBody>
-          <a:bodyPr rtlCol="0" anchor="ctr"/>
-          <a:lstStyle/>
-          <a:p>
-            <a:pPr algn="ctr"/>
-          </a:p>
-        </p:txBody>
-      </p:sp>
-      <p:sp>
-        <p:nvSpPr>
-          <p:cNvPr id="6" name="TextBox 5"/>
+              <a:t>ثانوي / استكشافي: بلا حكم تأكيدي، وp غير مصحَّحة</a:t>
+            </a:r>
+          </a:p>
+        </p:txBody>
+      </p:sp>
+      <p:graphicFrame>
+        <p:nvGraphicFramePr>
+          <p:cNvPr id="4" name="جدول"/>
+          <p:cNvGraphicFramePr>
+            <a:graphicFrameLocks noGrp="1"/>
+          </p:cNvGraphicFramePr>
+          <p:nvPr/>
+        </p:nvGraphicFramePr>
+        <p:xfrm>
+          <a:off x="548640" y="1874519"/>
+          <a:ext cx="11094414" cy="3794760"/>
+        </p:xfrm>
+        <a:graphic>
+          <a:graphicData uri="http://schemas.openxmlformats.org/drawingml/2006/table">
+            <a:tbl>
+              <a:tblPr firstRow="1" bandRow="0">
+                <a:tableStyleId>{5C22544A-7EE6-4342-B048-85BDC9FD1C3A}</a:tableStyleId>
+              </a:tblPr>
+              <a:tblGrid>
+                <a:gridCol w="1654430"/>
+                <a:gridCol w="2530305"/>
+                <a:gridCol w="1362472"/>
+                <a:gridCol w="1459791"/>
+                <a:gridCol w="4087416"/>
+              </a:tblGrid>
+              <a:tr h="632460">
+                <a:tc>
+                  <a:txBody>
+                    <a:bodyPr wrap="square"/>
+                    <a:lstStyle/>
+                    <a:p>
+                      <a:pPr rtl="1" algn="r"/>
+                      <a:r>
+                        <a:rPr sz="1500" b="1" i="0" lang="ar-SA">
+                          <a:solidFill>
+                            <a:srgbClr val="FFFFFF"/>
+                          </a:solidFill>
+                          <a:latin typeface="Arial"/>
+                          <a:cs typeface="Arial"/>
+                        </a:rPr>
+                        <a:t>p غير مصحَّحة</a:t>
+                      </a:r>
+                    </a:p>
+                  </a:txBody>
+                  <a:tcPr anchor="ctr" marL="91440" marR="91440" marT="36576" marB="36576">
+                    <a:solidFill>
+                      <a:srgbClr val="0F766E"/>
+                    </a:solidFill>
+                  </a:tcPr>
+                </a:tc>
+                <a:tc>
+                  <a:txBody>
+                    <a:bodyPr wrap="square"/>
+                    <a:lstStyle/>
+                    <a:p>
+                      <a:pPr rtl="1" algn="r"/>
+                      <a:r>
+                        <a:rPr sz="1500" b="1" i="0" lang="ar-SA">
+                          <a:solidFill>
+                            <a:srgbClr val="FFFFFF"/>
+                          </a:solidFill>
+                          <a:latin typeface="Arial"/>
+                          <a:cs typeface="Arial"/>
+                        </a:rPr>
+                        <a:t>فاصل الثقة 95%</a:t>
+                      </a:r>
+                    </a:p>
+                  </a:txBody>
+                  <a:tcPr anchor="ctr" marL="91440" marR="91440" marT="36576" marB="36576">
+                    <a:solidFill>
+                      <a:srgbClr val="0F766E"/>
+                    </a:solidFill>
+                  </a:tcPr>
+                </a:tc>
+                <a:tc>
+                  <a:txBody>
+                    <a:bodyPr wrap="square"/>
+                    <a:lstStyle/>
+                    <a:p>
+                      <a:pPr rtl="1" algn="r"/>
+                      <a:r>
+                        <a:rPr sz="1500" b="1" i="0" lang="ar-SA">
+                          <a:solidFill>
+                            <a:srgbClr val="FFFFFF"/>
+                          </a:solidFill>
+                          <a:latin typeface="Arial"/>
+                          <a:cs typeface="Arial"/>
+                        </a:rPr>
+                        <a:t>الفرق</a:t>
+                      </a:r>
+                    </a:p>
+                  </a:txBody>
+                  <a:tcPr anchor="ctr" marL="91440" marR="91440" marT="36576" marB="36576">
+                    <a:solidFill>
+                      <a:srgbClr val="0F766E"/>
+                    </a:solidFill>
+                  </a:tcPr>
+                </a:tc>
+                <a:tc>
+                  <a:txBody>
+                    <a:bodyPr wrap="square"/>
+                    <a:lstStyle/>
+                    <a:p>
+                      <a:pPr rtl="1" algn="r"/>
+                      <a:r>
+                        <a:rPr sz="1500" b="1" i="0" lang="ar-SA">
+                          <a:solidFill>
+                            <a:srgbClr val="FFFFFF"/>
+                          </a:solidFill>
+                          <a:latin typeface="Arial"/>
+                          <a:cs typeface="Arial"/>
+                        </a:rPr>
+                        <a:t>الوسم</a:t>
+                      </a:r>
+                    </a:p>
+                  </a:txBody>
+                  <a:tcPr anchor="ctr" marL="91440" marR="91440" marT="36576" marB="36576">
+                    <a:solidFill>
+                      <a:srgbClr val="0F766E"/>
+                    </a:solidFill>
+                  </a:tcPr>
+                </a:tc>
+                <a:tc>
+                  <a:txBody>
+                    <a:bodyPr wrap="square"/>
+                    <a:lstStyle/>
+                    <a:p>
+                      <a:pPr rtl="1" algn="r"/>
+                      <a:r>
+                        <a:rPr sz="1500" b="1" i="0" lang="ar-SA">
+                          <a:solidFill>
+                            <a:srgbClr val="FFFFFF"/>
+                          </a:solidFill>
+                          <a:latin typeface="Arial"/>
+                          <a:cs typeface="Arial"/>
+                        </a:rPr>
+                        <a:t>التحليل</a:t>
+                      </a:r>
+                    </a:p>
+                  </a:txBody>
+                  <a:tcPr anchor="ctr" marL="91440" marR="91440" marT="36576" marB="36576">
+                    <a:solidFill>
+                      <a:srgbClr val="0F766E"/>
+                    </a:solidFill>
+                  </a:tcPr>
+                </a:tc>
+              </a:tr>
+              <a:tr h="632460">
+                <a:tc>
+                  <a:txBody>
+                    <a:bodyPr wrap="square"/>
+                    <a:lstStyle/>
+                    <a:p>
+                      <a:pPr rtl="1" algn="r"/>
+                      <a:r>
+                        <a:rPr sz="1500" b="0" i="0" lang="ar-SA">
+                          <a:solidFill>
+                            <a:srgbClr val="134E4A"/>
+                          </a:solidFill>
+                          <a:latin typeface="Arial"/>
+                          <a:cs typeface="Arial"/>
+                        </a:rPr>
+                        <a:t>‭0.0012‬</a:t>
+                      </a:r>
+                    </a:p>
+                  </a:txBody>
+                  <a:tcPr anchor="ctr" marL="91440" marR="91440" marT="36576" marB="36576">
+                    <a:solidFill>
+                      <a:srgbClr val="FFFFFF"/>
+                    </a:solidFill>
+                  </a:tcPr>
+                </a:tc>
+                <a:tc>
+                  <a:txBody>
+                    <a:bodyPr wrap="square"/>
+                    <a:lstStyle/>
+                    <a:p>
+                      <a:pPr rtl="1" algn="r"/>
+                      <a:r>
+                        <a:rPr sz="1500" b="0" i="0" lang="ar-SA">
+                          <a:solidFill>
+                            <a:srgbClr val="134E4A"/>
+                          </a:solidFill>
+                          <a:latin typeface="Arial"/>
+                          <a:cs typeface="Arial"/>
+                        </a:rPr>
+                        <a:t>‭[+0.0186, +0.0846]‬</a:t>
+                      </a:r>
+                    </a:p>
+                  </a:txBody>
+                  <a:tcPr anchor="ctr" marL="91440" marR="91440" marT="36576" marB="36576">
+                    <a:solidFill>
+                      <a:srgbClr val="FFFFFF"/>
+                    </a:solidFill>
+                  </a:tcPr>
+                </a:tc>
+                <a:tc>
+                  <a:txBody>
+                    <a:bodyPr wrap="square"/>
+                    <a:lstStyle/>
+                    <a:p>
+                      <a:pPr rtl="1" algn="r"/>
+                      <a:r>
+                        <a:rPr sz="1500" b="0" i="0" lang="ar-SA">
+                          <a:solidFill>
+                            <a:srgbClr val="134E4A"/>
+                          </a:solidFill>
+                          <a:latin typeface="Arial"/>
+                          <a:cs typeface="Arial"/>
+                        </a:rPr>
+                        <a:t>‭+0.0407‬</a:t>
+                      </a:r>
+                    </a:p>
+                  </a:txBody>
+                  <a:tcPr anchor="ctr" marL="91440" marR="91440" marT="36576" marB="36576">
+                    <a:solidFill>
+                      <a:srgbClr val="FFFFFF"/>
+                    </a:solidFill>
+                  </a:tcPr>
+                </a:tc>
+                <a:tc>
+                  <a:txBody>
+                    <a:bodyPr wrap="square"/>
+                    <a:lstStyle/>
+                    <a:p>
+                      <a:pPr rtl="1" algn="r"/>
+                      <a:r>
+                        <a:rPr sz="1500" b="0" i="0" lang="ar-SA">
+                          <a:solidFill>
+                            <a:srgbClr val="134E4A"/>
+                          </a:solidFill>
+                          <a:latin typeface="Arial"/>
+                          <a:cs typeface="Arial"/>
+                        </a:rPr>
+                        <a:t>استكشافي</a:t>
+                      </a:r>
+                    </a:p>
+                  </a:txBody>
+                  <a:tcPr anchor="ctr" marL="91440" marR="91440" marT="36576" marB="36576">
+                    <a:solidFill>
+                      <a:srgbClr val="FFFFFF"/>
+                    </a:solidFill>
+                  </a:tcPr>
+                </a:tc>
+                <a:tc>
+                  <a:txBody>
+                    <a:bodyPr wrap="square"/>
+                    <a:lstStyle/>
+                    <a:p>
+                      <a:pPr rtl="1" algn="r"/>
+                      <a:r>
+                        <a:rPr sz="1500" b="1" i="0" lang="ar-SA">
+                          <a:solidFill>
+                            <a:srgbClr val="134E4A"/>
+                          </a:solidFill>
+                          <a:latin typeface="Arial"/>
+                          <a:cs typeface="Arial"/>
+                        </a:rPr>
+                        <a:t>H4-ب · الربع الأقل تاريخاً: الهجين مقابل SKNN</a:t>
+                      </a:r>
+                    </a:p>
+                  </a:txBody>
+                  <a:tcPr anchor="ctr" marL="91440" marR="91440" marT="36576" marB="36576">
+                    <a:solidFill>
+                      <a:srgbClr val="FFFFFF"/>
+                    </a:solidFill>
+                  </a:tcPr>
+                </a:tc>
+              </a:tr>
+              <a:tr h="632460">
+                <a:tc>
+                  <a:txBody>
+                    <a:bodyPr wrap="square"/>
+                    <a:lstStyle/>
+                    <a:p>
+                      <a:pPr rtl="1" algn="r"/>
+                      <a:r>
+                        <a:rPr sz="1500" b="0" i="0" lang="ar-SA">
+                          <a:solidFill>
+                            <a:srgbClr val="134E4A"/>
+                          </a:solidFill>
+                          <a:latin typeface="Arial"/>
+                          <a:cs typeface="Arial"/>
+                        </a:rPr>
+                        <a:t>‭0.0012‬</a:t>
+                      </a:r>
+                    </a:p>
+                  </a:txBody>
+                  <a:tcPr anchor="ctr" marL="91440" marR="91440" marT="36576" marB="36576">
+                    <a:solidFill>
+                      <a:srgbClr val="EEF2F6"/>
+                    </a:solidFill>
+                  </a:tcPr>
+                </a:tc>
+                <a:tc>
+                  <a:txBody>
+                    <a:bodyPr wrap="square"/>
+                    <a:lstStyle/>
+                    <a:p>
+                      <a:pPr rtl="1" algn="r"/>
+                      <a:r>
+                        <a:rPr sz="1500" b="0" i="0" lang="ar-SA">
+                          <a:solidFill>
+                            <a:srgbClr val="134E4A"/>
+                          </a:solidFill>
+                          <a:latin typeface="Arial"/>
+                          <a:cs typeface="Arial"/>
+                        </a:rPr>
+                        <a:t>‭[+0.0088, +0.0305]‬</a:t>
+                      </a:r>
+                    </a:p>
+                  </a:txBody>
+                  <a:tcPr anchor="ctr" marL="91440" marR="91440" marT="36576" marB="36576">
+                    <a:solidFill>
+                      <a:srgbClr val="EEF2F6"/>
+                    </a:solidFill>
+                  </a:tcPr>
+                </a:tc>
+                <a:tc>
+                  <a:txBody>
+                    <a:bodyPr wrap="square"/>
+                    <a:lstStyle/>
+                    <a:p>
+                      <a:pPr rtl="1" algn="r"/>
+                      <a:r>
+                        <a:rPr sz="1500" b="0" i="0" lang="ar-SA">
+                          <a:solidFill>
+                            <a:srgbClr val="134E4A"/>
+                          </a:solidFill>
+                          <a:latin typeface="Arial"/>
+                          <a:cs typeface="Arial"/>
+                        </a:rPr>
+                        <a:t>‭+0.0174‬</a:t>
+                      </a:r>
+                    </a:p>
+                  </a:txBody>
+                  <a:tcPr anchor="ctr" marL="91440" marR="91440" marT="36576" marB="36576">
+                    <a:solidFill>
+                      <a:srgbClr val="EEF2F6"/>
+                    </a:solidFill>
+                  </a:tcPr>
+                </a:tc>
+                <a:tc>
+                  <a:txBody>
+                    <a:bodyPr wrap="square"/>
+                    <a:lstStyle/>
+                    <a:p>
+                      <a:pPr rtl="1" algn="r"/>
+                      <a:r>
+                        <a:rPr sz="1500" b="0" i="0" lang="ar-SA">
+                          <a:solidFill>
+                            <a:srgbClr val="134E4A"/>
+                          </a:solidFill>
+                          <a:latin typeface="Arial"/>
+                          <a:cs typeface="Arial"/>
+                        </a:rPr>
+                        <a:t>استكشافي</a:t>
+                      </a:r>
+                    </a:p>
+                  </a:txBody>
+                  <a:tcPr anchor="ctr" marL="91440" marR="91440" marT="36576" marB="36576">
+                    <a:solidFill>
+                      <a:srgbClr val="EEF2F6"/>
+                    </a:solidFill>
+                  </a:tcPr>
+                </a:tc>
+                <a:tc>
+                  <a:txBody>
+                    <a:bodyPr wrap="square"/>
+                    <a:lstStyle/>
+                    <a:p>
+                      <a:pPr rtl="1" algn="r"/>
+                      <a:r>
+                        <a:rPr sz="1500" b="1" i="0" lang="ar-SA">
+                          <a:solidFill>
+                            <a:srgbClr val="134E4A"/>
+                          </a:solidFill>
+                          <a:latin typeface="Arial"/>
+                          <a:cs typeface="Arial"/>
+                        </a:rPr>
+                        <a:t>H4-ب · الربع الأعلى تاريخاً</a:t>
+                      </a:r>
+                    </a:p>
+                  </a:txBody>
+                  <a:tcPr anchor="ctr" marL="91440" marR="91440" marT="36576" marB="36576">
+                    <a:solidFill>
+                      <a:srgbClr val="EEF2F6"/>
+                    </a:solidFill>
+                  </a:tcPr>
+                </a:tc>
+              </a:tr>
+              <a:tr h="632460">
+                <a:tc>
+                  <a:txBody>
+                    <a:bodyPr wrap="square"/>
+                    <a:lstStyle/>
+                    <a:p>
+                      <a:pPr rtl="1" algn="r"/>
+                      <a:r>
+                        <a:rPr sz="1500" b="0" i="0" lang="ar-SA">
+                          <a:solidFill>
+                            <a:srgbClr val="134E4A"/>
+                          </a:solidFill>
+                          <a:latin typeface="Arial"/>
+                          <a:cs typeface="Arial"/>
+                        </a:rPr>
+                        <a:t>‭0.0146‬</a:t>
+                      </a:r>
+                    </a:p>
+                  </a:txBody>
+                  <a:tcPr anchor="ctr" marL="91440" marR="91440" marT="36576" marB="36576">
+                    <a:solidFill>
+                      <a:srgbClr val="FFFFFF"/>
+                    </a:solidFill>
+                  </a:tcPr>
+                </a:tc>
+                <a:tc>
+                  <a:txBody>
+                    <a:bodyPr wrap="square"/>
+                    <a:lstStyle/>
+                    <a:p>
+                      <a:pPr rtl="1" algn="r"/>
+                      <a:r>
+                        <a:rPr sz="1500" b="0" i="0" lang="ar-SA">
+                          <a:solidFill>
+                            <a:srgbClr val="134E4A"/>
+                          </a:solidFill>
+                          <a:latin typeface="Arial"/>
+                          <a:cs typeface="Arial"/>
+                        </a:rPr>
+                        <a:t>‭[+0.0019, +0.0144]‬</a:t>
+                      </a:r>
+                    </a:p>
+                  </a:txBody>
+                  <a:tcPr anchor="ctr" marL="91440" marR="91440" marT="36576" marB="36576">
+                    <a:solidFill>
+                      <a:srgbClr val="FFFFFF"/>
+                    </a:solidFill>
+                  </a:tcPr>
+                </a:tc>
+                <a:tc>
+                  <a:txBody>
+                    <a:bodyPr wrap="square"/>
+                    <a:lstStyle/>
+                    <a:p>
+                      <a:pPr rtl="1" algn="r"/>
+                      <a:r>
+                        <a:rPr sz="1500" b="0" i="0" lang="ar-SA">
+                          <a:solidFill>
+                            <a:srgbClr val="134E4A"/>
+                          </a:solidFill>
+                          <a:latin typeface="Arial"/>
+                          <a:cs typeface="Arial"/>
+                        </a:rPr>
+                        <a:t>‭+0.0083‬</a:t>
+                      </a:r>
+                    </a:p>
+                  </a:txBody>
+                  <a:tcPr anchor="ctr" marL="91440" marR="91440" marT="36576" marB="36576">
+                    <a:solidFill>
+                      <a:srgbClr val="FFFFFF"/>
+                    </a:solidFill>
+                  </a:tcPr>
+                </a:tc>
+                <a:tc>
+                  <a:txBody>
+                    <a:bodyPr wrap="square"/>
+                    <a:lstStyle/>
+                    <a:p>
+                      <a:pPr rtl="1" algn="r"/>
+                      <a:r>
+                        <a:rPr sz="1500" b="0" i="0" lang="ar-SA">
+                          <a:solidFill>
+                            <a:srgbClr val="134E4A"/>
+                          </a:solidFill>
+                          <a:latin typeface="Arial"/>
+                          <a:cs typeface="Arial"/>
+                        </a:rPr>
+                        <a:t>رئيسي (H4-أ)</a:t>
+                      </a:r>
+                    </a:p>
+                  </a:txBody>
+                  <a:tcPr anchor="ctr" marL="91440" marR="91440" marT="36576" marB="36576">
+                    <a:solidFill>
+                      <a:srgbClr val="FFFFFF"/>
+                    </a:solidFill>
+                  </a:tcPr>
+                </a:tc>
+                <a:tc>
+                  <a:txBody>
+                    <a:bodyPr wrap="square"/>
+                    <a:lstStyle/>
+                    <a:p>
+                      <a:pPr rtl="1" algn="r"/>
+                      <a:r>
+                        <a:rPr sz="1500" b="1" i="0" lang="ar-SA">
+                          <a:solidFill>
+                            <a:srgbClr val="134E4A"/>
+                          </a:solidFill>
+                          <a:latin typeface="Arial"/>
+                          <a:cs typeface="Arial"/>
+                        </a:rPr>
+                        <a:t>AUC عند اليوم 56: M1 مقابل M0</a:t>
+                      </a:r>
+                    </a:p>
+                  </a:txBody>
+                  <a:tcPr anchor="ctr" marL="91440" marR="91440" marT="36576" marB="36576">
+                    <a:solidFill>
+                      <a:srgbClr val="FFFFFF"/>
+                    </a:solidFill>
+                  </a:tcPr>
+                </a:tc>
+              </a:tr>
+              <a:tr h="632460">
+                <a:tc>
+                  <a:txBody>
+                    <a:bodyPr wrap="square"/>
+                    <a:lstStyle/>
+                    <a:p>
+                      <a:pPr rtl="1" algn="r"/>
+                      <a:r>
+                        <a:rPr sz="1500" b="0" i="0" lang="ar-SA">
+                          <a:solidFill>
+                            <a:srgbClr val="134E4A"/>
+                          </a:solidFill>
+                          <a:latin typeface="Arial"/>
+                          <a:cs typeface="Arial"/>
+                        </a:rPr>
+                        <a:t>‭0.0002‬</a:t>
+                      </a:r>
+                    </a:p>
+                  </a:txBody>
+                  <a:tcPr anchor="ctr" marL="91440" marR="91440" marT="36576" marB="36576">
+                    <a:solidFill>
+                      <a:srgbClr val="EEF2F6"/>
+                    </a:solidFill>
+                  </a:tcPr>
+                </a:tc>
+                <a:tc>
+                  <a:txBody>
+                    <a:bodyPr wrap="square"/>
+                    <a:lstStyle/>
+                    <a:p>
+                      <a:pPr rtl="1" algn="r"/>
+                      <a:r>
+                        <a:rPr sz="1500" b="0" i="0" lang="ar-SA">
+                          <a:solidFill>
+                            <a:srgbClr val="134E4A"/>
+                          </a:solidFill>
+                          <a:latin typeface="Arial"/>
+                          <a:cs typeface="Arial"/>
+                        </a:rPr>
+                        <a:t>‭[+0.0403, +0.0791]‬</a:t>
+                      </a:r>
+                    </a:p>
+                  </a:txBody>
+                  <a:tcPr anchor="ctr" marL="91440" marR="91440" marT="36576" marB="36576">
+                    <a:solidFill>
+                      <a:srgbClr val="EEF2F6"/>
+                    </a:solidFill>
+                  </a:tcPr>
+                </a:tc>
+                <a:tc>
+                  <a:txBody>
+                    <a:bodyPr wrap="square"/>
+                    <a:lstStyle/>
+                    <a:p>
+                      <a:pPr rtl="1" algn="r"/>
+                      <a:r>
+                        <a:rPr sz="1500" b="0" i="0" lang="ar-SA">
+                          <a:solidFill>
+                            <a:srgbClr val="134E4A"/>
+                          </a:solidFill>
+                          <a:latin typeface="Arial"/>
+                          <a:cs typeface="Arial"/>
+                        </a:rPr>
+                        <a:t>‭+0.0643‬</a:t>
+                      </a:r>
+                    </a:p>
+                  </a:txBody>
+                  <a:tcPr anchor="ctr" marL="91440" marR="91440" marT="36576" marB="36576">
+                    <a:solidFill>
+                      <a:srgbClr val="EEF2F6"/>
+                    </a:solidFill>
+                  </a:tcPr>
+                </a:tc>
+                <a:tc>
+                  <a:txBody>
+                    <a:bodyPr wrap="square"/>
+                    <a:lstStyle/>
+                    <a:p>
+                      <a:pPr rtl="1" algn="r"/>
+                      <a:r>
+                        <a:rPr sz="1500" b="0" i="0" lang="ar-SA">
+                          <a:solidFill>
+                            <a:srgbClr val="134E4A"/>
+                          </a:solidFill>
+                          <a:latin typeface="Arial"/>
+                          <a:cs typeface="Arial"/>
+                        </a:rPr>
+                        <a:t>ثانوي</a:t>
+                      </a:r>
+                    </a:p>
+                  </a:txBody>
+                  <a:tcPr anchor="ctr" marL="91440" marR="91440" marT="36576" marB="36576">
+                    <a:solidFill>
+                      <a:srgbClr val="EEF2F6"/>
+                    </a:solidFill>
+                  </a:tcPr>
+                </a:tc>
+                <a:tc>
+                  <a:txBody>
+                    <a:bodyPr wrap="square"/>
+                    <a:lstStyle/>
+                    <a:p>
+                      <a:pPr rtl="1" algn="r"/>
+                      <a:r>
+                        <a:rPr sz="1500" b="1" i="0" lang="ar-SA">
+                          <a:solidFill>
+                            <a:srgbClr val="134E4A"/>
+                          </a:solidFill>
+                          <a:latin typeface="Arial"/>
+                          <a:cs typeface="Arial"/>
+                        </a:rPr>
+                        <a:t>AUC عند اليوم 56: M2 مقابل M1</a:t>
+                      </a:r>
+                    </a:p>
+                  </a:txBody>
+                  <a:tcPr anchor="ctr" marL="91440" marR="91440" marT="36576" marB="36576">
+                    <a:solidFill>
+                      <a:srgbClr val="EEF2F6"/>
+                    </a:solidFill>
+                  </a:tcPr>
+                </a:tc>
+              </a:tr>
+              <a:tr h="632460">
+                <a:tc>
+                  <a:txBody>
+                    <a:bodyPr wrap="square"/>
+                    <a:lstStyle/>
+                    <a:p>
+                      <a:pPr rtl="1" algn="r"/>
+                      <a:r>
+                        <a:rPr sz="1500" b="0" i="0" lang="ar-SA">
+                          <a:solidFill>
+                            <a:srgbClr val="134E4A"/>
+                          </a:solidFill>
+                          <a:latin typeface="Arial"/>
+                          <a:cs typeface="Arial"/>
+                        </a:rPr>
+                        <a:t>‭0.0002‬</a:t>
+                      </a:r>
+                    </a:p>
+                  </a:txBody>
+                  <a:tcPr anchor="ctr" marL="91440" marR="91440" marT="36576" marB="36576">
+                    <a:solidFill>
+                      <a:srgbClr val="FFFFFF"/>
+                    </a:solidFill>
+                  </a:tcPr>
+                </a:tc>
+                <a:tc>
+                  <a:txBody>
+                    <a:bodyPr wrap="square"/>
+                    <a:lstStyle/>
+                    <a:p>
+                      <a:pPr rtl="1" algn="r"/>
+                      <a:r>
+                        <a:rPr sz="1500" b="0" i="0" lang="ar-SA">
+                          <a:solidFill>
+                            <a:srgbClr val="134E4A"/>
+                          </a:solidFill>
+                          <a:latin typeface="Arial"/>
+                          <a:cs typeface="Arial"/>
+                        </a:rPr>
+                        <a:t>‭[+0.0525, +0.0881]‬</a:t>
+                      </a:r>
+                    </a:p>
+                  </a:txBody>
+                  <a:tcPr anchor="ctr" marL="91440" marR="91440" marT="36576" marB="36576">
+                    <a:solidFill>
+                      <a:srgbClr val="FFFFFF"/>
+                    </a:solidFill>
+                  </a:tcPr>
+                </a:tc>
+                <a:tc>
+                  <a:txBody>
+                    <a:bodyPr wrap="square"/>
+                    <a:lstStyle/>
+                    <a:p>
+                      <a:pPr rtl="1" algn="r"/>
+                      <a:r>
+                        <a:rPr sz="1500" b="0" i="0" lang="ar-SA">
+                          <a:solidFill>
+                            <a:srgbClr val="134E4A"/>
+                          </a:solidFill>
+                          <a:latin typeface="Arial"/>
+                          <a:cs typeface="Arial"/>
+                        </a:rPr>
+                        <a:t>‭+0.0725‬</a:t>
+                      </a:r>
+                    </a:p>
+                  </a:txBody>
+                  <a:tcPr anchor="ctr" marL="91440" marR="91440" marT="36576" marB="36576">
+                    <a:solidFill>
+                      <a:srgbClr val="FFFFFF"/>
+                    </a:solidFill>
+                  </a:tcPr>
+                </a:tc>
+                <a:tc>
+                  <a:txBody>
+                    <a:bodyPr wrap="square"/>
+                    <a:lstStyle/>
+                    <a:p>
+                      <a:pPr rtl="1" algn="r"/>
+                      <a:r>
+                        <a:rPr sz="1500" b="0" i="0" lang="ar-SA">
+                          <a:solidFill>
+                            <a:srgbClr val="134E4A"/>
+                          </a:solidFill>
+                          <a:latin typeface="Arial"/>
+                          <a:cs typeface="Arial"/>
+                        </a:rPr>
+                        <a:t>ثانوي</a:t>
+                      </a:r>
+                    </a:p>
+                  </a:txBody>
+                  <a:tcPr anchor="ctr" marL="91440" marR="91440" marT="36576" marB="36576">
+                    <a:solidFill>
+                      <a:srgbClr val="FFFFFF"/>
+                    </a:solidFill>
+                  </a:tcPr>
+                </a:tc>
+                <a:tc>
+                  <a:txBody>
+                    <a:bodyPr wrap="square"/>
+                    <a:lstStyle/>
+                    <a:p>
+                      <a:pPr rtl="1" algn="r"/>
+                      <a:r>
+                        <a:rPr sz="1500" b="1" i="0" lang="ar-SA">
+                          <a:solidFill>
+                            <a:srgbClr val="134E4A"/>
+                          </a:solidFill>
+                          <a:latin typeface="Arial"/>
+                          <a:cs typeface="Arial"/>
+                        </a:rPr>
+                        <a:t>AUC عند اليوم 56: M2 مقابل M0</a:t>
+                      </a:r>
+                    </a:p>
+                  </a:txBody>
+                  <a:tcPr anchor="ctr" marL="91440" marR="91440" marT="36576" marB="36576">
+                    <a:solidFill>
+                      <a:srgbClr val="FFFFFF"/>
+                    </a:solidFill>
+                  </a:tcPr>
+                </a:tc>
+              </a:tr>
+            </a:tbl>
+          </a:graphicData>
+        </a:graphic>
+      </p:graphicFrame>
+      <p:sp>
+        <p:nvSpPr>
+          <p:cNvPr id="5" name="TextBox 4"/>
           <p:cNvSpPr txBox="1"/>
           <p:nvPr/>
         </p:nvSpPr>
         <p:spPr>
           <a:xfrm>
-            <a:off x="6370167" y="2423160"/>
-            <a:ext cx="4769967" cy="902970"/>
+            <a:off x="548640" y="5760720"/>
+            <a:ext cx="11094415" cy="502920"/>
           </a:xfrm>
           <a:prstGeom prst="rect">
             <a:avLst/>
@@ -18906,7 +19326,7 @@
           <a:p>
             <a:pPr rtl="1" algn="r">
               <a:lnSpc>
-                <a:spcPct val="105000"/>
+                <a:spcPct val="115000"/>
               </a:lnSpc>
               <a:spcBef>
                 <a:spcPts val="0"/>
@@ -18916,755 +19336,21 @@
               </a:spcAft>
             </a:pPr>
             <a:r>
-              <a:rPr sz="1700" b="0" i="0" lang="ar-SA">
-                <a:solidFill>
-                  <a:srgbClr val="134E4A"/>
-                </a:solidFill>
-                <a:latin typeface="Arial"/>
-                <a:cs typeface="Arial"/>
-              </a:rPr>
-              <a:t>بيئة التنفيذ لا تتيح TensorFlow ولا Keras ولا scikit-learn</a:t>
-            </a:r>
-          </a:p>
-        </p:txBody>
-      </p:sp>
-      <p:sp>
-        <p:nvSpPr>
-          <p:cNvPr id="7" name="نقطة"/>
-          <p:cNvSpPr/>
-          <p:nvPr/>
-        </p:nvSpPr>
-        <p:spPr>
-          <a:xfrm>
-            <a:off x="11259007" y="3695319"/>
-            <a:ext cx="164592" cy="164592"/>
-          </a:xfrm>
-          <a:prstGeom prst="ellipse">
-            <a:avLst/>
-          </a:prstGeom>
-          <a:solidFill>
-            <a:srgbClr val="B45309"/>
-          </a:solidFill>
-          <a:ln>
-            <a:noFill/>
-          </a:ln>
-          <a:effectLst/>
-        </p:spPr>
-        <p:style>
-          <a:lnRef idx="1">
-            <a:schemeClr val="accent1"/>
-          </a:lnRef>
-          <a:fillRef idx="3">
-            <a:schemeClr val="accent1"/>
-          </a:fillRef>
-          <a:effectRef idx="2">
-            <a:schemeClr val="accent1"/>
-          </a:effectRef>
-          <a:fontRef idx="minor">
-            <a:schemeClr val="lt1"/>
-          </a:fontRef>
-        </p:style>
-        <p:txBody>
-          <a:bodyPr rtlCol="0" anchor="ctr"/>
-          <a:lstStyle/>
-          <a:p>
-            <a:pPr algn="ctr"/>
-          </a:p>
-        </p:txBody>
-      </p:sp>
-      <p:sp>
-        <p:nvSpPr>
-          <p:cNvPr id="8" name="TextBox 7"/>
-          <p:cNvSpPr txBox="1"/>
-          <p:nvPr/>
-        </p:nvSpPr>
-        <p:spPr>
-          <a:xfrm>
-            <a:off x="6370167" y="3326130"/>
-            <a:ext cx="4769967" cy="902970"/>
-          </a:xfrm>
-          <a:prstGeom prst="rect">
-            <a:avLst/>
-          </a:prstGeom>
-          <a:noFill/>
-        </p:spPr>
-        <p:txBody>
-          <a:bodyPr wrap="square" lIns="45720" rIns="45720" tIns="27432" bIns="27432" anchor="ctr">
-            <a:spAutoFit/>
-          </a:bodyPr>
-          <a:lstStyle/>
-          <a:p>
-            <a:pPr rtl="1" algn="r">
-              <a:lnSpc>
-                <a:spcPct val="105000"/>
-              </a:lnSpc>
-              <a:spcBef>
-                <a:spcPts val="0"/>
-              </a:spcBef>
-              <a:spcAft>
-                <a:spcPts val="0"/>
-              </a:spcAft>
-            </a:pPr>
-            <a:r>
-              <a:rPr sz="1700" b="0" i="0" lang="ar-SA">
-                <a:solidFill>
-                  <a:srgbClr val="134E4A"/>
-                </a:solidFill>
-                <a:latin typeface="Arial"/>
-                <a:cs typeface="Arial"/>
-              </a:rPr>
-              <a:t>كُتبت الخوارزميات يدوياً مع اختبار تحقق لكل تنفيذ</a:t>
-            </a:r>
-          </a:p>
-        </p:txBody>
-      </p:sp>
-      <p:sp>
-        <p:nvSpPr>
-          <p:cNvPr id="9" name="نقطة"/>
-          <p:cNvSpPr/>
-          <p:nvPr/>
-        </p:nvSpPr>
-        <p:spPr>
-          <a:xfrm>
-            <a:off x="11259007" y="4598289"/>
-            <a:ext cx="164592" cy="164592"/>
-          </a:xfrm>
-          <a:prstGeom prst="ellipse">
-            <a:avLst/>
-          </a:prstGeom>
-          <a:solidFill>
-            <a:srgbClr val="B45309"/>
-          </a:solidFill>
-          <a:ln>
-            <a:noFill/>
-          </a:ln>
-          <a:effectLst/>
-        </p:spPr>
-        <p:style>
-          <a:lnRef idx="1">
-            <a:schemeClr val="accent1"/>
-          </a:lnRef>
-          <a:fillRef idx="3">
-            <a:schemeClr val="accent1"/>
-          </a:fillRef>
-          <a:effectRef idx="2">
-            <a:schemeClr val="accent1"/>
-          </a:effectRef>
-          <a:fontRef idx="minor">
-            <a:schemeClr val="lt1"/>
-          </a:fontRef>
-        </p:style>
-        <p:txBody>
-          <a:bodyPr rtlCol="0" anchor="ctr"/>
-          <a:lstStyle/>
-          <a:p>
-            <a:pPr algn="ctr"/>
-          </a:p>
-        </p:txBody>
-      </p:sp>
-      <p:sp>
-        <p:nvSpPr>
-          <p:cNvPr id="10" name="TextBox 9"/>
-          <p:cNvSpPr txBox="1"/>
-          <p:nvPr/>
-        </p:nvSpPr>
-        <p:spPr>
-          <a:xfrm>
-            <a:off x="6370167" y="4229100"/>
-            <a:ext cx="4769967" cy="902970"/>
-          </a:xfrm>
-          <a:prstGeom prst="rect">
-            <a:avLst/>
-          </a:prstGeom>
-          <a:noFill/>
-        </p:spPr>
-        <p:txBody>
-          <a:bodyPr wrap="square" lIns="45720" rIns="45720" tIns="27432" bIns="27432" anchor="ctr">
-            <a:spAutoFit/>
-          </a:bodyPr>
-          <a:lstStyle/>
-          <a:p>
-            <a:pPr rtl="1" algn="r">
-              <a:lnSpc>
-                <a:spcPct val="105000"/>
-              </a:lnSpc>
-              <a:spcBef>
-                <a:spcPts val="0"/>
-              </a:spcBef>
-              <a:spcAft>
-                <a:spcPts val="0"/>
-              </a:spcAft>
-            </a:pPr>
-            <a:r>
-              <a:rPr sz="1700" b="0" i="0" lang="ar-SA">
-                <a:solidFill>
-                  <a:srgbClr val="134E4A"/>
-                </a:solidFill>
-                <a:latin typeface="Arial"/>
-                <a:cs typeface="Arial"/>
-              </a:rPr>
-              <a:t>مثال: فحص تدرج GRU-lite بخطأ نسبي 4.3e-06</a:t>
-            </a:r>
-          </a:p>
-        </p:txBody>
-      </p:sp>
-      <p:sp>
-        <p:nvSpPr>
-          <p:cNvPr id="11" name="نقطة"/>
-          <p:cNvSpPr/>
-          <p:nvPr/>
-        </p:nvSpPr>
-        <p:spPr>
-          <a:xfrm>
-            <a:off x="11259007" y="5501259"/>
-            <a:ext cx="164592" cy="164592"/>
-          </a:xfrm>
-          <a:prstGeom prst="ellipse">
-            <a:avLst/>
-          </a:prstGeom>
-          <a:solidFill>
-            <a:srgbClr val="B45309"/>
-          </a:solidFill>
-          <a:ln>
-            <a:noFill/>
-          </a:ln>
-          <a:effectLst/>
-        </p:spPr>
-        <p:style>
-          <a:lnRef idx="1">
-            <a:schemeClr val="accent1"/>
-          </a:lnRef>
-          <a:fillRef idx="3">
-            <a:schemeClr val="accent1"/>
-          </a:fillRef>
-          <a:effectRef idx="2">
-            <a:schemeClr val="accent1"/>
-          </a:effectRef>
-          <a:fontRef idx="minor">
-            <a:schemeClr val="lt1"/>
-          </a:fontRef>
-        </p:style>
-        <p:txBody>
-          <a:bodyPr rtlCol="0" anchor="ctr"/>
-          <a:lstStyle/>
-          <a:p>
-            <a:pPr algn="ctr"/>
-          </a:p>
-        </p:txBody>
-      </p:sp>
-      <p:sp>
-        <p:nvSpPr>
-          <p:cNvPr id="12" name="TextBox 11"/>
-          <p:cNvSpPr txBox="1"/>
-          <p:nvPr/>
-        </p:nvSpPr>
-        <p:spPr>
-          <a:xfrm>
-            <a:off x="6370167" y="5132070"/>
-            <a:ext cx="4769967" cy="902970"/>
-          </a:xfrm>
-          <a:prstGeom prst="rect">
-            <a:avLst/>
-          </a:prstGeom>
-          <a:noFill/>
-        </p:spPr>
-        <p:txBody>
-          <a:bodyPr wrap="square" lIns="45720" rIns="45720" tIns="27432" bIns="27432" anchor="ctr">
-            <a:spAutoFit/>
-          </a:bodyPr>
-          <a:lstStyle/>
-          <a:p>
-            <a:pPr rtl="1" algn="r">
-              <a:lnSpc>
-                <a:spcPct val="105000"/>
-              </a:lnSpc>
-              <a:spcBef>
-                <a:spcPts val="0"/>
-              </a:spcBef>
-              <a:spcAft>
-                <a:spcPts val="0"/>
-              </a:spcAft>
-            </a:pPr>
-            <a:r>
-              <a:rPr sz="1700" b="0" i="0" lang="ar-SA">
-                <a:solidFill>
-                  <a:srgbClr val="134E4A"/>
-                </a:solidFill>
-                <a:latin typeface="Arial"/>
-                <a:cs typeface="Arial"/>
-              </a:rPr>
-              <a:t>القيد معلن في الفصل الثالث (3-6-3)</a:t>
-            </a:r>
-          </a:p>
-        </p:txBody>
-      </p:sp>
-      <p:sp>
-        <p:nvSpPr>
-          <p:cNvPr id="13" name="بطاقة"/>
-          <p:cNvSpPr/>
-          <p:nvPr/>
-        </p:nvSpPr>
-        <p:spPr>
-          <a:xfrm>
-            <a:off x="548640" y="1463040"/>
-            <a:ext cx="5410047" cy="4709160"/>
-          </a:xfrm>
-          <a:prstGeom prst="roundRect">
-            <a:avLst>
-              <a:gd name="adj" fmla="val 6000"/>
-            </a:avLst>
-          </a:prstGeom>
-          <a:solidFill>
-            <a:srgbClr val="FFFFFF"/>
-          </a:solidFill>
-          <a:ln w="12700">
-            <a:solidFill>
-              <a:srgbClr val="CBD5E1"/>
-            </a:solidFill>
-          </a:ln>
-          <a:effectLst/>
-        </p:spPr>
-        <p:style>
-          <a:lnRef idx="1">
-            <a:schemeClr val="accent1"/>
-          </a:lnRef>
-          <a:fillRef idx="3">
-            <a:schemeClr val="accent1"/>
-          </a:fillRef>
-          <a:effectRef idx="2">
-            <a:schemeClr val="accent1"/>
-          </a:effectRef>
-          <a:fontRef idx="minor">
-            <a:schemeClr val="lt1"/>
-          </a:fontRef>
-        </p:style>
-        <p:txBody>
-          <a:bodyPr rtlCol="0" anchor="ctr"/>
-          <a:lstStyle/>
-          <a:p>
-            <a:pPr algn="ctr"/>
-          </a:p>
-        </p:txBody>
-      </p:sp>
-      <p:sp>
-        <p:nvSpPr>
-          <p:cNvPr id="14" name="السؤال"/>
-          <p:cNvSpPr/>
-          <p:nvPr/>
-        </p:nvSpPr>
-        <p:spPr>
-          <a:xfrm>
-            <a:off x="548640" y="1463040"/>
-            <a:ext cx="5410047" cy="822960"/>
-          </a:xfrm>
-          <a:prstGeom prst="roundRect">
-            <a:avLst>
-              <a:gd name="adj" fmla="val 20000"/>
-            </a:avLst>
-          </a:prstGeom>
-          <a:solidFill>
-            <a:srgbClr val="CCFBF1"/>
-          </a:solidFill>
-          <a:ln>
-            <a:noFill/>
-          </a:ln>
-          <a:effectLst/>
-        </p:spPr>
-        <p:style>
-          <a:lnRef idx="1">
-            <a:schemeClr val="accent1"/>
-          </a:lnRef>
-          <a:fillRef idx="3">
-            <a:schemeClr val="accent1"/>
-          </a:fillRef>
-          <a:effectRef idx="2">
-            <a:schemeClr val="accent1"/>
-          </a:effectRef>
-          <a:fontRef idx="minor">
-            <a:schemeClr val="lt1"/>
-          </a:fontRef>
-        </p:style>
-        <p:txBody>
-          <a:bodyPr rtlCol="0" anchor="ctr" wrap="square" lIns="54864" rIns="228600" tIns="18288" bIns="18288"/>
-          <a:lstStyle/>
-          <a:p>
-            <a:pPr algn="r" rtl="1"/>
-            <a:r>
-              <a:rPr sz="2400" b="1" i="0" lang="ar-SA">
-                <a:solidFill>
-                  <a:srgbClr val="134E4A"/>
-                </a:solidFill>
-                <a:latin typeface="Arial"/>
-                <a:cs typeface="Arial"/>
-              </a:rPr>
-              <a:t>س: لماذا لا CNN؟</a:t>
-            </a:r>
-          </a:p>
-        </p:txBody>
-      </p:sp>
-      <p:sp>
-        <p:nvSpPr>
-          <p:cNvPr id="15" name="نقطة"/>
-          <p:cNvSpPr/>
-          <p:nvPr/>
-        </p:nvSpPr>
-        <p:spPr>
-          <a:xfrm>
-            <a:off x="5574639" y="2792349"/>
-            <a:ext cx="164592" cy="164592"/>
-          </a:xfrm>
-          <a:prstGeom prst="ellipse">
-            <a:avLst/>
-          </a:prstGeom>
-          <a:solidFill>
-            <a:srgbClr val="B45309"/>
-          </a:solidFill>
-          <a:ln>
-            <a:noFill/>
-          </a:ln>
-          <a:effectLst/>
-        </p:spPr>
-        <p:style>
-          <a:lnRef idx="1">
-            <a:schemeClr val="accent1"/>
-          </a:lnRef>
-          <a:fillRef idx="3">
-            <a:schemeClr val="accent1"/>
-          </a:fillRef>
-          <a:effectRef idx="2">
-            <a:schemeClr val="accent1"/>
-          </a:effectRef>
-          <a:fontRef idx="minor">
-            <a:schemeClr val="lt1"/>
-          </a:fontRef>
-        </p:style>
-        <p:txBody>
-          <a:bodyPr rtlCol="0" anchor="ctr"/>
-          <a:lstStyle/>
-          <a:p>
-            <a:pPr algn="ctr"/>
-          </a:p>
-        </p:txBody>
-      </p:sp>
-      <p:sp>
-        <p:nvSpPr>
-          <p:cNvPr id="16" name="TextBox 15"/>
-          <p:cNvSpPr txBox="1"/>
-          <p:nvPr/>
-        </p:nvSpPr>
-        <p:spPr>
-          <a:xfrm>
-            <a:off x="685800" y="2423160"/>
-            <a:ext cx="4769967" cy="902970"/>
-          </a:xfrm>
-          <a:prstGeom prst="rect">
-            <a:avLst/>
-          </a:prstGeom>
-          <a:noFill/>
-        </p:spPr>
-        <p:txBody>
-          <a:bodyPr wrap="square" lIns="45720" rIns="45720" tIns="27432" bIns="27432" anchor="ctr">
-            <a:spAutoFit/>
-          </a:bodyPr>
-          <a:lstStyle/>
-          <a:p>
-            <a:pPr rtl="1" algn="r">
-              <a:lnSpc>
-                <a:spcPct val="105000"/>
-              </a:lnSpc>
-              <a:spcBef>
-                <a:spcPts val="0"/>
-              </a:spcBef>
-              <a:spcAft>
-                <a:spcPts val="0"/>
-              </a:spcAft>
-            </a:pPr>
-            <a:r>
-              <a:rPr sz="1700" b="0" i="0" lang="ar-SA">
-                <a:solidFill>
-                  <a:srgbClr val="134E4A"/>
-                </a:solidFill>
-                <a:latin typeface="Arial"/>
-                <a:cs typeface="Arial"/>
-              </a:rPr>
-              <a:t>مرجعه الوحيد في الأدبيات المدروسة غير قابل للتكرار</a:t>
-            </a:r>
-          </a:p>
-        </p:txBody>
-      </p:sp>
-      <p:sp>
-        <p:nvSpPr>
-          <p:cNvPr id="17" name="نقطة"/>
-          <p:cNvSpPr/>
-          <p:nvPr/>
-        </p:nvSpPr>
-        <p:spPr>
-          <a:xfrm>
-            <a:off x="5574639" y="3695319"/>
-            <a:ext cx="164592" cy="164592"/>
-          </a:xfrm>
-          <a:prstGeom prst="ellipse">
-            <a:avLst/>
-          </a:prstGeom>
-          <a:solidFill>
-            <a:srgbClr val="B45309"/>
-          </a:solidFill>
-          <a:ln>
-            <a:noFill/>
-          </a:ln>
-          <a:effectLst/>
-        </p:spPr>
-        <p:style>
-          <a:lnRef idx="1">
-            <a:schemeClr val="accent1"/>
-          </a:lnRef>
-          <a:fillRef idx="3">
-            <a:schemeClr val="accent1"/>
-          </a:fillRef>
-          <a:effectRef idx="2">
-            <a:schemeClr val="accent1"/>
-          </a:effectRef>
-          <a:fontRef idx="minor">
-            <a:schemeClr val="lt1"/>
-          </a:fontRef>
-        </p:style>
-        <p:txBody>
-          <a:bodyPr rtlCol="0" anchor="ctr"/>
-          <a:lstStyle/>
-          <a:p>
-            <a:pPr algn="ctr"/>
-          </a:p>
-        </p:txBody>
-      </p:sp>
-      <p:sp>
-        <p:nvSpPr>
-          <p:cNvPr id="18" name="TextBox 17"/>
-          <p:cNvSpPr txBox="1"/>
-          <p:nvPr/>
-        </p:nvSpPr>
-        <p:spPr>
-          <a:xfrm>
-            <a:off x="685800" y="3326130"/>
-            <a:ext cx="4769967" cy="902970"/>
-          </a:xfrm>
-          <a:prstGeom prst="rect">
-            <a:avLst/>
-          </a:prstGeom>
-          <a:noFill/>
-        </p:spPr>
-        <p:txBody>
-          <a:bodyPr wrap="square" lIns="45720" rIns="45720" tIns="27432" bIns="27432" anchor="ctr">
-            <a:spAutoFit/>
-          </a:bodyPr>
-          <a:lstStyle/>
-          <a:p>
-            <a:pPr rtl="1" algn="r">
-              <a:lnSpc>
-                <a:spcPct val="105000"/>
-              </a:lnSpc>
-              <a:spcBef>
-                <a:spcPts val="0"/>
-              </a:spcBef>
-              <a:spcAft>
-                <a:spcPts val="0"/>
-              </a:spcAft>
-            </a:pPr>
-            <a:r>
-              <a:rPr sz="1700" b="0" i="0" lang="ar-SA">
-                <a:solidFill>
-                  <a:srgbClr val="134E4A"/>
-                </a:solidFill>
-                <a:latin typeface="Arial"/>
-                <a:cs typeface="Arial"/>
-              </a:rPr>
-              <a:t>سلال الأيام غير مرتبة داخلياً: لا بنية محلية تستفيد منها التلافيف</a:t>
-            </a:r>
-          </a:p>
-        </p:txBody>
-      </p:sp>
-      <p:sp>
-        <p:nvSpPr>
-          <p:cNvPr id="19" name="نقطة"/>
-          <p:cNvSpPr/>
-          <p:nvPr/>
-        </p:nvSpPr>
-        <p:spPr>
-          <a:xfrm>
-            <a:off x="5574639" y="4598289"/>
-            <a:ext cx="164592" cy="164592"/>
-          </a:xfrm>
-          <a:prstGeom prst="ellipse">
-            <a:avLst/>
-          </a:prstGeom>
-          <a:solidFill>
-            <a:srgbClr val="B45309"/>
-          </a:solidFill>
-          <a:ln>
-            <a:noFill/>
-          </a:ln>
-          <a:effectLst/>
-        </p:spPr>
-        <p:style>
-          <a:lnRef idx="1">
-            <a:schemeClr val="accent1"/>
-          </a:lnRef>
-          <a:fillRef idx="3">
-            <a:schemeClr val="accent1"/>
-          </a:fillRef>
-          <a:effectRef idx="2">
-            <a:schemeClr val="accent1"/>
-          </a:effectRef>
-          <a:fontRef idx="minor">
-            <a:schemeClr val="lt1"/>
-          </a:fontRef>
-        </p:style>
-        <p:txBody>
-          <a:bodyPr rtlCol="0" anchor="ctr"/>
-          <a:lstStyle/>
-          <a:p>
-            <a:pPr algn="ctr"/>
-          </a:p>
-        </p:txBody>
-      </p:sp>
-      <p:sp>
-        <p:nvSpPr>
-          <p:cNvPr id="20" name="TextBox 19"/>
-          <p:cNvSpPr txBox="1"/>
-          <p:nvPr/>
-        </p:nvSpPr>
-        <p:spPr>
-          <a:xfrm>
-            <a:off x="685800" y="4229100"/>
-            <a:ext cx="4769967" cy="902970"/>
-          </a:xfrm>
-          <a:prstGeom prst="rect">
-            <a:avLst/>
-          </a:prstGeom>
-          <a:noFill/>
-        </p:spPr>
-        <p:txBody>
-          <a:bodyPr wrap="square" lIns="45720" rIns="45720" tIns="27432" bIns="27432" anchor="ctr">
-            <a:spAutoFit/>
-          </a:bodyPr>
-          <a:lstStyle/>
-          <a:p>
-            <a:pPr rtl="1" algn="r">
-              <a:lnSpc>
-                <a:spcPct val="105000"/>
-              </a:lnSpc>
-              <a:spcBef>
-                <a:spcPts val="0"/>
-              </a:spcBef>
-              <a:spcAft>
-                <a:spcPts val="0"/>
-              </a:spcAft>
-            </a:pPr>
-            <a:r>
-              <a:rPr sz="1700" b="0" i="0" lang="ar-SA">
-                <a:solidFill>
-                  <a:srgbClr val="134E4A"/>
-                </a:solidFill>
-                <a:latin typeface="Arial"/>
-                <a:cs typeface="Arial"/>
-              </a:rPr>
-              <a:t>بقي الاتجاه العصبوني ممثلاً بـ GRU-lite</a:t>
-            </a:r>
-          </a:p>
-        </p:txBody>
-      </p:sp>
-      <p:sp>
-        <p:nvSpPr>
-          <p:cNvPr id="21" name="نقطة"/>
-          <p:cNvSpPr/>
-          <p:nvPr/>
-        </p:nvSpPr>
-        <p:spPr>
-          <a:xfrm>
-            <a:off x="5574639" y="5501259"/>
-            <a:ext cx="164592" cy="164592"/>
-          </a:xfrm>
-          <a:prstGeom prst="ellipse">
-            <a:avLst/>
-          </a:prstGeom>
-          <a:solidFill>
-            <a:srgbClr val="B45309"/>
-          </a:solidFill>
-          <a:ln>
-            <a:noFill/>
-          </a:ln>
-          <a:effectLst/>
-        </p:spPr>
-        <p:style>
-          <a:lnRef idx="1">
-            <a:schemeClr val="accent1"/>
-          </a:lnRef>
-          <a:fillRef idx="3">
-            <a:schemeClr val="accent1"/>
-          </a:fillRef>
-          <a:effectRef idx="2">
-            <a:schemeClr val="accent1"/>
-          </a:effectRef>
-          <a:fontRef idx="minor">
-            <a:schemeClr val="lt1"/>
-          </a:fontRef>
-        </p:style>
-        <p:txBody>
-          <a:bodyPr rtlCol="0" anchor="ctr"/>
-          <a:lstStyle/>
-          <a:p>
-            <a:pPr algn="ctr"/>
-          </a:p>
-        </p:txBody>
-      </p:sp>
-      <p:sp>
-        <p:nvSpPr>
-          <p:cNvPr id="22" name="TextBox 21"/>
-          <p:cNvSpPr txBox="1"/>
-          <p:nvPr/>
-        </p:nvSpPr>
-        <p:spPr>
-          <a:xfrm>
-            <a:off x="685800" y="5132070"/>
-            <a:ext cx="4769967" cy="902970"/>
-          </a:xfrm>
-          <a:prstGeom prst="rect">
-            <a:avLst/>
-          </a:prstGeom>
-          <a:noFill/>
-        </p:spPr>
-        <p:txBody>
-          <a:bodyPr wrap="square" lIns="45720" rIns="45720" tIns="27432" bIns="27432" anchor="ctr">
-            <a:spAutoFit/>
-          </a:bodyPr>
-          <a:lstStyle/>
-          <a:p>
-            <a:pPr rtl="1" algn="r">
-              <a:lnSpc>
-                <a:spcPct val="105000"/>
-              </a:lnSpc>
-              <a:spcBef>
-                <a:spcPts val="0"/>
-              </a:spcBef>
-              <a:spcAft>
-                <a:spcPts val="0"/>
-              </a:spcAft>
-            </a:pPr>
-            <a:r>
-              <a:rPr sz="1700" b="0" i="0" lang="ar-SA">
-                <a:solidFill>
-                  <a:srgbClr val="134E4A"/>
-                </a:solidFill>
-                <a:latin typeface="Arial"/>
-                <a:cs typeface="Arial"/>
-              </a:rPr>
-              <a:t>الخطة نفسها تركت اختيار الأنسب أثناء البحث</a:t>
-            </a:r>
-          </a:p>
-        </p:txBody>
-      </p:sp>
-      <p:sp>
-        <p:nvSpPr>
-          <p:cNvPr id="23" name="شعار الجامعة"/>
+              <a:rPr sz="1400" b="0" i="0" lang="ar-SA">
+                <a:solidFill>
+                  <a:srgbClr val="475569"/>
+                </a:solidFill>
+                <a:latin typeface="Arial"/>
+                <a:cs typeface="Arial"/>
+              </a:rPr>
+              <a:t>المصدر: results/conf2014/h4b.csv وsecondary.csv. M0 مجموع النقرات، وM1 ملامح السلوك. لا يدخل أي صف عائلة هولم. H1: الحد الأعلى 0.0204 يزيد على العتبة بـ0.0004؛ الحكم غير حاسمة بالإجراء المسجل.</a:t>
+            </a:r>
+          </a:p>
+        </p:txBody>
+      </p:sp>
+      <p:sp>
+        <p:nvSpPr>
+          <p:cNvPr id="6" name="شعار الجامعة"/>
           <p:cNvSpPr/>
           <p:nvPr/>
         </p:nvSpPr>
@@ -19720,7 +19406,7 @@
       </p:sp>
       <p:sp>
         <p:nvSpPr>
-          <p:cNvPr id="24" name="تذييل"/>
+          <p:cNvPr id="7" name="تذييل"/>
           <p:cNvSpPr txBox="1"/>
           <p:nvPr/>
         </p:nvSpPr>
@@ -19766,7 +19452,7 @@
       </p:sp>
       <p:sp>
         <p:nvSpPr>
-          <p:cNvPr id="25" name="رقم الشريحة"/>
+          <p:cNvPr id="8" name="رقم الشريحة"/>
           <p:cNvSpPr txBox="1"/>
           <p:nvPr/>
         </p:nvSpPr>
@@ -19866,7 +19552,7 @@
                 <a:latin typeface="Arial"/>
                 <a:cs typeface="Arial"/>
               </a:rPr>
-              <a:t>احتياطي: ما الدلالة الإحصائية؟</a:t>
+              <a:t>احتياطي: لماذا numpy فقط؟ ولماذا لا CNN؟</a:t>
             </a:r>
           </a:p>
         </p:txBody>
@@ -19879,8 +19565,8 @@
         </p:nvSpPr>
         <p:spPr>
           <a:xfrm>
-            <a:off x="548639" y="1463040"/>
-            <a:ext cx="11094415" cy="4709160"/>
+            <a:off x="6233007" y="1463040"/>
+            <a:ext cx="5410047" cy="4709160"/>
           </a:xfrm>
           <a:prstGeom prst="roundRect">
             <a:avLst>
@@ -19927,8 +19613,8 @@
         </p:nvSpPr>
         <p:spPr>
           <a:xfrm>
-            <a:off x="548639" y="1463040"/>
-            <a:ext cx="11094415" cy="822960"/>
+            <a:off x="6233007" y="1463040"/>
+            <a:ext cx="5410047" cy="822960"/>
           </a:xfrm>
           <a:prstGeom prst="roundRect">
             <a:avLst>
@@ -19970,7 +19656,7 @@
                 <a:latin typeface="Arial"/>
                 <a:cs typeface="Arial"/>
               </a:rPr>
-              <a:t>س: كيف يُحكم على الفرق بين نموذجين؟</a:t>
+              <a:t>س: لماذا numpy فقط؟</a:t>
             </a:r>
           </a:p>
         </p:txBody>
@@ -19983,7 +19669,7 @@
         </p:nvSpPr>
         <p:spPr>
           <a:xfrm>
-            <a:off x="11259007" y="2702052"/>
+            <a:off x="11259007" y="2792349"/>
             <a:ext cx="164592" cy="164592"/>
           </a:xfrm>
           <a:prstGeom prst="ellipse">
@@ -20027,8 +19713,8 @@
         </p:nvSpPr>
         <p:spPr>
           <a:xfrm>
-            <a:off x="685799" y="2423160"/>
-            <a:ext cx="10454335" cy="722376"/>
+            <a:off x="6370167" y="2423160"/>
+            <a:ext cx="4769967" cy="902970"/>
           </a:xfrm>
           <a:prstGeom prst="rect">
             <a:avLst/>
@@ -20053,14 +19739,14 @@
               </a:spcAft>
             </a:pPr>
             <a:r>
-              <a:rPr sz="2000" b="0" i="0" lang="ar-SA">
+              <a:rPr sz="1700" b="0" i="0" lang="ar-SA">
                 <a:solidFill>
                   <a:srgbClr val="134E4A"/>
                 </a:solidFill>
                 <a:latin typeface="Arial"/>
                 <a:cs typeface="Arial"/>
               </a:rPr>
-              <a:t>وحدة التحليل العرض: 13 عرضاً في 2014، ومتوسط الفروق على 3 قطوع</a:t>
+              <a:t>بيئة التنفيذ لا تتيح TensorFlow ولا Keras ولا scikit-learn</a:t>
             </a:r>
           </a:p>
         </p:txBody>
@@ -20073,7 +19759,7 @@
         </p:nvSpPr>
         <p:spPr>
           <a:xfrm>
-            <a:off x="11259007" y="3424428"/>
+            <a:off x="11259007" y="3695319"/>
             <a:ext cx="164592" cy="164592"/>
           </a:xfrm>
           <a:prstGeom prst="ellipse">
@@ -20117,8 +19803,8 @@
         </p:nvSpPr>
         <p:spPr>
           <a:xfrm>
-            <a:off x="685799" y="3145536"/>
-            <a:ext cx="10454335" cy="722376"/>
+            <a:off x="6370167" y="3326130"/>
+            <a:ext cx="4769967" cy="902970"/>
           </a:xfrm>
           <a:prstGeom prst="rect">
             <a:avLst/>
@@ -20143,14 +19829,14 @@
               </a:spcAft>
             </a:pPr>
             <a:r>
-              <a:rPr sz="2000" b="0" i="0" lang="ar-SA">
+              <a:rPr sz="1700" b="0" i="0" lang="ar-SA">
                 <a:solidFill>
                   <a:srgbClr val="134E4A"/>
                 </a:solidFill>
                 <a:latin typeface="Arial"/>
                 <a:cs typeface="Arial"/>
               </a:rPr>
-              <a:t>فاصل ثقة 95% بـ bootstrap-t العنقودي المعيَّر، بعشرة آلاف إعادة</a:t>
+              <a:t>كُتبت الخوارزميات يدوياً مع اختبار تحقق لكل تنفيذ</a:t>
             </a:r>
           </a:p>
         </p:txBody>
@@ -20163,7 +19849,7 @@
         </p:nvSpPr>
         <p:spPr>
           <a:xfrm>
-            <a:off x="11259007" y="4146804"/>
+            <a:off x="11259007" y="4598289"/>
             <a:ext cx="164592" cy="164592"/>
           </a:xfrm>
           <a:prstGeom prst="ellipse">
@@ -20207,8 +19893,8 @@
         </p:nvSpPr>
         <p:spPr>
           <a:xfrm>
-            <a:off x="685799" y="3867912"/>
-            <a:ext cx="10454335" cy="722376"/>
+            <a:off x="6370167" y="4229100"/>
+            <a:ext cx="4769967" cy="902970"/>
           </a:xfrm>
           <a:prstGeom prst="rect">
             <a:avLst/>
@@ -20233,14 +19919,14 @@
               </a:spcAft>
             </a:pPr>
             <a:r>
-              <a:rPr sz="2000" b="0" i="0" lang="ar-SA">
+              <a:rPr sz="1700" b="0" i="0" lang="ar-SA">
                 <a:solidFill>
                   <a:srgbClr val="134E4A"/>
                 </a:solidFill>
                 <a:latin typeface="Arial"/>
                 <a:cs typeface="Arial"/>
               </a:rPr>
-              <a:t>قيمة p بقلب الإشارات الدقيق (8,192 تركيبة)، وتصحيح هولم على 4 فرضيات</a:t>
+              <a:t>مثال: فحص تدرج GRU-lite بخطأ نسبي 4.3e-06</a:t>
             </a:r>
           </a:p>
         </p:txBody>
@@ -20253,7 +19939,7 @@
         </p:nvSpPr>
         <p:spPr>
           <a:xfrm>
-            <a:off x="11259007" y="4869179"/>
+            <a:off x="11259007" y="5501259"/>
             <a:ext cx="164592" cy="164592"/>
           </a:xfrm>
           <a:prstGeom prst="ellipse">
@@ -20297,8 +19983,8 @@
         </p:nvSpPr>
         <p:spPr>
           <a:xfrm>
-            <a:off x="685799" y="4590288"/>
-            <a:ext cx="10454335" cy="722376"/>
+            <a:off x="6370167" y="5132070"/>
+            <a:ext cx="4769967" cy="902970"/>
           </a:xfrm>
           <a:prstGeom prst="rect">
             <a:avLst/>
@@ -20323,27 +20009,131 @@
               </a:spcAft>
             </a:pPr>
             <a:r>
-              <a:rPr sz="2000" b="0" i="0" lang="ar-SA">
+              <a:rPr sz="1700" b="0" i="0" lang="ar-SA">
                 <a:solidFill>
                   <a:srgbClr val="134E4A"/>
                 </a:solidFill>
                 <a:latin typeface="Arial"/>
                 <a:cs typeface="Arial"/>
               </a:rPr>
-              <a:t>تُؤكَّد الفرضية إن بلغ الأثر 0.02 على الأقل وكان الحد الأدنى للفاصل موجباً وp المصحَّحة أقل من 0.05</a:t>
-            </a:r>
-          </a:p>
-        </p:txBody>
-      </p:sp>
-      <p:sp>
-        <p:nvSpPr>
-          <p:cNvPr id="13" name="نقطة"/>
+              <a:t>القيد معلن في الفصل الثالث (3-6-3)</a:t>
+            </a:r>
+          </a:p>
+        </p:txBody>
+      </p:sp>
+      <p:sp>
+        <p:nvSpPr>
+          <p:cNvPr id="13" name="بطاقة"/>
           <p:cNvSpPr/>
           <p:nvPr/>
         </p:nvSpPr>
         <p:spPr>
           <a:xfrm>
-            <a:off x="11259007" y="5591556"/>
+            <a:off x="548640" y="1463040"/>
+            <a:ext cx="5410047" cy="4709160"/>
+          </a:xfrm>
+          <a:prstGeom prst="roundRect">
+            <a:avLst>
+              <a:gd name="adj" fmla="val 6000"/>
+            </a:avLst>
+          </a:prstGeom>
+          <a:solidFill>
+            <a:srgbClr val="FFFFFF"/>
+          </a:solidFill>
+          <a:ln w="12700">
+            <a:solidFill>
+              <a:srgbClr val="CBD5E1"/>
+            </a:solidFill>
+          </a:ln>
+          <a:effectLst/>
+        </p:spPr>
+        <p:style>
+          <a:lnRef idx="1">
+            <a:schemeClr val="accent1"/>
+          </a:lnRef>
+          <a:fillRef idx="3">
+            <a:schemeClr val="accent1"/>
+          </a:fillRef>
+          <a:effectRef idx="2">
+            <a:schemeClr val="accent1"/>
+          </a:effectRef>
+          <a:fontRef idx="minor">
+            <a:schemeClr val="lt1"/>
+          </a:fontRef>
+        </p:style>
+        <p:txBody>
+          <a:bodyPr rtlCol="0" anchor="ctr"/>
+          <a:lstStyle/>
+          <a:p>
+            <a:pPr algn="ctr"/>
+          </a:p>
+        </p:txBody>
+      </p:sp>
+      <p:sp>
+        <p:nvSpPr>
+          <p:cNvPr id="14" name="السؤال"/>
+          <p:cNvSpPr/>
+          <p:nvPr/>
+        </p:nvSpPr>
+        <p:spPr>
+          <a:xfrm>
+            <a:off x="548640" y="1463040"/>
+            <a:ext cx="5410047" cy="822960"/>
+          </a:xfrm>
+          <a:prstGeom prst="roundRect">
+            <a:avLst>
+              <a:gd name="adj" fmla="val 20000"/>
+            </a:avLst>
+          </a:prstGeom>
+          <a:solidFill>
+            <a:srgbClr val="CCFBF1"/>
+          </a:solidFill>
+          <a:ln>
+            <a:noFill/>
+          </a:ln>
+          <a:effectLst/>
+        </p:spPr>
+        <p:style>
+          <a:lnRef idx="1">
+            <a:schemeClr val="accent1"/>
+          </a:lnRef>
+          <a:fillRef idx="3">
+            <a:schemeClr val="accent1"/>
+          </a:fillRef>
+          <a:effectRef idx="2">
+            <a:schemeClr val="accent1"/>
+          </a:effectRef>
+          <a:fontRef idx="minor">
+            <a:schemeClr val="lt1"/>
+          </a:fontRef>
+        </p:style>
+        <p:txBody>
+          <a:bodyPr rtlCol="0" anchor="ctr" wrap="square" lIns="54864" rIns="228600" tIns="18288" bIns="18288"/>
+          <a:lstStyle/>
+          <a:p>
+            <a:pPr algn="r" rtl="1"/>
+            <a:r>
+              <a:rPr sz="2400" b="1" i="0" lang="ar-SA">
+                <a:solidFill>
+                  <a:srgbClr val="134E4A"/>
+                </a:solidFill>
+                <a:latin typeface="Arial"/>
+                <a:cs typeface="Arial"/>
+              </a:rPr>
+              <a:t>س: لماذا لا CNN؟</a:t>
+            </a:r>
+          </a:p>
+        </p:txBody>
+      </p:sp>
+      <p:sp>
+        <p:nvSpPr>
+          <p:cNvPr id="15" name="نقطة"/>
+          <p:cNvSpPr/>
+          <p:nvPr/>
+        </p:nvSpPr>
+        <p:spPr>
+          <a:xfrm>
+            <a:off x="5574639" y="2792349"/>
             <a:ext cx="164592" cy="164592"/>
           </a:xfrm>
           <a:prstGeom prst="ellipse">
@@ -20381,14 +20171,14 @@
       </p:sp>
       <p:sp>
         <p:nvSpPr>
-          <p:cNvPr id="14" name="TextBox 13"/>
+          <p:cNvPr id="16" name="TextBox 15"/>
           <p:cNvSpPr txBox="1"/>
           <p:nvPr/>
         </p:nvSpPr>
         <p:spPr>
           <a:xfrm>
-            <a:off x="685799" y="5312664"/>
-            <a:ext cx="10454335" cy="722376"/>
+            <a:off x="685800" y="2423160"/>
+            <a:ext cx="4769967" cy="902970"/>
           </a:xfrm>
           <a:prstGeom prst="rect">
             <a:avLst/>
@@ -20413,21 +20203,291 @@
               </a:spcAft>
             </a:pPr>
             <a:r>
-              <a:rPr sz="2000" b="0" i="0" lang="ar-SA">
+              <a:rPr sz="1700" b="0" i="0" lang="ar-SA">
                 <a:solidFill>
                   <a:srgbClr val="134E4A"/>
                 </a:solidFill>
                 <a:latin typeface="Arial"/>
                 <a:cs typeface="Arial"/>
               </a:rPr>
-              <a:t>MDE80 المجمَّد: H1 0.0375، H2-أ 0.045، H3 0.050، H4-أ 0.0225</a:t>
-            </a:r>
-          </a:p>
-        </p:txBody>
-      </p:sp>
-      <p:sp>
-        <p:nvSpPr>
-          <p:cNvPr id="15" name="شعار الجامعة"/>
+              <a:t>مرجعه الوحيد في الأدبيات المدروسة غير قابل للتكرار</a:t>
+            </a:r>
+          </a:p>
+        </p:txBody>
+      </p:sp>
+      <p:sp>
+        <p:nvSpPr>
+          <p:cNvPr id="17" name="نقطة"/>
+          <p:cNvSpPr/>
+          <p:nvPr/>
+        </p:nvSpPr>
+        <p:spPr>
+          <a:xfrm>
+            <a:off x="5574639" y="3695319"/>
+            <a:ext cx="164592" cy="164592"/>
+          </a:xfrm>
+          <a:prstGeom prst="ellipse">
+            <a:avLst/>
+          </a:prstGeom>
+          <a:solidFill>
+            <a:srgbClr val="B45309"/>
+          </a:solidFill>
+          <a:ln>
+            <a:noFill/>
+          </a:ln>
+          <a:effectLst/>
+        </p:spPr>
+        <p:style>
+          <a:lnRef idx="1">
+            <a:schemeClr val="accent1"/>
+          </a:lnRef>
+          <a:fillRef idx="3">
+            <a:schemeClr val="accent1"/>
+          </a:fillRef>
+          <a:effectRef idx="2">
+            <a:schemeClr val="accent1"/>
+          </a:effectRef>
+          <a:fontRef idx="minor">
+            <a:schemeClr val="lt1"/>
+          </a:fontRef>
+        </p:style>
+        <p:txBody>
+          <a:bodyPr rtlCol="0" anchor="ctr"/>
+          <a:lstStyle/>
+          <a:p>
+            <a:pPr algn="ctr"/>
+          </a:p>
+        </p:txBody>
+      </p:sp>
+      <p:sp>
+        <p:nvSpPr>
+          <p:cNvPr id="18" name="TextBox 17"/>
+          <p:cNvSpPr txBox="1"/>
+          <p:nvPr/>
+        </p:nvSpPr>
+        <p:spPr>
+          <a:xfrm>
+            <a:off x="685800" y="3326130"/>
+            <a:ext cx="4769967" cy="902970"/>
+          </a:xfrm>
+          <a:prstGeom prst="rect">
+            <a:avLst/>
+          </a:prstGeom>
+          <a:noFill/>
+        </p:spPr>
+        <p:txBody>
+          <a:bodyPr wrap="square" lIns="45720" rIns="45720" tIns="27432" bIns="27432" anchor="ctr">
+            <a:spAutoFit/>
+          </a:bodyPr>
+          <a:lstStyle/>
+          <a:p>
+            <a:pPr rtl="1" algn="r">
+              <a:lnSpc>
+                <a:spcPct val="105000"/>
+              </a:lnSpc>
+              <a:spcBef>
+                <a:spcPts val="0"/>
+              </a:spcBef>
+              <a:spcAft>
+                <a:spcPts val="0"/>
+              </a:spcAft>
+            </a:pPr>
+            <a:r>
+              <a:rPr sz="1700" b="0" i="0" lang="ar-SA">
+                <a:solidFill>
+                  <a:srgbClr val="134E4A"/>
+                </a:solidFill>
+                <a:latin typeface="Arial"/>
+                <a:cs typeface="Arial"/>
+              </a:rPr>
+              <a:t>سلال الأيام غير مرتبة داخلياً: لا بنية محلية تستفيد منها التلافيف</a:t>
+            </a:r>
+          </a:p>
+        </p:txBody>
+      </p:sp>
+      <p:sp>
+        <p:nvSpPr>
+          <p:cNvPr id="19" name="نقطة"/>
+          <p:cNvSpPr/>
+          <p:nvPr/>
+        </p:nvSpPr>
+        <p:spPr>
+          <a:xfrm>
+            <a:off x="5574639" y="4598289"/>
+            <a:ext cx="164592" cy="164592"/>
+          </a:xfrm>
+          <a:prstGeom prst="ellipse">
+            <a:avLst/>
+          </a:prstGeom>
+          <a:solidFill>
+            <a:srgbClr val="B45309"/>
+          </a:solidFill>
+          <a:ln>
+            <a:noFill/>
+          </a:ln>
+          <a:effectLst/>
+        </p:spPr>
+        <p:style>
+          <a:lnRef idx="1">
+            <a:schemeClr val="accent1"/>
+          </a:lnRef>
+          <a:fillRef idx="3">
+            <a:schemeClr val="accent1"/>
+          </a:fillRef>
+          <a:effectRef idx="2">
+            <a:schemeClr val="accent1"/>
+          </a:effectRef>
+          <a:fontRef idx="minor">
+            <a:schemeClr val="lt1"/>
+          </a:fontRef>
+        </p:style>
+        <p:txBody>
+          <a:bodyPr rtlCol="0" anchor="ctr"/>
+          <a:lstStyle/>
+          <a:p>
+            <a:pPr algn="ctr"/>
+          </a:p>
+        </p:txBody>
+      </p:sp>
+      <p:sp>
+        <p:nvSpPr>
+          <p:cNvPr id="20" name="TextBox 19"/>
+          <p:cNvSpPr txBox="1"/>
+          <p:nvPr/>
+        </p:nvSpPr>
+        <p:spPr>
+          <a:xfrm>
+            <a:off x="685800" y="4229100"/>
+            <a:ext cx="4769967" cy="902970"/>
+          </a:xfrm>
+          <a:prstGeom prst="rect">
+            <a:avLst/>
+          </a:prstGeom>
+          <a:noFill/>
+        </p:spPr>
+        <p:txBody>
+          <a:bodyPr wrap="square" lIns="45720" rIns="45720" tIns="27432" bIns="27432" anchor="ctr">
+            <a:spAutoFit/>
+          </a:bodyPr>
+          <a:lstStyle/>
+          <a:p>
+            <a:pPr rtl="1" algn="r">
+              <a:lnSpc>
+                <a:spcPct val="105000"/>
+              </a:lnSpc>
+              <a:spcBef>
+                <a:spcPts val="0"/>
+              </a:spcBef>
+              <a:spcAft>
+                <a:spcPts val="0"/>
+              </a:spcAft>
+            </a:pPr>
+            <a:r>
+              <a:rPr sz="1700" b="0" i="0" lang="ar-SA">
+                <a:solidFill>
+                  <a:srgbClr val="134E4A"/>
+                </a:solidFill>
+                <a:latin typeface="Arial"/>
+                <a:cs typeface="Arial"/>
+              </a:rPr>
+              <a:t>بقي الاتجاه العصبوني ممثلاً بـ GRU-lite</a:t>
+            </a:r>
+          </a:p>
+        </p:txBody>
+      </p:sp>
+      <p:sp>
+        <p:nvSpPr>
+          <p:cNvPr id="21" name="نقطة"/>
+          <p:cNvSpPr/>
+          <p:nvPr/>
+        </p:nvSpPr>
+        <p:spPr>
+          <a:xfrm>
+            <a:off x="5574639" y="5501259"/>
+            <a:ext cx="164592" cy="164592"/>
+          </a:xfrm>
+          <a:prstGeom prst="ellipse">
+            <a:avLst/>
+          </a:prstGeom>
+          <a:solidFill>
+            <a:srgbClr val="B45309"/>
+          </a:solidFill>
+          <a:ln>
+            <a:noFill/>
+          </a:ln>
+          <a:effectLst/>
+        </p:spPr>
+        <p:style>
+          <a:lnRef idx="1">
+            <a:schemeClr val="accent1"/>
+          </a:lnRef>
+          <a:fillRef idx="3">
+            <a:schemeClr val="accent1"/>
+          </a:fillRef>
+          <a:effectRef idx="2">
+            <a:schemeClr val="accent1"/>
+          </a:effectRef>
+          <a:fontRef idx="minor">
+            <a:schemeClr val="lt1"/>
+          </a:fontRef>
+        </p:style>
+        <p:txBody>
+          <a:bodyPr rtlCol="0" anchor="ctr"/>
+          <a:lstStyle/>
+          <a:p>
+            <a:pPr algn="ctr"/>
+          </a:p>
+        </p:txBody>
+      </p:sp>
+      <p:sp>
+        <p:nvSpPr>
+          <p:cNvPr id="22" name="TextBox 21"/>
+          <p:cNvSpPr txBox="1"/>
+          <p:nvPr/>
+        </p:nvSpPr>
+        <p:spPr>
+          <a:xfrm>
+            <a:off x="685800" y="5132070"/>
+            <a:ext cx="4769967" cy="902970"/>
+          </a:xfrm>
+          <a:prstGeom prst="rect">
+            <a:avLst/>
+          </a:prstGeom>
+          <a:noFill/>
+        </p:spPr>
+        <p:txBody>
+          <a:bodyPr wrap="square" lIns="45720" rIns="45720" tIns="27432" bIns="27432" anchor="ctr">
+            <a:spAutoFit/>
+          </a:bodyPr>
+          <a:lstStyle/>
+          <a:p>
+            <a:pPr rtl="1" algn="r">
+              <a:lnSpc>
+                <a:spcPct val="105000"/>
+              </a:lnSpc>
+              <a:spcBef>
+                <a:spcPts val="0"/>
+              </a:spcBef>
+              <a:spcAft>
+                <a:spcPts val="0"/>
+              </a:spcAft>
+            </a:pPr>
+            <a:r>
+              <a:rPr sz="1700" b="0" i="0" lang="ar-SA">
+                <a:solidFill>
+                  <a:srgbClr val="134E4A"/>
+                </a:solidFill>
+                <a:latin typeface="Arial"/>
+                <a:cs typeface="Arial"/>
+              </a:rPr>
+              <a:t>الخطة نفسها تركت اختيار الأنسب أثناء البحث</a:t>
+            </a:r>
+          </a:p>
+        </p:txBody>
+      </p:sp>
+      <p:sp>
+        <p:nvSpPr>
+          <p:cNvPr id="23" name="شعار الجامعة"/>
           <p:cNvSpPr/>
           <p:nvPr/>
         </p:nvSpPr>
@@ -20483,7 +20543,7 @@
       </p:sp>
       <p:sp>
         <p:nvSpPr>
-          <p:cNvPr id="16" name="تذييل"/>
+          <p:cNvPr id="24" name="تذييل"/>
           <p:cNvSpPr txBox="1"/>
           <p:nvPr/>
         </p:nvSpPr>
@@ -20529,7 +20589,7 @@
       </p:sp>
       <p:sp>
         <p:nvSpPr>
-          <p:cNvPr id="17" name="رقم الشريحة"/>
+          <p:cNvPr id="25" name="رقم الشريحة"/>
           <p:cNvSpPr txBox="1"/>
           <p:nvPr/>
         </p:nvSpPr>
@@ -20571,6 +20631,769 @@
 </file>
 
 <file path=ppt/slides/slide23.xml><?xml version="1.0" encoding="utf-8"?>
+<p:sld xmlns:a="http://schemas.openxmlformats.org/drawingml/2006/main" xmlns:p="http://schemas.openxmlformats.org/presentationml/2006/main" xmlns:r="http://schemas.openxmlformats.org/officeDocument/2006/relationships">
+  <p:cSld>
+    <p:bg>
+      <p:bgPr>
+        <a:solidFill>
+          <a:srgbClr val="F8FAFC"/>
+        </a:solidFill>
+        <a:effectLst/>
+      </p:bgPr>
+    </p:bg>
+    <p:spTree>
+      <p:nvGrpSpPr>
+        <p:cNvPr id="1" name=""/>
+        <p:cNvGrpSpPr/>
+        <p:nvPr/>
+      </p:nvGrpSpPr>
+      <p:grpSpPr/>
+      <p:sp>
+        <p:nvSpPr>
+          <p:cNvPr id="2" name="العنوان"/>
+          <p:cNvSpPr txBox="1"/>
+          <p:nvPr/>
+        </p:nvSpPr>
+        <p:spPr>
+          <a:xfrm>
+            <a:off x="548640" y="347472"/>
+            <a:ext cx="11094415" cy="868680"/>
+          </a:xfrm>
+          <a:prstGeom prst="rect">
+            <a:avLst/>
+          </a:prstGeom>
+          <a:noFill/>
+        </p:spPr>
+        <p:txBody>
+          <a:bodyPr wrap="square" lIns="45720" rIns="45720" tIns="27432" bIns="27432" anchor="ctr">
+            <a:spAutoFit/>
+          </a:bodyPr>
+          <a:lstStyle/>
+          <a:p>
+            <a:pPr rtl="1" algn="r">
+              <a:lnSpc>
+                <a:spcPct val="115000"/>
+              </a:lnSpc>
+              <a:spcBef>
+                <a:spcPts val="0"/>
+              </a:spcBef>
+              <a:spcAft>
+                <a:spcPts val="0"/>
+              </a:spcAft>
+            </a:pPr>
+            <a:r>
+              <a:rPr sz="3000" b="1" i="0" lang="ar-SA">
+                <a:solidFill>
+                  <a:srgbClr val="134E4A"/>
+                </a:solidFill>
+                <a:latin typeface="Arial"/>
+                <a:cs typeface="Arial"/>
+              </a:rPr>
+              <a:t>احتياطي: ما الدلالة الإحصائية؟</a:t>
+            </a:r>
+          </a:p>
+        </p:txBody>
+      </p:sp>
+      <p:sp>
+        <p:nvSpPr>
+          <p:cNvPr id="3" name="بطاقة"/>
+          <p:cNvSpPr/>
+          <p:nvPr/>
+        </p:nvSpPr>
+        <p:spPr>
+          <a:xfrm>
+            <a:off x="548639" y="1463040"/>
+            <a:ext cx="11094415" cy="4709160"/>
+          </a:xfrm>
+          <a:prstGeom prst="roundRect">
+            <a:avLst>
+              <a:gd name="adj" fmla="val 6000"/>
+            </a:avLst>
+          </a:prstGeom>
+          <a:solidFill>
+            <a:srgbClr val="FFFFFF"/>
+          </a:solidFill>
+          <a:ln w="12700">
+            <a:solidFill>
+              <a:srgbClr val="CBD5E1"/>
+            </a:solidFill>
+          </a:ln>
+          <a:effectLst/>
+        </p:spPr>
+        <p:style>
+          <a:lnRef idx="1">
+            <a:schemeClr val="accent1"/>
+          </a:lnRef>
+          <a:fillRef idx="3">
+            <a:schemeClr val="accent1"/>
+          </a:fillRef>
+          <a:effectRef idx="2">
+            <a:schemeClr val="accent1"/>
+          </a:effectRef>
+          <a:fontRef idx="minor">
+            <a:schemeClr val="lt1"/>
+          </a:fontRef>
+        </p:style>
+        <p:txBody>
+          <a:bodyPr rtlCol="0" anchor="ctr"/>
+          <a:lstStyle/>
+          <a:p>
+            <a:pPr algn="ctr"/>
+          </a:p>
+        </p:txBody>
+      </p:sp>
+      <p:sp>
+        <p:nvSpPr>
+          <p:cNvPr id="4" name="السؤال"/>
+          <p:cNvSpPr/>
+          <p:nvPr/>
+        </p:nvSpPr>
+        <p:spPr>
+          <a:xfrm>
+            <a:off x="548639" y="1463040"/>
+            <a:ext cx="11094415" cy="822960"/>
+          </a:xfrm>
+          <a:prstGeom prst="roundRect">
+            <a:avLst>
+              <a:gd name="adj" fmla="val 20000"/>
+            </a:avLst>
+          </a:prstGeom>
+          <a:solidFill>
+            <a:srgbClr val="CCFBF1"/>
+          </a:solidFill>
+          <a:ln>
+            <a:noFill/>
+          </a:ln>
+          <a:effectLst/>
+        </p:spPr>
+        <p:style>
+          <a:lnRef idx="1">
+            <a:schemeClr val="accent1"/>
+          </a:lnRef>
+          <a:fillRef idx="3">
+            <a:schemeClr val="accent1"/>
+          </a:fillRef>
+          <a:effectRef idx="2">
+            <a:schemeClr val="accent1"/>
+          </a:effectRef>
+          <a:fontRef idx="minor">
+            <a:schemeClr val="lt1"/>
+          </a:fontRef>
+        </p:style>
+        <p:txBody>
+          <a:bodyPr rtlCol="0" anchor="ctr" wrap="square" lIns="54864" rIns="228600" tIns="18288" bIns="18288"/>
+          <a:lstStyle/>
+          <a:p>
+            <a:pPr algn="r" rtl="1"/>
+            <a:r>
+              <a:rPr sz="2400" b="1" i="0" lang="ar-SA">
+                <a:solidFill>
+                  <a:srgbClr val="134E4A"/>
+                </a:solidFill>
+                <a:latin typeface="Arial"/>
+                <a:cs typeface="Arial"/>
+              </a:rPr>
+              <a:t>س: كيف يُحكم على الفرق بين نموذجين؟</a:t>
+            </a:r>
+          </a:p>
+        </p:txBody>
+      </p:sp>
+      <p:sp>
+        <p:nvSpPr>
+          <p:cNvPr id="5" name="نقطة"/>
+          <p:cNvSpPr/>
+          <p:nvPr/>
+        </p:nvSpPr>
+        <p:spPr>
+          <a:xfrm>
+            <a:off x="11259007" y="2702052"/>
+            <a:ext cx="164592" cy="164592"/>
+          </a:xfrm>
+          <a:prstGeom prst="ellipse">
+            <a:avLst/>
+          </a:prstGeom>
+          <a:solidFill>
+            <a:srgbClr val="B45309"/>
+          </a:solidFill>
+          <a:ln>
+            <a:noFill/>
+          </a:ln>
+          <a:effectLst/>
+        </p:spPr>
+        <p:style>
+          <a:lnRef idx="1">
+            <a:schemeClr val="accent1"/>
+          </a:lnRef>
+          <a:fillRef idx="3">
+            <a:schemeClr val="accent1"/>
+          </a:fillRef>
+          <a:effectRef idx="2">
+            <a:schemeClr val="accent1"/>
+          </a:effectRef>
+          <a:fontRef idx="minor">
+            <a:schemeClr val="lt1"/>
+          </a:fontRef>
+        </p:style>
+        <p:txBody>
+          <a:bodyPr rtlCol="0" anchor="ctr"/>
+          <a:lstStyle/>
+          <a:p>
+            <a:pPr algn="ctr"/>
+          </a:p>
+        </p:txBody>
+      </p:sp>
+      <p:sp>
+        <p:nvSpPr>
+          <p:cNvPr id="6" name="TextBox 5"/>
+          <p:cNvSpPr txBox="1"/>
+          <p:nvPr/>
+        </p:nvSpPr>
+        <p:spPr>
+          <a:xfrm>
+            <a:off x="685799" y="2423160"/>
+            <a:ext cx="10454335" cy="722376"/>
+          </a:xfrm>
+          <a:prstGeom prst="rect">
+            <a:avLst/>
+          </a:prstGeom>
+          <a:noFill/>
+        </p:spPr>
+        <p:txBody>
+          <a:bodyPr wrap="square" lIns="45720" rIns="45720" tIns="27432" bIns="27432" anchor="ctr">
+            <a:spAutoFit/>
+          </a:bodyPr>
+          <a:lstStyle/>
+          <a:p>
+            <a:pPr rtl="1" algn="r">
+              <a:lnSpc>
+                <a:spcPct val="105000"/>
+              </a:lnSpc>
+              <a:spcBef>
+                <a:spcPts val="0"/>
+              </a:spcBef>
+              <a:spcAft>
+                <a:spcPts val="0"/>
+              </a:spcAft>
+            </a:pPr>
+            <a:r>
+              <a:rPr sz="2000" b="0" i="0" lang="ar-SA">
+                <a:solidFill>
+                  <a:srgbClr val="134E4A"/>
+                </a:solidFill>
+                <a:latin typeface="Arial"/>
+                <a:cs typeface="Arial"/>
+              </a:rPr>
+              <a:t>وحدة التحليل العرض: 13 عرضاً في 2014، ومتوسط الفروق على 3 قطوع</a:t>
+            </a:r>
+          </a:p>
+        </p:txBody>
+      </p:sp>
+      <p:sp>
+        <p:nvSpPr>
+          <p:cNvPr id="7" name="نقطة"/>
+          <p:cNvSpPr/>
+          <p:nvPr/>
+        </p:nvSpPr>
+        <p:spPr>
+          <a:xfrm>
+            <a:off x="11259007" y="3424428"/>
+            <a:ext cx="164592" cy="164592"/>
+          </a:xfrm>
+          <a:prstGeom prst="ellipse">
+            <a:avLst/>
+          </a:prstGeom>
+          <a:solidFill>
+            <a:srgbClr val="B45309"/>
+          </a:solidFill>
+          <a:ln>
+            <a:noFill/>
+          </a:ln>
+          <a:effectLst/>
+        </p:spPr>
+        <p:style>
+          <a:lnRef idx="1">
+            <a:schemeClr val="accent1"/>
+          </a:lnRef>
+          <a:fillRef idx="3">
+            <a:schemeClr val="accent1"/>
+          </a:fillRef>
+          <a:effectRef idx="2">
+            <a:schemeClr val="accent1"/>
+          </a:effectRef>
+          <a:fontRef idx="minor">
+            <a:schemeClr val="lt1"/>
+          </a:fontRef>
+        </p:style>
+        <p:txBody>
+          <a:bodyPr rtlCol="0" anchor="ctr"/>
+          <a:lstStyle/>
+          <a:p>
+            <a:pPr algn="ctr"/>
+          </a:p>
+        </p:txBody>
+      </p:sp>
+      <p:sp>
+        <p:nvSpPr>
+          <p:cNvPr id="8" name="TextBox 7"/>
+          <p:cNvSpPr txBox="1"/>
+          <p:nvPr/>
+        </p:nvSpPr>
+        <p:spPr>
+          <a:xfrm>
+            <a:off x="685799" y="3145536"/>
+            <a:ext cx="10454335" cy="722376"/>
+          </a:xfrm>
+          <a:prstGeom prst="rect">
+            <a:avLst/>
+          </a:prstGeom>
+          <a:noFill/>
+        </p:spPr>
+        <p:txBody>
+          <a:bodyPr wrap="square" lIns="45720" rIns="45720" tIns="27432" bIns="27432" anchor="ctr">
+            <a:spAutoFit/>
+          </a:bodyPr>
+          <a:lstStyle/>
+          <a:p>
+            <a:pPr rtl="1" algn="r">
+              <a:lnSpc>
+                <a:spcPct val="105000"/>
+              </a:lnSpc>
+              <a:spcBef>
+                <a:spcPts val="0"/>
+              </a:spcBef>
+              <a:spcAft>
+                <a:spcPts val="0"/>
+              </a:spcAft>
+            </a:pPr>
+            <a:r>
+              <a:rPr sz="2000" b="0" i="0" lang="ar-SA">
+                <a:solidFill>
+                  <a:srgbClr val="134E4A"/>
+                </a:solidFill>
+                <a:latin typeface="Arial"/>
+                <a:cs typeface="Arial"/>
+              </a:rPr>
+              <a:t>فاصل ثقة 95% بـ bootstrap-t العنقودي المعيَّر، بعشرة آلاف إعادة</a:t>
+            </a:r>
+          </a:p>
+        </p:txBody>
+      </p:sp>
+      <p:sp>
+        <p:nvSpPr>
+          <p:cNvPr id="9" name="نقطة"/>
+          <p:cNvSpPr/>
+          <p:nvPr/>
+        </p:nvSpPr>
+        <p:spPr>
+          <a:xfrm>
+            <a:off x="11259007" y="4146804"/>
+            <a:ext cx="164592" cy="164592"/>
+          </a:xfrm>
+          <a:prstGeom prst="ellipse">
+            <a:avLst/>
+          </a:prstGeom>
+          <a:solidFill>
+            <a:srgbClr val="B45309"/>
+          </a:solidFill>
+          <a:ln>
+            <a:noFill/>
+          </a:ln>
+          <a:effectLst/>
+        </p:spPr>
+        <p:style>
+          <a:lnRef idx="1">
+            <a:schemeClr val="accent1"/>
+          </a:lnRef>
+          <a:fillRef idx="3">
+            <a:schemeClr val="accent1"/>
+          </a:fillRef>
+          <a:effectRef idx="2">
+            <a:schemeClr val="accent1"/>
+          </a:effectRef>
+          <a:fontRef idx="minor">
+            <a:schemeClr val="lt1"/>
+          </a:fontRef>
+        </p:style>
+        <p:txBody>
+          <a:bodyPr rtlCol="0" anchor="ctr"/>
+          <a:lstStyle/>
+          <a:p>
+            <a:pPr algn="ctr"/>
+          </a:p>
+        </p:txBody>
+      </p:sp>
+      <p:sp>
+        <p:nvSpPr>
+          <p:cNvPr id="10" name="TextBox 9"/>
+          <p:cNvSpPr txBox="1"/>
+          <p:nvPr/>
+        </p:nvSpPr>
+        <p:spPr>
+          <a:xfrm>
+            <a:off x="685799" y="3867912"/>
+            <a:ext cx="10454335" cy="722376"/>
+          </a:xfrm>
+          <a:prstGeom prst="rect">
+            <a:avLst/>
+          </a:prstGeom>
+          <a:noFill/>
+        </p:spPr>
+        <p:txBody>
+          <a:bodyPr wrap="square" lIns="45720" rIns="45720" tIns="27432" bIns="27432" anchor="ctr">
+            <a:spAutoFit/>
+          </a:bodyPr>
+          <a:lstStyle/>
+          <a:p>
+            <a:pPr rtl="1" algn="r">
+              <a:lnSpc>
+                <a:spcPct val="105000"/>
+              </a:lnSpc>
+              <a:spcBef>
+                <a:spcPts val="0"/>
+              </a:spcBef>
+              <a:spcAft>
+                <a:spcPts val="0"/>
+              </a:spcAft>
+            </a:pPr>
+            <a:r>
+              <a:rPr sz="2000" b="0" i="0" lang="ar-SA">
+                <a:solidFill>
+                  <a:srgbClr val="134E4A"/>
+                </a:solidFill>
+                <a:latin typeface="Arial"/>
+                <a:cs typeface="Arial"/>
+              </a:rPr>
+              <a:t>قيمة p بقلب الإشارات الدقيق (8,192 تركيبة)، وتصحيح هولم على 4 فرضيات</a:t>
+            </a:r>
+          </a:p>
+        </p:txBody>
+      </p:sp>
+      <p:sp>
+        <p:nvSpPr>
+          <p:cNvPr id="11" name="نقطة"/>
+          <p:cNvSpPr/>
+          <p:nvPr/>
+        </p:nvSpPr>
+        <p:spPr>
+          <a:xfrm>
+            <a:off x="11259007" y="4869179"/>
+            <a:ext cx="164592" cy="164592"/>
+          </a:xfrm>
+          <a:prstGeom prst="ellipse">
+            <a:avLst/>
+          </a:prstGeom>
+          <a:solidFill>
+            <a:srgbClr val="B45309"/>
+          </a:solidFill>
+          <a:ln>
+            <a:noFill/>
+          </a:ln>
+          <a:effectLst/>
+        </p:spPr>
+        <p:style>
+          <a:lnRef idx="1">
+            <a:schemeClr val="accent1"/>
+          </a:lnRef>
+          <a:fillRef idx="3">
+            <a:schemeClr val="accent1"/>
+          </a:fillRef>
+          <a:effectRef idx="2">
+            <a:schemeClr val="accent1"/>
+          </a:effectRef>
+          <a:fontRef idx="minor">
+            <a:schemeClr val="lt1"/>
+          </a:fontRef>
+        </p:style>
+        <p:txBody>
+          <a:bodyPr rtlCol="0" anchor="ctr"/>
+          <a:lstStyle/>
+          <a:p>
+            <a:pPr algn="ctr"/>
+          </a:p>
+        </p:txBody>
+      </p:sp>
+      <p:sp>
+        <p:nvSpPr>
+          <p:cNvPr id="12" name="TextBox 11"/>
+          <p:cNvSpPr txBox="1"/>
+          <p:nvPr/>
+        </p:nvSpPr>
+        <p:spPr>
+          <a:xfrm>
+            <a:off x="685799" y="4590288"/>
+            <a:ext cx="10454335" cy="722376"/>
+          </a:xfrm>
+          <a:prstGeom prst="rect">
+            <a:avLst/>
+          </a:prstGeom>
+          <a:noFill/>
+        </p:spPr>
+        <p:txBody>
+          <a:bodyPr wrap="square" lIns="45720" rIns="45720" tIns="27432" bIns="27432" anchor="ctr">
+            <a:spAutoFit/>
+          </a:bodyPr>
+          <a:lstStyle/>
+          <a:p>
+            <a:pPr rtl="1" algn="r">
+              <a:lnSpc>
+                <a:spcPct val="105000"/>
+              </a:lnSpc>
+              <a:spcBef>
+                <a:spcPts val="0"/>
+              </a:spcBef>
+              <a:spcAft>
+                <a:spcPts val="0"/>
+              </a:spcAft>
+            </a:pPr>
+            <a:r>
+              <a:rPr sz="2000" b="0" i="0" lang="ar-SA">
+                <a:solidFill>
+                  <a:srgbClr val="134E4A"/>
+                </a:solidFill>
+                <a:latin typeface="Arial"/>
+                <a:cs typeface="Arial"/>
+              </a:rPr>
+              <a:t>تُؤكَّد الفرضية إن بلغ الأثر 0.02 على الأقل وكان الحد الأدنى للفاصل موجباً وp المصحَّحة أقل من 0.05</a:t>
+            </a:r>
+          </a:p>
+        </p:txBody>
+      </p:sp>
+      <p:sp>
+        <p:nvSpPr>
+          <p:cNvPr id="13" name="نقطة"/>
+          <p:cNvSpPr/>
+          <p:nvPr/>
+        </p:nvSpPr>
+        <p:spPr>
+          <a:xfrm>
+            <a:off x="11259007" y="5591556"/>
+            <a:ext cx="164592" cy="164592"/>
+          </a:xfrm>
+          <a:prstGeom prst="ellipse">
+            <a:avLst/>
+          </a:prstGeom>
+          <a:solidFill>
+            <a:srgbClr val="B45309"/>
+          </a:solidFill>
+          <a:ln>
+            <a:noFill/>
+          </a:ln>
+          <a:effectLst/>
+        </p:spPr>
+        <p:style>
+          <a:lnRef idx="1">
+            <a:schemeClr val="accent1"/>
+          </a:lnRef>
+          <a:fillRef idx="3">
+            <a:schemeClr val="accent1"/>
+          </a:fillRef>
+          <a:effectRef idx="2">
+            <a:schemeClr val="accent1"/>
+          </a:effectRef>
+          <a:fontRef idx="minor">
+            <a:schemeClr val="lt1"/>
+          </a:fontRef>
+        </p:style>
+        <p:txBody>
+          <a:bodyPr rtlCol="0" anchor="ctr"/>
+          <a:lstStyle/>
+          <a:p>
+            <a:pPr algn="ctr"/>
+          </a:p>
+        </p:txBody>
+      </p:sp>
+      <p:sp>
+        <p:nvSpPr>
+          <p:cNvPr id="14" name="TextBox 13"/>
+          <p:cNvSpPr txBox="1"/>
+          <p:nvPr/>
+        </p:nvSpPr>
+        <p:spPr>
+          <a:xfrm>
+            <a:off x="685799" y="5312664"/>
+            <a:ext cx="10454335" cy="722376"/>
+          </a:xfrm>
+          <a:prstGeom prst="rect">
+            <a:avLst/>
+          </a:prstGeom>
+          <a:noFill/>
+        </p:spPr>
+        <p:txBody>
+          <a:bodyPr wrap="square" lIns="45720" rIns="45720" tIns="27432" bIns="27432" anchor="ctr">
+            <a:spAutoFit/>
+          </a:bodyPr>
+          <a:lstStyle/>
+          <a:p>
+            <a:pPr rtl="1" algn="r">
+              <a:lnSpc>
+                <a:spcPct val="105000"/>
+              </a:lnSpc>
+              <a:spcBef>
+                <a:spcPts val="0"/>
+              </a:spcBef>
+              <a:spcAft>
+                <a:spcPts val="0"/>
+              </a:spcAft>
+            </a:pPr>
+            <a:r>
+              <a:rPr sz="2000" b="0" i="0" lang="ar-SA">
+                <a:solidFill>
+                  <a:srgbClr val="134E4A"/>
+                </a:solidFill>
+                <a:latin typeface="Arial"/>
+                <a:cs typeface="Arial"/>
+              </a:rPr>
+              <a:t>MDE80 المجمَّد: H1 0.0375، H2-أ 0.045، H3 0.050، H4-أ 0.0225</a:t>
+            </a:r>
+          </a:p>
+        </p:txBody>
+      </p:sp>
+      <p:sp>
+        <p:nvSpPr>
+          <p:cNvPr id="15" name="شعار الجامعة"/>
+          <p:cNvSpPr/>
+          <p:nvPr/>
+        </p:nvSpPr>
+        <p:spPr>
+          <a:xfrm>
+            <a:off x="10957255" y="6382512"/>
+            <a:ext cx="685800" cy="292608"/>
+          </a:xfrm>
+          <a:prstGeom prst="roundRect">
+            <a:avLst>
+              <a:gd name="adj" fmla="val 50000"/>
+            </a:avLst>
+          </a:prstGeom>
+          <a:solidFill>
+            <a:srgbClr val="0F766E"/>
+          </a:solidFill>
+          <a:ln>
+            <a:noFill/>
+          </a:ln>
+          <a:effectLst/>
+        </p:spPr>
+        <p:style>
+          <a:lnRef idx="1">
+            <a:schemeClr val="accent1"/>
+          </a:lnRef>
+          <a:fillRef idx="3">
+            <a:schemeClr val="accent1"/>
+          </a:fillRef>
+          <a:effectRef idx="2">
+            <a:schemeClr val="accent1"/>
+          </a:effectRef>
+          <a:fontRef idx="minor">
+            <a:schemeClr val="lt1"/>
+          </a:fontRef>
+        </p:style>
+        <p:txBody>
+          <a:bodyPr rtlCol="0" anchor="ctr" wrap="square" lIns="54864" rIns="54864" tIns="18288" bIns="18288"/>
+          <a:lstStyle/>
+          <a:p>
+            <a:pPr algn="ctr" rtl="1"/>
+            <a:r>
+              <a:rPr sz="1200" b="1" i="0" lang="ar-SA">
+                <a:solidFill>
+                  <a:srgbClr val="FFFFFF"/>
+                </a:solidFill>
+                <a:latin typeface="Arial"/>
+                <a:cs typeface="Arial"/>
+              </a:rPr>
+              <a:t>SVU</a:t>
+            </a:r>
+          </a:p>
+        </p:txBody>
+      </p:sp>
+      <p:sp>
+        <p:nvSpPr>
+          <p:cNvPr id="16" name="تذييل"/>
+          <p:cNvSpPr txBox="1"/>
+          <p:nvPr/>
+        </p:nvSpPr>
+        <p:spPr>
+          <a:xfrm>
+            <a:off x="5287975" y="6373368"/>
+            <a:ext cx="5577840" cy="310896"/>
+          </a:xfrm>
+          <a:prstGeom prst="rect">
+            <a:avLst/>
+          </a:prstGeom>
+          <a:noFill/>
+        </p:spPr>
+        <p:txBody>
+          <a:bodyPr wrap="square" lIns="45720" rIns="45720" tIns="27432" bIns="27432" anchor="ctr">
+            <a:spAutoFit/>
+          </a:bodyPr>
+          <a:lstStyle/>
+          <a:p>
+            <a:pPr rtl="1" algn="r">
+              <a:lnSpc>
+                <a:spcPct val="115000"/>
+              </a:lnSpc>
+              <a:spcBef>
+                <a:spcPts val="0"/>
+              </a:spcBef>
+              <a:spcAft>
+                <a:spcPts val="0"/>
+              </a:spcAft>
+            </a:pPr>
+            <a:r>
+              <a:rPr sz="1200" b="0" i="0" lang="ar-SA">
+                <a:solidFill>
+                  <a:srgbClr val="475569"/>
+                </a:solidFill>
+                <a:latin typeface="Arial"/>
+                <a:cs typeface="Arial"/>
+              </a:rPr>
+              <a:t>الجامعة الافتراضية السورية  |  ماجستير علوم الوب</a:t>
+            </a:r>
+          </a:p>
+        </p:txBody>
+      </p:sp>
+      <p:sp>
+        <p:nvSpPr>
+          <p:cNvPr id="17" name="رقم الشريحة"/>
+          <p:cNvSpPr txBox="1"/>
+          <p:nvPr/>
+        </p:nvSpPr>
+        <p:spPr>
+          <a:xfrm>
+            <a:off x="548640" y="6373368"/>
+            <a:ext cx="914400" cy="310896"/>
+          </a:xfrm>
+          <a:prstGeom prst="rect">
+            <a:avLst/>
+          </a:prstGeom>
+          <a:noFill/>
+        </p:spPr>
+        <p:txBody>
+          <a:bodyPr wrap="none">
+            <a:spAutoFit/>
+          </a:bodyPr>
+          <a:lstStyle/>
+          <a:p>
+            <a:pPr rtl="1" algn="l"/>
+            <a:fld id="{B6F15528-21DE-4FAA-801E-634DDDAF4B2B}" type="slidenum">
+              <a:rPr lang="en-US" sz="1200">
+                <a:solidFill>
+                  <a:srgbClr val="475569"/>
+                </a:solidFill>
+                <a:latin typeface="Arial"/>
+              </a:rPr>
+              <a:t>‹#›</a:t>
+            </a:fld>
+          </a:p>
+        </p:txBody>
+      </p:sp>
+    </p:spTree>
+  </p:cSld>
+  <p:clrMapOvr>
+    <a:masterClrMapping/>
+  </p:clrMapOvr>
+</p:sld>
+</file>
+
+<file path=ppt/slides/slide24.xml><?xml version="1.0" encoding="utf-8"?>
 <p:sld xmlns:a="http://schemas.openxmlformats.org/drawingml/2006/main" xmlns:p="http://schemas.openxmlformats.org/presentationml/2006/main" xmlns:r="http://schemas.openxmlformats.org/officeDocument/2006/relationships">
   <p:cSld>
     <p:bg>

--- a/deliverables/07-presentation/العرض-التقديمي.pptx
+++ b/deliverables/07-presentation/العرض-التقديمي.pptx
@@ -1246,7 +1246,7 @@
             <a:pPr rtl="1" algn="r"/>
             <a:r>
               <a:rPr lang="ar-SA"/>
-              <a:t>الشكل من results/conf2014/figures/fig1_forest.png (قُصّت أطرافه الفارغة؛ الأحكام في الجدول السابق). أشكال أخرى متاحة للاستعمال: fig2 الفروق لكل عرض، fig3 استئصال الإشارة، fig4 النماذج، fig5 منحنيات ROC، fig6 H4-ب، fig7 الإنصاف.</a:t>
+              <a:t>الشكل من deliverables/06-final-thesis/figures/derived/fig1_forest.png (نسخة مشتقة معتمدة بتسميات كاملة؛ لا قص للأصل المقفل). أشكال أخرى متاحة للاستعمال: fig2 الفروق لكل عرض، fig3 استئصال الإشارة، fig4 النماذج، fig5 منحنيات ROC، fig6 H4-ب، fig7 الإنصاف.</a:t>
             </a:r>
           </a:p>
         </p:txBody>
@@ -12162,15 +12162,14 @@
         </p:nvPicPr>
         <p:blipFill>
           <a:blip r:embed="rId2"/>
-          <a:srcRect l="27000" r="22000"/>
           <a:stretch>
             <a:fillRect/>
           </a:stretch>
         </p:blipFill>
         <p:spPr>
           <a:xfrm>
-            <a:off x="548640" y="1371600"/>
-            <a:ext cx="6907031" cy="4526279"/>
+            <a:off x="548640" y="2240695"/>
+            <a:ext cx="7132320" cy="2788088"/>
           </a:xfrm>
           <a:prstGeom prst="rect">
             <a:avLst/>
@@ -12190,8 +12189,8 @@
         </p:nvSpPr>
         <p:spPr>
           <a:xfrm>
-            <a:off x="548640" y="5943599"/>
-            <a:ext cx="6907031" cy="365760"/>
+            <a:off x="548640" y="5074504"/>
+            <a:ext cx="7132320" cy="365760"/>
           </a:xfrm>
           <a:prstGeom prst="rect">
             <a:avLst/>
@@ -12223,7 +12222,7 @@
                 <a:latin typeface="Arial"/>
                 <a:cs typeface="Arial"/>
               </a:rPr>
-              <a:t>الشكل: Δ̄ وفاصل bootstrap-t لكل فرضية (results/conf2014/figures)</a:t>
+              <a:t>الشكل: Δ̄ وفاصل bootstrap-t لكل فرضية. أُعيد رسمه من fig1_forest.csv المقفل؛ الأصل في results/conf2014/figures/</a:t>
             </a:r>
           </a:p>
         </p:txBody>
@@ -12236,8 +12235,8 @@
         </p:nvSpPr>
         <p:spPr>
           <a:xfrm>
-            <a:off x="7821431" y="1371600"/>
-            <a:ext cx="3821623" cy="1447800"/>
+            <a:off x="8046719" y="1371600"/>
+            <a:ext cx="3596335" cy="1447800"/>
           </a:xfrm>
           <a:prstGeom prst="roundRect">
             <a:avLst>
@@ -12340,8 +12339,8 @@
         </p:nvSpPr>
         <p:spPr>
           <a:xfrm>
-            <a:off x="7958592" y="1444752"/>
-            <a:ext cx="2907223" cy="594360"/>
+            <a:off x="8183879" y="1444752"/>
+            <a:ext cx="2681935" cy="594360"/>
           </a:xfrm>
           <a:prstGeom prst="rect">
             <a:avLst/>
@@ -12386,8 +12385,8 @@
         </p:nvSpPr>
         <p:spPr>
           <a:xfrm>
-            <a:off x="7958592" y="2084832"/>
-            <a:ext cx="3547303" cy="670560"/>
+            <a:off x="8183879" y="2084832"/>
+            <a:ext cx="3322015" cy="670560"/>
           </a:xfrm>
           <a:prstGeom prst="rect">
             <a:avLst/>
@@ -12432,8 +12431,8 @@
         </p:nvSpPr>
         <p:spPr>
           <a:xfrm>
-            <a:off x="7821431" y="3047999"/>
-            <a:ext cx="3821623" cy="1447800"/>
+            <a:off x="8046719" y="3047999"/>
+            <a:ext cx="3596335" cy="1447800"/>
           </a:xfrm>
           <a:prstGeom prst="roundRect">
             <a:avLst>
@@ -12536,8 +12535,8 @@
         </p:nvSpPr>
         <p:spPr>
           <a:xfrm>
-            <a:off x="7958592" y="3121152"/>
-            <a:ext cx="2907223" cy="594360"/>
+            <a:off x="8183879" y="3121152"/>
+            <a:ext cx="2681935" cy="594360"/>
           </a:xfrm>
           <a:prstGeom prst="rect">
             <a:avLst/>
@@ -12582,8 +12581,8 @@
         </p:nvSpPr>
         <p:spPr>
           <a:xfrm>
-            <a:off x="7958592" y="3761232"/>
-            <a:ext cx="3547303" cy="670560"/>
+            <a:off x="8183879" y="3761232"/>
+            <a:ext cx="3322015" cy="670560"/>
           </a:xfrm>
           <a:prstGeom prst="rect">
             <a:avLst/>
@@ -12628,8 +12627,8 @@
         </p:nvSpPr>
         <p:spPr>
           <a:xfrm>
-            <a:off x="7821431" y="4724399"/>
-            <a:ext cx="3821623" cy="1447800"/>
+            <a:off x="8046719" y="4724399"/>
+            <a:ext cx="3596335" cy="1447800"/>
           </a:xfrm>
           <a:prstGeom prst="roundRect">
             <a:avLst>
@@ -12732,8 +12731,8 @@
         </p:nvSpPr>
         <p:spPr>
           <a:xfrm>
-            <a:off x="7958592" y="4797551"/>
-            <a:ext cx="2907223" cy="594360"/>
+            <a:off x="8183879" y="4797551"/>
+            <a:ext cx="2681935" cy="594360"/>
           </a:xfrm>
           <a:prstGeom prst="rect">
             <a:avLst/>
@@ -12778,8 +12777,8 @@
         </p:nvSpPr>
         <p:spPr>
           <a:xfrm>
-            <a:off x="7958592" y="5437632"/>
-            <a:ext cx="3547303" cy="670560"/>
+            <a:off x="8183879" y="5437632"/>
+            <a:ext cx="3322015" cy="670560"/>
           </a:xfrm>
           <a:prstGeom prst="rect">
             <a:avLst/>

--- a/deliverables/07-presentation/العرض-التقديمي.pptx
+++ b/deliverables/07-presentation/العرض-التقديمي.pptx
@@ -12168,8 +12168,8 @@
         </p:blipFill>
         <p:spPr>
           <a:xfrm>
-            <a:off x="548640" y="2240695"/>
-            <a:ext cx="7132320" cy="2788088"/>
+            <a:off x="548640" y="2044099"/>
+            <a:ext cx="8138160" cy="3181280"/>
           </a:xfrm>
           <a:prstGeom prst="rect">
             <a:avLst/>
@@ -12189,8 +12189,8 @@
         </p:nvSpPr>
         <p:spPr>
           <a:xfrm>
-            <a:off x="548640" y="5074504"/>
-            <a:ext cx="7132320" cy="365760"/>
+            <a:off x="548640" y="5271100"/>
+            <a:ext cx="8138160" cy="365760"/>
           </a:xfrm>
           <a:prstGeom prst="rect">
             <a:avLst/>
@@ -12235,8 +12235,8 @@
         </p:nvSpPr>
         <p:spPr>
           <a:xfrm>
-            <a:off x="8046719" y="1371600"/>
-            <a:ext cx="3596335" cy="1447800"/>
+            <a:off x="9052560" y="1371600"/>
+            <a:ext cx="2590495" cy="1447800"/>
           </a:xfrm>
           <a:prstGeom prst="roundRect">
             <a:avLst>
@@ -12339,8 +12339,8 @@
         </p:nvSpPr>
         <p:spPr>
           <a:xfrm>
-            <a:off x="8183879" y="1444752"/>
-            <a:ext cx="2681935" cy="594360"/>
+            <a:off x="9189720" y="1444752"/>
+            <a:ext cx="1676095" cy="594360"/>
           </a:xfrm>
           <a:prstGeom prst="rect">
             <a:avLst/>
@@ -12372,7 +12372,7 @@
                 <a:latin typeface="Arial"/>
                 <a:cs typeface="Arial"/>
               </a:rPr>
-              <a:t>الخطان المتقطعان</a:t>
+              <a:t>الخطان</a:t>
             </a:r>
           </a:p>
         </p:txBody>
@@ -12385,8 +12385,8 @@
         </p:nvSpPr>
         <p:spPr>
           <a:xfrm>
-            <a:off x="8183879" y="2084832"/>
-            <a:ext cx="3322015" cy="670560"/>
+            <a:off x="9189720" y="2084832"/>
+            <a:ext cx="2316175" cy="670560"/>
           </a:xfrm>
           <a:prstGeom prst="rect">
             <a:avLst/>
@@ -12418,7 +12418,7 @@
                 <a:latin typeface="Arial"/>
                 <a:cs typeface="Arial"/>
               </a:rPr>
-              <a:t>الصفر والعتبة العملية 0.02</a:t>
+              <a:t>الصفر والعتبة 0.02</a:t>
             </a:r>
           </a:p>
         </p:txBody>
@@ -12431,8 +12431,8 @@
         </p:nvSpPr>
         <p:spPr>
           <a:xfrm>
-            <a:off x="8046719" y="3047999"/>
-            <a:ext cx="3596335" cy="1447800"/>
+            <a:off x="9052560" y="3047999"/>
+            <a:ext cx="2590495" cy="1447800"/>
           </a:xfrm>
           <a:prstGeom prst="roundRect">
             <a:avLst>
@@ -12535,8 +12535,8 @@
         </p:nvSpPr>
         <p:spPr>
           <a:xfrm>
-            <a:off x="8183879" y="3121152"/>
-            <a:ext cx="2681935" cy="594360"/>
+            <a:off x="9189720" y="3121152"/>
+            <a:ext cx="1676095" cy="594360"/>
           </a:xfrm>
           <a:prstGeom prst="rect">
             <a:avLst/>
@@ -12581,8 +12581,8 @@
         </p:nvSpPr>
         <p:spPr>
           <a:xfrm>
-            <a:off x="8183879" y="3761232"/>
-            <a:ext cx="3322015" cy="670560"/>
+            <a:off x="9189720" y="3761232"/>
+            <a:ext cx="2316175" cy="670560"/>
           </a:xfrm>
           <a:prstGeom prst="rect">
             <a:avLst/>
@@ -12614,7 +12614,7 @@
                 <a:latin typeface="Arial"/>
                 <a:cs typeface="Arial"/>
               </a:rPr>
-              <a:t>الفاصل كله فوق العتبة في 13 من 13 عرضاً</a:t>
+              <a:t>الفاصل كله فوق العتبة</a:t>
             </a:r>
           </a:p>
         </p:txBody>
@@ -12627,8 +12627,8 @@
         </p:nvSpPr>
         <p:spPr>
           <a:xfrm>
-            <a:off x="8046719" y="4724399"/>
-            <a:ext cx="3596335" cy="1447800"/>
+            <a:off x="9052560" y="4724399"/>
+            <a:ext cx="2590495" cy="1447800"/>
           </a:xfrm>
           <a:prstGeom prst="roundRect">
             <a:avLst>
@@ -12731,8 +12731,8 @@
         </p:nvSpPr>
         <p:spPr>
           <a:xfrm>
-            <a:off x="8183879" y="4797551"/>
-            <a:ext cx="2681935" cy="594360"/>
+            <a:off x="9189720" y="4797551"/>
+            <a:ext cx="1676095" cy="594360"/>
           </a:xfrm>
           <a:prstGeom prst="rect">
             <a:avLst/>
@@ -12764,7 +12764,7 @@
                 <a:latin typeface="Arial"/>
                 <a:cs typeface="Arial"/>
               </a:rPr>
-              <a:t>بقية الفرضيات</a:t>
+              <a:t>البقية</a:t>
             </a:r>
           </a:p>
         </p:txBody>
@@ -12777,8 +12777,8 @@
         </p:nvSpPr>
         <p:spPr>
           <a:xfrm>
-            <a:off x="8183879" y="5437632"/>
-            <a:ext cx="3322015" cy="670560"/>
+            <a:off x="9189720" y="5437632"/>
+            <a:ext cx="2316175" cy="670560"/>
           </a:xfrm>
           <a:prstGeom prst="rect">
             <a:avLst/>
@@ -12810,7 +12810,7 @@
                 <a:latin typeface="Arial"/>
                 <a:cs typeface="Arial"/>
               </a:rPr>
-              <a:t>H1 غير حاسمة؛ H3 وH4-أ حدّها الأعلى دون العتبة</a:t>
+              <a:t>H1 غير حاسمة؛ H3 وH4-أ دون العتبة</a:t>
             </a:r>
           </a:p>
         </p:txBody>

--- a/deliverables/07-presentation/العرض-التقديمي.pptx
+++ b/deliverables/07-presentation/العرض-التقديمي.pptx
@@ -1174,7 +1174,7 @@
             <a:pPr rtl="1" algn="r"/>
             <a:r>
               <a:rPr lang="ar-SA"/>
-              <a:t>الجدول مولَّد آلياً من results/conf2014/verdicts.csv المقفل. H2-أ مؤكَّدة بهامش في 13 من 13 عرضاً. H1 غير حاسمة: لا يكشف التصميم بقوة 80% أثراً أصغر من MDE80 المجمَّد. H3 وسمها «مدحوضة للتفوق» (الصف الخامس من جدول الحكم السداسي) وH4-أ مدحوضة عملياً، والشرط واحد: الحد الأعلى دون العتبة 0.02؛ وH4-أ موجبة ودالة إحصائياً لكن حدّها الأعلى دون العتبة. H2-ب غير منطبقة بالبناء. الدلالة تجيب «هل الأثر غير صفري؟» والعتبة تجيب «هل هو بحجم يستحق؟».</a:t>
+              <a:t>الجدول مولَّد آلياً من results/conf2014/verdicts.csv المقفل. H2-أ: الفرق موجب في 13 من 13 عرضاً (وعرضان منها دون 0.02)، ومؤكَّدة بهامش على المتوسط. H1 غير حاسمة: لا يكشف التصميم بقوة 80% أثراً أصغر من MDE80 المجمَّد. H3 وسمها «مدحوضة للتفوق» (الصف الخامس من جدول الحكم السداسي) وH4-أ مدحوضة عملياً، والشرط واحد: الحد الأعلى دون العتبة 0.02؛ وH4-أ موجبة ودالة إحصائياً لكن حدّها الأعلى دون العتبة. H2-ب غير منطبقة بالبناء. الدلالة تجيب «هل الأثر غير صفري؟» والعتبة تجيب «هل هو بحجم يستحق؟».</a:t>
             </a:r>
           </a:p>
         </p:txBody>
@@ -12614,7 +12614,7 @@
                 <a:latin typeface="Arial"/>
                 <a:cs typeface="Arial"/>
               </a:rPr>
-              <a:t>الفاصل كله فوق العتبة</a:t>
+              <a:t>فاصل المتوسط كله فوق العتبة</a:t>
             </a:r>
           </a:p>
         </p:txBody>
@@ -13803,7 +13803,7 @@
                 <a:latin typeface="Arial"/>
                 <a:cs typeface="Arial"/>
               </a:rPr>
-              <a:t>مؤكَّدة في 13 من 13 عرضاً، داخل WRMF وبيانات 2014 فقط، دون تعميم إلى النظام أو نماذج أخرى.</a:t>
+              <a:t>الفرق موجب في 13 من 13 عرضاً، ومؤكَّدة بهامش على المتوسط، داخل WRMF وبيانات 2014 فقط دون تعميم.</a:t>
             </a:r>
           </a:p>
         </p:txBody>
@@ -15481,7 +15481,7 @@
                 <a:latin typeface="Arial"/>
                 <a:cs typeface="Arial"/>
               </a:rPr>
-              <a:t>ترجيح الإشارات رفع WRMF في 13 من 13 عرضاً، داخل WRMF وOULAD 2014 فقط</a:t>
+              <a:t>ترجيح الإشارات رفع WRMF بفرق موجب في 13 من 13 عرضاً، داخل WRMF وOULAD 2014 فقط</a:t>
             </a:r>
           </a:p>
         </p:txBody>
@@ -18550,7 +18550,7 @@
         </p:nvGraphicFramePr>
         <p:xfrm>
           <a:off x="548640" y="1874519"/>
-          <a:ext cx="11094414" cy="3794760"/>
+          <a:ext cx="11094414" cy="3657600"/>
         </p:xfrm>
         <a:graphic>
           <a:graphicData uri="http://schemas.openxmlformats.org/drawingml/2006/table">
@@ -18565,7 +18565,7 @@
                 <a:gridCol w="1459791"/>
                 <a:gridCol w="4087416"/>
               </a:tblGrid>
-              <a:tr h="632460">
+              <a:tr h="731520">
                 <a:tc>
                   <a:txBody>
                     <a:bodyPr wrap="square"/>
@@ -18687,7 +18687,7 @@
                   </a:tcPr>
                 </a:tc>
               </a:tr>
-              <a:tr h="632460">
+              <a:tr h="731520">
                 <a:tc>
                   <a:txBody>
                     <a:bodyPr wrap="square"/>
@@ -18809,7 +18809,7 @@
                   </a:tcPr>
                 </a:tc>
               </a:tr>
-              <a:tr h="632460">
+              <a:tr h="731520">
                 <a:tc>
                   <a:txBody>
                     <a:bodyPr wrap="square"/>
@@ -18931,7 +18931,7 @@
                   </a:tcPr>
                 </a:tc>
               </a:tr>
-              <a:tr h="632460">
+              <a:tr h="731520">
                 <a:tc>
                   <a:txBody>
                     <a:bodyPr wrap="square"/>
@@ -18946,7 +18946,7 @@
                           <a:latin typeface="Arial"/>
                           <a:cs typeface="Arial"/>
                         </a:rPr>
-                        <a:t>‭0.0146‬</a:t>
+                        <a:t>‭0.0002‬</a:t>
                       </a:r>
                     </a:p>
                   </a:txBody>
@@ -18970,7 +18970,7 @@
                           <a:latin typeface="Arial"/>
                           <a:cs typeface="Arial"/>
                         </a:rPr>
-                        <a:t>‭[+0.0019, +0.0144]‬</a:t>
+                        <a:t>‭[+0.0403, +0.0791]‬</a:t>
                       </a:r>
                     </a:p>
                   </a:txBody>
@@ -18994,7 +18994,7 @@
                           <a:latin typeface="Arial"/>
                           <a:cs typeface="Arial"/>
                         </a:rPr>
-                        <a:t>‭+0.0083‬</a:t>
+                        <a:t>‭+0.0643‬</a:t>
                       </a:r>
                     </a:p>
                   </a:txBody>
@@ -19018,7 +19018,7 @@
                           <a:latin typeface="Arial"/>
                           <a:cs typeface="Arial"/>
                         </a:rPr>
-                        <a:t>رئيسي (H4-أ)</a:t>
+                        <a:t>ثانوي</a:t>
                       </a:r>
                     </a:p>
                   </a:txBody>
@@ -19042,7 +19042,7 @@
                           <a:latin typeface="Arial"/>
                           <a:cs typeface="Arial"/>
                         </a:rPr>
-                        <a:t>AUC عند اليوم 56: M1 مقابل M0</a:t>
+                        <a:t>AUC عند اليوم 56: M2 مقابل M1</a:t>
                       </a:r>
                     </a:p>
                   </a:txBody>
@@ -19053,7 +19053,7 @@
                   </a:tcPr>
                 </a:tc>
               </a:tr>
-              <a:tr h="632460">
+              <a:tr h="731520">
                 <a:tc>
                   <a:txBody>
                     <a:bodyPr wrap="square"/>
@@ -19092,7 +19092,7 @@
                           <a:latin typeface="Arial"/>
                           <a:cs typeface="Arial"/>
                         </a:rPr>
-                        <a:t>‭[+0.0403, +0.0791]‬</a:t>
+                        <a:t>‭[+0.0525, +0.0881]‬</a:t>
                       </a:r>
                     </a:p>
                   </a:txBody>
@@ -19116,7 +19116,7 @@
                           <a:latin typeface="Arial"/>
                           <a:cs typeface="Arial"/>
                         </a:rPr>
-                        <a:t>‭+0.0643‬</a:t>
+                        <a:t>‭+0.0725‬</a:t>
                       </a:r>
                     </a:p>
                   </a:txBody>
@@ -19164,7 +19164,7 @@
                           <a:latin typeface="Arial"/>
                           <a:cs typeface="Arial"/>
                         </a:rPr>
-                        <a:t>AUC عند اليوم 56: M2 مقابل M1</a:t>
+                        <a:t>AUC عند اليوم 56: M2 مقابل M0</a:t>
                       </a:r>
                     </a:p>
                   </a:txBody>
@@ -19175,128 +19175,6 @@
                   </a:tcPr>
                 </a:tc>
               </a:tr>
-              <a:tr h="632460">
-                <a:tc>
-                  <a:txBody>
-                    <a:bodyPr wrap="square"/>
-                    <a:lstStyle/>
-                    <a:p>
-                      <a:pPr rtl="1" algn="r"/>
-                      <a:r>
-                        <a:rPr sz="1500" b="0" i="0" lang="ar-SA">
-                          <a:solidFill>
-                            <a:srgbClr val="134E4A"/>
-                          </a:solidFill>
-                          <a:latin typeface="Arial"/>
-                          <a:cs typeface="Arial"/>
-                        </a:rPr>
-                        <a:t>‭0.0002‬</a:t>
-                      </a:r>
-                    </a:p>
-                  </a:txBody>
-                  <a:tcPr anchor="ctr" marL="91440" marR="91440" marT="36576" marB="36576">
-                    <a:solidFill>
-                      <a:srgbClr val="FFFFFF"/>
-                    </a:solidFill>
-                  </a:tcPr>
-                </a:tc>
-                <a:tc>
-                  <a:txBody>
-                    <a:bodyPr wrap="square"/>
-                    <a:lstStyle/>
-                    <a:p>
-                      <a:pPr rtl="1" algn="r"/>
-                      <a:r>
-                        <a:rPr sz="1500" b="0" i="0" lang="ar-SA">
-                          <a:solidFill>
-                            <a:srgbClr val="134E4A"/>
-                          </a:solidFill>
-                          <a:latin typeface="Arial"/>
-                          <a:cs typeface="Arial"/>
-                        </a:rPr>
-                        <a:t>‭[+0.0525, +0.0881]‬</a:t>
-                      </a:r>
-                    </a:p>
-                  </a:txBody>
-                  <a:tcPr anchor="ctr" marL="91440" marR="91440" marT="36576" marB="36576">
-                    <a:solidFill>
-                      <a:srgbClr val="FFFFFF"/>
-                    </a:solidFill>
-                  </a:tcPr>
-                </a:tc>
-                <a:tc>
-                  <a:txBody>
-                    <a:bodyPr wrap="square"/>
-                    <a:lstStyle/>
-                    <a:p>
-                      <a:pPr rtl="1" algn="r"/>
-                      <a:r>
-                        <a:rPr sz="1500" b="0" i="0" lang="ar-SA">
-                          <a:solidFill>
-                            <a:srgbClr val="134E4A"/>
-                          </a:solidFill>
-                          <a:latin typeface="Arial"/>
-                          <a:cs typeface="Arial"/>
-                        </a:rPr>
-                        <a:t>‭+0.0725‬</a:t>
-                      </a:r>
-                    </a:p>
-                  </a:txBody>
-                  <a:tcPr anchor="ctr" marL="91440" marR="91440" marT="36576" marB="36576">
-                    <a:solidFill>
-                      <a:srgbClr val="FFFFFF"/>
-                    </a:solidFill>
-                  </a:tcPr>
-                </a:tc>
-                <a:tc>
-                  <a:txBody>
-                    <a:bodyPr wrap="square"/>
-                    <a:lstStyle/>
-                    <a:p>
-                      <a:pPr rtl="1" algn="r"/>
-                      <a:r>
-                        <a:rPr sz="1500" b="0" i="0" lang="ar-SA">
-                          <a:solidFill>
-                            <a:srgbClr val="134E4A"/>
-                          </a:solidFill>
-                          <a:latin typeface="Arial"/>
-                          <a:cs typeface="Arial"/>
-                        </a:rPr>
-                        <a:t>ثانوي</a:t>
-                      </a:r>
-                    </a:p>
-                  </a:txBody>
-                  <a:tcPr anchor="ctr" marL="91440" marR="91440" marT="36576" marB="36576">
-                    <a:solidFill>
-                      <a:srgbClr val="FFFFFF"/>
-                    </a:solidFill>
-                  </a:tcPr>
-                </a:tc>
-                <a:tc>
-                  <a:txBody>
-                    <a:bodyPr wrap="square"/>
-                    <a:lstStyle/>
-                    <a:p>
-                      <a:pPr rtl="1" algn="r"/>
-                      <a:r>
-                        <a:rPr sz="1500" b="1" i="0" lang="ar-SA">
-                          <a:solidFill>
-                            <a:srgbClr val="134E4A"/>
-                          </a:solidFill>
-                          <a:latin typeface="Arial"/>
-                          <a:cs typeface="Arial"/>
-                        </a:rPr>
-                        <a:t>AUC عند اليوم 56: M2 مقابل M0</a:t>
-                      </a:r>
-                    </a:p>
-                  </a:txBody>
-                  <a:tcPr anchor="ctr" marL="91440" marR="91440" marT="36576" marB="36576">
-                    <a:solidFill>
-                      <a:srgbClr val="FFFFFF"/>
-                    </a:solidFill>
-                  </a:tcPr>
-                </a:tc>
-              </a:tr>
             </a:tbl>
           </a:graphicData>
         </a:graphic>
@@ -19309,7 +19187,7 @@
         </p:nvSpPr>
         <p:spPr>
           <a:xfrm>
-            <a:off x="548640" y="5760720"/>
+            <a:off x="548640" y="5623559"/>
             <a:ext cx="11094415" cy="502920"/>
           </a:xfrm>
           <a:prstGeom prst="rect">
@@ -19342,7 +19220,7 @@
                 <a:latin typeface="Arial"/>
                 <a:cs typeface="Arial"/>
               </a:rPr>
-              <a:t>المصدر: results/conf2014/h4b.csv وsecondary.csv. M0 مجموع النقرات، وM1 ملامح السلوك. لا يدخل أي صف عائلة هولم. H1: الحد الأعلى 0.0204 يزيد على العتبة بـ0.0004؛ الحكم غير حاسمة بالإجراء المسجل.</a:t>
+              <a:t>المصدر: results/conf2014/h4b.csv وsecondary.csv. M0 مجموع النقرات، وM1 ملامح السلوك. لا يدخل أي صف من هذه الصفوف الثانوية عائلة هولم؛ H4-أ الرئيسي في الشريحة 15. H1: الحد الأعلى 0.0204 يزيد على العتبة بـ0.0004؛ الحكم غير حاسمة بالإجراء المسجل.</a:t>
             </a:r>
           </a:p>
         </p:txBody>

--- a/deliverables/07-presentation/العرض-التقديمي.pptx
+++ b/deliverables/07-presentation/العرض-التقديمي.pptx
@@ -1102,7 +1102,7 @@
             <a:pPr rtl="1" algn="r"/>
             <a:r>
               <a:rPr lang="ar-SA"/>
-              <a:t>هذه أرقام تطوير على عروض 2013 لتثبيت التصميم، وهي وصفية لا اختبار للفرضيات. الشعبية الآنية (0.541) تتقدّم على معظم النماذج الشخصية، وSKNN (0.531) وGRU-lite (0.519) قريبان منها. الفرق بين SKNN والشعبية الآنية −0.010 وفاصله [−0.057، +0.024]. الهجين المجمَّد 0.561 ± 0.078، والفرق عن الشعبية الآنية +0.020 [−0.007، +0.042] وp = 0.12: لا يُستنتج منه شيء قبل التأكيد. وصفياً أيضاً: الربع الأقل تاريخاً Δ = +0.052 [+0.022، +0.133] للهجين مقابل SKNN وحده (استكشافي). B10 EASE مرجعي فقط.</a:t>
+              <a:t>هذه أرقام تطوير على عروض 2013 لتثبيت التصميم، وهي وصفية لا اختبار للفرضيات. الشعبية الآنية (0.541) تتقدّم على معظم النماذج الشخصية، وSKNN (0.531) وGRU-lite (0.519) قريبان منها. الفرق بين SKNN والشعبية الآنية −0.010 وفاصله [−0.057، +0.024]. الهجين المجمَّد 0.561 ± 0.078، والفرق عن الشعبية الآنية +0.020 [−0.007، +0.042] وp = 0.12: لا يُستنتج منه شيء قبل التأكيد. وصفياً أيضاً (جاء أعلى وصفاً): الربع الأقل تاريخاً Δ = +0.052 [+0.022، +0.133] للهجين مقابل SKNN وحده (استكشافي). B10 EASE مرجعي فقط.</a:t>
             </a:r>
           </a:p>
         </p:txBody>
@@ -1318,7 +1318,7 @@
             <a:pPr rtl="1" algn="r"/>
             <a:r>
               <a:rPr lang="ar-SA"/>
-              <a:t>الرسائل الأربع بصياغة المشرف. (أ) الدلالة تجيب هل الأثر غير صفري، والعتبة تجيب هل هو بحجم يستحق. (ب) لا «تكافؤ» ولا أرقام تطوير في الملخص؛ التفكيك الثانوي في الشريحة الاحتياطية. (ج) H3 هي GRU-lite مقابل SKNN، ولا علاقة لها بالعناقيد؛ العنقود سياق شعبي مكمّل للجيران يظهر في التفكيك وH4-ب. (د) H2-ب غير منطبقة بالبناء.</a:t>
+              <a:t>الرسائل الأربع بصياغة المشرف. (أ) الدلالة تجيب هل الأثر غير صفري، والعتبة تجيب هل هو بحجم يستحق. (ب) H1: لم يتفوق الهجين؛ غير حاسمة، فلا دليل على إضافة بهذا الحجم ولا على غيابها؛ لا «تكافؤ» ولا أرقام تطوير في الملخص؛ التفكيك الثانوي في الشريحة الاحتياطية. (ج) H3 هي GRU-lite مقابل SKNN، ولا علاقة لها بالعناقيد؛ العنقود سياق شعبي مكمّل للجيران يظهر في التفكيك وH4-ب. (د) H2-ب غير منطبقة بالبناء.</a:t>
             </a:r>
           </a:p>
         </p:txBody>
@@ -1462,7 +1462,7 @@
             <a:pPr rtl="1" algn="r"/>
             <a:r>
               <a:rPr lang="ar-SA"/>
-              <a:t>الخاتمة: أربع مساهمات تجريبية ومنهجية، لا خوارزمية جديدة. الأحكام: H2-أ مؤكَّدة، وH1 غير حاسمة، وH3 وH4-أ مدحوضتان عملياً (وH4-أ دالة إحصائياً). والجواب عن السؤال التطبيقي: ما الذي يضيفه التخصيص فوق مواد الأسبوع الحالي؟ أثر مؤكَّد لترجيح الإشارات داخل WRMF، ولا تفوق مثبت للهجين على الشعبية الآنية.</a:t>
+              <a:t>الخاتمة: أربع مساهمات تجريبية ومنهجية، لا خوارزمية جديدة. الأحكام: H2-أ مؤكَّدة، وH1 غير حاسمة، وH3 مدحوضة للتفوق، وH4-أ مدحوضة عملياً (وهي دالة إحصائياً). والجواب عن السؤال التطبيقي: ما الذي يضيفه التخصيص فوق مواد الأسبوع الحالي؟ أثر مؤكَّد لترجيح الإشارات داخل WRMF، وفي H1 لم يتفوق الهجين على الشعبية الآنية؛ غير حاسمة بقوة 80% لأثر ≥ 0.0375، فلا دليل على إضافة بهذا الحجم ولا على غيابها.</a:t>
             </a:r>
           </a:p>
         </p:txBody>
@@ -1678,7 +1678,7 @@
             <a:pPr rtl="1" algn="r"/>
             <a:r>
               <a:rPr lang="ar-SA"/>
-              <a:t>للاستعمال عند السؤال عن الثانوي والاستكشافي فقط. الأرقام مولَّدة آلياً من ملفات التأكيد، وكلها موسومة ثانوية أو استكشافية ولا تغيّر الأحكام.</a:t>
+              <a:t>للاستعمال عند السؤال عن الثانوي والاستكشافي فقط. الأرقام مولَّدة آلياً من ملفات التأكيد، وكلها موسومة ثانوية أو استكشافية ولا تغيّر الأحكام. H4-ب: الربع الأقل تاريخاً جاء أعلى وصفاً (استكشافي)، ولا تُقرأ تفوقاً مؤكَّداً. أثر M2 يتسق مع أن الملامح الأكاديمية أقوى المنبئات.</a:t>
             </a:r>
           </a:p>
         </p:txBody>
@@ -13411,7 +13411,7 @@
                 <a:latin typeface="Arial"/>
                 <a:cs typeface="Arial"/>
               </a:rPr>
-              <a:t>الحكم غير حاسمة، وليس «تكافؤاً»: الفرق صفري تقريباً وفاصله يشمل الصفر والعتبة. المساهمة منهجية وتجريبية.</a:t>
+              <a:t>غير حاسمة: لا يكشف التصميم بقوة 80% أثراً أصغر من 0.0375، فلا دليل على إضافة بهذا الحجم ولا على غيابها.</a:t>
             </a:r>
           </a:p>
         </p:txBody>
@@ -15481,7 +15481,7 @@
                 <a:latin typeface="Arial"/>
                 <a:cs typeface="Arial"/>
               </a:rPr>
-              <a:t>ترجيح الإشارات رفع WRMF بفرق موجب في 13 من 13 عرضاً، داخل WRMF وOULAD 2014 فقط</a:t>
+              <a:t>ترجيح الإشارات رفع WRMF بفرق موجب في 13 من 13 عرضاً، داخله فقط</a:t>
             </a:r>
           </a:p>
         </p:txBody>
@@ -16023,7 +16023,7 @@
                 <a:latin typeface="Arial"/>
                 <a:cs typeface="Arial"/>
               </a:rPr>
-              <a:t>قوة الشعبية الآنية</a:t>
+              <a:t>ما يكشفه التصميم في H1</a:t>
             </a:r>
           </a:p>
         </p:txBody>
@@ -16069,7 +16069,7 @@
                 <a:latin typeface="Arial"/>
                 <a:cs typeface="Arial"/>
               </a:rPr>
-              <a:t>الهجين لم يتفوق عليها في 2014 (غير حاسمة): الجدول الدراسي يفرض الكثير من الوصول</a:t>
+              <a:t>لم يتفوق الهجين على الشعبية الآنية في 2014؛ غير حاسمة بقوة 80% لأثر ≥ 0.0375</a:t>
             </a:r>
           </a:p>
         </p:txBody>

--- a/deliverables/07-presentation/العرض-التقديمي.pptx
+++ b/deliverables/07-presentation/العرض-التقديمي.pptx
@@ -1318,7 +1318,7 @@
             <a:pPr rtl="1" algn="r"/>
             <a:r>
               <a:rPr lang="ar-SA"/>
-              <a:t>الرسائل الأربع بصياغة المشرف. (أ) الدلالة تجيب هل الأثر غير صفري، والعتبة تجيب هل هو بحجم يستحق. (ب) H1: لم يتفوق الهجين؛ غير حاسمة، فلا دليل على إضافة بهذا الحجم ولا على غيابها؛ لا «تكافؤ» ولا أرقام تطوير في الملخص؛ التفكيك الثانوي في الشريحة الاحتياطية. (ج) H3 هي GRU-lite مقابل SKNN، ولا علاقة لها بالعناقيد؛ العنقود سياق شعبي مكمّل للجيران يظهر في التفكيك وH4-ب. (د) H2-ب غير منطبقة بالبناء.</a:t>
+              <a:t>الرسائل الأربع. (أ) الدلالة تجيب هل الأثر غير صفري، والعتبة تجيب هل هو بحجم يستحق. (ب) H1: لم يتفوق الهجين؛ غير حاسمة، فلا دليل على إضافة بهذا الحجم ولا على غيابها؛ لا «تكافؤ» ولا أرقام تطوير في الملخص؛ التفكيك الثانوي في الشريحة الاحتياطية. (ج) H3 هي GRU-lite مقابل SKNN، ولا علاقة لها بالعناقيد؛ العنقود سياق شعبي مكمّل للجيران يظهر في التفكيك وH4-ب. (د) H2-ب غير منطبقة بالبناء.</a:t>
             </a:r>
           </a:p>
         </p:txBody>
@@ -1462,7 +1462,7 @@
             <a:pPr rtl="1" algn="r"/>
             <a:r>
               <a:rPr lang="ar-SA"/>
-              <a:t>الخاتمة: أربع مساهمات تجريبية ومنهجية، لا خوارزمية جديدة. الأحكام: H2-أ مؤكَّدة، وH1 غير حاسمة، وH3 مدحوضة للتفوق، وH4-أ مدحوضة عملياً (وهي دالة إحصائياً). والجواب عن السؤال التطبيقي: ما الذي يضيفه التخصيص فوق مواد الأسبوع الحالي؟ أثر مؤكَّد لترجيح الإشارات داخل WRMF، وفي H1 لم يتفوق الهجين على الشعبية الآنية؛ غير حاسمة بقوة 80% لأثر ≥ 0.0375، فلا دليل على إضافة بهذا الحجم ولا على غيابها.</a:t>
+              <a:t>الخاتمة: أربع مساهمات تجريبية ومنهجية، لا خوارزمية جديدة. الأحكام: H2-أ مؤكَّدة، وH1 غير حاسمة، وH3 مدحوضة للتفوق، وH4-أ مدحوضة عملياً (وهي دالة إحصائياً). والجواب عن السؤال التطبيقي: ما الذي يضيفه التخصيص فوق مواد الأسبوع الحالي؟ أثر مؤكَّد لترجيح الإشارات داخل WRMF، وفي H1 لم يتفوق الهجين على الشعبية الآنية؛ غير حاسمة: لا يكشف التصميم بقوة 80% أثراً أصغر من 0.0375، فلا دليل على إضافة بهذا الحجم ولا على غيابها.</a:t>
             </a:r>
           </a:p>
         </p:txBody>
@@ -16069,7 +16069,7 @@
                 <a:latin typeface="Arial"/>
                 <a:cs typeface="Arial"/>
               </a:rPr>
-              <a:t>لم يتفوق الهجين على الشعبية الآنية في 2014؛ غير حاسمة بقوة 80% لأثر ≥ 0.0375</a:t>
+              <a:t>لم يتفوق الهجين على الشعبية الآنية في 2014؛ غير حاسمة: لا يكشف التصميم بقوة 80% أثراً أصغر من 0.0375</a:t>
             </a:r>
           </a:p>
         </p:txBody>

--- a/deliverables/07-presentation/العرض-التقديمي.pptx
+++ b/deliverables/07-presentation/العرض-التقديمي.pptx
@@ -1462,7 +1462,7 @@
             <a:pPr rtl="1" algn="r"/>
             <a:r>
               <a:rPr lang="ar-SA"/>
-              <a:t>الخاتمة: أربع مساهمات تجريبية ومنهجية، لا خوارزمية جديدة. الأحكام: H2-أ مؤكَّدة، وH1 غير حاسمة، وH3 مدحوضة للتفوق، وH4-أ مدحوضة عملياً (وهي دالة إحصائياً). والجواب عن السؤال التطبيقي: ما الذي يضيفه التخصيص فوق مواد الأسبوع الحالي؟ أثر مؤكَّد لترجيح الإشارات داخل WRMF، وفي H1 لم يتفوق الهجين على الشعبية الآنية؛ غير حاسمة: لا يكشف التصميم بقوة 80% أثراً أصغر من 0.0375، فلا دليل على إضافة بهذا الحجم ولا على غيابها.</a:t>
+              <a:t>الخاتمة: أربع مساهمات تجريبية ومنهجية، لا خوارزمية جديدة. الأحكام: H2-أ مؤكَّدة، وH1 غير حاسمة، وH3 مدحوضة للتفوق، وH4-أ مدحوضة عملياً (دالة على مستوى العروض، لا المقررات). والجواب عن السؤال التطبيقي: ما الذي يضيفه التخصيص فوق مواد الأسبوع الحالي؟ أثر مؤكَّد لترجيح الإشارات داخل WRMF، وفي H1 لم يتفوق الهجين على الشعبية الآنية؛ غير حاسمة: لا يكشف التصميم بقوة 80% أثراً أصغر من 0.0375، ويستبعد الفاصل إضافة تزيد على 0.0204 بوحدة العرض (0.043 على المقررات).</a:t>
             </a:r>
           </a:p>
         </p:txBody>
@@ -7153,7 +7153,7 @@
                 <a:latin typeface="Arial"/>
                 <a:cs typeface="Arial"/>
               </a:rPr>
-              <a:t>مراجعة الزميل وتوقيعه</a:t>
+              <a:t>مراجعة آلية بدور الزميل</a:t>
             </a:r>
           </a:p>
         </p:txBody>
@@ -13411,7 +13411,7 @@
                 <a:latin typeface="Arial"/>
                 <a:cs typeface="Arial"/>
               </a:rPr>
-              <a:t>غير حاسمة: لا يكشف التصميم بقوة 80% أثراً أصغر من 0.0375، فلا دليل على إضافة بهذا الحجم ولا على غيابها.</a:t>
+              <a:t>غير حاسمة: لا يكشف التصميم بقوة 80% أثراً أصغر من 0.0375، ويستبعد الفاصل إضافة تزيد على 0.0204 بوحدة العرض (0.043 على المقررات).</a:t>
             </a:r>
           </a:p>
         </p:txBody>
